--- a/fpga/sw/export/docs/slides/01_EDHOC_SoC_on_Arty_A7-100T.pptx
+++ b/fpga/sw/export/docs/slides/01_EDHOC_SoC_on_Arty_A7-100T.pptx
@@ -10897,7 +10897,7 @@
                 </a:solidFill>
                 <a:latin typeface="Consolas"/>
               </a:rPr>
-              <a:t>git clone [GitHub URL] chipyard</a:t>
+              <a:t>git clone git@github.com:Khaiduy/chipyard-edhoc.git chipyard</a:t>
             </a:r>
           </a:p>
           <a:p>
@@ -10929,7 +10929,7 @@
                 </a:solidFill>
                 <a:latin typeface="Consolas"/>
               </a:rPr>
-              <a:t>git checkout [revision]          # the revision these slides describe</a:t>
+              <a:t>git checkout edhoc-course-v1     # the revision these slides describe</a:t>
             </a:r>
           </a:p>
         </p:txBody>
@@ -11253,6 +11253,41 @@
             <a:spAutoFit/>
           </a:bodyPr>
           <a:lstStyle/>
+          <a:p>
+            <a:pPr marL="256032" indent="-219456">
+              <a:spcAft>
+                <a:spcPts val="400"/>
+              </a:spcAft>
+              <a:buChar char="•"/>
+            </a:pPr>
+            <a:r>
+              <a:rPr sz="1700" b="0">
+                <a:solidFill>
+                  <a:srgbClr val="000000"/>
+                </a:solidFill>
+                <a:latin typeface="Times New Roman"/>
+              </a:rPr>
+              <a:t>The repository is </a:t>
+            </a:r>
+            <a:r>
+              <a:rPr sz="1700" b="1">
+                <a:solidFill>
+                  <a:srgbClr val="000000"/>
+                </a:solidFill>
+                <a:latin typeface="Times New Roman"/>
+              </a:rPr>
+              <a:t>private</a:t>
+            </a:r>
+            <a:r>
+              <a:rPr sz="1700" b="0">
+                <a:solidFill>
+                  <a:srgbClr val="000000"/>
+                </a:solidFill>
+                <a:latin typeface="Times New Roman"/>
+              </a:rPr>
+              <a:t>: ask the author to add your GitHub account, then clone with your own SSH key.</a:t>
+            </a:r>
+          </a:p>
           <a:p>
             <a:pPr marL="256032" indent="-219456">
               <a:spcAft>
@@ -40141,7 +40176,7 @@
                 </a:solidFill>
                 <a:latin typeface="Times New Roman"/>
               </a:rPr>
-              <a:t>Repository: [GitHub URL]   ·   all paths are relative to chipyard-1.11.0/</a:t>
+              <a:t>Repository: github.com/Khaiduy/chipyard-edhoc (private: ask the author for access)   ·   paths are relative to its root</a:t>
             </a:r>
           </a:p>
         </p:txBody>

--- a/fpga/sw/export/docs/slides/01_EDHOC_SoC_on_Arty_A7-100T.pptx
+++ b/fpga/sw/export/docs/slides/01_EDHOC_SoC_on_Arty_A7-100T.pptx
@@ -10420,7 +10420,7 @@
                           </a:solidFill>
                           <a:latin typeface="Times New Roman"/>
                         </a:rPr>
-                        <a:t>host tests, timing tables, these slides (python-pptx)</a:t>
+                        <a:t>host tests, timing tables, reference model</a:t>
                       </a:r>
                     </a:p>
                   </a:txBody>

--- a/fpga/sw/export/docs/slides/01_EDHOC_SoC_on_Arty_A7-100T.pptx
+++ b/fpga/sw/export/docs/slides/01_EDHOC_SoC_on_Arty_A7-100T.pptx
@@ -9729,7 +9729,7 @@
                           </a:solidFill>
                           <a:latin typeface="Times New Roman"/>
                         </a:rPr>
-                        <a:t>wired UART1 link on PMOD JB instead of the radio</a:t>
+                        <a:t>wired UART1 link on PMOD JB (GND, TX↔RX crossed); works, but slower than the radio</a:t>
                       </a:r>
                     </a:p>
                   </a:txBody>
@@ -15042,7 +15042,7 @@
                 </a:solidFill>
                 <a:latin typeface="Times New Roman"/>
               </a:rPr>
-              <a:t>Smallest build (suite 4, method 3) needs ≈ 32.3 KB with its stack: only method 3 of suites 0 / 1 / 4 fits 32 KiB, and barely.</a:t>
+              <a:t>Smallest build (suite 4, method 3) needs ≈ 32.4 KB with its stack: only method 3 of suites 0 / 1 / 4 fits 32 KiB, and barely.</a:t>
             </a:r>
           </a:p>
           <a:p>
@@ -39316,7 +39316,7 @@
                 <a:latin typeface="Times New Roman"/>
                 <a:ea typeface="DejaVu Sans"/>
               </a:rPr>
-              <a:t>[YYYY/MM]</a:t>
+              <a:t>2026/12</a:t>
             </a:r>
             <a:endParaRPr lang="en-US" sz="3200" b="0" strike="noStrike" spc="-1" dirty="0">
               <a:latin typeface="Arial"/>
@@ -39480,7 +39480,7 @@
                 <a:latin typeface="Times New Roman"/>
                 <a:ea typeface="DejaVu Sans"/>
               </a:rPr>
-              <a:t>[YYYY/MM]</a:t>
+              <a:t>2026/12</a:t>
             </a:r>
             <a:endParaRPr lang="en-US" sz="3200" b="0" strike="noStrike" spc="-1" dirty="0">
               <a:latin typeface="Arial"/>
@@ -39582,7 +39582,7 @@
                 <a:latin typeface="Times New Roman"/>
                 <a:ea typeface="DejaVu Sans"/>
               </a:rPr>
-              <a:t>[Course name]</a:t>
+              <a:t>EDHOC on a Rocket RV64 SoC</a:t>
             </a:r>
             <a:r>
               <a:rPr lang="en-US" sz="4800" spc="-1" dirty="0">
@@ -39807,7 +39807,7 @@
                 <a:latin typeface="Times New Roman" panose="02020603050405020304" pitchFamily="18" charset="0"/>
                 <a:cs typeface="Times New Roman" panose="02020603050405020304" pitchFamily="18" charset="0"/>
               </a:rPr>
-              <a:t>[Author]</a:t>
+              <a:t>Khai-Duy Nguyen</a:t>
             </a:r>
           </a:p>
         </p:txBody>

--- a/fpga/sw/export/docs/slides/01_EDHOC_SoC_on_Arty_A7-100T.pptx
+++ b/fpga/sw/export/docs/slides/01_EDHOC_SoC_on_Arty_A7-100T.pptx
@@ -9482,7 +9482,7 @@
                           </a:solidFill>
                           <a:latin typeface="Times New Roman"/>
                         </a:rPr>
-                        <a:t>microSD PMOD adapter (PmodSD) + microSD card</a:t>
+                        <a:t>Digilent PmodMicroSD + microSD card</a:t>
                       </a:r>
                     </a:p>
                   </a:txBody>
@@ -9949,8 +9949,8 @@
         </p:blipFill>
         <p:spPr>
           <a:xfrm>
-            <a:off x="822960" y="822960"/>
-            <a:ext cx="9326880" cy="5486400"/>
+            <a:off x="2103120" y="822960"/>
+            <a:ext cx="7997125" cy="5486400"/>
           </a:xfrm>
           <a:prstGeom prst="rect">
             <a:avLst/>
@@ -9991,7 +9991,7 @@
                 </a:solidFill>
                 <a:latin typeface="Times New Roman"/>
               </a:rPr>
-              <a:t>Same wiring on both boards; the 3 UART wires on JB are optional (TRANSPORT=uart). Pin by pin: section 4 (2/8). Arty A7-35 shown; the A7-100T looks the same.</a:t>
+              <a:t>Same wiring on both boards; the 3 UART wires on JB are optional (TRANSPORT=uart). Pin by pin: section 4 (2/8).</a:t>
             </a:r>
           </a:p>
         </p:txBody>
@@ -17283,70 +17283,65 @@
           </a:p>
         </p:txBody>
       </p:sp>
+      <p:pic>
+        <p:nvPicPr>
+          <p:cNvPr id="84" name="Picture 83" descr="setup_two_boards.png"/>
+          <p:cNvPicPr>
+            <a:picLocks noChangeAspect="1"/>
+          </p:cNvPicPr>
+          <p:nvPr/>
+        </p:nvPicPr>
+        <p:blipFill>
+          <a:blip r:embed="rId3"/>
+          <a:stretch>
+            <a:fillRect/>
+          </a:stretch>
+        </p:blipFill>
+        <p:spPr>
+          <a:xfrm>
+            <a:off x="6400800" y="5257800"/>
+            <a:ext cx="1732711" cy="1188720"/>
+          </a:xfrm>
+          <a:prstGeom prst="rect">
+            <a:avLst/>
+          </a:prstGeom>
+        </p:spPr>
+      </p:pic>
       <p:sp>
         <p:nvSpPr>
-          <p:cNvPr id="84" name="Rectangle 83"/>
-          <p:cNvSpPr/>
+          <p:cNvPr id="85" name="TextBox 84"/>
+          <p:cNvSpPr txBox="1"/>
           <p:nvPr/>
         </p:nvSpPr>
         <p:spPr>
           <a:xfrm>
-            <a:off x="6400800" y="5349240"/>
-            <a:ext cx="5394960" cy="1097280"/>
+            <a:off x="8229600" y="5577840"/>
+            <a:ext cx="3657600" cy="548640"/>
           </a:xfrm>
           <a:prstGeom prst="rect">
             <a:avLst/>
           </a:prstGeom>
-          <a:solidFill>
-            <a:srgbClr val="E7E6E6"/>
-          </a:solidFill>
-          <a:ln>
-            <a:solidFill>
-              <a:srgbClr val="808080"/>
-            </a:solidFill>
-            <a:prstDash val="dash"/>
-          </a:ln>
-          <a:effectLst/>
+          <a:noFill/>
         </p:spPr>
-        <p:style>
-          <a:lnRef idx="1">
-            <a:schemeClr val="accent1"/>
-          </a:lnRef>
-          <a:fillRef idx="3">
-            <a:schemeClr val="accent1"/>
-          </a:fillRef>
-          <a:effectRef idx="2">
-            <a:schemeClr val="accent1"/>
-          </a:effectRef>
-          <a:fontRef idx="minor">
-            <a:schemeClr val="lt1"/>
-          </a:fontRef>
-        </p:style>
         <p:txBody>
-          <a:bodyPr rtlCol="0" anchor="ctr" wrap="square"/>
+          <a:bodyPr wrap="square" anchor="t">
+            <a:spAutoFit/>
+          </a:bodyPr>
           <a:lstStyle/>
           <a:p>
-            <a:pPr algn="ctr"/>
-            <a:r>
-              <a:rPr sz="1600" b="1">
+            <a:pPr>
+              <a:spcAft>
+                <a:spcPts val="400"/>
+              </a:spcAft>
+            </a:pPr>
+            <a:r>
+              <a:rPr sz="1400" b="0">
                 <a:solidFill>
                   <a:srgbClr val="808080"/>
                 </a:solidFill>
                 <a:latin typeface="Times New Roman"/>
               </a:rPr>
-              <a:t>PHOTO</a:t>
-            </a:r>
-          </a:p>
-          <a:p>
-            <a:pPr algn="ctr"/>
-            <a:r>
-              <a:rPr sz="1600" b="0">
-                <a:solidFill>
-                  <a:srgbClr val="808080"/>
-                </a:solidFill>
-                <a:latin typeface="Times New Roman"/>
-              </a:rPr>
-              <a:t>both boards wired: JA SD, JC radio, JD JTAG cable</a:t>
+              <a:t>Full-size picture: section 1, (3/8).</a:t>
             </a:r>
           </a:p>
         </p:txBody>
@@ -23372,7 +23367,7 @@
                           </a:solidFill>
                           <a:latin typeface="Times New Roman"/>
                         </a:rPr>
-                        <a:t>microSD (PmodSD)</a:t>
+                        <a:t>PmodMicroSD</a:t>
                       </a:r>
                     </a:p>
                   </a:txBody>
@@ -23718,7 +23713,7 @@
         <p:spPr>
           <a:xfrm>
             <a:off x="1371600" y="4023360"/>
-            <a:ext cx="3210016" cy="2468880"/>
+            <a:ext cx="2244436" cy="2468880"/>
           </a:xfrm>
           <a:prstGeom prst="rect">
             <a:avLst/>
@@ -26500,7 +26495,7 @@
                           </a:solidFill>
                           <a:latin typeface="Times New Roman"/>
                         </a:rPr>
-                        <a:t>PmodSD</a:t>
+                        <a:t>PmodMicroSD</a:t>
                       </a:r>
                     </a:p>
                   </a:txBody>
@@ -27020,70 +27015,65 @@
           </a:p>
         </p:txBody>
       </p:sp>
+      <p:pic>
+        <p:nvPicPr>
+          <p:cNvPr id="66" name="Picture 65" descr="pmodmicrosd-top.png"/>
+          <p:cNvPicPr>
+            <a:picLocks noChangeAspect="1"/>
+          </p:cNvPicPr>
+          <p:nvPr/>
+        </p:nvPicPr>
+        <p:blipFill>
+          <a:blip r:embed="rId3"/>
+          <a:stretch>
+            <a:fillRect/>
+          </a:stretch>
+        </p:blipFill>
+        <p:spPr>
+          <a:xfrm>
+            <a:off x="365760" y="5532120"/>
+            <a:ext cx="914400" cy="914400"/>
+          </a:xfrm>
+          <a:prstGeom prst="rect">
+            <a:avLst/>
+          </a:prstGeom>
+        </p:spPr>
+      </p:pic>
       <p:sp>
         <p:nvSpPr>
-          <p:cNvPr id="66" name="Rectangle 65"/>
-          <p:cNvSpPr/>
+          <p:cNvPr id="67" name="TextBox 66"/>
+          <p:cNvSpPr txBox="1"/>
           <p:nvPr/>
         </p:nvSpPr>
         <p:spPr>
           <a:xfrm>
-            <a:off x="365760" y="5623560"/>
-            <a:ext cx="6400800" cy="777240"/>
+            <a:off x="1371600" y="5760720"/>
+            <a:ext cx="5394960" cy="457200"/>
           </a:xfrm>
           <a:prstGeom prst="rect">
             <a:avLst/>
           </a:prstGeom>
-          <a:solidFill>
-            <a:srgbClr val="E7E6E6"/>
-          </a:solidFill>
-          <a:ln>
-            <a:solidFill>
-              <a:srgbClr val="808080"/>
-            </a:solidFill>
-            <a:prstDash val="dash"/>
-          </a:ln>
-          <a:effectLst/>
+          <a:noFill/>
         </p:spPr>
-        <p:style>
-          <a:lnRef idx="1">
-            <a:schemeClr val="accent1"/>
-          </a:lnRef>
-          <a:fillRef idx="3">
-            <a:schemeClr val="accent1"/>
-          </a:fillRef>
-          <a:effectRef idx="2">
-            <a:schemeClr val="accent1"/>
-          </a:effectRef>
-          <a:fontRef idx="minor">
-            <a:schemeClr val="lt1"/>
-          </a:fontRef>
-        </p:style>
         <p:txBody>
-          <a:bodyPr rtlCol="0" anchor="ctr" wrap="square"/>
+          <a:bodyPr wrap="square" anchor="t">
+            <a:spAutoFit/>
+          </a:bodyPr>
           <a:lstStyle/>
           <a:p>
-            <a:pPr algn="ctr"/>
-            <a:r>
-              <a:rPr sz="1600" b="1">
+            <a:pPr>
+              <a:spcAft>
+                <a:spcPts val="400"/>
+              </a:spcAft>
+            </a:pPr>
+            <a:r>
+              <a:rPr sz="1300" b="0">
                 <a:solidFill>
                   <a:srgbClr val="808080"/>
                 </a:solidFill>
                 <a:latin typeface="Times New Roman"/>
               </a:rPr>
-              <a:t>PHOTO</a:t>
-            </a:r>
-          </a:p>
-          <a:p>
-            <a:pPr algn="ctr"/>
-            <a:r>
-              <a:rPr sz="1600" b="0">
-                <a:solidFill>
-                  <a:srgbClr val="808080"/>
-                </a:solidFill>
-                <a:latin typeface="Times New Roman"/>
-              </a:rPr>
-              <a:t>PmodSD with microSD card on JA</a:t>
+              <a:t>PmodMicroSD (pin 1 = CS, top); image: Digilent Inc.</a:t>
             </a:r>
           </a:p>
         </p:txBody>
@@ -27657,70 +27647,65 @@
           </a:p>
         </p:txBody>
       </p:sp>
+      <p:pic>
+        <p:nvPicPr>
+          <p:cNvPr id="66" name="Picture 65" descr="mrf24J40.jpeg"/>
+          <p:cNvPicPr>
+            <a:picLocks noChangeAspect="1"/>
+          </p:cNvPicPr>
+          <p:nvPr/>
+        </p:nvPicPr>
+        <p:blipFill>
+          <a:blip r:embed="rId3"/>
+          <a:stretch>
+            <a:fillRect/>
+          </a:stretch>
+        </p:blipFill>
+        <p:spPr>
+          <a:xfrm>
+            <a:off x="365760" y="4152761"/>
+            <a:ext cx="960120" cy="960120"/>
+          </a:xfrm>
+          <a:prstGeom prst="rect">
+            <a:avLst/>
+          </a:prstGeom>
+        </p:spPr>
+      </p:pic>
       <p:sp>
         <p:nvSpPr>
-          <p:cNvPr id="66" name="Rectangle 65"/>
-          <p:cNvSpPr/>
+          <p:cNvPr id="67" name="TextBox 66"/>
+          <p:cNvSpPr txBox="1"/>
           <p:nvPr/>
         </p:nvSpPr>
         <p:spPr>
           <a:xfrm>
-            <a:off x="365760" y="4152761"/>
-            <a:ext cx="6035040" cy="960120"/>
+            <a:off x="1463040" y="4427081"/>
+            <a:ext cx="4937760" cy="457200"/>
           </a:xfrm>
           <a:prstGeom prst="rect">
             <a:avLst/>
           </a:prstGeom>
-          <a:solidFill>
-            <a:srgbClr val="E7E6E6"/>
-          </a:solidFill>
-          <a:ln>
-            <a:solidFill>
-              <a:srgbClr val="808080"/>
-            </a:solidFill>
-            <a:prstDash val="dash"/>
-          </a:ln>
-          <a:effectLst/>
+          <a:noFill/>
         </p:spPr>
-        <p:style>
-          <a:lnRef idx="1">
-            <a:schemeClr val="accent1"/>
-          </a:lnRef>
-          <a:fillRef idx="3">
-            <a:schemeClr val="accent1"/>
-          </a:fillRef>
-          <a:effectRef idx="2">
-            <a:schemeClr val="accent1"/>
-          </a:effectRef>
-          <a:fontRef idx="minor">
-            <a:schemeClr val="lt1"/>
-          </a:fontRef>
-        </p:style>
         <p:txBody>
-          <a:bodyPr rtlCol="0" anchor="ctr" wrap="square"/>
+          <a:bodyPr wrap="square" anchor="t">
+            <a:spAutoFit/>
+          </a:bodyPr>
           <a:lstStyle/>
           <a:p>
-            <a:pPr algn="ctr"/>
-            <a:r>
-              <a:rPr sz="1600" b="1">
+            <a:pPr>
+              <a:spcAft>
+                <a:spcPts val="400"/>
+              </a:spcAft>
+            </a:pPr>
+            <a:r>
+              <a:rPr sz="1300" b="0">
                 <a:solidFill>
                   <a:srgbClr val="808080"/>
                 </a:solidFill>
                 <a:latin typeface="Times New Roman"/>
               </a:rPr>
-              <a:t>PHOTO</a:t>
-            </a:r>
-          </a:p>
-          <a:p>
-            <a:pPr algn="ctr"/>
-            <a:r>
-              <a:rPr sz="1600" b="0">
-                <a:solidFill>
-                  <a:srgbClr val="808080"/>
-                </a:solidFill>
-                <a:latin typeface="Times New Roman"/>
-              </a:rPr>
-              <a:t>MRF24J40MA module on PMOD JC</a:t>
+              <a:t>MRF24J40MA, on a PMOD adapter on JC; image: Microchip Technology.</a:t>
             </a:r>
           </a:p>
         </p:txBody>
@@ -36884,74 +36869,30 @@
           </a:p>
         </p:txBody>
       </p:sp>
-      <p:sp>
-        <p:nvSpPr>
-          <p:cNvPr id="66" name="Rectangle 65"/>
-          <p:cNvSpPr/>
+      <p:pic>
+        <p:nvPicPr>
+          <p:cNvPr id="66" name="Picture 65" descr="pmodmicrosd-top.png"/>
+          <p:cNvPicPr>
+            <a:picLocks noChangeAspect="1"/>
+          </p:cNvPicPr>
           <p:nvPr/>
-        </p:nvSpPr>
+        </p:nvPicPr>
+        <p:blipFill>
+          <a:blip r:embed="rId3"/>
+          <a:stretch>
+            <a:fillRect/>
+          </a:stretch>
+        </p:blipFill>
         <p:spPr>
           <a:xfrm>
-            <a:off x="8046720" y="1994916"/>
-            <a:ext cx="3931920" cy="1828800"/>
+            <a:off x="8778240" y="1994916"/>
+            <a:ext cx="1828800" cy="1828800"/>
           </a:xfrm>
           <a:prstGeom prst="rect">
             <a:avLst/>
           </a:prstGeom>
-          <a:solidFill>
-            <a:srgbClr val="E7E6E6"/>
-          </a:solidFill>
-          <a:ln>
-            <a:solidFill>
-              <a:srgbClr val="808080"/>
-            </a:solidFill>
-            <a:prstDash val="dash"/>
-          </a:ln>
-          <a:effectLst/>
         </p:spPr>
-        <p:style>
-          <a:lnRef idx="1">
-            <a:schemeClr val="accent1"/>
-          </a:lnRef>
-          <a:fillRef idx="3">
-            <a:schemeClr val="accent1"/>
-          </a:fillRef>
-          <a:effectRef idx="2">
-            <a:schemeClr val="accent1"/>
-          </a:effectRef>
-          <a:fontRef idx="minor">
-            <a:schemeClr val="lt1"/>
-          </a:fontRef>
-        </p:style>
-        <p:txBody>
-          <a:bodyPr rtlCol="0" anchor="ctr" wrap="square"/>
-          <a:lstStyle/>
-          <a:p>
-            <a:pPr algn="ctr"/>
-            <a:r>
-              <a:rPr sz="1600" b="1">
-                <a:solidFill>
-                  <a:srgbClr val="808080"/>
-                </a:solidFill>
-                <a:latin typeface="Times New Roman"/>
-              </a:rPr>
-              <a:t>PHOTO</a:t>
-            </a:r>
-          </a:p>
-          <a:p>
-            <a:pPr algn="ctr"/>
-            <a:r>
-              <a:rPr sz="1600" b="0">
-                <a:solidFill>
-                  <a:srgbClr val="808080"/>
-                </a:solidFill>
-                <a:latin typeface="Times New Roman"/>
-              </a:rPr>
-              <a:t>microSD card in the PMOD JA slot</a:t>
-            </a:r>
-          </a:p>
-        </p:txBody>
-      </p:sp>
+      </p:pic>
     </p:spTree>
   </p:cSld>
   <p:clrMapOvr>

--- a/fpga/sw/export/docs/slides/01_EDHOC_SoC_on_Arty_A7-100T.pptx
+++ b/fpga/sw/export/docs/slides/01_EDHOC_SoC_on_Arty_A7-100T.pptx
@@ -9949,8 +9949,8 @@
         </p:blipFill>
         <p:spPr>
           <a:xfrm>
-            <a:off x="2103120" y="822960"/>
-            <a:ext cx="7997125" cy="5486400"/>
+            <a:off x="2651760" y="804672"/>
+            <a:ext cx="6838122" cy="5486400"/>
           </a:xfrm>
           <a:prstGeom prst="rect">
             <a:avLst/>
@@ -17300,7 +17300,7 @@
         <p:spPr>
           <a:xfrm>
             <a:off x="6400800" y="5257800"/>
-            <a:ext cx="1732711" cy="1188720"/>
+            <a:ext cx="1481593" cy="1188720"/>
           </a:xfrm>
           <a:prstGeom prst="rect">
             <a:avLst/>
@@ -29315,70 +29315,65 @@
           </a:p>
         </p:txBody>
       </p:sp>
+      <p:pic>
+        <p:nvPicPr>
+          <p:cNvPr id="66" name="Picture 65" descr="C232HM.jpg"/>
+          <p:cNvPicPr>
+            <a:picLocks noChangeAspect="1"/>
+          </p:cNvPicPr>
+          <p:nvPr/>
+        </p:nvPicPr>
+        <p:blipFill>
+          <a:blip r:embed="rId3"/>
+          <a:stretch>
+            <a:fillRect/>
+          </a:stretch>
+        </p:blipFill>
+        <p:spPr>
+          <a:xfrm>
+            <a:off x="7223760" y="4800600"/>
+            <a:ext cx="1574684" cy="1463040"/>
+          </a:xfrm>
+          <a:prstGeom prst="rect">
+            <a:avLst/>
+          </a:prstGeom>
+        </p:spPr>
+      </p:pic>
       <p:sp>
         <p:nvSpPr>
-          <p:cNvPr id="66" name="Rectangle 65"/>
-          <p:cNvSpPr/>
+          <p:cNvPr id="67" name="TextBox 66"/>
+          <p:cNvSpPr txBox="1"/>
           <p:nvPr/>
         </p:nvSpPr>
         <p:spPr>
           <a:xfrm>
-            <a:off x="7223760" y="4846320"/>
-            <a:ext cx="4754880" cy="1554480"/>
+            <a:off x="8869680" y="5120640"/>
+            <a:ext cx="3108960" cy="914400"/>
           </a:xfrm>
           <a:prstGeom prst="rect">
             <a:avLst/>
           </a:prstGeom>
-          <a:solidFill>
-            <a:srgbClr val="E7E6E6"/>
-          </a:solidFill>
-          <a:ln>
-            <a:solidFill>
-              <a:srgbClr val="808080"/>
-            </a:solidFill>
-            <a:prstDash val="dash"/>
-          </a:ln>
-          <a:effectLst/>
+          <a:noFill/>
         </p:spPr>
-        <p:style>
-          <a:lnRef idx="1">
-            <a:schemeClr val="accent1"/>
-          </a:lnRef>
-          <a:fillRef idx="3">
-            <a:schemeClr val="accent1"/>
-          </a:fillRef>
-          <a:effectRef idx="2">
-            <a:schemeClr val="accent1"/>
-          </a:effectRef>
-          <a:fontRef idx="minor">
-            <a:schemeClr val="lt1"/>
-          </a:fontRef>
-        </p:style>
         <p:txBody>
-          <a:bodyPr rtlCol="0" anchor="ctr" wrap="square"/>
+          <a:bodyPr wrap="square" anchor="t">
+            <a:spAutoFit/>
+          </a:bodyPr>
           <a:lstStyle/>
           <a:p>
-            <a:pPr algn="ctr"/>
-            <a:r>
-              <a:rPr sz="1600" b="1">
+            <a:pPr>
+              <a:spcAft>
+                <a:spcPts val="400"/>
+              </a:spcAft>
+            </a:pPr>
+            <a:r>
+              <a:rPr sz="1300" b="0">
                 <a:solidFill>
                   <a:srgbClr val="808080"/>
                 </a:solidFill>
                 <a:latin typeface="Times New Roman"/>
               </a:rPr>
-              <a:t>PHOTO</a:t>
-            </a:r>
-          </a:p>
-          <a:p>
-            <a:pPr algn="ctr"/>
-            <a:r>
-              <a:rPr sz="1600" b="0">
-                <a:solidFill>
-                  <a:srgbClr val="808080"/>
-                </a:solidFill>
-                <a:latin typeface="Times New Roman"/>
-              </a:rPr>
-              <a:t>C232HM cable on PMOD JD</a:t>
+              <a:t>C232HM-DDHSL-0: flying leads to JD, USB to the PC; image: FTDI.</a:t>
             </a:r>
           </a:p>
         </p:txBody>

--- a/fpga/sw/export/docs/slides/01_EDHOC_SoC_on_Arty_A7-100T.pptx
+++ b/fpga/sw/export/docs/slides/01_EDHOC_SoC_on_Arty_A7-100T.pptx
@@ -9950,7 +9950,7 @@
         <p:spPr>
           <a:xfrm>
             <a:off x="2651760" y="804672"/>
-            <a:ext cx="6838122" cy="5486400"/>
+            <a:ext cx="6692630" cy="5486400"/>
           </a:xfrm>
           <a:prstGeom prst="rect">
             <a:avLst/>
@@ -17300,7 +17300,7 @@
         <p:spPr>
           <a:xfrm>
             <a:off x="6400800" y="5257800"/>
-            <a:ext cx="1481593" cy="1188720"/>
+            <a:ext cx="1450070" cy="1188720"/>
           </a:xfrm>
           <a:prstGeom prst="rect">
             <a:avLst/>

--- a/fpga/sw/export/docs/slides/01_EDHOC_SoC_on_Arty_A7-100T.pptx
+++ b/fpga/sw/export/docs/slides/01_EDHOC_SoC_on_Arty_A7-100T.pptx
@@ -3740,40 +3740,40 @@
                 <c:formatCode>General</c:formatCode>
                 <c:ptCount val="12"/>
                 <c:pt idx="0">
-                  <c:v>42291</c:v>
+                  <c:v>42505</c:v>
                 </c:pt>
                 <c:pt idx="1">
-                  <c:v>42291</c:v>
+                  <c:v>42505</c:v>
                 </c:pt>
                 <c:pt idx="2">
-                  <c:v>43739</c:v>
+                  <c:v>43977</c:v>
                 </c:pt>
                 <c:pt idx="3">
-                  <c:v>43739</c:v>
+                  <c:v>43977</c:v>
                 </c:pt>
                 <c:pt idx="4">
-                  <c:v>41653</c:v>
+                  <c:v>41863</c:v>
                 </c:pt>
                 <c:pt idx="5">
-                  <c:v>43365</c:v>
+                  <c:v>43603</c:v>
                 </c:pt>
                 <c:pt idx="6">
-                  <c:v>46361</c:v>
+                  <c:v>46595</c:v>
                 </c:pt>
                 <c:pt idx="7">
-                  <c:v>47391</c:v>
+                  <c:v>47673</c:v>
                 </c:pt>
                 <c:pt idx="8">
-                  <c:v>47913</c:v>
+                  <c:v>48209</c:v>
                 </c:pt>
                 <c:pt idx="9">
-                  <c:v>32712</c:v>
+                  <c:v>32718</c:v>
                 </c:pt>
                 <c:pt idx="10">
-                  <c:v>32876</c:v>
+                  <c:v>32878</c:v>
                 </c:pt>
                 <c:pt idx="11">
-                  <c:v>37637</c:v>
+                  <c:v>37663</c:v>
                 </c:pt>
               </c:numCache>
             </c:numRef>
@@ -15238,7 +15238,7 @@
                 </a:solidFill>
                 <a:latin typeface="Times New Roman"/>
               </a:rPr>
-              <a:t>; largest: suite 25 = 60,457 B, TBD3 = 61,445 B.</a:t>
+              <a:t>; largest: suite 25 = 60,753 B, TBD3 = 61,471 B.</a:t>
             </a:r>
           </a:p>
           <a:p>
@@ -15255,7 +15255,7 @@
                 </a:solidFill>
                 <a:latin typeface="Times New Roman"/>
               </a:rPr>
-              <a:t>Smallest build (suite 4, method 3) needs ≈ 32.4 KB with its stack: only method 3 of suites 0 / 1 / 4 fits 32 KiB, and barely.</a:t>
+              <a:t>32 KiB: only suite 4, method 3, initiator fits (32,539 B, 229 B spare); its responder is 69 B over, suites 0 / 1 method 3 141–437 B over.</a:t>
             </a:r>
           </a:p>
           <a:p>
@@ -15290,6 +15290,23 @@
                 <a:latin typeface="Times New Roman"/>
               </a:rPr>
               <a:t>The requirement says “minimum 32 KiB”, so 64 KiB is within it.</a:t>
+            </a:r>
+          </a:p>
+          <a:p>
+            <a:pPr marL="256032" indent="-219456">
+              <a:spcAft>
+                <a:spcPts val="400"/>
+              </a:spcAft>
+              <a:buChar char="•"/>
+            </a:pPr>
+            <a:r>
+              <a:rPr sz="1700" b="0">
+                <a:solidFill>
+                  <a:srgbClr val="000000"/>
+                </a:solidFill>
+                <a:latin typeface="Times New Roman"/>
+              </a:rPr>
+              <a:t>Build set: this revision, default flags (TRANSPORT=rf; no TIMING, DEBUG or APP options); per suite the build with the largest image + stack reserve.</a:t>
             </a:r>
           </a:p>
         </p:txBody>
@@ -21525,7 +21542,7 @@
                 </a:solidFill>
                 <a:latin typeface="Times New Roman"/>
               </a:rPr>
-              <a:t>Each list entry is one controller instance; the list index is the port number used by the overlays in section 3 (SPI0 → JA, SPI1 → JC).</a:t>
+              <a:t>Each list entry is one controller instance; the list index is the port number used by the overlays in section 4 (SPI0 → JA, SPI1 → JC).</a:t>
             </a:r>
           </a:p>
           <a:p>
@@ -22586,7 +22603,7 @@
                 </a:solidFill>
                 <a:latin typeface="Times New Roman"/>
               </a:rPr>
-              <a:t>During development we skip it: firmware is loaded over JTAG in seconds (section 5).</a:t>
+              <a:t>During development we skip it: firmware is loaded over JTAG in seconds (section 6).</a:t>
             </a:r>
           </a:p>
         </p:txBody>
@@ -28199,7 +28216,7 @@
                 </a:solidFill>
                 <a:latin typeface="Times New Roman"/>
               </a:rPr>
-              <a:t>Each board shows up as two ttyUSB devices; the console is interface 1 of the Digilent FTDI. Find it by serial number, because ttyUSB numbers change when Vivado or OpenOCD opens a port (section 5).</a:t>
+              <a:t>Each board shows up as two ttyUSB devices; the console is interface 1 of the Digilent FTDI. Find it by serial number, because ttyUSB numbers change when Vivado or OpenOCD opens a port (section 6).</a:t>
             </a:r>
           </a:p>
         </p:txBody>
@@ -30593,7 +30610,7 @@
                 </a:solidFill>
                 <a:latin typeface="Consolas"/>
               </a:rPr>
-              <a:t>echo $?                    # 0 = done; 2 = timing failed (a .bit is still written)</a:t>
+              <a:t>echo $?                    # 0 = make finished; nonzero = something failed: read the log</a:t>
             </a:r>
           </a:p>
         </p:txBody>
@@ -30782,7 +30799,7 @@
                 </a:solidFill>
                 <a:latin typeface="Times New Roman"/>
               </a:rPr>
-              <a:t> if timing fails, make stops with exit code 2 but still writes the </a:t>
+              <a:t> exit status 0 does not mean timing was met, and a failed flow may still leave a </a:t>
             </a:r>
             <a:r>
               <a:rPr sz="1800" b="0" i="1">
@@ -30800,7 +30817,7 @@
                 </a:solidFill>
                 <a:latin typeface="Times New Roman"/>
               </a:rPr>
-              <a:t> file. Always read </a:t>
+              <a:t>. Timing is decided only by </a:t>
             </a:r>
             <a:r>
               <a:rPr sz="1800" b="0" i="1">
@@ -30809,7 +30826,7 @@
                 </a:solidFill>
                 <a:latin typeface="Times New Roman"/>
               </a:rPr>
-              <a:t>timing.txt</a:t>
+              <a:t>report/timing.txt</a:t>
             </a:r>
             <a:r>
               <a:rPr sz="1800" b="0">
@@ -30818,7 +30835,7 @@
                 </a:solidFill>
                 <a:latin typeface="Times New Roman"/>
               </a:rPr>
-              <a:t> before using a new bitstream.</a:t>
+              <a:t>: read it before using a new bitstream.</a:t>
             </a:r>
           </a:p>
         </p:txBody>
@@ -33063,7 +33080,7 @@
                           </a:solidFill>
                           <a:latin typeface="Times New Roman"/>
                         </a:rPr>
-                        <a:t>exit status of make</a:t>
+                        <a:t>exit status of make, then the log</a:t>
                       </a:r>
                     </a:p>
                   </a:txBody>
@@ -33085,7 +33102,7 @@
                           </a:solidFill>
                           <a:latin typeface="Times New Roman"/>
                         </a:rPr>
-                        <a:t>0 (2 = timing failed, even though a .bit exists)</a:t>
+                        <a:t>0; nonzero = build failed</a:t>
                       </a:r>
                     </a:p>
                   </a:txBody>
@@ -34671,7 +34688,7 @@
         <p:spPr>
           <a:xfrm>
             <a:off x="365760" y="868680"/>
-            <a:ext cx="7315200" cy="1465123"/>
+            <a:ext cx="7315200" cy="1139631"/>
           </a:xfrm>
           <a:prstGeom prst="rect">
             <a:avLst/>
@@ -34706,13 +34723,13 @@
           <a:p>
             <a:pPr algn="l"/>
             <a:r>
-              <a:rPr sz="1165" b="1">
+              <a:rPr sz="1211" b="1">
                 <a:solidFill>
                   <a:srgbClr val="808080"/>
                 </a:solidFill>
                 <a:latin typeface="Consolas"/>
               </a:rPr>
-              <a:t>Run this</a:t>
+              <a:t>Run this — from the repository root</a:t>
             </a:r>
           </a:p>
           <a:p>
@@ -34722,7 +34739,7 @@
               </a:lnSpc>
             </a:pPr>
             <a:r>
-              <a:rPr sz="1165">
+              <a:rPr sz="1211">
                 <a:solidFill>
                   <a:srgbClr val="1F1F1F"/>
                 </a:solidFill>
@@ -34738,7 +34755,7 @@
               </a:lnSpc>
             </a:pPr>
             <a:r>
-              <a:rPr sz="1165">
+              <a:rPr sz="1211">
                 <a:solidFill>
                   <a:srgbClr val="1F1F1F"/>
                 </a:solidFill>
@@ -34754,13 +34771,13 @@
               </a:lnSpc>
             </a:pPr>
             <a:r>
-              <a:rPr sz="1165">
+              <a:rPr sz="1211">
                 <a:solidFill>
                   <a:srgbClr val="1F1F1F"/>
                 </a:solidFill>
                 <a:latin typeface="Consolas"/>
               </a:rPr>
-              <a:t>BOARD=initiator \</a:t>
+              <a:t>BOARD=initiator ../common/board/run_one.sh build/gpio_test.elf 5   # board A</a:t>
             </a:r>
           </a:p>
           <a:p>
@@ -34770,45 +34787,13 @@
               </a:lnSpc>
             </a:pPr>
             <a:r>
-              <a:rPr sz="1165">
+              <a:rPr sz="1211">
                 <a:solidFill>
                   <a:srgbClr val="1F1F1F"/>
                 </a:solidFill>
                 <a:latin typeface="Consolas"/>
               </a:rPr>
-              <a:t>  ../common/board/run_one.sh build/gpio_test.elf 5   # load, run, print console</a:t>
-            </a:r>
-          </a:p>
-          <a:p>
-            <a:pPr algn="l">
-              <a:lnSpc>
-                <a:spcPct val="100000"/>
-              </a:lnSpc>
-            </a:pPr>
-            <a:r>
-              <a:rPr sz="1165">
-                <a:solidFill>
-                  <a:srgbClr val="2E7D32"/>
-                </a:solidFill>
-                <a:latin typeface="Consolas"/>
-              </a:rPr>
-              <a:t># both boards at once (responder first):</a:t>
-            </a:r>
-          </a:p>
-          <a:p>
-            <a:pPr algn="l">
-              <a:lnSpc>
-                <a:spcPct val="100000"/>
-              </a:lnSpc>
-            </a:pPr>
-            <a:r>
-              <a:rPr sz="1165">
-                <a:solidFill>
-                  <a:srgbClr val="1F1F1F"/>
-                </a:solidFill>
-                <a:latin typeface="Consolas"/>
-              </a:rPr>
-              <a:t>../common/board/load_both.sh A.elf B.elf</a:t>
+              <a:t>BOARD=responder ../common/board/run_one.sh build/gpio_test.elf 5   # board B</a:t>
             </a:r>
           </a:p>
         </p:txBody>
@@ -34821,8 +34806,8 @@
         </p:nvSpPr>
         <p:spPr>
           <a:xfrm>
-            <a:off x="365760" y="2516683"/>
-            <a:ext cx="7315200" cy="1006856"/>
+            <a:off x="365760" y="2191191"/>
+            <a:ext cx="7315200" cy="1004809"/>
           </a:xfrm>
           <a:prstGeom prst="rect">
             <a:avLst/>
@@ -34857,13 +34842,13 @@
           <a:p>
             <a:pPr algn="l"/>
             <a:r>
-              <a:rPr sz="1300" b="1">
+              <a:rPr sz="1296" b="1">
                 <a:solidFill>
                   <a:srgbClr val="808080"/>
                 </a:solidFill>
                 <a:latin typeface="Consolas"/>
               </a:rPr>
-              <a:t>Run this — what run_one.sh does (simplified)</a:t>
+              <a:t>Simplified — what run_one.sh does ($SERIAL, $ELF are set by the script)</a:t>
             </a:r>
           </a:p>
           <a:p>
@@ -34873,7 +34858,7 @@
               </a:lnSpc>
             </a:pPr>
             <a:r>
-              <a:rPr sz="1300">
+              <a:rPr sz="1296">
                 <a:solidFill>
                   <a:srgbClr val="1F1F1F"/>
                 </a:solidFill>
@@ -34889,7 +34874,7 @@
               </a:lnSpc>
             </a:pPr>
             <a:r>
-              <a:rPr sz="1300">
+              <a:rPr sz="1296">
                 <a:solidFill>
                   <a:srgbClr val="1F1F1F"/>
                 </a:solidFill>
@@ -34905,7 +34890,7 @@
               </a:lnSpc>
             </a:pPr>
             <a:r>
-              <a:rPr sz="1300">
+              <a:rPr sz="1296">
                 <a:solidFill>
                   <a:srgbClr val="1F1F1F"/>
                 </a:solidFill>
@@ -34977,6 +34962,41 @@
                 </a:solidFill>
                 <a:latin typeface="Times New Roman"/>
               </a:rPr>
+              <a:t>Both boards at once (responder first): </a:t>
+            </a:r>
+            <a:r>
+              <a:rPr sz="1400" b="0">
+                <a:solidFill>
+                  <a:srgbClr val="8B1A1A"/>
+                </a:solidFill>
+                <a:latin typeface="Consolas"/>
+              </a:rPr>
+              <a:t>load_both.sh &lt;initiator.elf&gt; &lt;responder.elf&gt;</a:t>
+            </a:r>
+            <a:r>
+              <a:rPr sz="1600" b="0">
+                <a:solidFill>
+                  <a:srgbClr val="000000"/>
+                </a:solidFill>
+                <a:latin typeface="Times New Roman"/>
+              </a:rPr>
+              <a:t>, used from Lesson 3 on.</a:t>
+            </a:r>
+          </a:p>
+          <a:p>
+            <a:pPr marL="256032" indent="-219456">
+              <a:spcAft>
+                <a:spcPts val="400"/>
+              </a:spcAft>
+              <a:buChar char="•"/>
+            </a:pPr>
+            <a:r>
+              <a:rPr sz="1600" b="0">
+                <a:solidFill>
+                  <a:srgbClr val="000000"/>
+                </a:solidFill>
+                <a:latin typeface="Times New Roman"/>
+              </a:rPr>
               <a:t>Cable and console of each board come from </a:t>
             </a:r>
             <a:r>
@@ -35025,7 +35045,7 @@
         </p:nvSpPr>
         <p:spPr>
           <a:xfrm>
-            <a:off x="365760" y="3706418"/>
+            <a:off x="365760" y="3378880"/>
             <a:ext cx="7315200" cy="576553"/>
           </a:xfrm>
           <a:prstGeom prst="rect">
@@ -36475,7 +36495,7 @@
         <p:spPr>
           <a:xfrm>
             <a:off x="365760" y="868680"/>
-            <a:ext cx="11430000" cy="851916"/>
+            <a:ext cx="11430000" cy="1068832"/>
           </a:xfrm>
           <a:prstGeom prst="rect">
             <a:avLst/>
@@ -36516,7 +36536,7 @@
                 </a:solidFill>
                 <a:latin typeface="Consolas"/>
               </a:rPr>
-              <a:t>Run this</a:t>
+              <a:t>Run this — from the repository root; sdX = your card reader (lsblk)</a:t>
             </a:r>
           </a:p>
           <a:p>
@@ -36532,7 +36552,7 @@
                 </a:solidFill>
                 <a:latin typeface="Consolas"/>
               </a:rPr>
-              <a:t>sudo fpga/sw/export/tools/mksd.sh /dev/sdX            # once: partitions + FAT32</a:t>
+              <a:t>cd fpga/sw/export/tests &amp;&amp; make gpio_test      # -&gt; build/gpio_test.bin</a:t>
             </a:r>
           </a:p>
           <a:p>
@@ -36548,7 +36568,23 @@
                 </a:solidFill>
                 <a:latin typeface="Consolas"/>
               </a:rPr>
-              <a:t>sudo fpga/sw/export/common/board/sd_boot.sh build/app.bin sdX1   # firmware -&gt; LBA 2048</a:t>
+              <a:t>sudo ../tools/mksd.sh /dev/sdX                       # once; ERASES the card</a:t>
+            </a:r>
+          </a:p>
+          <a:p>
+            <a:pPr algn="l">
+              <a:lnSpc>
+                <a:spcPct val="100000"/>
+              </a:lnSpc>
+            </a:pPr>
+            <a:r>
+              <a:rPr sz="1400">
+                <a:solidFill>
+                  <a:srgbClr val="1F1F1F"/>
+                </a:solidFill>
+                <a:latin typeface="Consolas"/>
+              </a:rPr>
+              <a:t>sudo ../common/board/sd_boot.sh build/gpio_test.bin sdX1    # image -&gt; LBA 2048</a:t>
             </a:r>
           </a:p>
         </p:txBody>
@@ -36562,7 +36598,7 @@
           <p:nvPr/>
         </p:nvGraphicFramePr>
         <p:xfrm>
-          <a:off x="365760" y="1994916"/>
+          <a:off x="365760" y="2211832"/>
           <a:ext cx="7498080" cy="1828800"/>
         </p:xfrm>
         <a:graphic>
@@ -36880,7 +36916,7 @@
         </p:blipFill>
         <p:spPr>
           <a:xfrm>
-            <a:off x="8778240" y="1994916"/>
+            <a:off x="8778240" y="2211832"/>
             <a:ext cx="1828800" cy="1828800"/>
           </a:xfrm>
           <a:prstGeom prst="rect">
@@ -38998,7 +39034,7 @@
                 </a:solidFill>
                 <a:latin typeface="Times New Roman"/>
               </a:rPr>
-              <a:t>64 KiB because the largest EDHOC build needs 61.4 KB with its stack; 75 MHz because this implementation failed timing at 100 MHz and closes at 75 MHz.</a:t>
+              <a:t>64 KiB because the largest EDHOC build needs 61.5 KB with its stack; 75 MHz because this implementation failed timing at 100 MHz and closes at 75 MHz.</a:t>
             </a:r>
           </a:p>
           <a:p>

--- a/fpga/sw/export/docs/slides/01_EDHOC_SoC_on_Arty_A7-100T.pptx
+++ b/fpga/sw/export/docs/slides/01_EDHOC_SoC_on_Arty_A7-100T.pptx
@@ -9551,7 +9551,7 @@
                           </a:solidFill>
                           <a:latin typeface="Times New Roman"/>
                         </a:rPr>
-                        <a:t>MRF24J40MA 802.15.4 module on a PMOD adapter</a:t>
+                        <a:t>MRF24J40MA 802.15.4 module</a:t>
                       </a:r>
                     </a:p>
                   </a:txBody>
@@ -9595,7 +9595,7 @@
                           </a:solidFill>
                           <a:latin typeface="Times New Roman"/>
                         </a:rPr>
-                        <a:t>PMOD JC; a custom PCB: module pins to JC in section 4 (6/9)</a:t>
+                        <a:t>PMOD JC; module-to-JC signal wiring in section 4 (6/9)</a:t>
                       </a:r>
                     </a:p>
                   </a:txBody>
@@ -11054,7 +11054,7 @@
         <p:spPr>
           <a:xfrm>
             <a:off x="365760" y="868680"/>
-            <a:ext cx="11430000" cy="1097280"/>
+            <a:ext cx="11430000" cy="898397"/>
           </a:xfrm>
           <a:prstGeom prst="rect">
             <a:avLst/>
@@ -11089,7 +11089,7 @@
           <a:p>
             <a:pPr algn="l"/>
             <a:r>
-              <a:rPr sz="1475" b="1">
+              <a:rPr sz="1500" b="1">
                 <a:solidFill>
                   <a:srgbClr val="808080"/>
                 </a:solidFill>
@@ -11105,7 +11105,7 @@
               </a:lnSpc>
             </a:pPr>
             <a:r>
-              <a:rPr sz="1475">
+              <a:rPr sz="1500">
                 <a:solidFill>
                   <a:srgbClr val="1F1F1F"/>
                 </a:solidFill>
@@ -11121,29 +11121,13 @@
               </a:lnSpc>
             </a:pPr>
             <a:r>
-              <a:rPr sz="1475">
+              <a:rPr sz="1500">
                 <a:solidFill>
                   <a:srgbClr val="1F1F1F"/>
                 </a:solidFill>
                 <a:latin typeface="Consolas"/>
               </a:rPr>
               <a:t>cd chipyard</a:t>
-            </a:r>
-          </a:p>
-          <a:p>
-            <a:pPr algn="l">
-              <a:lnSpc>
-                <a:spcPct val="100000"/>
-              </a:lnSpc>
-            </a:pPr>
-            <a:r>
-              <a:rPr sz="1475">
-                <a:solidFill>
-                  <a:srgbClr val="1F1F1F"/>
-                </a:solidFill>
-                <a:latin typeface="Consolas"/>
-              </a:rPr>
-              <a:t>git checkout edhoc-course-v1     # the revision these slides describe</a:t>
             </a:r>
           </a:p>
         </p:txBody>
@@ -11157,7 +11141,7 @@
           <p:nvPr/>
         </p:nvGraphicFramePr>
         <p:xfrm>
-          <a:off x="365760" y="2240279"/>
+          <a:off x="365760" y="2041397"/>
           <a:ext cx="11430000" cy="2103120"/>
         </p:xfrm>
         <a:graphic>
@@ -28903,7 +28887,7 @@
                 </a:solidFill>
                 <a:latin typeface="Times New Roman"/>
               </a:rPr>
-              <a:t>The course uses a small custom PCB that wires exactly this. Any adapter works if it does the same; check the module pins against the MRF24J40MA data sheet.</a:t>
+              <a:t>Connect the module signals to the JC pins shown here; check the module pin numbers against the MRF24J40MA data sheet.</a:t>
             </a:r>
           </a:p>
           <a:p>
@@ -33601,7 +33585,7 @@
         <p:spPr>
           <a:xfrm>
             <a:off x="365760" y="2331720"/>
-            <a:ext cx="7498079" cy="1980540"/>
+            <a:ext cx="7498079" cy="2215388"/>
           </a:xfrm>
           <a:prstGeom prst="rect">
             <a:avLst/>
@@ -33640,13 +33624,13 @@
               </a:lnSpc>
             </a:pPr>
             <a:r>
-              <a:rPr sz="1276">
+              <a:rPr sz="1300">
                 <a:solidFill>
                   <a:srgbClr val="1F1F1F"/>
                 </a:solidFill>
                 <a:latin typeface="Consolas"/>
               </a:rPr>
-              <a:t>open_checkpoint obj/post_opt.dcp</a:t>
+              <a:t>open_checkpoint post_opt.dcp</a:t>
             </a:r>
           </a:p>
           <a:p>
@@ -33656,7 +33640,7 @@
               </a:lnSpc>
             </a:pPr>
             <a:r>
-              <a:rPr sz="1276">
+              <a:rPr sz="1300">
                 <a:solidFill>
                   <a:srgbClr val="1F1F1F"/>
                 </a:solidFill>
@@ -33672,7 +33656,7 @@
               </a:lnSpc>
             </a:pPr>
             <a:r>
-              <a:rPr sz="1276">
+              <a:rPr sz="1300">
                 <a:solidFill>
                   <a:srgbClr val="1F1F1F"/>
                 </a:solidFill>
@@ -33688,7 +33672,7 @@
               </a:lnSpc>
             </a:pPr>
             <a:r>
-              <a:rPr sz="1276">
+              <a:rPr sz="1300">
                 <a:solidFill>
                   <a:srgbClr val="1F1F1F"/>
                 </a:solidFill>
@@ -33704,7 +33688,7 @@
               </a:lnSpc>
             </a:pPr>
             <a:r>
-              <a:rPr sz="1276">
+              <a:rPr sz="1300">
                 <a:solidFill>
                   <a:srgbClr val="1F1F1F"/>
                 </a:solidFill>
@@ -33720,7 +33704,7 @@
               </a:lnSpc>
             </a:pPr>
             <a:r>
-              <a:rPr sz="1276">
+              <a:rPr sz="1300">
                 <a:solidFill>
                   <a:srgbClr val="1F1F1F"/>
                 </a:solidFill>
@@ -33736,7 +33720,7 @@
               </a:lnSpc>
             </a:pPr>
             <a:r>
-              <a:rPr sz="1276">
+              <a:rPr sz="1300">
                 <a:solidFill>
                   <a:srgbClr val="1F1F1F"/>
                 </a:solidFill>
@@ -33752,13 +33736,13 @@
               </a:lnSpc>
             </a:pPr>
             <a:r>
-              <a:rPr sz="1276">
+              <a:rPr sz="1300">
                 <a:solidFill>
                   <a:srgbClr val="1F1F1F"/>
                 </a:solidFill>
                 <a:latin typeface="Consolas"/>
               </a:rPr>
-              <a:t>report_timing_summary -file timing.txt        ;# expect WNS &gt;= 0, WHS &gt;= 0</a:t>
+              <a:t>file mkdir report</a:t>
             </a:r>
           </a:p>
           <a:p>
@@ -33768,7 +33752,23 @@
               </a:lnSpc>
             </a:pPr>
             <a:r>
-              <a:rPr sz="1276">
+              <a:rPr sz="1300">
+                <a:solidFill>
+                  <a:srgbClr val="1F1F1F"/>
+                </a:solidFill>
+                <a:latin typeface="Consolas"/>
+              </a:rPr>
+              <a:t>report_timing_summary -file report/timing.txt ;# check WNS and WHS &gt;= 0</a:t>
+            </a:r>
+          </a:p>
+          <a:p>
+            <a:pPr algn="l">
+              <a:lnSpc>
+                <a:spcPct val="100000"/>
+              </a:lnSpc>
+            </a:pPr>
+            <a:r>
+              <a:rPr sz="1300">
                 <a:solidFill>
                   <a:srgbClr val="1F1F1F"/>
                 </a:solidFill>
@@ -33831,7 +33831,7 @@
                 </a:solidFill>
                 <a:latin typeface="Times New Roman"/>
               </a:rPr>
-              <a:t>Do not add extra clock uncertainty to “help” placement: it makes WNS worse.</a:t>
+              <a:t>Extra clock uncertainty did not improve the measured implementation; do not assume it will repair a timing failure.</a:t>
             </a:r>
           </a:p>
           <a:p>
@@ -37969,7 +37969,7 @@
                 </a:solidFill>
                 <a:latin typeface="Times New Roman"/>
               </a:rPr>
-              <a:t>No card reader? </a:t>
+              <a:t>No card reader? First format the card with </a:t>
             </a:r>
             <a:r>
               <a:rPr sz="1500" b="0" i="1">
@@ -37978,7 +37978,7 @@
                 </a:solidFill>
                 <a:latin typeface="Times New Roman"/>
               </a:rPr>
-              <a:t>tests/sd_prep</a:t>
+              <a:t>sd_prep</a:t>
             </a:r>
             <a:r>
               <a:rPr sz="1500" b="0">
@@ -37987,7 +37987,25 @@
                 </a:solidFill>
                 <a:latin typeface="Times New Roman"/>
               </a:rPr>
-              <a:t> formats the card from the board over JTAG; </a:t>
+              <a:t> (Lesson 5). In </a:t>
+            </a:r>
+            <a:r>
+              <a:rPr sz="1500" b="0" i="1">
+                <a:solidFill>
+                  <a:srgbClr val="000000"/>
+                </a:solidFill>
+                <a:latin typeface="Times New Roman"/>
+              </a:rPr>
+              <a:t>tests/</a:t>
+            </a:r>
+            <a:r>
+              <a:rPr sz="1500" b="0">
+                <a:solidFill>
+                  <a:srgbClr val="000000"/>
+                </a:solidFill>
+                <a:latin typeface="Times New Roman"/>
+              </a:rPr>
+              <a:t>: </a:t>
             </a:r>
             <a:r>
               <a:rPr sz="1300" b="0">
@@ -37996,7 +38014,7 @@
                 </a:solidFill>
                 <a:latin typeface="Consolas"/>
               </a:rPr>
-              <a:t>cp build/gpio_test.bin build/boot.bin; make -B sd_prep EXTRA_CFLAGS=-DSD_PREP_BOOT</a:t>
+              <a:t>cp build/gpio_test.bin build/boot.bin</a:t>
             </a:r>
             <a:r>
               <a:rPr sz="1500" b="0">
@@ -38005,7 +38023,43 @@
                 </a:solidFill>
                 <a:latin typeface="Times New Roman"/>
               </a:rPr>
-              <a:t> also writes the image to LBA 2048.</a:t>
+              <a:t>, then </a:t>
+            </a:r>
+            <a:r>
+              <a:rPr sz="1300" b="0">
+                <a:solidFill>
+                  <a:srgbClr val="8B1A1A"/>
+                </a:solidFill>
+                <a:latin typeface="Consolas"/>
+              </a:rPr>
+              <a:t>make -B sd_prep EXTRA_CFLAGS=-DSD_PREP_BOOT</a:t>
+            </a:r>
+            <a:r>
+              <a:rPr sz="1500" b="0">
+                <a:solidFill>
+                  <a:srgbClr val="000000"/>
+                </a:solidFill>
+                <a:latin typeface="Times New Roman"/>
+              </a:rPr>
+              <a:t>. Load it with </a:t>
+            </a:r>
+            <a:r>
+              <a:rPr sz="1300" b="0">
+                <a:solidFill>
+                  <a:srgbClr val="8B1A1A"/>
+                </a:solidFill>
+                <a:latin typeface="Consolas"/>
+              </a:rPr>
+              <a:t>BOARD=initiator ../common/board/run_one.sh build/sd_prep.elf 30</a:t>
+            </a:r>
+            <a:r>
+              <a:rPr sz="1500" b="0">
+                <a:solidFill>
+                  <a:srgbClr val="000000"/>
+                </a:solidFill>
+                <a:latin typeface="Times New Roman"/>
+              </a:rPr>
+              <a:t>, then press RESET.</a:t>
             </a:r>
           </a:p>
         </p:txBody>

--- a/fpga/sw/export/docs/slides/01_EDHOC_SoC_on_Arty_A7-100T.pptx
+++ b/fpga/sw/export/docs/slides/01_EDHOC_SoC_on_Arty_A7-100T.pptx
@@ -10156,7 +10156,7 @@
         </p:nvGraphicFramePr>
         <p:xfrm>
           <a:off x="365760" y="868680"/>
-          <a:ext cx="11430000" cy="4206240"/>
+          <a:ext cx="11430000" cy="3657600"/>
         </p:xfrm>
         <a:graphic>
           <a:graphicData uri="http://schemas.openxmlformats.org/drawingml/2006/table">
@@ -10169,14 +10169,14 @@
                 <a:gridCol w="2194560"/>
                 <a:gridCol w="4114800"/>
               </a:tblGrid>
-              <a:tr h="467360">
+              <a:tr h="406400">
                 <a:tc>
                   <a:txBody>
                     <a:bodyPr wrap="square"/>
                     <a:lstStyle/>
                     <a:p>
                       <a:r>
-                        <a:rPr sz="1500" b="1">
+                        <a:rPr sz="1400" b="1">
                           <a:solidFill>
                             <a:srgbClr val="000000"/>
                           </a:solidFill>
@@ -10198,7 +10198,7 @@
                     <a:lstStyle/>
                     <a:p>
                       <a:r>
-                        <a:rPr sz="1500" b="1">
+                        <a:rPr sz="1400" b="1">
                           <a:solidFill>
                             <a:srgbClr val="000000"/>
                           </a:solidFill>
@@ -10220,7 +10220,7 @@
                     <a:lstStyle/>
                     <a:p>
                       <a:r>
-                        <a:rPr sz="1500" b="1">
+                        <a:rPr sz="1400" b="1">
                           <a:solidFill>
                             <a:srgbClr val="000000"/>
                           </a:solidFill>
@@ -10237,14 +10237,14 @@
                   </a:tcPr>
                 </a:tc>
               </a:tr>
-              <a:tr h="467360">
+              <a:tr h="406400">
                 <a:tc>
                   <a:txBody>
                     <a:bodyPr wrap="square"/>
                     <a:lstStyle/>
                     <a:p>
                       <a:r>
-                        <a:rPr sz="1500" b="0">
+                        <a:rPr sz="1400" b="0">
                           <a:solidFill>
                             <a:srgbClr val="000000"/>
                           </a:solidFill>
@@ -10266,7 +10266,7 @@
                     <a:lstStyle/>
                     <a:p>
                       <a:r>
-                        <a:rPr sz="1500" b="0">
+                        <a:rPr sz="1400" b="0">
                           <a:solidFill>
                             <a:srgbClr val="000000"/>
                           </a:solidFill>
@@ -10288,7 +10288,7 @@
                     <a:lstStyle/>
                     <a:p>
                       <a:r>
-                        <a:rPr sz="1500" b="0">
+                        <a:rPr sz="1400" b="0">
                           <a:solidFill>
                             <a:srgbClr val="000000"/>
                           </a:solidFill>
@@ -10305,14 +10305,14 @@
                   </a:tcPr>
                 </a:tc>
               </a:tr>
-              <a:tr h="467360">
+              <a:tr h="406400">
                 <a:tc>
                   <a:txBody>
                     <a:bodyPr wrap="square"/>
                     <a:lstStyle/>
                     <a:p>
                       <a:r>
-                        <a:rPr sz="1500" b="0">
+                        <a:rPr sz="1400" b="0">
                           <a:solidFill>
                             <a:srgbClr val="000000"/>
                           </a:solidFill>
@@ -10334,7 +10334,7 @@
                     <a:lstStyle/>
                     <a:p>
                       <a:r>
-                        <a:rPr sz="1500" b="0">
+                        <a:rPr sz="1400" b="0">
                           <a:solidFill>
                             <a:srgbClr val="000000"/>
                           </a:solidFill>
@@ -10356,7 +10356,7 @@
                     <a:lstStyle/>
                     <a:p>
                       <a:r>
-                        <a:rPr sz="1500" b="0">
+                        <a:rPr sz="1400" b="0">
                           <a:solidFill>
                             <a:srgbClr val="000000"/>
                           </a:solidFill>
@@ -10373,14 +10373,14 @@
                   </a:tcPr>
                 </a:tc>
               </a:tr>
-              <a:tr h="467360">
+              <a:tr h="406400">
                 <a:tc>
                   <a:txBody>
                     <a:bodyPr wrap="square"/>
                     <a:lstStyle/>
                     <a:p>
                       <a:r>
-                        <a:rPr sz="1500" b="0">
+                        <a:rPr sz="1400" b="0">
                           <a:solidFill>
                             <a:srgbClr val="000000"/>
                           </a:solidFill>
@@ -10402,7 +10402,7 @@
                     <a:lstStyle/>
                     <a:p>
                       <a:r>
-                        <a:rPr sz="1500" b="0">
+                        <a:rPr sz="1400" b="0">
                           <a:solidFill>
                             <a:srgbClr val="000000"/>
                           </a:solidFill>
@@ -10424,7 +10424,7 @@
                     <a:lstStyle/>
                     <a:p>
                       <a:r>
-                        <a:rPr sz="1500" b="0">
+                        <a:rPr sz="1400" b="0">
                           <a:solidFill>
                             <a:srgbClr val="000000"/>
                           </a:solidFill>
@@ -10441,14 +10441,14 @@
                   </a:tcPr>
                 </a:tc>
               </a:tr>
-              <a:tr h="467360">
+              <a:tr h="406400">
                 <a:tc>
                   <a:txBody>
                     <a:bodyPr wrap="square"/>
                     <a:lstStyle/>
                     <a:p>
                       <a:r>
-                        <a:rPr sz="1500" b="0">
+                        <a:rPr sz="1400" b="0">
                           <a:solidFill>
                             <a:srgbClr val="000000"/>
                           </a:solidFill>
@@ -10470,7 +10470,7 @@
                     <a:lstStyle/>
                     <a:p>
                       <a:r>
-                        <a:rPr sz="1500" b="0">
+                        <a:rPr sz="1400" b="0">
                           <a:solidFill>
                             <a:srgbClr val="000000"/>
                           </a:solidFill>
@@ -10492,7 +10492,7 @@
                     <a:lstStyle/>
                     <a:p>
                       <a:r>
-                        <a:rPr sz="1500" b="0">
+                        <a:rPr sz="1400" b="0">
                           <a:solidFill>
                             <a:srgbClr val="000000"/>
                           </a:solidFill>
@@ -10509,14 +10509,14 @@
                   </a:tcPr>
                 </a:tc>
               </a:tr>
-              <a:tr h="467360">
+              <a:tr h="406400">
                 <a:tc>
                   <a:txBody>
                     <a:bodyPr wrap="square"/>
                     <a:lstStyle/>
                     <a:p>
                       <a:r>
-                        <a:rPr sz="1500" b="0">
+                        <a:rPr sz="1400" b="0">
                           <a:solidFill>
                             <a:srgbClr val="000000"/>
                           </a:solidFill>
@@ -10538,7 +10538,7 @@
                     <a:lstStyle/>
                     <a:p>
                       <a:r>
-                        <a:rPr sz="1500" b="0">
+                        <a:rPr sz="1400" b="0">
                           <a:solidFill>
                             <a:srgbClr val="000000"/>
                           </a:solidFill>
@@ -10560,7 +10560,7 @@
                     <a:lstStyle/>
                     <a:p>
                       <a:r>
-                        <a:rPr sz="1500" b="0">
+                        <a:rPr sz="1400" b="0">
                           <a:solidFill>
                             <a:srgbClr val="000000"/>
                           </a:solidFill>
@@ -10577,20 +10577,20 @@
                   </a:tcPr>
                 </a:tc>
               </a:tr>
-              <a:tr h="467360">
+              <a:tr h="406400">
                 <a:tc>
                   <a:txBody>
                     <a:bodyPr wrap="square"/>
                     <a:lstStyle/>
                     <a:p>
                       <a:r>
-                        <a:rPr sz="1500" b="0">
+                        <a:rPr sz="1400" b="0">
                           <a:solidFill>
                             <a:srgbClr val="000000"/>
                           </a:solidFill>
                           <a:latin typeface="Times New Roman"/>
                         </a:rPr>
-                        <a:t>Python 3</a:t>
+                        <a:t>Python 3 (in a venv, command below)</a:t>
                       </a:r>
                     </a:p>
                   </a:txBody>
@@ -10606,13 +10606,13 @@
                     <a:lstStyle/>
                     <a:p>
                       <a:r>
-                        <a:rPr sz="1500" b="0">
+                        <a:rPr sz="1400" b="0">
                           <a:solidFill>
                             <a:srgbClr val="000000"/>
                           </a:solidFill>
                           <a:latin typeface="Times New Roman"/>
                         </a:rPr>
-                        <a:t>3.11</a:t>
+                        <a:t>3.12</a:t>
                       </a:r>
                     </a:p>
                   </a:txBody>
@@ -10628,7 +10628,7 @@
                     <a:lstStyle/>
                     <a:p>
                       <a:r>
-                        <a:rPr sz="1500" b="0">
+                        <a:rPr sz="1400" b="0">
                           <a:solidFill>
                             <a:srgbClr val="000000"/>
                           </a:solidFill>
@@ -10645,20 +10645,20 @@
                   </a:tcPr>
                 </a:tc>
               </a:tr>
-              <a:tr h="467360">
+              <a:tr h="406400">
                 <a:tc>
                   <a:txBody>
                     <a:bodyPr wrap="square"/>
                     <a:lstStyle/>
                     <a:p>
                       <a:r>
-                        <a:rPr sz="1500" b="0">
+                        <a:rPr sz="1400" b="0">
                           <a:solidFill>
                             <a:srgbClr val="000000"/>
                           </a:solidFill>
                           <a:latin typeface="Times New Roman"/>
                         </a:rPr>
-                        <a:t>pip: pyfatfs pycryptodome cryptography kyber-py</a:t>
+                        <a:t>pip: pyfatfs pycryptodome cryptography kyber-py setuptools&lt;81</a:t>
                       </a:r>
                     </a:p>
                   </a:txBody>
@@ -10674,7 +10674,7 @@
                     <a:lstStyle/>
                     <a:p>
                       <a:r>
-                        <a:rPr sz="1500" b="0">
+                        <a:rPr sz="1400" b="0">
                           <a:solidFill>
                             <a:srgbClr val="000000"/>
                           </a:solidFill>
@@ -10696,7 +10696,7 @@
                     <a:lstStyle/>
                     <a:p>
                       <a:r>
-                        <a:rPr sz="1500" b="0">
+                        <a:rPr sz="1400" b="0">
                           <a:solidFill>
                             <a:srgbClr val="000000"/>
                           </a:solidFill>
@@ -10713,14 +10713,14 @@
                   </a:tcPr>
                 </a:tc>
               </a:tr>
-              <a:tr h="467360">
+              <a:tr h="406400">
                 <a:tc>
                   <a:txBody>
                     <a:bodyPr wrap="square"/>
                     <a:lstStyle/>
                     <a:p>
                       <a:r>
-                        <a:rPr sz="1500" b="0">
+                        <a:rPr sz="1400" b="0">
                           <a:solidFill>
                             <a:srgbClr val="000000"/>
                           </a:solidFill>
@@ -10742,7 +10742,7 @@
                     <a:lstStyle/>
                     <a:p>
                       <a:r>
-                        <a:rPr sz="1500" b="0">
+                        <a:rPr sz="1400" b="0">
                           <a:solidFill>
                             <a:srgbClr val="000000"/>
                           </a:solidFill>
@@ -10764,7 +10764,7 @@
                     <a:lstStyle/>
                     <a:p>
                       <a:r>
-                        <a:rPr sz="1500" b="0">
+                        <a:rPr sz="1400" b="0">
                           <a:solidFill>
                             <a:srgbClr val="000000"/>
                           </a:solidFill>
@@ -10787,14 +10787,101 @@
       </p:graphicFrame>
       <p:sp>
         <p:nvSpPr>
-          <p:cNvPr id="64" name="TextBox 63"/>
+          <p:cNvPr id="64" name="Rectangle 63"/>
+          <p:cNvSpPr/>
+          <p:nvPr/>
+        </p:nvSpPr>
+        <p:spPr>
+          <a:xfrm>
+            <a:off x="365760" y="4617720"/>
+            <a:ext cx="11430000" cy="805433"/>
+          </a:xfrm>
+          <a:prstGeom prst="rect">
+            <a:avLst/>
+          </a:prstGeom>
+          <a:solidFill>
+            <a:srgbClr val="F4F4F4"/>
+          </a:solidFill>
+          <a:ln>
+            <a:solidFill>
+              <a:srgbClr val="C8C8C8"/>
+            </a:solidFill>
+          </a:ln>
+          <a:effectLst/>
+        </p:spPr>
+        <p:style>
+          <a:lnRef idx="1">
+            <a:schemeClr val="accent1"/>
+          </a:lnRef>
+          <a:fillRef idx="3">
+            <a:schemeClr val="accent1"/>
+          </a:fillRef>
+          <a:effectRef idx="2">
+            <a:schemeClr val="accent1"/>
+          </a:effectRef>
+          <a:fontRef idx="minor">
+            <a:schemeClr val="lt1"/>
+          </a:fontRef>
+        </p:style>
+        <p:txBody>
+          <a:bodyPr rtlCol="0" anchor="t" wrap="none" lIns="73152" rIns="73152" tIns="73152" bIns="73152"/>
+          <a:lstStyle/>
+          <a:p>
+            <a:pPr algn="l"/>
+            <a:r>
+              <a:rPr sz="1300" b="1">
+                <a:solidFill>
+                  <a:srgbClr val="808080"/>
+                </a:solidFill>
+                <a:latin typeface="Consolas"/>
+              </a:rPr>
+              <a:t>Run this — once; plain pip install is refused on Ubuntu 24.04</a:t>
+            </a:r>
+          </a:p>
+          <a:p>
+            <a:pPr algn="l">
+              <a:lnSpc>
+                <a:spcPct val="100000"/>
+              </a:lnSpc>
+            </a:pPr>
+            <a:r>
+              <a:rPr sz="1300">
+                <a:solidFill>
+                  <a:srgbClr val="1F1F1F"/>
+                </a:solidFill>
+                <a:latin typeface="Consolas"/>
+              </a:rPr>
+              <a:t>python3 -m venv ~/edhoc-venv &amp;&amp; . ~/edhoc-venv/bin/activate</a:t>
+            </a:r>
+          </a:p>
+          <a:p>
+            <a:pPr algn="l">
+              <a:lnSpc>
+                <a:spcPct val="100000"/>
+              </a:lnSpc>
+            </a:pPr>
+            <a:r>
+              <a:rPr sz="1300">
+                <a:solidFill>
+                  <a:srgbClr val="1F1F1F"/>
+                </a:solidFill>
+                <a:latin typeface="Consolas"/>
+              </a:rPr>
+              <a:t>pip install pyfatfs pycryptodome cryptography kyber-py "setuptools&lt;81"</a:t>
+            </a:r>
+          </a:p>
+        </p:txBody>
+      </p:sp>
+      <p:sp>
+        <p:nvSpPr>
+          <p:cNvPr id="65" name="TextBox 64"/>
           <p:cNvSpPr txBox="1"/>
           <p:nvPr/>
         </p:nvSpPr>
         <p:spPr>
           <a:xfrm>
-            <a:off x="365760" y="5257800"/>
-            <a:ext cx="11430000" cy="1188720"/>
+            <a:off x="365760" y="5486400"/>
+            <a:ext cx="11430000" cy="1005840"/>
           </a:xfrm>
           <a:prstGeom prst="rect">
             <a:avLst/>
@@ -10814,7 +10901,7 @@
               <a:buChar char="•"/>
             </a:pPr>
             <a:r>
-              <a:rPr sz="1600" b="0">
+              <a:rPr sz="1400" b="0">
                 <a:solidFill>
                   <a:srgbClr val="000000"/>
                 </a:solidFill>
@@ -10823,7 +10910,7 @@
               <a:t>USB access without sudo: install Vivado's cable drivers (Digilent) and OpenOCD's </a:t>
             </a:r>
             <a:r>
-              <a:rPr sz="1600" b="0" i="1">
+              <a:rPr sz="1400" b="0" i="1">
                 <a:solidFill>
                   <a:srgbClr val="000000"/>
                 </a:solidFill>
@@ -10832,7 +10919,7 @@
               <a:t>60-openocd.rules</a:t>
             </a:r>
             <a:r>
-              <a:rPr sz="1600" b="0">
+              <a:rPr sz="1400" b="0">
                 <a:solidFill>
                   <a:srgbClr val="000000"/>
                 </a:solidFill>
@@ -10841,7 +10928,7 @@
               <a:t> (C232HM), and be in the </a:t>
             </a:r>
             <a:r>
-              <a:rPr sz="1600" b="0" i="1">
+              <a:rPr sz="1400" b="0" i="1">
                 <a:solidFill>
                   <a:srgbClr val="000000"/>
                 </a:solidFill>
@@ -10850,7 +10937,7 @@
               <a:t>dialout</a:t>
             </a:r>
             <a:r>
-              <a:rPr sz="1600" b="0">
+              <a:rPr sz="1400" b="0">
                 <a:solidFill>
                   <a:srgbClr val="000000"/>
                 </a:solidFill>
@@ -10859,7 +10946,7 @@
               <a:t> / </a:t>
             </a:r>
             <a:r>
-              <a:rPr sz="1600" b="0" i="1">
+              <a:rPr sz="1400" b="0" i="1">
                 <a:solidFill>
                   <a:srgbClr val="000000"/>
                 </a:solidFill>
@@ -10868,7 +10955,7 @@
               <a:t>plugdev</a:t>
             </a:r>
             <a:r>
-              <a:rPr sz="1600" b="0">
+              <a:rPr sz="1400" b="0">
                 <a:solidFill>
                   <a:srgbClr val="000000"/>
                 </a:solidFill>
@@ -10885,7 +10972,7 @@
               <a:buChar char="•"/>
             </a:pPr>
             <a:r>
-              <a:rPr sz="1600" b="0">
+              <a:rPr sz="1400" b="0">
                 <a:solidFill>
                   <a:srgbClr val="000000"/>
                 </a:solidFill>
@@ -11111,7 +11198,7 @@
                 </a:solidFill>
                 <a:latin typeface="Consolas"/>
               </a:rPr>
-              <a:t>git clone git@github.com:Khaiduy/chipyard-edhoc.git chipyard</a:t>
+              <a:t>git clone git@github.com:Khaiduy/chipyard-edhoc.git chipyard   # path without spaces</a:t>
             </a:r>
           </a:p>
           <a:p>
@@ -11303,7 +11390,7 @@
                           </a:solidFill>
                           <a:latin typeface="Times New Roman"/>
                         </a:rPr>
-                        <a:t>./build-setup.sh riscv-tools; source env.sh; ./scripts/init-fpga.sh; ./patches/apply.sh</a:t>
+                        <a:t>./build-setup.sh riscv-tools --skip-marshal --skip-firesim; source env.sh; ./patches/apply.sh (~30 min, ~20 GB + Vivado; then ~1 h per bitstream)</a:t>
                       </a:r>
                     </a:p>
                   </a:txBody>
@@ -11438,8 +11525,8 @@
         </p:nvSpPr>
         <p:spPr>
           <a:xfrm>
-            <a:off x="365760" y="4206240"/>
-            <a:ext cx="11430000" cy="2103120"/>
+            <a:off x="365760" y="4663440"/>
+            <a:ext cx="11430000" cy="1828800"/>
           </a:xfrm>
           <a:prstGeom prst="rect">
             <a:avLst/>
@@ -11459,7 +11546,7 @@
               <a:buChar char="•"/>
             </a:pPr>
             <a:r>
-              <a:rPr sz="1700" b="0">
+              <a:rPr sz="1600" b="0">
                 <a:solidFill>
                   <a:srgbClr val="000000"/>
                 </a:solidFill>
@@ -11468,7 +11555,7 @@
               <a:t>The repository is </a:t>
             </a:r>
             <a:r>
-              <a:rPr sz="1700" b="1">
+              <a:rPr sz="1600" b="1">
                 <a:solidFill>
                   <a:srgbClr val="000000"/>
                 </a:solidFill>
@@ -11477,7 +11564,7 @@
               <a:t>private</a:t>
             </a:r>
             <a:r>
-              <a:rPr sz="1700" b="0">
+              <a:rPr sz="1600" b="0">
                 <a:solidFill>
                   <a:srgbClr val="000000"/>
                 </a:solidFill>
@@ -11494,7 +11581,7 @@
               <a:buChar char="•"/>
             </a:pPr>
             <a:r>
-              <a:rPr sz="1700" b="0">
+              <a:rPr sz="1600" b="0">
                 <a:solidFill>
                   <a:srgbClr val="000000"/>
                 </a:solidFill>
@@ -11503,7 +11590,7 @@
               <a:t>No prebuilt bitstream ships with the course: route B needs a bitstream built from the </a:t>
             </a:r>
             <a:r>
-              <a:rPr sz="1700" b="1">
+              <a:rPr sz="1600" b="1">
                 <a:solidFill>
                   <a:srgbClr val="000000"/>
                 </a:solidFill>
@@ -11512,7 +11599,7 @@
               <a:t>same revision</a:t>
             </a:r>
             <a:r>
-              <a:rPr sz="1700" b="0">
+              <a:rPr sz="1600" b="0">
                 <a:solidFill>
                   <a:srgbClr val="000000"/>
                 </a:solidFill>
@@ -11521,7 +11608,7 @@
               <a:t> (route A), e.g. by your lab, written to the boards' flash or kept as a </a:t>
             </a:r>
             <a:r>
-              <a:rPr sz="1700" b="0" i="1">
+              <a:rPr sz="1600" b="0" i="1">
                 <a:solidFill>
                   <a:srgbClr val="000000"/>
                 </a:solidFill>
@@ -11530,7 +11617,7 @@
               <a:t>.bit</a:t>
             </a:r>
             <a:r>
-              <a:rPr sz="1700" b="0">
+              <a:rPr sz="1600" b="0">
                 <a:solidFill>
                   <a:srgbClr val="000000"/>
                 </a:solidFill>
@@ -11547,7 +11634,7 @@
               <a:buChar char="•"/>
             </a:pPr>
             <a:r>
-              <a:rPr sz="1700" b="0">
+              <a:rPr sz="1600" b="0">
                 <a:solidFill>
                   <a:srgbClr val="000000"/>
                 </a:solidFill>
@@ -11556,7 +11643,7 @@
               <a:t>The firmware tree </a:t>
             </a:r>
             <a:r>
-              <a:rPr sz="1700" b="0" i="1">
+              <a:rPr sz="1600" b="0" i="1">
                 <a:solidFill>
                   <a:srgbClr val="000000"/>
                 </a:solidFill>
@@ -11565,7 +11652,7 @@
               <a:t>fpga/sw/export/</a:t>
             </a:r>
             <a:r>
-              <a:rPr sz="1700" b="0">
+              <a:rPr sz="1600" b="0">
                 <a:solidFill>
                   <a:srgbClr val="000000"/>
                 </a:solidFill>
@@ -12035,6 +12122,32 @@
                 <a:latin typeface="Times New Roman"/>
               </a:rPr>
               <a:t> C232HM lines.</a:t>
+            </a:r>
+          </a:p>
+          <a:p>
+            <a:pPr marL="256032" indent="-219456">
+              <a:spcAft>
+                <a:spcPts val="400"/>
+              </a:spcAft>
+              <a:buChar char="•"/>
+            </a:pPr>
+            <a:r>
+              <a:rPr sz="1600" b="0" i="1">
+                <a:solidFill>
+                  <a:srgbClr val="000000"/>
+                </a:solidFill>
+                <a:latin typeface="Times New Roman"/>
+              </a:rPr>
+              <a:t>common/board/boards.env</a:t>
+            </a:r>
+            <a:r>
+              <a:rPr sz="1600" b="0">
+                <a:solidFill>
+                  <a:srgbClr val="000000"/>
+                </a:solidFill>
+                <a:latin typeface="Times New Roman"/>
+              </a:rPr>
+              <a:t> ships with our serials: put your four in (Lesson 2, section 2).</a:t>
             </a:r>
           </a:p>
         </p:txBody>
@@ -36081,7 +36194,7 @@
                 </a:solidFill>
                 <a:latin typeface="Times New Roman"/>
               </a:rPr>
-              <a:t>; Lesson 2 shows how to fill it in with your serials.</a:t>
+              <a:t>. It ships with our serials: put yours in first (Lesson 2, section 2, (1/3)–(2/3)).</a:t>
             </a:r>
           </a:p>
           <a:p>

--- a/fpga/sw/export/docs/slides/01_EDHOC_SoC_on_Arty_A7-100T.pptx
+++ b/fpga/sw/export/docs/slides/01_EDHOC_SoC_on_Arty_A7-100T.pptx
@@ -31939,7 +31939,7 @@
               <a:buChar char="•"/>
             </a:pPr>
             <a:r>
-              <a:rPr sz="1800" b="0">
+              <a:rPr sz="1600" b="0">
                 <a:solidFill>
                   <a:srgbClr val="000000"/>
                 </a:solidFill>
@@ -31948,7 +31948,7 @@
               <a:t>Output folder: </a:t>
             </a:r>
             <a:r>
-              <a:rPr sz="1800" b="0" i="1">
+              <a:rPr sz="1600" b="0" i="1">
                 <a:solidFill>
                   <a:srgbClr val="000000"/>
                 </a:solidFill>
@@ -31965,7 +31965,7 @@
               <a:buChar char="–"/>
             </a:pPr>
             <a:r>
-              <a:rPr sz="1600" b="0" i="1">
+              <a:rPr sz="1400" b="0" i="1">
                 <a:solidFill>
                   <a:srgbClr val="000000"/>
                 </a:solidFill>
@@ -31974,7 +31974,7 @@
               <a:t>Arty100TWithoutDDRHarness.bit</a:t>
             </a:r>
             <a:r>
-              <a:rPr sz="1600" b="0">
+              <a:rPr sz="1400" b="0">
                 <a:solidFill>
                   <a:srgbClr val="000000"/>
                 </a:solidFill>
@@ -31991,7 +31991,7 @@
               <a:buChar char="–"/>
             </a:pPr>
             <a:r>
-              <a:rPr sz="1600" b="0" i="1">
+              <a:rPr sz="1400" b="0" i="1">
                 <a:solidFill>
                   <a:srgbClr val="000000"/>
                 </a:solidFill>
@@ -32000,7 +32000,7 @@
               <a:t>report/timing.txt</a:t>
             </a:r>
             <a:r>
-              <a:rPr sz="1600" b="0">
+              <a:rPr sz="1400" b="0">
                 <a:solidFill>
                   <a:srgbClr val="000000"/>
                 </a:solidFill>
@@ -32009,7 +32009,7 @@
               <a:t>, </a:t>
             </a:r>
             <a:r>
-              <a:rPr sz="1600" b="0" i="1">
+              <a:rPr sz="1400" b="0" i="1">
                 <a:solidFill>
                   <a:srgbClr val="000000"/>
                 </a:solidFill>
@@ -32018,7 +32018,7 @@
               <a:t>report/utilization.txt</a:t>
             </a:r>
             <a:r>
-              <a:rPr sz="1600" b="0">
+              <a:rPr sz="1400" b="0">
                 <a:solidFill>
                   <a:srgbClr val="000000"/>
                 </a:solidFill>
@@ -32035,7 +32035,7 @@
               <a:buChar char="–"/>
             </a:pPr>
             <a:r>
-              <a:rPr sz="1600" b="0" i="1">
+              <a:rPr sz="1400" b="0" i="1">
                 <a:solidFill>
                   <a:srgbClr val="000000"/>
                 </a:solidFill>
@@ -32044,7 +32044,7 @@
               <a:t>post_opt.dcp</a:t>
             </a:r>
             <a:r>
-              <a:rPr sz="1600" b="0">
+              <a:rPr sz="1400" b="0">
                 <a:solidFill>
                   <a:srgbClr val="000000"/>
                 </a:solidFill>
@@ -32053,7 +32053,7 @@
               <a:t>, </a:t>
             </a:r>
             <a:r>
-              <a:rPr sz="1600" b="0" i="1">
+              <a:rPr sz="1400" b="0" i="1">
                 <a:solidFill>
                   <a:srgbClr val="000000"/>
                 </a:solidFill>
@@ -32062,7 +32062,7 @@
               <a:t>post_route.dcp</a:t>
             </a:r>
             <a:r>
-              <a:rPr sz="1600" b="0">
+              <a:rPr sz="1400" b="0">
                 <a:solidFill>
                   <a:srgbClr val="000000"/>
                 </a:solidFill>
@@ -32079,7 +32079,7 @@
               <a:buChar char="•"/>
             </a:pPr>
             <a:r>
-              <a:rPr sz="1800" b="1">
+              <a:rPr sz="1600" b="1">
                 <a:solidFill>
                   <a:srgbClr val="000000"/>
                 </a:solidFill>
@@ -32088,7 +32088,7 @@
               <a:t>Careful:</a:t>
             </a:r>
             <a:r>
-              <a:rPr sz="1800" b="0">
+              <a:rPr sz="1600" b="0">
                 <a:solidFill>
                   <a:srgbClr val="000000"/>
                 </a:solidFill>
@@ -32097,7 +32097,7 @@
               <a:t> exit status 0 does not mean timing was met, and a failed flow may still leave a </a:t>
             </a:r>
             <a:r>
-              <a:rPr sz="1800" b="0" i="1">
+              <a:rPr sz="1600" b="0" i="1">
                 <a:solidFill>
                   <a:srgbClr val="000000"/>
                 </a:solidFill>
@@ -32106,7 +32106,7 @@
               <a:t>.bit</a:t>
             </a:r>
             <a:r>
-              <a:rPr sz="1800" b="0">
+              <a:rPr sz="1600" b="0">
                 <a:solidFill>
                   <a:srgbClr val="000000"/>
                 </a:solidFill>
@@ -32115,7 +32115,7 @@
               <a:t>. Timing is decided only by </a:t>
             </a:r>
             <a:r>
-              <a:rPr sz="1800" b="0" i="1">
+              <a:rPr sz="1600" b="0" i="1">
                 <a:solidFill>
                   <a:srgbClr val="000000"/>
                 </a:solidFill>
@@ -32124,13 +32124,48 @@
               <a:t>report/timing.txt</a:t>
             </a:r>
             <a:r>
-              <a:rPr sz="1800" b="0">
+              <a:rPr sz="1600" b="0">
                 <a:solidFill>
                   <a:srgbClr val="000000"/>
                 </a:solidFill>
                 <a:latin typeface="Times New Roman"/>
               </a:rPr>
               <a:t>: read it before using a new bitstream.</a:t>
+            </a:r>
+          </a:p>
+          <a:p>
+            <a:pPr marL="256032" indent="-219456">
+              <a:spcAft>
+                <a:spcPts val="400"/>
+              </a:spcAft>
+              <a:buChar char="•"/>
+            </a:pPr>
+            <a:r>
+              <a:rPr sz="1600" b="0">
+                <a:solidFill>
+                  <a:srgbClr val="000000"/>
+                </a:solidFill>
+                <a:latin typeface="Times New Roman"/>
+              </a:rPr>
+              <a:t>Lines like </a:t>
+            </a:r>
+            <a:r>
+              <a:rPr sz="1400" b="0">
+                <a:solidFill>
+                  <a:srgbClr val="8B1A1A"/>
+                </a:solidFill>
+                <a:latin typeface="Consolas"/>
+              </a:rPr>
+              <a:t>make: [...] Error 1 (ignored)</a:t>
+            </a:r>
+            <a:r>
+              <a:rPr sz="1600" b="0">
+                <a:solidFill>
+                  <a:srgbClr val="000000"/>
+                </a:solidFill>
+                <a:latin typeface="Times New Roman"/>
+              </a:rPr>
+              <a:t> are normal: a Chipyard copy step that has no files to copy in the FPGA flow.</a:t>
             </a:r>
           </a:p>
         </p:txBody>

--- a/fpga/sw/export/docs/slides/01_EDHOC_SoC_on_Arty_A7-100T.pptx
+++ b/fpga/sw/export/docs/slides/01_EDHOC_SoC_on_Arty_A7-100T.pptx
@@ -61,6 +61,9 @@
     <p:sldId id="918" r:id="rId65"/>
     <p:sldId id="919" r:id="rId66"/>
     <p:sldId id="920" r:id="rId67"/>
+    <p:sldId id="921" r:id="rId68"/>
+    <p:sldId id="922" r:id="rId69"/>
+    <p:sldId id="923" r:id="rId70"/>
   </p:sldIdLst>
   <p:sldSz cx="12192000" cy="6858000"/>
   <p:notesSz cx="7559675" cy="10691813"/>
@@ -7864,7 +7867,7 @@
                 <a:latin typeface="Times New Roman" panose="02020603050405020304" pitchFamily="18" charset="0"/>
                 <a:cs typeface="Times New Roman" panose="02020603050405020304" pitchFamily="18" charset="0"/>
               </a:rPr>
-              <a:t>(1/8) The learning path</a:t>
+              <a:t>(1/11) The learning path</a:t>
             </a:r>
           </a:p>
         </p:txBody>
@@ -9112,7 +9115,7 @@
                 <a:latin typeface="Times New Roman" panose="02020603050405020304" pitchFamily="18" charset="0"/>
                 <a:cs typeface="Times New Roman" panose="02020603050405020304" pitchFamily="18" charset="0"/>
               </a:rPr>
-              <a:t>(2/8) Equipment</a:t>
+              <a:t>(2/11) Equipment</a:t>
             </a:r>
           </a:p>
         </p:txBody>
@@ -9871,7 +9874,7 @@
                 <a:latin typeface="Times New Roman" panose="02020603050405020304" pitchFamily="18" charset="0"/>
                 <a:cs typeface="Times New Roman" panose="02020603050405020304" pitchFamily="18" charset="0"/>
               </a:rPr>
-              <a:t>(3/8) How everything is connected</a:t>
+              <a:t>(3/11) How everything is connected</a:t>
             </a:r>
           </a:p>
         </p:txBody>
@@ -10083,7 +10086,7 @@
                 <a:latin typeface="Times New Roman" panose="02020603050405020304" pitchFamily="18" charset="0"/>
                 <a:cs typeface="Times New Roman" panose="02020603050405020304" pitchFamily="18" charset="0"/>
               </a:rPr>
-              <a:t>(4/8) Software</a:t>
+              <a:t>(4/11) Software</a:t>
             </a:r>
           </a:p>
         </p:txBody>
@@ -10386,7 +10389,7 @@
                           </a:solidFill>
                           <a:latin typeface="Times New Roman"/>
                         </a:rPr>
-                        <a:t>Chipyard and its conda environment</a:t>
+                        <a:t>Java 17, dtc, jq, firtool (no conda)</a:t>
                       </a:r>
                     </a:p>
                   </a:txBody>
@@ -10408,7 +10411,7 @@
                           </a:solidFill>
                           <a:latin typeface="Times New Roman"/>
                         </a:rPr>
-                        <a:t>1.11.0 + this fork</a:t>
+                        <a:t>17 / 1.61.0</a:t>
                       </a:r>
                     </a:p>
                   </a:txBody>
@@ -10430,7 +10433,7 @@
                           </a:solidFill>
                           <a:latin typeface="Times New Roman"/>
                         </a:rPr>
-                        <a:t>route A only</a:t>
+                        <a:t>route A only: Chipyard build</a:t>
                       </a:r>
                     </a:p>
                   </a:txBody>
@@ -11069,7 +11072,7 @@
                 <a:latin typeface="Times New Roman" panose="02020603050405020304" pitchFamily="18" charset="0"/>
                 <a:cs typeface="Times New Roman" panose="02020603050405020304" pitchFamily="18" charset="0"/>
               </a:rPr>
-              <a:t>(5/8) Get the code — two routes</a:t>
+              <a:t>(5/11) Get the code — two routes</a:t>
             </a:r>
           </a:p>
         </p:txBody>
@@ -11390,7 +11393,7 @@
                           </a:solidFill>
                           <a:latin typeface="Times New Roman"/>
                         </a:rPr>
-                        <a:t>./build-setup.sh riscv-tools --skip-marshal --skip-firesim; source env.sh; ./patches/apply.sh (~30 min, ~20 GB + Vivado; then ~1 h per bitstream)</a:t>
+                        <a:t>Vivado (6/11), tools (7/11), Chipyard sources and firtool (8/11)</a:t>
                       </a:r>
                     </a:p>
                   </a:txBody>
@@ -11480,7 +11483,7 @@
                           </a:solidFill>
                           <a:latin typeface="Times New Roman"/>
                         </a:rPr>
-                        <a:t>cd fpga/sw/export; toolchain + OpenOCD (Lesson 2, section 1)</a:t>
+                        <a:t>Vivado or Vivado Lab (6/11), tools (7/11)</a:t>
                       </a:r>
                     </a:p>
                   </a:txBody>
@@ -11749,7 +11752,7 @@
                 <a:latin typeface="Times New Roman" panose="02020603050405020304" pitchFamily="18" charset="0"/>
                 <a:cs typeface="Times New Roman" panose="02020603050405020304" pitchFamily="18" charset="0"/>
               </a:rPr>
-              <a:t>(6/8) Readiness check</a:t>
+              <a:t>(6/11) Install Vivado 2024.2</a:t>
             </a:r>
           </a:p>
         </p:txBody>
@@ -11805,6 +11808,1534 @@
                 <a:ea typeface="DejaVu Sans"/>
               </a:rPr>
               <a:t>10</a:t>
+            </a:fld>
+            <a:endParaRPr lang="en-US" sz="1600" b="0" strike="noStrike" spc="-1">
+              <a:latin typeface="Arial"/>
+            </a:endParaRPr>
+          </a:p>
+        </p:txBody>
+      </p:sp>
+      <p:sp>
+        <p:nvSpPr>
+          <p:cNvPr id="63" name="Rectangle 62"/>
+          <p:cNvSpPr/>
+          <p:nvPr/>
+        </p:nvSpPr>
+        <p:spPr>
+          <a:xfrm>
+            <a:off x="365760" y="868680"/>
+            <a:ext cx="11430000" cy="2153412"/>
+          </a:xfrm>
+          <a:prstGeom prst="rect">
+            <a:avLst/>
+          </a:prstGeom>
+          <a:solidFill>
+            <a:srgbClr val="F4F4F4"/>
+          </a:solidFill>
+          <a:ln>
+            <a:solidFill>
+              <a:srgbClr val="C8C8C8"/>
+            </a:solidFill>
+          </a:ln>
+          <a:effectLst/>
+        </p:spPr>
+        <p:style>
+          <a:lnRef idx="1">
+            <a:schemeClr val="accent1"/>
+          </a:lnRef>
+          <a:fillRef idx="3">
+            <a:schemeClr val="accent1"/>
+          </a:fillRef>
+          <a:effectRef idx="2">
+            <a:schemeClr val="accent1"/>
+          </a:effectRef>
+          <a:fontRef idx="minor">
+            <a:schemeClr val="lt1"/>
+          </a:fontRef>
+        </p:style>
+        <p:txBody>
+          <a:bodyPr rtlCol="0" anchor="t" wrap="none" lIns="73152" rIns="73152" tIns="73152" bIns="73152"/>
+          <a:lstStyle/>
+          <a:p>
+            <a:pPr algn="l"/>
+            <a:r>
+              <a:rPr sz="1400" b="1">
+                <a:solidFill>
+                  <a:srgbClr val="808080"/>
+                </a:solidFill>
+                <a:latin typeface="Consolas"/>
+              </a:rPr>
+              <a:t>Run this — once, after downloading the installer</a:t>
+            </a:r>
+          </a:p>
+          <a:p>
+            <a:pPr algn="l">
+              <a:lnSpc>
+                <a:spcPct val="100000"/>
+              </a:lnSpc>
+            </a:pPr>
+            <a:r>
+              <a:rPr sz="1400">
+                <a:solidFill>
+                  <a:srgbClr val="1F1F1F"/>
+                </a:solidFill>
+                <a:latin typeface="Consolas"/>
+              </a:rPr>
+              <a:t>chmod +x FPGAs_AdaptiveSoCs_Unified_2024.2_1113_1001_Lin64.bin</a:t>
+            </a:r>
+          </a:p>
+          <a:p>
+            <a:pPr algn="l">
+              <a:lnSpc>
+                <a:spcPct val="100000"/>
+              </a:lnSpc>
+            </a:pPr>
+            <a:r>
+              <a:rPr sz="1400">
+                <a:solidFill>
+                  <a:srgbClr val="1F1F1F"/>
+                </a:solidFill>
+                <a:latin typeface="Consolas"/>
+              </a:rPr>
+              <a:t>./FPGAs_AdaptiveSoCs_Unified_2024.2_1113_1001_Lin64.bin   # installer window opens</a:t>
+            </a:r>
+          </a:p>
+          <a:p>
+            <a:pPr algn="l">
+              <a:lnSpc>
+                <a:spcPct val="100000"/>
+              </a:lnSpc>
+            </a:pPr>
+            <a:r>
+              <a:rPr sz="1400">
+                <a:solidFill>
+                  <a:srgbClr val="2E7D32"/>
+                </a:solidFill>
+                <a:latin typeface="Consolas"/>
+              </a:rPr>
+              <a:t>#   Product: Vivado   Edition: Vivado ML Standard   Devices: 7 Series only</a:t>
+            </a:r>
+          </a:p>
+          <a:p>
+            <a:pPr algn="l">
+              <a:lnSpc>
+                <a:spcPct val="100000"/>
+              </a:lnSpc>
+            </a:pPr>
+            <a:r>
+              <a:rPr sz="1400">
+                <a:solidFill>
+                  <a:srgbClr val="2E7D32"/>
+                </a:solidFill>
+                <a:latin typeface="Consolas"/>
+              </a:rPr>
+              <a:t>#   Install directory: $HOME/Xilinx (no spaces)</a:t>
+            </a:r>
+          </a:p>
+          <a:p>
+            <a:pPr algn="l">
+              <a:lnSpc>
+                <a:spcPct val="100000"/>
+              </a:lnSpc>
+            </a:pPr>
+            <a:r>
+              <a:rPr sz="1400">
+                <a:solidFill>
+                  <a:srgbClr val="1F1F1F"/>
+                </a:solidFill>
+                <a:latin typeface="Consolas"/>
+              </a:rPr>
+              <a:t>cd $HOME/Xilinx/Vivado/2024.2/data/xicom/cable_drivers/lin64/install_script/install_drivers</a:t>
+            </a:r>
+          </a:p>
+          <a:p>
+            <a:pPr algn="l">
+              <a:lnSpc>
+                <a:spcPct val="100000"/>
+              </a:lnSpc>
+            </a:pPr>
+            <a:r>
+              <a:rPr sz="1400">
+                <a:solidFill>
+                  <a:srgbClr val="1F1F1F"/>
+                </a:solidFill>
+                <a:latin typeface="Consolas"/>
+              </a:rPr>
+              <a:t>sudo ./install_drivers                 # USB drivers for the Arty's programming port</a:t>
+            </a:r>
+          </a:p>
+          <a:p>
+            <a:pPr algn="l">
+              <a:lnSpc>
+                <a:spcPct val="100000"/>
+              </a:lnSpc>
+            </a:pPr>
+            <a:r>
+              <a:rPr sz="1400">
+                <a:solidFill>
+                  <a:srgbClr val="1F1F1F"/>
+                </a:solidFill>
+                <a:latin typeface="Consolas"/>
+              </a:rPr>
+              <a:t>source $HOME/Xilinx/Vivado/2024.2/settings64.sh</a:t>
+            </a:r>
+          </a:p>
+          <a:p>
+            <a:pPr algn="l">
+              <a:lnSpc>
+                <a:spcPct val="100000"/>
+              </a:lnSpc>
+            </a:pPr>
+            <a:r>
+              <a:rPr sz="1400">
+                <a:solidFill>
+                  <a:srgbClr val="1F1F1F"/>
+                </a:solidFill>
+                <a:latin typeface="Consolas"/>
+              </a:rPr>
+              <a:t>vivado -version | head -1              # Vivado v2024.2 (64-bit)</a:t>
+            </a:r>
+          </a:p>
+        </p:txBody>
+      </p:sp>
+      <p:sp>
+        <p:nvSpPr>
+          <p:cNvPr id="64" name="TextBox 63"/>
+          <p:cNvSpPr txBox="1"/>
+          <p:nvPr/>
+        </p:nvSpPr>
+        <p:spPr>
+          <a:xfrm>
+            <a:off x="365760" y="3296412"/>
+            <a:ext cx="11430000" cy="2651760"/>
+          </a:xfrm>
+          <a:prstGeom prst="rect">
+            <a:avLst/>
+          </a:prstGeom>
+          <a:noFill/>
+        </p:spPr>
+        <p:txBody>
+          <a:bodyPr wrap="square" anchor="t">
+            <a:spAutoFit/>
+          </a:bodyPr>
+          <a:lstStyle/>
+          <a:p>
+            <a:pPr marL="256032" indent="-219456">
+              <a:spcAft>
+                <a:spcPts val="400"/>
+              </a:spcAft>
+              <a:buChar char="•"/>
+            </a:pPr>
+            <a:r>
+              <a:rPr sz="1600" b="0">
+                <a:solidFill>
+                  <a:srgbClr val="000000"/>
+                </a:solidFill>
+                <a:latin typeface="Times New Roman"/>
+              </a:rPr>
+              <a:t>Download “AMD Unified Installer for FPGAs &amp; Adaptive SoCs 2024.2: Linux Self Extracting Web Installer” from AMD’s Vivado download page (free AMD account).</a:t>
+            </a:r>
+          </a:p>
+          <a:p>
+            <a:pPr marL="256032" indent="-219456">
+              <a:spcAft>
+                <a:spcPts val="400"/>
+              </a:spcAft>
+              <a:buChar char="•"/>
+            </a:pPr>
+            <a:r>
+              <a:rPr sz="1600" b="0">
+                <a:solidFill>
+                  <a:srgbClr val="000000"/>
+                </a:solidFill>
+                <a:latin typeface="Times New Roman"/>
+              </a:rPr>
+              <a:t>Vivado ML Standard is free and covers the XC7A100T. Selecting only 7 Series keeps the download small.</a:t>
+            </a:r>
+          </a:p>
+          <a:p>
+            <a:pPr marL="256032" indent="-219456">
+              <a:spcAft>
+                <a:spcPts val="400"/>
+              </a:spcAft>
+              <a:buChar char="•"/>
+            </a:pPr>
+            <a:r>
+              <a:rPr sz="1600" b="0">
+                <a:solidFill>
+                  <a:srgbClr val="000000"/>
+                </a:solidFill>
+                <a:latin typeface="Times New Roman"/>
+              </a:rPr>
+              <a:t>Unplug and replug the boards after </a:t>
+            </a:r>
+            <a:r>
+              <a:rPr sz="1600" b="0" i="1">
+                <a:solidFill>
+                  <a:srgbClr val="000000"/>
+                </a:solidFill>
+                <a:latin typeface="Times New Roman"/>
+              </a:rPr>
+              <a:t>install_drivers</a:t>
+            </a:r>
+            <a:r>
+              <a:rPr sz="1600" b="0">
+                <a:solidFill>
+                  <a:srgbClr val="000000"/>
+                </a:solidFill>
+                <a:latin typeface="Times New Roman"/>
+              </a:rPr>
+              <a:t>.</a:t>
+            </a:r>
+          </a:p>
+          <a:p>
+            <a:pPr marL="256032" indent="-219456">
+              <a:spcAft>
+                <a:spcPts val="400"/>
+              </a:spcAft>
+              <a:buChar char="•"/>
+            </a:pPr>
+            <a:r>
+              <a:rPr sz="1600" b="0">
+                <a:solidFill>
+                  <a:srgbClr val="000000"/>
+                </a:solidFill>
+                <a:latin typeface="Times New Roman"/>
+              </a:rPr>
+              <a:t>Route B only programs the boards: Vivado Lab Edition should be enough (not tested).</a:t>
+            </a:r>
+          </a:p>
+        </p:txBody>
+      </p:sp>
+    </p:spTree>
+  </p:cSld>
+  <p:clrMapOvr>
+    <a:masterClrMapping/>
+  </p:clrMapOvr>
+</p:sld>
+</file>
+
+<file path=ppt/slides/slide17.xml><?xml version="1.0" encoding="utf-8"?>
+<p:sld xmlns:a="http://schemas.openxmlformats.org/drawingml/2006/main" xmlns:p="http://schemas.openxmlformats.org/presentationml/2006/main" xmlns:r="http://schemas.openxmlformats.org/officeDocument/2006/relationships">
+  <p:cSld>
+    <p:spTree>
+      <p:nvGrpSpPr>
+        <p:cNvPr id="1" name=""/>
+        <p:cNvGrpSpPr/>
+        <p:nvPr/>
+      </p:nvGrpSpPr>
+      <p:grpSpPr/>
+      <p:sp>
+        <p:nvSpPr>
+          <p:cNvPr id="10" name="CustomShape 6">
+            <a:extLst>
+              <a:ext uri="{FF2B5EF4-FFF2-40B4-BE49-F238E27FC236}">
+                <a16:creationId xmlns:a16="http://schemas.microsoft.com/office/drawing/2014/main" id="{CB76DC60-C0C9-436D-8956-EE4CA394869E}"/>
+              </a:ext>
+            </a:extLst>
+          </p:cNvPr>
+          <p:cNvSpPr/>
+          <p:nvPr/>
+        </p:nvSpPr>
+        <p:spPr>
+          <a:xfrm>
+            <a:off x="-6000" y="0"/>
+            <a:ext cx="12198000" cy="644877"/>
+          </a:xfrm>
+          <a:prstGeom prst="rect">
+            <a:avLst/>
+          </a:prstGeom>
+          <a:solidFill>
+            <a:schemeClr val="accent6">
+              <a:lumMod val="40000"/>
+              <a:lumOff val="60000"/>
+            </a:schemeClr>
+          </a:solidFill>
+          <a:ln>
+            <a:noFill/>
+          </a:ln>
+        </p:spPr>
+        <p:style>
+          <a:lnRef idx="0">
+            <a:scrgbClr r="0" g="0" b="0"/>
+          </a:lnRef>
+          <a:fillRef idx="0">
+            <a:scrgbClr r="0" g="0" b="0"/>
+          </a:fillRef>
+          <a:effectRef idx="0">
+            <a:scrgbClr r="0" g="0" b="0"/>
+          </a:effectRef>
+          <a:fontRef idx="minor"/>
+        </p:style>
+        <p:txBody>
+          <a:bodyPr wrap="square" lIns="90000" tIns="45000" rIns="90000" bIns="45000">
+            <a:spAutoFit/>
+          </a:bodyPr>
+          <a:lstStyle/>
+          <a:p>
+            <a:pPr marL="360" algn="ctr">
+              <a:lnSpc>
+                <a:spcPct val="100000"/>
+              </a:lnSpc>
+              <a:buClr>
+                <a:srgbClr val="000000"/>
+              </a:buClr>
+            </a:pPr>
+            <a:r>
+              <a:rPr lang="en-US" sz="2700" b="1" spc="-1" dirty="0">
+                <a:latin typeface="Times New Roman" panose="02020603050405020304" pitchFamily="18" charset="0"/>
+                <a:cs typeface="Times New Roman" panose="02020603050405020304" pitchFamily="18" charset="0"/>
+              </a:rPr>
+              <a:t>1. Start Here </a:t>
+            </a:r>
+            <a:r>
+              <a:rPr lang="en-US" sz="2700" spc="-1" dirty="0">
+                <a:latin typeface="Times New Roman" panose="02020603050405020304" pitchFamily="18" charset="0"/>
+                <a:cs typeface="Times New Roman" panose="02020603050405020304" pitchFamily="18" charset="0"/>
+              </a:rPr>
+              <a:t>(7/11) Tools for both routes: packages and RISC-V GCC</a:t>
+            </a:r>
+          </a:p>
+        </p:txBody>
+      </p:sp>
+      <p:sp>
+        <p:nvSpPr>
+          <p:cNvPr id="62" name="CustomShape 2"/>
+          <p:cNvSpPr/>
+          <p:nvPr/>
+        </p:nvSpPr>
+        <p:spPr>
+          <a:xfrm>
+            <a:off x="11291400" y="6492960"/>
+            <a:ext cx="894600" cy="358920"/>
+          </a:xfrm>
+          <a:prstGeom prst="rect">
+            <a:avLst/>
+          </a:prstGeom>
+          <a:noFill/>
+          <a:ln>
+            <a:noFill/>
+          </a:ln>
+        </p:spPr>
+        <p:style>
+          <a:lnRef idx="0">
+            <a:scrgbClr r="0" g="0" b="0"/>
+          </a:lnRef>
+          <a:fillRef idx="0">
+            <a:scrgbClr r="0" g="0" b="0"/>
+          </a:fillRef>
+          <a:effectRef idx="0">
+            <a:scrgbClr r="0" g="0" b="0"/>
+          </a:effectRef>
+          <a:fontRef idx="minor"/>
+        </p:style>
+        <p:txBody>
+          <a:bodyPr lIns="90000" tIns="45000" rIns="90000" bIns="45000" anchor="ctr">
+            <a:noAutofit/>
+          </a:bodyPr>
+          <a:lstStyle/>
+          <a:p>
+            <a:pPr algn="ctr">
+              <a:lnSpc>
+                <a:spcPct val="100000"/>
+              </a:lnSpc>
+            </a:pPr>
+            <a:fld id="{32452110-F6D1-439F-92C4-7A3912DA20B0}" type="slidenum">
+              <a:rPr lang="en-US" sz="1600" b="1" strike="noStrike" spc="-1">
+                <a:solidFill>
+                  <a:srgbClr val="000000"/>
+                </a:solidFill>
+                <a:latin typeface="Times New Roman"/>
+                <a:ea typeface="DejaVu Sans"/>
+              </a:rPr>
+              <a:t>11</a:t>
+            </a:fld>
+            <a:endParaRPr lang="en-US" sz="1600" b="0" strike="noStrike" spc="-1">
+              <a:latin typeface="Arial"/>
+            </a:endParaRPr>
+          </a:p>
+        </p:txBody>
+      </p:sp>
+      <p:sp>
+        <p:nvSpPr>
+          <p:cNvPr id="63" name="Rectangle 62"/>
+          <p:cNvSpPr/>
+          <p:nvPr/>
+        </p:nvSpPr>
+        <p:spPr>
+          <a:xfrm>
+            <a:off x="365760" y="868680"/>
+            <a:ext cx="11430000" cy="2416810"/>
+          </a:xfrm>
+          <a:prstGeom prst="rect">
+            <a:avLst/>
+          </a:prstGeom>
+          <a:solidFill>
+            <a:srgbClr val="F4F4F4"/>
+          </a:solidFill>
+          <a:ln>
+            <a:solidFill>
+              <a:srgbClr val="C8C8C8"/>
+            </a:solidFill>
+          </a:ln>
+          <a:effectLst/>
+        </p:spPr>
+        <p:style>
+          <a:lnRef idx="1">
+            <a:schemeClr val="accent1"/>
+          </a:lnRef>
+          <a:fillRef idx="3">
+            <a:schemeClr val="accent1"/>
+          </a:fillRef>
+          <a:effectRef idx="2">
+            <a:schemeClr val="accent1"/>
+          </a:effectRef>
+          <a:fontRef idx="minor">
+            <a:schemeClr val="lt1"/>
+          </a:fontRef>
+        </p:style>
+        <p:txBody>
+          <a:bodyPr rtlCol="0" anchor="t" wrap="none" lIns="73152" rIns="73152" tIns="73152" bIns="73152"/>
+          <a:lstStyle/>
+          <a:p>
+            <a:pPr algn="l"/>
+            <a:r>
+              <a:rPr sz="1300" b="1">
+                <a:solidFill>
+                  <a:srgbClr val="808080"/>
+                </a:solidFill>
+                <a:latin typeface="Consolas"/>
+              </a:rPr>
+              <a:t>Run this — outside the chipyard folder</a:t>
+            </a:r>
+          </a:p>
+          <a:p>
+            <a:pPr algn="l">
+              <a:lnSpc>
+                <a:spcPct val="100000"/>
+              </a:lnSpc>
+            </a:pPr>
+            <a:r>
+              <a:rPr sz="1300">
+                <a:solidFill>
+                  <a:srgbClr val="1F1F1F"/>
+                </a:solidFill>
+                <a:latin typeface="Consolas"/>
+              </a:rPr>
+              <a:t>sudo apt install git make wget jq python3 python3-venv openocd dosfstools \</a:t>
+            </a:r>
+          </a:p>
+          <a:p>
+            <a:pPr algn="l">
+              <a:lnSpc>
+                <a:spcPct val="100000"/>
+              </a:lnSpc>
+            </a:pPr>
+            <a:r>
+              <a:rPr sz="1300">
+                <a:solidFill>
+                  <a:srgbClr val="1F1F1F"/>
+                </a:solidFill>
+                <a:latin typeface="Consolas"/>
+              </a:rPr>
+              <a:t>  autoconf automake autotools-dev curl libmpc-dev libmpfr-dev libgmp-dev gawk \</a:t>
+            </a:r>
+          </a:p>
+          <a:p>
+            <a:pPr algn="l">
+              <a:lnSpc>
+                <a:spcPct val="100000"/>
+              </a:lnSpc>
+            </a:pPr>
+            <a:r>
+              <a:rPr sz="1300">
+                <a:solidFill>
+                  <a:srgbClr val="1F1F1F"/>
+                </a:solidFill>
+                <a:latin typeface="Consolas"/>
+              </a:rPr>
+              <a:t>  build-essential bison flex texinfo gperf libtool patchutils bc zlib1g-dev libexpat-dev</a:t>
+            </a:r>
+          </a:p>
+          <a:p>
+            <a:pPr algn="l">
+              <a:lnSpc>
+                <a:spcPct val="100000"/>
+              </a:lnSpc>
+            </a:pPr>
+            <a:r>
+              <a:rPr sz="1300">
+                <a:solidFill>
+                  <a:srgbClr val="1F1F1F"/>
+                </a:solidFill>
+                <a:latin typeface="Consolas"/>
+              </a:rPr>
+              <a:t>git clone https://github.com/riscv-collab/riscv-gnu-toolchain</a:t>
+            </a:r>
+          </a:p>
+          <a:p>
+            <a:pPr algn="l">
+              <a:lnSpc>
+                <a:spcPct val="100000"/>
+              </a:lnSpc>
+            </a:pPr>
+            <a:r>
+              <a:rPr sz="1300">
+                <a:solidFill>
+                  <a:srgbClr val="1F1F1F"/>
+                </a:solidFill>
+                <a:latin typeface="Consolas"/>
+              </a:rPr>
+              <a:t>cd riscv-gnu-toolchain &amp;&amp; git checkout 2025.06.07</a:t>
+            </a:r>
+          </a:p>
+          <a:p>
+            <a:pPr algn="l">
+              <a:lnSpc>
+                <a:spcPct val="100000"/>
+              </a:lnSpc>
+            </a:pPr>
+            <a:r>
+              <a:rPr sz="1300">
+                <a:solidFill>
+                  <a:srgbClr val="1F1F1F"/>
+                </a:solidFill>
+                <a:latin typeface="Consolas"/>
+              </a:rPr>
+              <a:t>git config submodule.binutils.url https://github.com/gnutools/binutils-gdb.git</a:t>
+            </a:r>
+          </a:p>
+          <a:p>
+            <a:pPr algn="l">
+              <a:lnSpc>
+                <a:spcPct val="100000"/>
+              </a:lnSpc>
+            </a:pPr>
+            <a:r>
+              <a:rPr sz="1300">
+                <a:solidFill>
+                  <a:srgbClr val="1F1F1F"/>
+                </a:solidFill>
+                <a:latin typeface="Consolas"/>
+              </a:rPr>
+              <a:t>git config submodule.gdb.url https://github.com/gnutools/binutils-gdb.git</a:t>
+            </a:r>
+          </a:p>
+          <a:p>
+            <a:pPr algn="l">
+              <a:lnSpc>
+                <a:spcPct val="100000"/>
+              </a:lnSpc>
+            </a:pPr>
+            <a:r>
+              <a:rPr sz="1300">
+                <a:solidFill>
+                  <a:srgbClr val="1F1F1F"/>
+                </a:solidFill>
+                <a:latin typeface="Consolas"/>
+              </a:rPr>
+              <a:t>git config submodule.newlib.url https://github.com/cygwin/cygwin.git</a:t>
+            </a:r>
+          </a:p>
+          <a:p>
+            <a:pPr algn="l">
+              <a:lnSpc>
+                <a:spcPct val="100000"/>
+              </a:lnSpc>
+            </a:pPr>
+            <a:r>
+              <a:rPr sz="1300">
+                <a:solidFill>
+                  <a:srgbClr val="1F1F1F"/>
+                </a:solidFill>
+                <a:latin typeface="Consolas"/>
+              </a:rPr>
+              <a:t>./configure --prefix=$HOME/opt/riscv --with-multilib-generator="rv64imac-lp64--"</a:t>
+            </a:r>
+          </a:p>
+          <a:p>
+            <a:pPr algn="l">
+              <a:lnSpc>
+                <a:spcPct val="100000"/>
+              </a:lnSpc>
+            </a:pPr>
+            <a:r>
+              <a:rPr sz="1300">
+                <a:solidFill>
+                  <a:srgbClr val="1F1F1F"/>
+                </a:solidFill>
+                <a:latin typeface="Consolas"/>
+              </a:rPr>
+              <a:t>make -j$(nproc)                  # downloads and builds GCC 15.1: ~15 min on 20 cores</a:t>
+            </a:r>
+          </a:p>
+        </p:txBody>
+      </p:sp>
+      <p:sp>
+        <p:nvSpPr>
+          <p:cNvPr id="64" name="TextBox 63"/>
+          <p:cNvSpPr txBox="1"/>
+          <p:nvPr/>
+        </p:nvSpPr>
+        <p:spPr>
+          <a:xfrm>
+            <a:off x="365760" y="3559809"/>
+            <a:ext cx="11430000" cy="2194560"/>
+          </a:xfrm>
+          <a:prstGeom prst="rect">
+            <a:avLst/>
+          </a:prstGeom>
+          <a:noFill/>
+        </p:spPr>
+        <p:txBody>
+          <a:bodyPr wrap="square" anchor="t">
+            <a:spAutoFit/>
+          </a:bodyPr>
+          <a:lstStyle/>
+          <a:p>
+            <a:pPr marL="256032" indent="-219456">
+              <a:spcAft>
+                <a:spcPts val="400"/>
+              </a:spcAft>
+              <a:buChar char="•"/>
+            </a:pPr>
+            <a:r>
+              <a:rPr sz="1600" b="0">
+                <a:solidFill>
+                  <a:srgbClr val="000000"/>
+                </a:solidFill>
+                <a:latin typeface="Times New Roman"/>
+              </a:rPr>
+              <a:t>The three </a:t>
+            </a:r>
+            <a:r>
+              <a:rPr sz="1600" b="0" i="1">
+                <a:solidFill>
+                  <a:srgbClr val="000000"/>
+                </a:solidFill>
+                <a:latin typeface="Times New Roman"/>
+              </a:rPr>
+              <a:t>git config</a:t>
+            </a:r>
+            <a:r>
+              <a:rPr sz="1600" b="0">
+                <a:solidFill>
+                  <a:srgbClr val="000000"/>
+                </a:solidFill>
+                <a:latin typeface="Times New Roman"/>
+              </a:rPr>
+              <a:t> lines point the tag’s </a:t>
+            </a:r>
+            <a:r>
+              <a:rPr sz="1600" b="0" i="1">
+                <a:solidFill>
+                  <a:srgbClr val="000000"/>
+                </a:solidFill>
+                <a:latin typeface="Times New Roman"/>
+              </a:rPr>
+              <a:t>newlib</a:t>
+            </a:r>
+            <a:r>
+              <a:rPr sz="1600" b="0">
+                <a:solidFill>
+                  <a:srgbClr val="000000"/>
+                </a:solidFill>
+                <a:latin typeface="Times New Roman"/>
+              </a:rPr>
+              <a:t> / </a:t>
+            </a:r>
+            <a:r>
+              <a:rPr sz="1600" b="0" i="1">
+                <a:solidFill>
+                  <a:srgbClr val="000000"/>
+                </a:solidFill>
+                <a:latin typeface="Times New Roman"/>
+              </a:rPr>
+              <a:t>binutils</a:t>
+            </a:r>
+            <a:r>
+              <a:rPr sz="1600" b="0">
+                <a:solidFill>
+                  <a:srgbClr val="000000"/>
+                </a:solidFill>
+                <a:latin typeface="Times New Roman"/>
+              </a:rPr>
+              <a:t> / </a:t>
+            </a:r>
+            <a:r>
+              <a:rPr sz="1600" b="0" i="1">
+                <a:solidFill>
+                  <a:srgbClr val="000000"/>
+                </a:solidFill>
+                <a:latin typeface="Times New Roman"/>
+              </a:rPr>
+              <a:t>gdb</a:t>
+            </a:r>
+            <a:r>
+              <a:rPr sz="1600" b="0">
+                <a:solidFill>
+                  <a:srgbClr val="000000"/>
+                </a:solidFill>
+                <a:latin typeface="Times New Roman"/>
+              </a:rPr>
+              <a:t> sources at their current GitHub mirrors (the original ones are gone); without them </a:t>
+            </a:r>
+            <a:r>
+              <a:rPr sz="1600" b="0" i="1">
+                <a:solidFill>
+                  <a:srgbClr val="000000"/>
+                </a:solidFill>
+                <a:latin typeface="Times New Roman"/>
+              </a:rPr>
+              <a:t>make</a:t>
+            </a:r>
+            <a:r>
+              <a:rPr sz="1600" b="0">
+                <a:solidFill>
+                  <a:srgbClr val="000000"/>
+                </a:solidFill>
+                <a:latin typeface="Times New Roman"/>
+              </a:rPr>
+              <a:t> stops with “could not read Username”.</a:t>
+            </a:r>
+          </a:p>
+          <a:p>
+            <a:pPr marL="256032" indent="-219456">
+              <a:spcAft>
+                <a:spcPts val="400"/>
+              </a:spcAft>
+              <a:buChar char="•"/>
+            </a:pPr>
+            <a:r>
+              <a:rPr sz="1600" b="0">
+                <a:solidFill>
+                  <a:srgbClr val="000000"/>
+                </a:solidFill>
+                <a:latin typeface="Times New Roman"/>
+              </a:rPr>
+              <a:t>Result: </a:t>
+            </a:r>
+            <a:r>
+              <a:rPr sz="1600" b="0" i="1">
+                <a:solidFill>
+                  <a:srgbClr val="000000"/>
+                </a:solidFill>
+                <a:latin typeface="Times New Roman"/>
+              </a:rPr>
+              <a:t>$HOME/opt/riscv</a:t>
+            </a:r>
+            <a:r>
+              <a:rPr sz="1600" b="0">
+                <a:solidFill>
+                  <a:srgbClr val="000000"/>
+                </a:solidFill>
+                <a:latin typeface="Times New Roman"/>
+              </a:rPr>
+              <a:t> (2.4 GB). Put it on PATH in every shell: </a:t>
+            </a:r>
+            <a:r>
+              <a:rPr sz="1400" b="0">
+                <a:solidFill>
+                  <a:srgbClr val="8B1A1A"/>
+                </a:solidFill>
+                <a:latin typeface="Consolas"/>
+              </a:rPr>
+              <a:t>export PATH=$HOME/opt/riscv/bin:$PATH</a:t>
+            </a:r>
+            <a:r>
+              <a:rPr sz="1600" b="0">
+                <a:solidFill>
+                  <a:srgbClr val="000000"/>
+                </a:solidFill>
+                <a:latin typeface="Times New Roman"/>
+              </a:rPr>
+              <a:t> (route A: (8/11) does this).</a:t>
+            </a:r>
+          </a:p>
+          <a:p>
+            <a:pPr marL="256032" indent="-219456">
+              <a:spcAft>
+                <a:spcPts val="400"/>
+              </a:spcAft>
+              <a:buChar char="•"/>
+            </a:pPr>
+            <a:r>
+              <a:rPr sz="1600" b="0">
+                <a:solidFill>
+                  <a:srgbClr val="000000"/>
+                </a:solidFill>
+                <a:latin typeface="Times New Roman"/>
+              </a:rPr>
+              <a:t>The same compiler builds the firmware and, in route A, the boot ROM. Details: Lesson 2, section 1.</a:t>
+            </a:r>
+          </a:p>
+        </p:txBody>
+      </p:sp>
+    </p:spTree>
+  </p:cSld>
+  <p:clrMapOvr>
+    <a:masterClrMapping/>
+  </p:clrMapOvr>
+</p:sld>
+</file>
+
+<file path=ppt/slides/slide18.xml><?xml version="1.0" encoding="utf-8"?>
+<p:sld xmlns:a="http://schemas.openxmlformats.org/drawingml/2006/main" xmlns:p="http://schemas.openxmlformats.org/presentationml/2006/main" xmlns:r="http://schemas.openxmlformats.org/officeDocument/2006/relationships">
+  <p:cSld>
+    <p:spTree>
+      <p:nvGrpSpPr>
+        <p:cNvPr id="1" name=""/>
+        <p:cNvGrpSpPr/>
+        <p:nvPr/>
+      </p:nvGrpSpPr>
+      <p:grpSpPr/>
+      <p:sp>
+        <p:nvSpPr>
+          <p:cNvPr id="10" name="CustomShape 6">
+            <a:extLst>
+              <a:ext uri="{FF2B5EF4-FFF2-40B4-BE49-F238E27FC236}">
+                <a16:creationId xmlns:a16="http://schemas.microsoft.com/office/drawing/2014/main" id="{CB76DC60-C0C9-436D-8956-EE4CA394869E}"/>
+              </a:ext>
+            </a:extLst>
+          </p:cNvPr>
+          <p:cNvSpPr/>
+          <p:nvPr/>
+        </p:nvSpPr>
+        <p:spPr>
+          <a:xfrm>
+            <a:off x="-6000" y="0"/>
+            <a:ext cx="12198000" cy="644877"/>
+          </a:xfrm>
+          <a:prstGeom prst="rect">
+            <a:avLst/>
+          </a:prstGeom>
+          <a:solidFill>
+            <a:schemeClr val="accent6">
+              <a:lumMod val="40000"/>
+              <a:lumOff val="60000"/>
+            </a:schemeClr>
+          </a:solidFill>
+          <a:ln>
+            <a:noFill/>
+          </a:ln>
+        </p:spPr>
+        <p:style>
+          <a:lnRef idx="0">
+            <a:scrgbClr r="0" g="0" b="0"/>
+          </a:lnRef>
+          <a:fillRef idx="0">
+            <a:scrgbClr r="0" g="0" b="0"/>
+          </a:fillRef>
+          <a:effectRef idx="0">
+            <a:scrgbClr r="0" g="0" b="0"/>
+          </a:effectRef>
+          <a:fontRef idx="minor"/>
+        </p:style>
+        <p:txBody>
+          <a:bodyPr wrap="square" lIns="90000" tIns="45000" rIns="90000" bIns="45000">
+            <a:spAutoFit/>
+          </a:bodyPr>
+          <a:lstStyle/>
+          <a:p>
+            <a:pPr marL="360" algn="ctr">
+              <a:lnSpc>
+                <a:spcPct val="100000"/>
+              </a:lnSpc>
+              <a:buClr>
+                <a:srgbClr val="000000"/>
+              </a:buClr>
+            </a:pPr>
+            <a:r>
+              <a:rPr lang="en-US" sz="2900" b="1" spc="-1" dirty="0">
+                <a:latin typeface="Times New Roman" panose="02020603050405020304" pitchFamily="18" charset="0"/>
+                <a:cs typeface="Times New Roman" panose="02020603050405020304" pitchFamily="18" charset="0"/>
+              </a:rPr>
+              <a:t>1. Start Here </a:t>
+            </a:r>
+            <a:r>
+              <a:rPr lang="en-US" sz="2900" spc="-1" dirty="0">
+                <a:latin typeface="Times New Roman" panose="02020603050405020304" pitchFamily="18" charset="0"/>
+                <a:cs typeface="Times New Roman" panose="02020603050405020304" pitchFamily="18" charset="0"/>
+              </a:rPr>
+              <a:t>(8/11) Route A only: Chipyard sources and firtool</a:t>
+            </a:r>
+          </a:p>
+        </p:txBody>
+      </p:sp>
+      <p:sp>
+        <p:nvSpPr>
+          <p:cNvPr id="62" name="CustomShape 2"/>
+          <p:cNvSpPr/>
+          <p:nvPr/>
+        </p:nvSpPr>
+        <p:spPr>
+          <a:xfrm>
+            <a:off x="11291400" y="6492960"/>
+            <a:ext cx="894600" cy="358920"/>
+          </a:xfrm>
+          <a:prstGeom prst="rect">
+            <a:avLst/>
+          </a:prstGeom>
+          <a:noFill/>
+          <a:ln>
+            <a:noFill/>
+          </a:ln>
+        </p:spPr>
+        <p:style>
+          <a:lnRef idx="0">
+            <a:scrgbClr r="0" g="0" b="0"/>
+          </a:lnRef>
+          <a:fillRef idx="0">
+            <a:scrgbClr r="0" g="0" b="0"/>
+          </a:fillRef>
+          <a:effectRef idx="0">
+            <a:scrgbClr r="0" g="0" b="0"/>
+          </a:effectRef>
+          <a:fontRef idx="minor"/>
+        </p:style>
+        <p:txBody>
+          <a:bodyPr lIns="90000" tIns="45000" rIns="90000" bIns="45000" anchor="ctr">
+            <a:noAutofit/>
+          </a:bodyPr>
+          <a:lstStyle/>
+          <a:p>
+            <a:pPr algn="ctr">
+              <a:lnSpc>
+                <a:spcPct val="100000"/>
+              </a:lnSpc>
+            </a:pPr>
+            <a:fld id="{32452110-F6D1-439F-92C4-7A3912DA20B0}" type="slidenum">
+              <a:rPr lang="en-US" sz="1600" b="1" strike="noStrike" spc="-1">
+                <a:solidFill>
+                  <a:srgbClr val="000000"/>
+                </a:solidFill>
+                <a:latin typeface="Times New Roman"/>
+                <a:ea typeface="DejaVu Sans"/>
+              </a:rPr>
+              <a:t>12</a:t>
+            </a:fld>
+            <a:endParaRPr lang="en-US" sz="1600" b="0" strike="noStrike" spc="-1">
+              <a:latin typeface="Arial"/>
+            </a:endParaRPr>
+          </a:p>
+        </p:txBody>
+      </p:sp>
+      <p:sp>
+        <p:nvSpPr>
+          <p:cNvPr id="63" name="Rectangle 62"/>
+          <p:cNvSpPr/>
+          <p:nvPr/>
+        </p:nvSpPr>
+        <p:spPr>
+          <a:xfrm>
+            <a:off x="365760" y="868680"/>
+            <a:ext cx="11430000" cy="1611121"/>
+          </a:xfrm>
+          <a:prstGeom prst="rect">
+            <a:avLst/>
+          </a:prstGeom>
+          <a:solidFill>
+            <a:srgbClr val="F4F4F4"/>
+          </a:solidFill>
+          <a:ln>
+            <a:solidFill>
+              <a:srgbClr val="C8C8C8"/>
+            </a:solidFill>
+          </a:ln>
+          <a:effectLst/>
+        </p:spPr>
+        <p:style>
+          <a:lnRef idx="1">
+            <a:schemeClr val="accent1"/>
+          </a:lnRef>
+          <a:fillRef idx="3">
+            <a:schemeClr val="accent1"/>
+          </a:fillRef>
+          <a:effectRef idx="2">
+            <a:schemeClr val="accent1"/>
+          </a:effectRef>
+          <a:fontRef idx="minor">
+            <a:schemeClr val="lt1"/>
+          </a:fontRef>
+        </p:style>
+        <p:txBody>
+          <a:bodyPr rtlCol="0" anchor="t" wrap="none" lIns="73152" rIns="73152" tIns="73152" bIns="73152"/>
+          <a:lstStyle/>
+          <a:p>
+            <a:pPr algn="l"/>
+            <a:r>
+              <a:rPr sz="1300" b="1">
+                <a:solidFill>
+                  <a:srgbClr val="808080"/>
+                </a:solidFill>
+                <a:latin typeface="Consolas"/>
+              </a:rPr>
+              <a:t>Run this — once</a:t>
+            </a:r>
+          </a:p>
+          <a:p>
+            <a:pPr algn="l">
+              <a:lnSpc>
+                <a:spcPct val="100000"/>
+              </a:lnSpc>
+            </a:pPr>
+            <a:r>
+              <a:rPr sz="1300">
+                <a:solidFill>
+                  <a:srgbClr val="1F1F1F"/>
+                </a:solidFill>
+                <a:latin typeface="Consolas"/>
+              </a:rPr>
+              <a:t>sudo apt install openjdk-17-jdk-headless device-tree-compiler</a:t>
+            </a:r>
+          </a:p>
+          <a:p>
+            <a:pPr algn="l">
+              <a:lnSpc>
+                <a:spcPct val="100000"/>
+              </a:lnSpc>
+            </a:pPr>
+            <a:r>
+              <a:rPr sz="1300">
+                <a:solidFill>
+                  <a:srgbClr val="1F1F1F"/>
+                </a:solidFill>
+                <a:latin typeface="Consolas"/>
+              </a:rPr>
+              <a:t>cd chipyard                                       # your clone from (5/11)</a:t>
+            </a:r>
+          </a:p>
+          <a:p>
+            <a:pPr algn="l">
+              <a:lnSpc>
+                <a:spcPct val="100000"/>
+              </a:lnSpc>
+            </a:pPr>
+            <a:r>
+              <a:rPr sz="1300">
+                <a:solidFill>
+                  <a:srgbClr val="1F1F1F"/>
+                </a:solidFill>
+                <a:latin typeface="Consolas"/>
+              </a:rPr>
+              <a:t>./scripts/init-submodules-no-riscv-tools.sh       # Chipyard sources, ~7 min</a:t>
+            </a:r>
+          </a:p>
+          <a:p>
+            <a:pPr algn="l">
+              <a:lnSpc>
+                <a:spcPct val="100000"/>
+              </a:lnSpc>
+            </a:pPr>
+            <a:r>
+              <a:rPr sz="1300">
+                <a:solidFill>
+                  <a:srgbClr val="1F1F1F"/>
+                </a:solidFill>
+                <a:latin typeface="Consolas"/>
+              </a:rPr>
+              <a:t>./patches/apply.sh                                # this fork's fpga-shells changes</a:t>
+            </a:r>
+          </a:p>
+          <a:p>
+            <a:pPr algn="l">
+              <a:lnSpc>
+                <a:spcPct val="100000"/>
+              </a:lnSpc>
+            </a:pPr>
+            <a:r>
+              <a:rPr sz="1300">
+                <a:solidFill>
+                  <a:srgbClr val="1F1F1F"/>
+                </a:solidFill>
+                <a:latin typeface="Consolas"/>
+              </a:rPr>
+              <a:t>wget https://github.com/llvm/circt/releases/download/firtool-1.61.0/firrtl-bin-linux-x64.tar.gz</a:t>
+            </a:r>
+          </a:p>
+          <a:p>
+            <a:pPr algn="l">
+              <a:lnSpc>
+                <a:spcPct val="100000"/>
+              </a:lnSpc>
+            </a:pPr>
+            <a:r>
+              <a:rPr sz="1300">
+                <a:solidFill>
+                  <a:srgbClr val="1F1F1F"/>
+                </a:solidFill>
+                <a:latin typeface="Consolas"/>
+              </a:rPr>
+              <a:t>tar xzf firrtl-bin-linux-x64.tar.gz -C $HOME/opt</a:t>
+            </a:r>
+          </a:p>
+        </p:txBody>
+      </p:sp>
+      <p:sp>
+        <p:nvSpPr>
+          <p:cNvPr id="64" name="Rectangle 63"/>
+          <p:cNvSpPr/>
+          <p:nvPr/>
+        </p:nvSpPr>
+        <p:spPr>
+          <a:xfrm>
+            <a:off x="365760" y="2708401"/>
+            <a:ext cx="11430000" cy="1006856"/>
+          </a:xfrm>
+          <a:prstGeom prst="rect">
+            <a:avLst/>
+          </a:prstGeom>
+          <a:solidFill>
+            <a:srgbClr val="F4F4F4"/>
+          </a:solidFill>
+          <a:ln>
+            <a:solidFill>
+              <a:srgbClr val="C8C8C8"/>
+            </a:solidFill>
+          </a:ln>
+          <a:effectLst/>
+        </p:spPr>
+        <p:style>
+          <a:lnRef idx="1">
+            <a:schemeClr val="accent1"/>
+          </a:lnRef>
+          <a:fillRef idx="3">
+            <a:schemeClr val="accent1"/>
+          </a:fillRef>
+          <a:effectRef idx="2">
+            <a:schemeClr val="accent1"/>
+          </a:effectRef>
+          <a:fontRef idx="minor">
+            <a:schemeClr val="lt1"/>
+          </a:fontRef>
+        </p:style>
+        <p:txBody>
+          <a:bodyPr rtlCol="0" anchor="t" wrap="none" lIns="73152" rIns="73152" tIns="73152" bIns="73152"/>
+          <a:lstStyle/>
+          <a:p>
+            <a:pPr algn="l"/>
+            <a:r>
+              <a:rPr sz="1300" b="1">
+                <a:solidFill>
+                  <a:srgbClr val="808080"/>
+                </a:solidFill>
+                <a:latin typeface="Consolas"/>
+              </a:rPr>
+              <a:t>Run this — in every new shell (or add to ~/.bashrc)</a:t>
+            </a:r>
+          </a:p>
+          <a:p>
+            <a:pPr algn="l">
+              <a:lnSpc>
+                <a:spcPct val="100000"/>
+              </a:lnSpc>
+            </a:pPr>
+            <a:r>
+              <a:rPr sz="1300">
+                <a:solidFill>
+                  <a:srgbClr val="1F1F1F"/>
+                </a:solidFill>
+                <a:latin typeface="Consolas"/>
+              </a:rPr>
+              <a:t>export RISCV=$HOME/opt/riscv</a:t>
+            </a:r>
+          </a:p>
+          <a:p>
+            <a:pPr algn="l">
+              <a:lnSpc>
+                <a:spcPct val="100000"/>
+              </a:lnSpc>
+            </a:pPr>
+            <a:r>
+              <a:rPr sz="1300">
+                <a:solidFill>
+                  <a:srgbClr val="1F1F1F"/>
+                </a:solidFill>
+                <a:latin typeface="Consolas"/>
+              </a:rPr>
+              <a:t>export PATH=$HOME/opt/riscv/bin:$HOME/opt/firtool-1.61.0/bin:$PATH</a:t>
+            </a:r>
+          </a:p>
+          <a:p>
+            <a:pPr algn="l">
+              <a:lnSpc>
+                <a:spcPct val="100000"/>
+              </a:lnSpc>
+            </a:pPr>
+            <a:r>
+              <a:rPr sz="1300">
+                <a:solidFill>
+                  <a:srgbClr val="1F1F1F"/>
+                </a:solidFill>
+                <a:latin typeface="Consolas"/>
+              </a:rPr>
+              <a:t>source $HOME/Xilinx/Vivado/2024.2/settings64.sh</a:t>
+            </a:r>
+          </a:p>
+        </p:txBody>
+      </p:sp>
+      <p:sp>
+        <p:nvSpPr>
+          <p:cNvPr id="65" name="TextBox 64"/>
+          <p:cNvSpPr txBox="1"/>
+          <p:nvPr/>
+        </p:nvSpPr>
+        <p:spPr>
+          <a:xfrm>
+            <a:off x="365760" y="3989576"/>
+            <a:ext cx="11430000" cy="1828800"/>
+          </a:xfrm>
+          <a:prstGeom prst="rect">
+            <a:avLst/>
+          </a:prstGeom>
+          <a:noFill/>
+        </p:spPr>
+        <p:txBody>
+          <a:bodyPr wrap="square" anchor="t">
+            <a:spAutoFit/>
+          </a:bodyPr>
+          <a:lstStyle/>
+          <a:p>
+            <a:pPr marL="256032" indent="-219456">
+              <a:spcAft>
+                <a:spcPts val="400"/>
+              </a:spcAft>
+              <a:buChar char="•"/>
+            </a:pPr>
+            <a:r>
+              <a:rPr sz="1500" b="0">
+                <a:solidFill>
+                  <a:srgbClr val="000000"/>
+                </a:solidFill>
+                <a:latin typeface="Times New Roman"/>
+              </a:rPr>
+              <a:t>No conda and no </a:t>
+            </a:r>
+            <a:r>
+              <a:rPr sz="1500" b="0" i="1">
+                <a:solidFill>
+                  <a:srgbClr val="000000"/>
+                </a:solidFill>
+                <a:latin typeface="Times New Roman"/>
+              </a:rPr>
+              <a:t>build-setup.sh</a:t>
+            </a:r>
+            <a:r>
+              <a:rPr sz="1500" b="0">
+                <a:solidFill>
+                  <a:srgbClr val="000000"/>
+                </a:solidFill>
+                <a:latin typeface="Times New Roman"/>
+              </a:rPr>
+              <a:t>: nothing for Verilator, FireSim or FireMarshal is installed. The submodule script fetches FireSim and FireMarshal sources (~20 MB) only because Chipyard’s </a:t>
+            </a:r>
+            <a:r>
+              <a:rPr sz="1500" b="0" i="1">
+                <a:solidFill>
+                  <a:srgbClr val="000000"/>
+                </a:solidFill>
+                <a:latin typeface="Times New Roman"/>
+              </a:rPr>
+              <a:t>build.sbt</a:t>
+            </a:r>
+            <a:r>
+              <a:rPr sz="1500" b="0">
+                <a:solidFill>
+                  <a:srgbClr val="000000"/>
+                </a:solidFill>
+                <a:latin typeface="Times New Roman"/>
+              </a:rPr>
+              <a:t> refers to them.</a:t>
+            </a:r>
+          </a:p>
+          <a:p>
+            <a:pPr marL="256032" indent="-219456">
+              <a:spcAft>
+                <a:spcPts val="400"/>
+              </a:spcAft>
+              <a:buChar char="•"/>
+            </a:pPr>
+            <a:r>
+              <a:rPr sz="1500" b="0" i="1">
+                <a:solidFill>
+                  <a:srgbClr val="000000"/>
+                </a:solidFill>
+                <a:latin typeface="Times New Roman"/>
+              </a:rPr>
+              <a:t>RISCV</a:t>
+            </a:r>
+            <a:r>
+              <a:rPr sz="1500" b="0">
+                <a:solidFill>
+                  <a:srgbClr val="000000"/>
+                </a:solidFill>
+                <a:latin typeface="Times New Roman"/>
+              </a:rPr>
+              <a:t> tells the build where </a:t>
+            </a:r>
+            <a:r>
+              <a:rPr sz="1500" b="0" i="1">
+                <a:solidFill>
+                  <a:srgbClr val="000000"/>
+                </a:solidFill>
+                <a:latin typeface="Times New Roman"/>
+              </a:rPr>
+              <a:t>riscv64-unknown-elf-gcc</a:t>
+            </a:r>
+            <a:r>
+              <a:rPr sz="1500" b="0">
+                <a:solidFill>
+                  <a:srgbClr val="000000"/>
+                </a:solidFill>
+                <a:latin typeface="Times New Roman"/>
+              </a:rPr>
+              <a:t> is: the boot ROM is compiled during the bitstream build. Disk: ~4 GB here, ~1.5 GB more per build.</a:t>
+            </a:r>
+          </a:p>
+        </p:txBody>
+      </p:sp>
+    </p:spTree>
+  </p:cSld>
+  <p:clrMapOvr>
+    <a:masterClrMapping/>
+  </p:clrMapOvr>
+</p:sld>
+</file>
+
+<file path=ppt/slides/slide19.xml><?xml version="1.0" encoding="utf-8"?>
+<p:sld xmlns:a="http://schemas.openxmlformats.org/drawingml/2006/main" xmlns:p="http://schemas.openxmlformats.org/presentationml/2006/main" xmlns:r="http://schemas.openxmlformats.org/officeDocument/2006/relationships">
+  <p:cSld>
+    <p:spTree>
+      <p:nvGrpSpPr>
+        <p:cNvPr id="1" name=""/>
+        <p:cNvGrpSpPr/>
+        <p:nvPr/>
+      </p:nvGrpSpPr>
+      <p:grpSpPr/>
+      <p:sp>
+        <p:nvSpPr>
+          <p:cNvPr id="10" name="CustomShape 6">
+            <a:extLst>
+              <a:ext uri="{FF2B5EF4-FFF2-40B4-BE49-F238E27FC236}">
+                <a16:creationId xmlns:a16="http://schemas.microsoft.com/office/drawing/2014/main" id="{CB76DC60-C0C9-436D-8956-EE4CA394869E}"/>
+              </a:ext>
+            </a:extLst>
+          </p:cNvPr>
+          <p:cNvSpPr/>
+          <p:nvPr/>
+        </p:nvSpPr>
+        <p:spPr>
+          <a:xfrm>
+            <a:off x="-6000" y="0"/>
+            <a:ext cx="12198000" cy="644877"/>
+          </a:xfrm>
+          <a:prstGeom prst="rect">
+            <a:avLst/>
+          </a:prstGeom>
+          <a:solidFill>
+            <a:schemeClr val="accent6">
+              <a:lumMod val="40000"/>
+              <a:lumOff val="60000"/>
+            </a:schemeClr>
+          </a:solidFill>
+          <a:ln>
+            <a:noFill/>
+          </a:ln>
+        </p:spPr>
+        <p:style>
+          <a:lnRef idx="0">
+            <a:scrgbClr r="0" g="0" b="0"/>
+          </a:lnRef>
+          <a:fillRef idx="0">
+            <a:scrgbClr r="0" g="0" b="0"/>
+          </a:fillRef>
+          <a:effectRef idx="0">
+            <a:scrgbClr r="0" g="0" b="0"/>
+          </a:effectRef>
+          <a:fontRef idx="minor"/>
+        </p:style>
+        <p:txBody>
+          <a:bodyPr wrap="square" lIns="90000" tIns="45000" rIns="90000" bIns="45000">
+            <a:spAutoFit/>
+          </a:bodyPr>
+          <a:lstStyle/>
+          <a:p>
+            <a:pPr marL="360" algn="ctr">
+              <a:lnSpc>
+                <a:spcPct val="100000"/>
+              </a:lnSpc>
+              <a:buClr>
+                <a:srgbClr val="000000"/>
+              </a:buClr>
+            </a:pPr>
+            <a:r>
+              <a:rPr lang="en-US" sz="3600" b="1" spc="-1" dirty="0">
+                <a:latin typeface="Times New Roman" panose="02020603050405020304" pitchFamily="18" charset="0"/>
+                <a:cs typeface="Times New Roman" panose="02020603050405020304" pitchFamily="18" charset="0"/>
+              </a:rPr>
+              <a:t>1. Start Here </a:t>
+            </a:r>
+            <a:r>
+              <a:rPr lang="en-US" sz="3600" spc="-1" dirty="0">
+                <a:latin typeface="Times New Roman" panose="02020603050405020304" pitchFamily="18" charset="0"/>
+                <a:cs typeface="Times New Roman" panose="02020603050405020304" pitchFamily="18" charset="0"/>
+              </a:rPr>
+              <a:t>(9/11) Readiness check</a:t>
+            </a:r>
+          </a:p>
+        </p:txBody>
+      </p:sp>
+      <p:sp>
+        <p:nvSpPr>
+          <p:cNvPr id="62" name="CustomShape 2"/>
+          <p:cNvSpPr/>
+          <p:nvPr/>
+        </p:nvSpPr>
+        <p:spPr>
+          <a:xfrm>
+            <a:off x="11291400" y="6492960"/>
+            <a:ext cx="894600" cy="358920"/>
+          </a:xfrm>
+          <a:prstGeom prst="rect">
+            <a:avLst/>
+          </a:prstGeom>
+          <a:noFill/>
+          <a:ln>
+            <a:noFill/>
+          </a:ln>
+        </p:spPr>
+        <p:style>
+          <a:lnRef idx="0">
+            <a:scrgbClr r="0" g="0" b="0"/>
+          </a:lnRef>
+          <a:fillRef idx="0">
+            <a:scrgbClr r="0" g="0" b="0"/>
+          </a:fillRef>
+          <a:effectRef idx="0">
+            <a:scrgbClr r="0" g="0" b="0"/>
+          </a:effectRef>
+          <a:fontRef idx="minor"/>
+        </p:style>
+        <p:txBody>
+          <a:bodyPr lIns="90000" tIns="45000" rIns="90000" bIns="45000" anchor="ctr">
+            <a:noAutofit/>
+          </a:bodyPr>
+          <a:lstStyle/>
+          <a:p>
+            <a:pPr algn="ctr">
+              <a:lnSpc>
+                <a:spcPct val="100000"/>
+              </a:lnSpc>
+            </a:pPr>
+            <a:fld id="{32452110-F6D1-439F-92C4-7A3912DA20B0}" type="slidenum">
+              <a:rPr lang="en-US" sz="1600" b="1" strike="noStrike" spc="-1">
+                <a:solidFill>
+                  <a:srgbClr val="000000"/>
+                </a:solidFill>
+                <a:latin typeface="Times New Roman"/>
+                <a:ea typeface="DejaVu Sans"/>
+              </a:rPr>
+              <a:t>13</a:t>
             </a:fld>
             <a:endParaRPr lang="en-US" sz="1600" b="0" strike="noStrike" spc="-1">
               <a:latin typeface="Arial"/>
@@ -12370,7 +13901,7 @@
 </p:sld>
 </file>
 
-<file path=ppt/slides/slide17.xml><?xml version="1.0" encoding="utf-8"?>
+<file path=ppt/slides/slide20.xml><?xml version="1.0" encoding="utf-8"?>
 <p:sld xmlns:a="http://schemas.openxmlformats.org/drawingml/2006/main" xmlns:p="http://schemas.openxmlformats.org/presentationml/2006/main" xmlns:r="http://schemas.openxmlformats.org/officeDocument/2006/relationships">
   <p:cSld>
     <p:spTree>
@@ -12437,18 +13968,18 @@
               </a:buClr>
             </a:pPr>
             <a:r>
-              <a:rPr lang="en-US" sz="3600" b="1" spc="-1" dirty="0">
+              <a:rPr lang="en-US" sz="3400" b="1" spc="-1" dirty="0">
                 <a:latin typeface="Times New Roman" panose="02020603050405020304" pitchFamily="18" charset="0"/>
                 <a:cs typeface="Times New Roman" panose="02020603050405020304" pitchFamily="18" charset="0"/>
               </a:rPr>
               <a:t>1. Start Here </a:t>
             </a:r>
             <a:r>
-              <a:rPr lang="en-US" sz="3600" spc="-1" dirty="0">
+              <a:rPr lang="en-US" sz="3400" spc="-1" dirty="0">
                 <a:latin typeface="Times New Roman" panose="02020603050405020304" pitchFamily="18" charset="0"/>
                 <a:cs typeface="Times New Roman" panose="02020603050405020304" pitchFamily="18" charset="0"/>
               </a:rPr>
-              <a:t>(7/8) How to read the practical slides</a:t>
+              <a:t>(10/11) How to read the practical slides</a:t>
             </a:r>
           </a:p>
         </p:txBody>
@@ -12503,7 +14034,7 @@
                 <a:latin typeface="Times New Roman"/>
                 <a:ea typeface="DejaVu Sans"/>
               </a:rPr>
-              <a:t>11</a:t>
+              <a:t>14</a:t>
             </a:fld>
             <a:endParaRPr lang="en-US" sz="1600" b="0" strike="noStrike" spc="-1">
               <a:latin typeface="Arial"/>
@@ -12869,7 +14400,7 @@
 </p:sld>
 </file>
 
-<file path=ppt/slides/slide18.xml><?xml version="1.0" encoding="utf-8"?>
+<file path=ppt/slides/slide21.xml><?xml version="1.0" encoding="utf-8"?>
 <p:sld xmlns:a="http://schemas.openxmlformats.org/drawingml/2006/main" xmlns:p="http://schemas.openxmlformats.org/presentationml/2006/main" xmlns:r="http://schemas.openxmlformats.org/officeDocument/2006/relationships">
   <p:cSld>
     <p:spTree>
@@ -12947,7 +14478,7 @@
                 <a:latin typeface="Times New Roman" panose="02020603050405020304" pitchFamily="18" charset="0"/>
                 <a:cs typeface="Times New Roman" panose="02020603050405020304" pitchFamily="18" charset="0"/>
               </a:rPr>
-              <a:t>(8/8) Words used in this course</a:t>
+              <a:t>(11/11) Words used in this course</a:t>
             </a:r>
           </a:p>
         </p:txBody>
@@ -13002,7 +14533,7 @@
                 <a:latin typeface="Times New Roman"/>
                 <a:ea typeface="DejaVu Sans"/>
               </a:rPr>
-              <a:t>12</a:t>
+              <a:t>15</a:t>
             </a:fld>
             <a:endParaRPr lang="en-US" sz="1600" b="0" strike="noStrike" spc="-1">
               <a:latin typeface="Arial"/>
@@ -13805,7 +15336,7 @@
 </p:sld>
 </file>
 
-<file path=ppt/slides/slide19.xml><?xml version="1.0" encoding="utf-8"?>
+<file path=ppt/slides/slide22.xml><?xml version="1.0" encoding="utf-8"?>
 <p:sld xmlns:a="http://schemas.openxmlformats.org/drawingml/2006/main" xmlns:p="http://schemas.openxmlformats.org/presentationml/2006/main" xmlns:r="http://schemas.openxmlformats.org/officeDocument/2006/relationships">
   <p:cSld>
     <p:spTree>
@@ -13991,7 +15522,7 @@
                 <a:latin typeface="Times New Roman"/>
                 <a:ea typeface="DejaVu Sans"/>
               </a:rPr>
-              <a:t>13</a:t>
+              <a:t>16</a:t>
             </a:fld>
             <a:endParaRPr lang="en-US" sz="1600" b="0" strike="noStrike" spc="-1">
               <a:latin typeface="Arial"/>
@@ -14283,7 +15814,7 @@
 </p:sld>
 </file>
 
-<file path=ppt/slides/slide20.xml><?xml version="1.0" encoding="utf-8"?>
+<file path=ppt/slides/slide23.xml><?xml version="1.0" encoding="utf-8"?>
 <p:sld xmlns:a="http://schemas.openxmlformats.org/drawingml/2006/main" xmlns:p="http://schemas.openxmlformats.org/presentationml/2006/main" xmlns:r="http://schemas.openxmlformats.org/officeDocument/2006/relationships">
   <p:cSld>
     <p:spTree>
@@ -14416,7 +15947,7 @@
                 <a:latin typeface="Times New Roman"/>
                 <a:ea typeface="DejaVu Sans"/>
               </a:rPr>
-              <a:t>14</a:t>
+              <a:t>17</a:t>
             </a:fld>
             <a:endParaRPr lang="en-US" sz="1600" b="0" strike="noStrike" spc="-1">
               <a:latin typeface="Arial"/>
@@ -14975,7 +16506,7 @@
 </p:sld>
 </file>
 
-<file path=ppt/slides/slide21.xml><?xml version="1.0" encoding="utf-8"?>
+<file path=ppt/slides/slide24.xml><?xml version="1.0" encoding="utf-8"?>
 <p:sld xmlns:a="http://schemas.openxmlformats.org/drawingml/2006/main" xmlns:p="http://schemas.openxmlformats.org/presentationml/2006/main" xmlns:r="http://schemas.openxmlformats.org/officeDocument/2006/relationships">
   <p:cSld>
     <p:spTree>
@@ -15108,7 +16639,7 @@
                 <a:latin typeface="Times New Roman"/>
                 <a:ea typeface="DejaVu Sans"/>
               </a:rPr>
-              <a:t>15</a:t>
+              <a:t>18</a:t>
             </a:fld>
             <a:endParaRPr lang="en-US" sz="1600" b="0" strike="noStrike" spc="-1">
               <a:latin typeface="Arial"/>
@@ -15273,7 +16804,7 @@
 </p:sld>
 </file>
 
-<file path=ppt/slides/slide22.xml><?xml version="1.0" encoding="utf-8"?>
+<file path=ppt/slides/slide25.xml><?xml version="1.0" encoding="utf-8"?>
 <p:sld xmlns:a="http://schemas.openxmlformats.org/drawingml/2006/main" xmlns:p="http://schemas.openxmlformats.org/presentationml/2006/main" xmlns:r="http://schemas.openxmlformats.org/officeDocument/2006/relationships">
   <p:cSld>
     <p:spTree>
@@ -15406,7 +16937,7 @@
                 <a:latin typeface="Times New Roman"/>
                 <a:ea typeface="DejaVu Sans"/>
               </a:rPr>
-              <a:t>16</a:t>
+              <a:t>19</a:t>
             </a:fld>
             <a:endParaRPr lang="en-US" sz="1600" b="0" strike="noStrike" spc="-1">
               <a:latin typeface="Arial"/>
@@ -15859,7 +17390,7 @@
 </p:sld>
 </file>
 
-<file path=ppt/slides/slide23.xml><?xml version="1.0" encoding="utf-8"?>
+<file path=ppt/slides/slide26.xml><?xml version="1.0" encoding="utf-8"?>
 <p:sld xmlns:a="http://schemas.openxmlformats.org/drawingml/2006/main" xmlns:p="http://schemas.openxmlformats.org/presentationml/2006/main" xmlns:r="http://schemas.openxmlformats.org/officeDocument/2006/relationships">
   <p:cSld>
     <p:spTree>
@@ -15992,7 +17523,7 @@
                 <a:latin typeface="Times New Roman"/>
                 <a:ea typeface="DejaVu Sans"/>
               </a:rPr>
-              <a:t>17</a:t>
+              <a:t>20</a:t>
             </a:fld>
             <a:endParaRPr lang="en-US" sz="1600" b="0" strike="noStrike" spc="-1">
               <a:latin typeface="Arial"/>
@@ -17289,7 +18820,7 @@
                 </a:solidFill>
                 <a:latin typeface="Times New Roman"/>
               </a:rPr>
-              <a:t>Full-size picture: section 1, (3/8).</a:t>
+              <a:t>Full-size picture: section 1, (3/11).</a:t>
             </a:r>
           </a:p>
         </p:txBody>
@@ -17302,7 +18833,7 @@
 </p:sld>
 </file>
 
-<file path=ppt/slides/slide24.xml><?xml version="1.0" encoding="utf-8"?>
+<file path=ppt/slides/slide27.xml><?xml version="1.0" encoding="utf-8"?>
 <p:sld xmlns:a="http://schemas.openxmlformats.org/drawingml/2006/main" xmlns:p="http://schemas.openxmlformats.org/presentationml/2006/main" xmlns:r="http://schemas.openxmlformats.org/officeDocument/2006/relationships">
   <p:cSld>
     <p:spTree>
@@ -17488,7 +19019,7 @@
                 <a:latin typeface="Times New Roman"/>
                 <a:ea typeface="DejaVu Sans"/>
               </a:rPr>
-              <a:t>18</a:t>
+              <a:t>21</a:t>
             </a:fld>
             <a:endParaRPr lang="en-US" sz="1600" b="0" strike="noStrike" spc="-1">
               <a:latin typeface="Arial"/>
@@ -17780,7 +19311,7 @@
 </p:sld>
 </file>
 
-<file path=ppt/slides/slide25.xml><?xml version="1.0" encoding="utf-8"?>
+<file path=ppt/slides/slide28.xml><?xml version="1.0" encoding="utf-8"?>
 <p:sld xmlns:a="http://schemas.openxmlformats.org/drawingml/2006/main" xmlns:p="http://schemas.openxmlformats.org/presentationml/2006/main" xmlns:r="http://schemas.openxmlformats.org/officeDocument/2006/relationships">
   <p:cSld>
     <p:spTree>
@@ -17913,7 +19444,7 @@
                 <a:latin typeface="Times New Roman"/>
                 <a:ea typeface="DejaVu Sans"/>
               </a:rPr>
-              <a:t>19</a:t>
+              <a:t>22</a:t>
             </a:fld>
             <a:endParaRPr lang="en-US" sz="1600" b="0" strike="noStrike" spc="-1">
               <a:latin typeface="Arial"/>
@@ -18271,7 +19802,7 @@
 </p:sld>
 </file>
 
-<file path=ppt/slides/slide26.xml><?xml version="1.0" encoding="utf-8"?>
+<file path=ppt/slides/slide29.xml><?xml version="1.0" encoding="utf-8"?>
 <p:sld xmlns:a="http://schemas.openxmlformats.org/drawingml/2006/main" xmlns:p="http://schemas.openxmlformats.org/presentationml/2006/main" xmlns:r="http://schemas.openxmlformats.org/officeDocument/2006/relationships">
   <p:cSld>
     <p:spTree>
@@ -18404,7 +19935,7 @@
                 <a:latin typeface="Times New Roman"/>
                 <a:ea typeface="DejaVu Sans"/>
               </a:rPr>
-              <a:t>20</a:t>
+              <a:t>23</a:t>
             </a:fld>
             <a:endParaRPr lang="en-US" sz="1600" b="0" strike="noStrike" spc="-1">
               <a:latin typeface="Arial"/>
@@ -19021,7 +20552,7 @@
 </p:sld>
 </file>
 
-<file path=ppt/slides/slide27.xml><?xml version="1.0" encoding="utf-8"?>
+<file path=ppt/slides/slide30.xml><?xml version="1.0" encoding="utf-8"?>
 <p:sld xmlns:a="http://schemas.openxmlformats.org/drawingml/2006/main" xmlns:p="http://schemas.openxmlformats.org/presentationml/2006/main" xmlns:r="http://schemas.openxmlformats.org/officeDocument/2006/relationships">
   <p:cSld>
     <p:spTree>
@@ -19154,7 +20685,7 @@
                 <a:latin typeface="Times New Roman"/>
                 <a:ea typeface="DejaVu Sans"/>
               </a:rPr>
-              <a:t>21</a:t>
+              <a:t>24</a:t>
             </a:fld>
             <a:endParaRPr lang="en-US" sz="1600" b="0" strike="noStrike" spc="-1">
               <a:latin typeface="Arial"/>
@@ -19733,7 +21264,7 @@
 </p:sld>
 </file>
 
-<file path=ppt/slides/slide28.xml><?xml version="1.0" encoding="utf-8"?>
+<file path=ppt/slides/slide31.xml><?xml version="1.0" encoding="utf-8"?>
 <p:sld xmlns:a="http://schemas.openxmlformats.org/drawingml/2006/main" xmlns:p="http://schemas.openxmlformats.org/presentationml/2006/main" xmlns:r="http://schemas.openxmlformats.org/officeDocument/2006/relationships">
   <p:cSld>
     <p:spTree>
@@ -19866,7 +21397,7 @@
                 <a:latin typeface="Times New Roman"/>
                 <a:ea typeface="DejaVu Sans"/>
               </a:rPr>
-              <a:t>22</a:t>
+              <a:t>25</a:t>
             </a:fld>
             <a:endParaRPr lang="en-US" sz="1600" b="0" strike="noStrike" spc="-1">
               <a:latin typeface="Arial"/>
@@ -21047,7 +22578,7 @@
 </p:sld>
 </file>
 
-<file path=ppt/slides/slide29.xml><?xml version="1.0" encoding="utf-8"?>
+<file path=ppt/slides/slide32.xml><?xml version="1.0" encoding="utf-8"?>
 <p:sld xmlns:a="http://schemas.openxmlformats.org/drawingml/2006/main" xmlns:p="http://schemas.openxmlformats.org/presentationml/2006/main" xmlns:r="http://schemas.openxmlformats.org/officeDocument/2006/relationships">
   <p:cSld>
     <p:spTree>
@@ -21180,7 +22711,7 @@
                 <a:latin typeface="Times New Roman"/>
                 <a:ea typeface="DejaVu Sans"/>
               </a:rPr>
-              <a:t>23</a:t>
+              <a:t>26</a:t>
             </a:fld>
             <a:endParaRPr lang="en-US" sz="1600" b="0" strike="noStrike" spc="-1">
               <a:latin typeface="Arial"/>
@@ -21495,1528 +23026,6 @@
           </a:p>
         </p:txBody>
       </p:sp>
-    </p:spTree>
-  </p:cSld>
-  <p:clrMapOvr>
-    <a:masterClrMapping/>
-  </p:clrMapOvr>
-</p:sld>
-</file>
-
-<file path=ppt/slides/slide30.xml><?xml version="1.0" encoding="utf-8"?>
-<p:sld xmlns:a="http://schemas.openxmlformats.org/drawingml/2006/main" xmlns:p="http://schemas.openxmlformats.org/presentationml/2006/main" xmlns:r="http://schemas.openxmlformats.org/officeDocument/2006/relationships">
-  <p:cSld>
-    <p:spTree>
-      <p:nvGrpSpPr>
-        <p:cNvPr id="1" name=""/>
-        <p:cNvGrpSpPr/>
-        <p:nvPr/>
-      </p:nvGrpSpPr>
-      <p:grpSpPr/>
-      <p:sp>
-        <p:nvSpPr>
-          <p:cNvPr id="10" name="CustomShape 6">
-            <a:extLst>
-              <a:ext uri="{FF2B5EF4-FFF2-40B4-BE49-F238E27FC236}">
-                <a16:creationId xmlns:a16="http://schemas.microsoft.com/office/drawing/2014/main" id="{CB76DC60-C0C9-436D-8956-EE4CA394869E}"/>
-              </a:ext>
-            </a:extLst>
-          </p:cNvPr>
-          <p:cNvSpPr/>
-          <p:nvPr/>
-        </p:nvSpPr>
-        <p:spPr>
-          <a:xfrm>
-            <a:off x="-6000" y="0"/>
-            <a:ext cx="12198000" cy="644877"/>
-          </a:xfrm>
-          <a:prstGeom prst="rect">
-            <a:avLst/>
-          </a:prstGeom>
-          <a:solidFill>
-            <a:schemeClr val="accent6">
-              <a:lumMod val="40000"/>
-              <a:lumOff val="60000"/>
-            </a:schemeClr>
-          </a:solidFill>
-          <a:ln>
-            <a:noFill/>
-          </a:ln>
-        </p:spPr>
-        <p:style>
-          <a:lnRef idx="0">
-            <a:scrgbClr r="0" g="0" b="0"/>
-          </a:lnRef>
-          <a:fillRef idx="0">
-            <a:scrgbClr r="0" g="0" b="0"/>
-          </a:fillRef>
-          <a:effectRef idx="0">
-            <a:scrgbClr r="0" g="0" b="0"/>
-          </a:effectRef>
-          <a:fontRef idx="minor"/>
-        </p:style>
-        <p:txBody>
-          <a:bodyPr wrap="square" lIns="90000" tIns="45000" rIns="90000" bIns="45000">
-            <a:spAutoFit/>
-          </a:bodyPr>
-          <a:lstStyle/>
-          <a:p>
-            <a:pPr marL="360" algn="ctr">
-              <a:lnSpc>
-                <a:spcPct val="100000"/>
-              </a:lnSpc>
-              <a:buClr>
-                <a:srgbClr val="000000"/>
-              </a:buClr>
-            </a:pPr>
-            <a:r>
-              <a:rPr lang="en-US" sz="3400" b="1" spc="-1" dirty="0">
-                <a:latin typeface="Times New Roman" panose="02020603050405020304" pitchFamily="18" charset="0"/>
-                <a:cs typeface="Times New Roman" panose="02020603050405020304" pitchFamily="18" charset="0"/>
-              </a:rPr>
-              <a:t>3. SoC Configuration </a:t>
-            </a:r>
-            <a:r>
-              <a:rPr lang="en-US" sz="3400" spc="-1" dirty="0">
-                <a:latin typeface="Times New Roman" panose="02020603050405020304" pitchFamily="18" charset="0"/>
-                <a:cs typeface="Times New Roman" panose="02020603050405020304" pitchFamily="18" charset="0"/>
-              </a:rPr>
-              <a:t>(6/7) One clock for the whole SoC</a:t>
-            </a:r>
-          </a:p>
-        </p:txBody>
-      </p:sp>
-      <p:sp>
-        <p:nvSpPr>
-          <p:cNvPr id="62" name="CustomShape 2"/>
-          <p:cNvSpPr/>
-          <p:nvPr/>
-        </p:nvSpPr>
-        <p:spPr>
-          <a:xfrm>
-            <a:off x="11291400" y="6492960"/>
-            <a:ext cx="894600" cy="358920"/>
-          </a:xfrm>
-          <a:prstGeom prst="rect">
-            <a:avLst/>
-          </a:prstGeom>
-          <a:noFill/>
-          <a:ln>
-            <a:noFill/>
-          </a:ln>
-        </p:spPr>
-        <p:style>
-          <a:lnRef idx="0">
-            <a:scrgbClr r="0" g="0" b="0"/>
-          </a:lnRef>
-          <a:fillRef idx="0">
-            <a:scrgbClr r="0" g="0" b="0"/>
-          </a:fillRef>
-          <a:effectRef idx="0">
-            <a:scrgbClr r="0" g="0" b="0"/>
-          </a:effectRef>
-          <a:fontRef idx="minor"/>
-        </p:style>
-        <p:txBody>
-          <a:bodyPr lIns="90000" tIns="45000" rIns="90000" bIns="45000" anchor="ctr">
-            <a:noAutofit/>
-          </a:bodyPr>
-          <a:lstStyle/>
-          <a:p>
-            <a:pPr algn="ctr">
-              <a:lnSpc>
-                <a:spcPct val="100000"/>
-              </a:lnSpc>
-            </a:pPr>
-            <a:fld id="{32452110-F6D1-439F-92C4-7A3912DA20B0}" type="slidenum">
-              <a:rPr lang="en-US" sz="1600" b="1" strike="noStrike" spc="-1">
-                <a:solidFill>
-                  <a:srgbClr val="000000"/>
-                </a:solidFill>
-                <a:latin typeface="Times New Roman"/>
-                <a:ea typeface="DejaVu Sans"/>
-              </a:rPr>
-              <a:t>24</a:t>
-            </a:fld>
-            <a:endParaRPr lang="en-US" sz="1600" b="0" strike="noStrike" spc="-1">
-              <a:latin typeface="Arial"/>
-            </a:endParaRPr>
-          </a:p>
-        </p:txBody>
-      </p:sp>
-      <p:sp>
-        <p:nvSpPr>
-          <p:cNvPr id="63" name="Rectangle 62"/>
-          <p:cNvSpPr/>
-          <p:nvPr/>
-        </p:nvSpPr>
-        <p:spPr>
-          <a:xfrm>
-            <a:off x="365760" y="868680"/>
-            <a:ext cx="7315200" cy="2697480"/>
-          </a:xfrm>
-          <a:prstGeom prst="rect">
-            <a:avLst/>
-          </a:prstGeom>
-          <a:solidFill>
-            <a:srgbClr val="F4F4F4"/>
-          </a:solidFill>
-          <a:ln>
-            <a:solidFill>
-              <a:srgbClr val="C8C8C8"/>
-            </a:solidFill>
-          </a:ln>
-          <a:effectLst/>
-        </p:spPr>
-        <p:style>
-          <a:lnRef idx="1">
-            <a:schemeClr val="accent1"/>
-          </a:lnRef>
-          <a:fillRef idx="3">
-            <a:schemeClr val="accent1"/>
-          </a:fillRef>
-          <a:effectRef idx="2">
-            <a:schemeClr val="accent1"/>
-          </a:effectRef>
-          <a:fontRef idx="minor">
-            <a:schemeClr val="lt1"/>
-          </a:fontRef>
-        </p:style>
-        <p:txBody>
-          <a:bodyPr rtlCol="0" anchor="t" wrap="none" lIns="73152" rIns="73152" tIns="73152" bIns="73152"/>
-          <a:lstStyle/>
-          <a:p>
-            <a:pPr algn="l"/>
-            <a:r>
-              <a:rPr sz="1150" b="1">
-                <a:solidFill>
-                  <a:srgbClr val="808080"/>
-                </a:solidFill>
-                <a:latin typeface="Consolas"/>
-              </a:rPr>
-              <a:t>fpga/src/main/scala/arty100t/Configs.scala</a:t>
-            </a:r>
-          </a:p>
-          <a:p>
-            <a:pPr algn="l">
-              <a:lnSpc>
-                <a:spcPct val="100000"/>
-              </a:lnSpc>
-            </a:pPr>
-            <a:r>
-              <a:rPr sz="1150">
-                <a:solidFill>
-                  <a:srgbClr val="1F1F1F"/>
-                </a:solidFill>
-                <a:latin typeface="Consolas"/>
-              </a:rPr>
-              <a:t>class WithTinyArty100TTweaks(freqMHz: Double = 50) extends Config(</a:t>
-            </a:r>
-          </a:p>
-          <a:p>
-            <a:pPr algn="l">
-              <a:lnSpc>
-                <a:spcPct val="100000"/>
-              </a:lnSpc>
-            </a:pPr>
-            <a:r>
-              <a:rPr sz="1150">
-                <a:solidFill>
-                  <a:srgbClr val="1F1F1F"/>
-                </a:solidFill>
-                <a:latin typeface="Consolas"/>
-              </a:rPr>
-              <a:t>  new chipyard.harness.WithHarnessBinderClockFreqMHz(freqMHz) ++</a:t>
-            </a:r>
-          </a:p>
-          <a:p>
-            <a:pPr algn="l">
-              <a:lnSpc>
-                <a:spcPct val="100000"/>
-              </a:lnSpc>
-            </a:pPr>
-            <a:r>
-              <a:rPr sz="1150">
-                <a:solidFill>
-                  <a:srgbClr val="1F1F1F"/>
-                </a:solidFill>
-                <a:latin typeface="Consolas"/>
-              </a:rPr>
-              <a:t>  new chipyard.config.WithMemoryBusFrequency(freqMHz) ++</a:t>
-            </a:r>
-          </a:p>
-          <a:p>
-            <a:pPr algn="l">
-              <a:lnSpc>
-                <a:spcPct val="100000"/>
-              </a:lnSpc>
-            </a:pPr>
-            <a:r>
-              <a:rPr sz="1150">
-                <a:solidFill>
-                  <a:srgbClr val="1F1F1F"/>
-                </a:solidFill>
-                <a:latin typeface="Consolas"/>
-              </a:rPr>
-              <a:t>  new chipyard.config.WithFrontBusFrequency(freqMHz) ++</a:t>
-            </a:r>
-          </a:p>
-          <a:p>
-            <a:pPr algn="l">
-              <a:lnSpc>
-                <a:spcPct val="100000"/>
-              </a:lnSpc>
-            </a:pPr>
-            <a:r>
-              <a:rPr sz="1150">
-                <a:solidFill>
-                  <a:srgbClr val="1F1F1F"/>
-                </a:solidFill>
-                <a:latin typeface="Consolas"/>
-              </a:rPr>
-              <a:t>  new chipyard.config.WithSystemBusFrequency(freqMHz) ++</a:t>
-            </a:r>
-          </a:p>
-          <a:p>
-            <a:pPr algn="l">
-              <a:lnSpc>
-                <a:spcPct val="100000"/>
-              </a:lnSpc>
-            </a:pPr>
-            <a:r>
-              <a:rPr sz="1150">
-                <a:solidFill>
-                  <a:srgbClr val="1F1F1F"/>
-                </a:solidFill>
-                <a:latin typeface="Consolas"/>
-              </a:rPr>
-              <a:t>  new chipyard.config.WithPeripheryBusFrequency(freqMHz) ++</a:t>
-            </a:r>
-          </a:p>
-          <a:p>
-            <a:pPr algn="l">
-              <a:lnSpc>
-                <a:spcPct val="100000"/>
-              </a:lnSpc>
-            </a:pPr>
-            <a:r>
-              <a:rPr sz="1150">
-                <a:solidFill>
-                  <a:srgbClr val="1F1F1F"/>
-                </a:solidFill>
-                <a:latin typeface="Consolas"/>
-              </a:rPr>
-              <a:t>  new chipyard.config.WithControlBusFrequency(freqMHz) ++</a:t>
-            </a:r>
-          </a:p>
-          <a:p>
-            <a:pPr algn="l">
-              <a:lnSpc>
-                <a:spcPct val="100000"/>
-              </a:lnSpc>
-            </a:pPr>
-            <a:r>
-              <a:rPr sz="1150">
-                <a:solidFill>
-                  <a:srgbClr val="1F1F1F"/>
-                </a:solidFill>
-                <a:latin typeface="Consolas"/>
-              </a:rPr>
-              <a:t>  new chipyard.config.WithOffchipBusFrequency(freqMHz) ++</a:t>
-            </a:r>
-          </a:p>
-          <a:p>
-            <a:pPr algn="l">
-              <a:lnSpc>
-                <a:spcPct val="100000"/>
-              </a:lnSpc>
-            </a:pPr>
-            <a:r>
-              <a:rPr sz="1150">
-                <a:solidFill>
-                  <a:srgbClr val="1F1F1F"/>
-                </a:solidFill>
-                <a:latin typeface="Consolas"/>
-              </a:rPr>
-              <a:t>  new chipyard.clocking.WithPassthroughClockGenerator ++</a:t>
-            </a:r>
-          </a:p>
-          <a:p>
-            <a:pPr algn="l">
-              <a:lnSpc>
-                <a:spcPct val="100000"/>
-              </a:lnSpc>
-            </a:pPr>
-            <a:r>
-              <a:rPr sz="1150">
-                <a:solidFill>
-                  <a:srgbClr val="1F1F1F"/>
-                </a:solidFill>
-                <a:latin typeface="Consolas"/>
-              </a:rPr>
-              <a:t>  new WithArty100TUARTHarnessBinder ++ new WithArty100TSPISDCardHarnessBinder ++</a:t>
-            </a:r>
-          </a:p>
-          <a:p>
-            <a:pPr algn="l">
-              <a:lnSpc>
-                <a:spcPct val="100000"/>
-              </a:lnSpc>
-            </a:pPr>
-            <a:r>
-              <a:rPr sz="1150">
-                <a:solidFill>
-                  <a:srgbClr val="1F1F1F"/>
-                </a:solidFill>
-                <a:latin typeface="Consolas"/>
-              </a:rPr>
-              <a:t>  new WithArty100TJTAGHarnessBinder ++ new WithArty100TGPIOHarnessBinder ++</a:t>
-            </a:r>
-          </a:p>
-          <a:p>
-            <a:pPr algn="l">
-              <a:lnSpc>
-                <a:spcPct val="100000"/>
-              </a:lnSpc>
-            </a:pPr>
-            <a:r>
-              <a:rPr sz="1150">
-                <a:solidFill>
-                  <a:srgbClr val="1F1F1F"/>
-                </a:solidFill>
-                <a:latin typeface="Consolas"/>
-              </a:rPr>
-              <a:t>  ...</a:t>
-            </a:r>
-          </a:p>
-          <a:p>
-            <a:pPr algn="l">
-              <a:lnSpc>
-                <a:spcPct val="100000"/>
-              </a:lnSpc>
-            </a:pPr>
-            <a:r>
-              <a:rPr sz="1150">
-                <a:solidFill>
-                  <a:srgbClr val="1F1F1F"/>
-                </a:solidFill>
-                <a:latin typeface="Consolas"/>
-              </a:rPr>
-              <a:t>  new WithDefaultPeripherals ++ new WithSystemModifications ++ ...)</a:t>
-            </a:r>
-          </a:p>
-        </p:txBody>
-      </p:sp>
-      <p:sp>
-        <p:nvSpPr>
-          <p:cNvPr id="64" name="TextBox 63"/>
-          <p:cNvSpPr txBox="1"/>
-          <p:nvPr/>
-        </p:nvSpPr>
-        <p:spPr>
-          <a:xfrm>
-            <a:off x="7863840" y="914400"/>
-            <a:ext cx="4114800" cy="4572000"/>
-          </a:xfrm>
-          <a:prstGeom prst="rect">
-            <a:avLst/>
-          </a:prstGeom>
-          <a:noFill/>
-        </p:spPr>
-        <p:txBody>
-          <a:bodyPr wrap="square" anchor="t">
-            <a:spAutoFit/>
-          </a:bodyPr>
-          <a:lstStyle/>
-          <a:p>
-            <a:pPr marL="256032" indent="-219456">
-              <a:spcAft>
-                <a:spcPts val="400"/>
-              </a:spcAft>
-              <a:buChar char="•"/>
-            </a:pPr>
-            <a:r>
-              <a:rPr sz="1500" b="0">
-                <a:solidFill>
-                  <a:srgbClr val="8B1A1A"/>
-                </a:solidFill>
-                <a:latin typeface="Consolas"/>
-              </a:rPr>
-              <a:t>(75)</a:t>
-            </a:r>
-            <a:r>
-              <a:rPr sz="1700" b="0">
-                <a:solidFill>
-                  <a:srgbClr val="000000"/>
-                </a:solidFill>
-                <a:latin typeface="Times New Roman"/>
-              </a:rPr>
-              <a:t> sets all seven bus clocks at once.</a:t>
-            </a:r>
-          </a:p>
-          <a:p>
-            <a:pPr marL="256032" indent="-219456">
-              <a:spcAft>
-                <a:spcPts val="400"/>
-              </a:spcAft>
-              <a:buChar char="•"/>
-            </a:pPr>
-            <a:r>
-              <a:rPr sz="1700" b="0">
-                <a:solidFill>
-                  <a:srgbClr val="000000"/>
-                </a:solidFill>
-                <a:latin typeface="Times New Roman"/>
-              </a:rPr>
-              <a:t>Chipyard 1.11 added front / control / off-chip bus clocks that default to 500 MHz; every bus in the clock group must ask for the same frequency.</a:t>
-            </a:r>
-          </a:p>
-          <a:p>
-            <a:pPr marL="256032" indent="-219456">
-              <a:spcAft>
-                <a:spcPts val="400"/>
-              </a:spcAft>
-              <a:buChar char="•"/>
-            </a:pPr>
-            <a:r>
-              <a:rPr sz="1700" b="0">
-                <a:solidFill>
-                  <a:srgbClr val="000000"/>
-                </a:solidFill>
-                <a:latin typeface="Times New Roman"/>
-              </a:rPr>
-              <a:t>The board’s 100 MHz oscillator (pin E3) feeds a PLL that makes 75 MHz.</a:t>
-            </a:r>
-          </a:p>
-        </p:txBody>
-      </p:sp>
-      <p:sp>
-        <p:nvSpPr>
-          <p:cNvPr id="65" name="TextBox 64"/>
-          <p:cNvSpPr txBox="1"/>
-          <p:nvPr/>
-        </p:nvSpPr>
-        <p:spPr>
-          <a:xfrm>
-            <a:off x="365760" y="3840480"/>
-            <a:ext cx="11430000" cy="914400"/>
-          </a:xfrm>
-          <a:prstGeom prst="rect">
-            <a:avLst/>
-          </a:prstGeom>
-          <a:noFill/>
-        </p:spPr>
-        <p:txBody>
-          <a:bodyPr wrap="square" anchor="t">
-            <a:spAutoFit/>
-          </a:bodyPr>
-          <a:lstStyle/>
-          <a:p>
-            <a:pPr>
-              <a:spcAft>
-                <a:spcPts val="400"/>
-              </a:spcAft>
-            </a:pPr>
-            <a:r>
-              <a:rPr sz="1700" b="0">
-                <a:solidFill>
-                  <a:srgbClr val="808080"/>
-                </a:solidFill>
-                <a:latin typeface="Times New Roman"/>
-              </a:rPr>
-              <a:t>Firmware must know the clock too: </a:t>
-            </a:r>
-            <a:r>
-              <a:rPr sz="1500" b="0">
-                <a:solidFill>
-                  <a:srgbClr val="8B1A1A"/>
-                </a:solidFill>
-                <a:latin typeface="Consolas"/>
-              </a:rPr>
-              <a:t>PERF_CPU_HZ</a:t>
-            </a:r>
-            <a:r>
-              <a:rPr sz="1700" b="0">
-                <a:solidFill>
-                  <a:srgbClr val="808080"/>
-                </a:solidFill>
-                <a:latin typeface="Times New Roman"/>
-              </a:rPr>
-              <a:t> / </a:t>
-            </a:r>
-            <a:r>
-              <a:rPr sz="1500" b="0">
-                <a:solidFill>
-                  <a:srgbClr val="8B1A1A"/>
-                </a:solidFill>
-                <a:latin typeface="Consolas"/>
-              </a:rPr>
-              <a:t>F_CPU</a:t>
-            </a:r>
-            <a:r>
-              <a:rPr sz="1700" b="0">
-                <a:solidFill>
-                  <a:srgbClr val="808080"/>
-                </a:solidFill>
-                <a:latin typeface="Times New Roman"/>
-              </a:rPr>
-              <a:t> = 75000000 (UART divider, SPI dividers, timing reports).</a:t>
-            </a:r>
-          </a:p>
-        </p:txBody>
-      </p:sp>
-    </p:spTree>
-  </p:cSld>
-  <p:clrMapOvr>
-    <a:masterClrMapping/>
-  </p:clrMapOvr>
-</p:sld>
-</file>
-
-<file path=ppt/slides/slide31.xml><?xml version="1.0" encoding="utf-8"?>
-<p:sld xmlns:a="http://schemas.openxmlformats.org/drawingml/2006/main" xmlns:p="http://schemas.openxmlformats.org/presentationml/2006/main" xmlns:r="http://schemas.openxmlformats.org/officeDocument/2006/relationships">
-  <p:cSld>
-    <p:spTree>
-      <p:nvGrpSpPr>
-        <p:cNvPr id="1" name=""/>
-        <p:cNvGrpSpPr/>
-        <p:nvPr/>
-      </p:nvGrpSpPr>
-      <p:grpSpPr/>
-      <p:sp>
-        <p:nvSpPr>
-          <p:cNvPr id="10" name="CustomShape 6">
-            <a:extLst>
-              <a:ext uri="{FF2B5EF4-FFF2-40B4-BE49-F238E27FC236}">
-                <a16:creationId xmlns:a16="http://schemas.microsoft.com/office/drawing/2014/main" id="{CB76DC60-C0C9-436D-8956-EE4CA394869E}"/>
-              </a:ext>
-            </a:extLst>
-          </p:cNvPr>
-          <p:cNvSpPr/>
-          <p:nvPr/>
-        </p:nvSpPr>
-        <p:spPr>
-          <a:xfrm>
-            <a:off x="-6000" y="0"/>
-            <a:ext cx="12198000" cy="644877"/>
-          </a:xfrm>
-          <a:prstGeom prst="rect">
-            <a:avLst/>
-          </a:prstGeom>
-          <a:solidFill>
-            <a:schemeClr val="accent6">
-              <a:lumMod val="40000"/>
-              <a:lumOff val="60000"/>
-            </a:schemeClr>
-          </a:solidFill>
-          <a:ln>
-            <a:noFill/>
-          </a:ln>
-        </p:spPr>
-        <p:style>
-          <a:lnRef idx="0">
-            <a:scrgbClr r="0" g="0" b="0"/>
-          </a:lnRef>
-          <a:fillRef idx="0">
-            <a:scrgbClr r="0" g="0" b="0"/>
-          </a:fillRef>
-          <a:effectRef idx="0">
-            <a:scrgbClr r="0" g="0" b="0"/>
-          </a:effectRef>
-          <a:fontRef idx="minor"/>
-        </p:style>
-        <p:txBody>
-          <a:bodyPr wrap="square" lIns="90000" tIns="45000" rIns="90000" bIns="45000">
-            <a:spAutoFit/>
-          </a:bodyPr>
-          <a:lstStyle/>
-          <a:p>
-            <a:pPr marL="360" algn="ctr">
-              <a:lnSpc>
-                <a:spcPct val="100000"/>
-              </a:lnSpc>
-              <a:buClr>
-                <a:srgbClr val="000000"/>
-              </a:buClr>
-            </a:pPr>
-            <a:r>
-              <a:rPr lang="en-US" sz="3600" b="1" spc="-1" dirty="0">
-                <a:latin typeface="Times New Roman" panose="02020603050405020304" pitchFamily="18" charset="0"/>
-                <a:cs typeface="Times New Roman" panose="02020603050405020304" pitchFamily="18" charset="0"/>
-              </a:rPr>
-              <a:t>3. SoC Configuration </a:t>
-            </a:r>
-            <a:r>
-              <a:rPr lang="en-US" sz="3600" spc="-1" dirty="0">
-                <a:latin typeface="Times New Roman" panose="02020603050405020304" pitchFamily="18" charset="0"/>
-                <a:cs typeface="Times New Roman" panose="02020603050405020304" pitchFamily="18" charset="0"/>
-              </a:rPr>
-              <a:t>(7/7) Boot ROM rebuilt for RV64</a:t>
-            </a:r>
-          </a:p>
-        </p:txBody>
-      </p:sp>
-      <p:sp>
-        <p:nvSpPr>
-          <p:cNvPr id="62" name="CustomShape 2"/>
-          <p:cNvSpPr/>
-          <p:nvPr/>
-        </p:nvSpPr>
-        <p:spPr>
-          <a:xfrm>
-            <a:off x="11291400" y="6492960"/>
-            <a:ext cx="894600" cy="358920"/>
-          </a:xfrm>
-          <a:prstGeom prst="rect">
-            <a:avLst/>
-          </a:prstGeom>
-          <a:noFill/>
-          <a:ln>
-            <a:noFill/>
-          </a:ln>
-        </p:spPr>
-        <p:style>
-          <a:lnRef idx="0">
-            <a:scrgbClr r="0" g="0" b="0"/>
-          </a:lnRef>
-          <a:fillRef idx="0">
-            <a:scrgbClr r="0" g="0" b="0"/>
-          </a:fillRef>
-          <a:effectRef idx="0">
-            <a:scrgbClr r="0" g="0" b="0"/>
-          </a:effectRef>
-          <a:fontRef idx="minor"/>
-        </p:style>
-        <p:txBody>
-          <a:bodyPr lIns="90000" tIns="45000" rIns="90000" bIns="45000" anchor="ctr">
-            <a:noAutofit/>
-          </a:bodyPr>
-          <a:lstStyle/>
-          <a:p>
-            <a:pPr algn="ctr">
-              <a:lnSpc>
-                <a:spcPct val="100000"/>
-              </a:lnSpc>
-            </a:pPr>
-            <a:fld id="{32452110-F6D1-439F-92C4-7A3912DA20B0}" type="slidenum">
-              <a:rPr lang="en-US" sz="1600" b="1" strike="noStrike" spc="-1">
-                <a:solidFill>
-                  <a:srgbClr val="000000"/>
-                </a:solidFill>
-                <a:latin typeface="Times New Roman"/>
-                <a:ea typeface="DejaVu Sans"/>
-              </a:rPr>
-              <a:t>25</a:t>
-            </a:fld>
-            <a:endParaRPr lang="en-US" sz="1600" b="0" strike="noStrike" spc="-1">
-              <a:latin typeface="Arial"/>
-            </a:endParaRPr>
-          </a:p>
-        </p:txBody>
-      </p:sp>
-      <p:sp>
-        <p:nvSpPr>
-          <p:cNvPr id="63" name="Rectangle 62"/>
-          <p:cNvSpPr/>
-          <p:nvPr/>
-        </p:nvSpPr>
-        <p:spPr>
-          <a:xfrm>
-            <a:off x="365760" y="868680"/>
-            <a:ext cx="11430000" cy="2416810"/>
-          </a:xfrm>
-          <a:prstGeom prst="rect">
-            <a:avLst/>
-          </a:prstGeom>
-          <a:solidFill>
-            <a:srgbClr val="F4F4F4"/>
-          </a:solidFill>
-          <a:ln>
-            <a:solidFill>
-              <a:srgbClr val="C8C8C8"/>
-            </a:solidFill>
-          </a:ln>
-          <a:effectLst/>
-        </p:spPr>
-        <p:style>
-          <a:lnRef idx="1">
-            <a:schemeClr val="accent1"/>
-          </a:lnRef>
-          <a:fillRef idx="3">
-            <a:schemeClr val="accent1"/>
-          </a:fillRef>
-          <a:effectRef idx="2">
-            <a:schemeClr val="accent1"/>
-          </a:effectRef>
-          <a:fontRef idx="minor">
-            <a:schemeClr val="lt1"/>
-          </a:fontRef>
-        </p:style>
-        <p:txBody>
-          <a:bodyPr rtlCol="0" anchor="t" wrap="none" lIns="73152" rIns="73152" tIns="73152" bIns="73152"/>
-          <a:lstStyle/>
-          <a:p>
-            <a:pPr algn="l"/>
-            <a:r>
-              <a:rPr sz="1300" b="1">
-                <a:solidFill>
-                  <a:srgbClr val="808080"/>
-                </a:solidFill>
-                <a:latin typeface="Consolas"/>
-              </a:rPr>
-              <a:t>fpga/src/main/scala/arty100t/Configs.scala</a:t>
-            </a:r>
-          </a:p>
-          <a:p>
-            <a:pPr algn="l">
-              <a:lnSpc>
-                <a:spcPct val="100000"/>
-              </a:lnSpc>
-            </a:pPr>
-            <a:r>
-              <a:rPr sz="1300">
-                <a:solidFill>
-                  <a:srgbClr val="1F1F1F"/>
-                </a:solidFill>
-                <a:latin typeface="Consolas"/>
-              </a:rPr>
-              <a:t>class WithSystemModifications extends Config((site, here, up) =&gt; {</a:t>
-            </a:r>
-          </a:p>
-          <a:p>
-            <a:pPr algn="l">
-              <a:lnSpc>
-                <a:spcPct val="100000"/>
-              </a:lnSpc>
-            </a:pPr>
-            <a:r>
-              <a:rPr sz="1300">
-                <a:solidFill>
-                  <a:srgbClr val="1F1F1F"/>
-                </a:solidFill>
-                <a:latin typeface="Consolas"/>
-              </a:rPr>
-              <a:t>  case BootROMLocated(x) =&gt; up(BootROMLocated(x), site).map{ p =&gt;</a:t>
-            </a:r>
-          </a:p>
-          <a:p>
-            <a:pPr algn="l">
-              <a:lnSpc>
-                <a:spcPct val="100000"/>
-              </a:lnSpc>
-            </a:pPr>
-            <a:r>
-              <a:rPr sz="1300">
-                <a:solidFill>
-                  <a:srgbClr val="1F1F1F"/>
-                </a:solidFill>
-                <a:latin typeface="Consolas"/>
-              </a:rPr>
-              <a:t>    val freqMHz = (site(SystemBusKey).dtsFrequency.get / (1000 * 1000)).toLong</a:t>
-            </a:r>
-          </a:p>
-          <a:p>
-            <a:pPr algn="l">
-              <a:lnSpc>
-                <a:spcPct val="100000"/>
-              </a:lnSpc>
-            </a:pPr>
-            <a:r>
-              <a:rPr sz="1300">
-                <a:solidFill>
-                  <a:srgbClr val="1F1F1F"/>
-                </a:solidFill>
-                <a:latin typeface="Consolas"/>
-              </a:rPr>
-              <a:t>    val make = s"make -C fpga/src/main/resources/arty35t/sdboot " +</a:t>
-            </a:r>
-          </a:p>
-          <a:p>
-            <a:pPr algn="l">
-              <a:lnSpc>
-                <a:spcPct val="100000"/>
-              </a:lnSpc>
-            </a:pPr>
-            <a:r>
-              <a:rPr sz="1300">
-                <a:solidFill>
-                  <a:srgbClr val="1F1F1F"/>
-                </a:solidFill>
-                <a:latin typeface="Consolas"/>
-              </a:rPr>
-              <a:t>               s"XLEN=${site(XLen)} PBUS_CLK=${freqMHz}"</a:t>
-            </a:r>
-          </a:p>
-          <a:p>
-            <a:pPr algn="l">
-              <a:lnSpc>
-                <a:spcPct val="100000"/>
-              </a:lnSpc>
-            </a:pPr>
-            <a:r>
-              <a:rPr sz="1300">
-                <a:solidFill>
-                  <a:srgbClr val="1F1F1F"/>
-                </a:solidFill>
-                <a:latin typeface="Consolas"/>
-              </a:rPr>
-              <a:t>    require (make.! == 0, "Failed to build bootrom")</a:t>
-            </a:r>
-          </a:p>
-          <a:p>
-            <a:pPr algn="l">
-              <a:lnSpc>
-                <a:spcPct val="100000"/>
-              </a:lnSpc>
-            </a:pPr>
-            <a:r>
-              <a:rPr sz="1300">
-                <a:solidFill>
-                  <a:srgbClr val="1F1F1F"/>
-                </a:solidFill>
-                <a:latin typeface="Consolas"/>
-              </a:rPr>
-              <a:t>    p.copy(hang = 0x10000, size = 0x2000,</a:t>
-            </a:r>
-          </a:p>
-          <a:p>
-            <a:pPr algn="l">
-              <a:lnSpc>
-                <a:spcPct val="100000"/>
-              </a:lnSpc>
-            </a:pPr>
-            <a:r>
-              <a:rPr sz="1300">
-                <a:solidFill>
-                  <a:srgbClr val="1F1F1F"/>
-                </a:solidFill>
-                <a:latin typeface="Consolas"/>
-              </a:rPr>
-              <a:t>           contentFileName = s"./fpga/src/main/resources/arty35t/sdboot/build/sdboot.bin")</a:t>
-            </a:r>
-          </a:p>
-          <a:p>
-            <a:pPr algn="l">
-              <a:lnSpc>
-                <a:spcPct val="100000"/>
-              </a:lnSpc>
-            </a:pPr>
-            <a:r>
-              <a:rPr sz="1300">
-                <a:solidFill>
-                  <a:srgbClr val="1F1F1F"/>
-                </a:solidFill>
-                <a:latin typeface="Consolas"/>
-              </a:rPr>
-              <a:t>  }</a:t>
-            </a:r>
-          </a:p>
-          <a:p>
-            <a:pPr algn="l">
-              <a:lnSpc>
-                <a:spcPct val="100000"/>
-              </a:lnSpc>
-            </a:pPr>
-            <a:r>
-              <a:rPr sz="1300">
-                <a:solidFill>
-                  <a:srgbClr val="1F1F1F"/>
-                </a:solidFill>
-                <a:latin typeface="Consolas"/>
-              </a:rPr>
-              <a:t>  ...</a:t>
-            </a:r>
-          </a:p>
-        </p:txBody>
-      </p:sp>
-      <p:sp>
-        <p:nvSpPr>
-          <p:cNvPr id="64" name="TextBox 63"/>
-          <p:cNvSpPr txBox="1"/>
-          <p:nvPr/>
-        </p:nvSpPr>
-        <p:spPr>
-          <a:xfrm>
-            <a:off x="365760" y="3559809"/>
-            <a:ext cx="11430000" cy="2468880"/>
-          </a:xfrm>
-          <a:prstGeom prst="rect">
-            <a:avLst/>
-          </a:prstGeom>
-          <a:noFill/>
-        </p:spPr>
-        <p:txBody>
-          <a:bodyPr wrap="square" anchor="t">
-            <a:spAutoFit/>
-          </a:bodyPr>
-          <a:lstStyle/>
-          <a:p>
-            <a:pPr marL="256032" indent="-219456">
-              <a:spcAft>
-                <a:spcPts val="400"/>
-              </a:spcAft>
-              <a:buChar char="•"/>
-            </a:pPr>
-            <a:r>
-              <a:rPr sz="1900" b="0">
-                <a:solidFill>
-                  <a:srgbClr val="000000"/>
-                </a:solidFill>
-                <a:latin typeface="Times New Roman"/>
-              </a:rPr>
-              <a:t>Every bitstream build recompiles the boot ROM for the core width (</a:t>
-            </a:r>
-            <a:r>
-              <a:rPr sz="1700" b="0">
-                <a:solidFill>
-                  <a:srgbClr val="8B1A1A"/>
-                </a:solidFill>
-                <a:latin typeface="Consolas"/>
-              </a:rPr>
-              <a:t>XLEN=64</a:t>
-            </a:r>
-            <a:r>
-              <a:rPr sz="1900" b="0">
-                <a:solidFill>
-                  <a:srgbClr val="000000"/>
-                </a:solidFill>
-                <a:latin typeface="Times New Roman"/>
-              </a:rPr>
-              <a:t>) and the bus clock (</a:t>
-            </a:r>
-            <a:r>
-              <a:rPr sz="1700" b="0">
-                <a:solidFill>
-                  <a:srgbClr val="8B1A1A"/>
-                </a:solidFill>
-                <a:latin typeface="Consolas"/>
-              </a:rPr>
-              <a:t>PBUS_CLK=75</a:t>
-            </a:r>
-            <a:r>
-              <a:rPr sz="1900" b="0">
-                <a:solidFill>
-                  <a:srgbClr val="000000"/>
-                </a:solidFill>
-                <a:latin typeface="Times New Roman"/>
-              </a:rPr>
-              <a:t>).</a:t>
-            </a:r>
-          </a:p>
-          <a:p>
-            <a:pPr marL="256032" indent="-219456">
-              <a:spcAft>
-                <a:spcPts val="400"/>
-              </a:spcAft>
-              <a:buChar char="•"/>
-            </a:pPr>
-            <a:r>
-              <a:rPr sz="1900" b="0">
-                <a:solidFill>
-                  <a:srgbClr val="000000"/>
-                </a:solidFill>
-                <a:latin typeface="Times New Roman"/>
-              </a:rPr>
-              <a:t>At reset the boot ROM copies the firmware from the SD card (LBA 2048) into the scratchpad and jumps to 0x8000_0000.</a:t>
-            </a:r>
-          </a:p>
-          <a:p>
-            <a:pPr marL="256032" indent="-219456">
-              <a:spcAft>
-                <a:spcPts val="400"/>
-              </a:spcAft>
-              <a:buChar char="•"/>
-            </a:pPr>
-            <a:r>
-              <a:rPr sz="1900" b="0">
-                <a:solidFill>
-                  <a:srgbClr val="000000"/>
-                </a:solidFill>
-                <a:latin typeface="Times New Roman"/>
-              </a:rPr>
-              <a:t>During development you can skip it: firmware is loaded over JTAG in seconds (section 6).</a:t>
-            </a:r>
-          </a:p>
-        </p:txBody>
-      </p:sp>
-    </p:spTree>
-  </p:cSld>
-  <p:clrMapOvr>
-    <a:masterClrMapping/>
-  </p:clrMapOvr>
-</p:sld>
-</file>
-
-<file path=ppt/slides/slide32.xml><?xml version="1.0" encoding="utf-8"?>
-<p:sld xmlns:a="http://schemas.openxmlformats.org/drawingml/2006/main" xmlns:p="http://schemas.openxmlformats.org/presentationml/2006/main" xmlns:r="http://schemas.openxmlformats.org/officeDocument/2006/relationships">
-  <p:cSld>
-    <p:spTree>
-      <p:nvGrpSpPr>
-        <p:cNvPr id="1" name=""/>
-        <p:cNvGrpSpPr/>
-        <p:nvPr/>
-      </p:nvGrpSpPr>
-      <p:grpSpPr/>
-      <p:sp>
-        <p:nvSpPr>
-          <p:cNvPr id="41" name="CustomShape 3"/>
-          <p:cNvSpPr/>
-          <p:nvPr/>
-        </p:nvSpPr>
-        <p:spPr>
-          <a:xfrm>
-            <a:off x="0" y="1277373"/>
-            <a:ext cx="12186000" cy="1014209"/>
-          </a:xfrm>
-          <a:prstGeom prst="rect">
-            <a:avLst/>
-          </a:prstGeom>
-          <a:noFill/>
-          <a:ln>
-            <a:noFill/>
-          </a:ln>
-        </p:spPr>
-        <p:style>
-          <a:lnRef idx="0">
-            <a:scrgbClr r="0" g="0" b="0"/>
-          </a:lnRef>
-          <a:fillRef idx="0">
-            <a:scrgbClr r="0" g="0" b="0"/>
-          </a:fillRef>
-          <a:effectRef idx="0">
-            <a:scrgbClr r="0" g="0" b="0"/>
-          </a:effectRef>
-          <a:fontRef idx="minor"/>
-        </p:style>
-        <p:txBody>
-          <a:bodyPr wrap="square" lIns="90000" tIns="45000" rIns="90000" bIns="45000">
-            <a:spAutoFit/>
-          </a:bodyPr>
-          <a:lstStyle/>
-          <a:p>
-            <a:pPr algn="ctr">
-              <a:lnSpc>
-                <a:spcPct val="100000"/>
-              </a:lnSpc>
-            </a:pPr>
-            <a:r>
-              <a:rPr lang="en-US" sz="6000" b="0" strike="noStrike" spc="-1" dirty="0">
-                <a:solidFill>
-                  <a:srgbClr val="000000"/>
-                </a:solidFill>
-                <a:latin typeface="Times New Roman"/>
-                <a:ea typeface="DejaVu Sans"/>
-              </a:rPr>
-              <a:t>Outline</a:t>
-            </a:r>
-            <a:endParaRPr lang="en-US" sz="6000" b="0" strike="noStrike" spc="-1" dirty="0">
-              <a:latin typeface="Arial"/>
-            </a:endParaRPr>
-          </a:p>
-        </p:txBody>
-      </p:sp>
-      <p:sp>
-        <p:nvSpPr>
-          <p:cNvPr id="42" name="CustomShape 4"/>
-          <p:cNvSpPr/>
-          <p:nvPr/>
-        </p:nvSpPr>
-        <p:spPr>
-          <a:xfrm>
-            <a:off x="6972480" y="105480"/>
-            <a:ext cx="5213520" cy="1110240"/>
-          </a:xfrm>
-          <a:prstGeom prst="rect">
-            <a:avLst/>
-          </a:prstGeom>
-          <a:solidFill>
-            <a:schemeClr val="bg2">
-              <a:lumMod val="75000"/>
-            </a:schemeClr>
-          </a:solidFill>
-          <a:ln>
-            <a:noFill/>
-          </a:ln>
-        </p:spPr>
-        <p:style>
-          <a:lnRef idx="2">
-            <a:schemeClr val="accent1">
-              <a:shade val="50000"/>
-            </a:schemeClr>
-          </a:lnRef>
-          <a:fillRef idx="1">
-            <a:schemeClr val="accent1"/>
-          </a:fillRef>
-          <a:effectRef idx="0">
-            <a:schemeClr val="accent1"/>
-          </a:effectRef>
-          <a:fontRef idx="minor"/>
-        </p:style>
-        <p:txBody>
-          <a:bodyPr/>
-          <a:lstStyle/>
-          <a:p>
-            <a:endParaRPr lang="en-US"/>
-          </a:p>
-        </p:txBody>
-      </p:sp>
-      <p:pic>
-        <p:nvPicPr>
-          <p:cNvPr id="43" name="Picture 4" descr="http://vlsilab.ee.uec.ac.jp/images/logo.png"/>
-          <p:cNvPicPr/>
-          <p:nvPr/>
-        </p:nvPicPr>
-        <p:blipFill>
-          <a:blip r:embed="rId2"/>
-          <a:stretch/>
-        </p:blipFill>
-        <p:spPr>
-          <a:xfrm>
-            <a:off x="7713720" y="152280"/>
-            <a:ext cx="3730320" cy="1035720"/>
-          </a:xfrm>
-          <a:prstGeom prst="rect">
-            <a:avLst/>
-          </a:prstGeom>
-          <a:ln>
-            <a:noFill/>
-          </a:ln>
-        </p:spPr>
-      </p:pic>
-      <p:sp>
-        <p:nvSpPr>
-          <p:cNvPr id="45" name="CustomShape 6"/>
-          <p:cNvSpPr/>
-          <p:nvPr/>
-        </p:nvSpPr>
-        <p:spPr>
-          <a:xfrm>
-            <a:off x="11291400" y="6492960"/>
-            <a:ext cx="894600" cy="358920"/>
-          </a:xfrm>
-          <a:prstGeom prst="rect">
-            <a:avLst/>
-          </a:prstGeom>
-          <a:noFill/>
-          <a:ln>
-            <a:noFill/>
-          </a:ln>
-        </p:spPr>
-        <p:style>
-          <a:lnRef idx="0">
-            <a:scrgbClr r="0" g="0" b="0"/>
-          </a:lnRef>
-          <a:fillRef idx="0">
-            <a:scrgbClr r="0" g="0" b="0"/>
-          </a:fillRef>
-          <a:effectRef idx="0">
-            <a:scrgbClr r="0" g="0" b="0"/>
-          </a:effectRef>
-          <a:fontRef idx="minor"/>
-        </p:style>
-        <p:txBody>
-          <a:bodyPr lIns="90000" tIns="45000" rIns="90000" bIns="45000" anchor="ctr">
-            <a:noAutofit/>
-          </a:bodyPr>
-          <a:lstStyle/>
-          <a:p>
-            <a:pPr algn="ctr">
-              <a:lnSpc>
-                <a:spcPct val="100000"/>
-              </a:lnSpc>
-            </a:pPr>
-            <a:fld id="{976D1C0D-8C0B-4FED-8F9E-AAED3AF2BED7}" type="slidenum">
-              <a:rPr lang="en-US" sz="1600" b="1" strike="noStrike" spc="-1">
-                <a:solidFill>
-                  <a:srgbClr val="000000"/>
-                </a:solidFill>
-                <a:latin typeface="Times New Roman"/>
-                <a:ea typeface="DejaVu Sans"/>
-              </a:rPr>
-              <a:t>26</a:t>
-            </a:fld>
-            <a:endParaRPr lang="en-US" sz="1600" b="0" strike="noStrike" spc="-1">
-              <a:latin typeface="Arial"/>
-            </a:endParaRPr>
-          </a:p>
-        </p:txBody>
-      </p:sp>
-      <p:sp>
-        <p:nvSpPr>
-          <p:cNvPr id="10" name="CustomShape 3">
-            <a:extLst>
-              <a:ext uri="{FF2B5EF4-FFF2-40B4-BE49-F238E27FC236}">
-                <a16:creationId xmlns:a16="http://schemas.microsoft.com/office/drawing/2014/main" id="{F22CA456-F1E3-4191-9864-00187BF37E54}"/>
-              </a:ext>
-            </a:extLst>
-          </p:cNvPr>
-          <p:cNvSpPr/>
-          <p:nvPr/>
-        </p:nvSpPr>
-        <p:spPr>
-          <a:xfrm>
-            <a:off x="402300" y="2353236"/>
-            <a:ext cx="11381400" cy="2553091"/>
-          </a:xfrm>
-          <a:prstGeom prst="rect">
-            <a:avLst/>
-          </a:prstGeom>
-          <a:noFill/>
-          <a:ln>
-            <a:noFill/>
-          </a:ln>
-        </p:spPr>
-        <p:style>
-          <a:lnRef idx="0">
-            <a:scrgbClr r="0" g="0" b="0"/>
-          </a:lnRef>
-          <a:fillRef idx="0">
-            <a:scrgbClr r="0" g="0" b="0"/>
-          </a:fillRef>
-          <a:effectRef idx="0">
-            <a:scrgbClr r="0" g="0" b="0"/>
-          </a:effectRef>
-          <a:fontRef idx="minor"/>
-        </p:style>
-        <p:txBody>
-          <a:bodyPr wrap="square" lIns="90000" tIns="45000" rIns="90000" bIns="45000">
-            <a:spAutoFit/>
-          </a:bodyPr>
-          <a:lstStyle/>
-          <a:p>
-            <a:pPr marL="1143000" indent="-1143000">
-              <a:lnSpc>
-                <a:spcPct val="100000"/>
-              </a:lnSpc>
-              <a:buFont typeface="+mj-lt"/>
-              <a:buAutoNum type="arabicPeriod"/>
-            </a:pPr>
-            <a:r>
-              <a:rPr lang="en-US" sz="2800" spc="-1" dirty="0" err="1" b="0">
-                <a:solidFill>
-                  <a:srgbClr val="808080"/>
-                </a:solidFill>
-                <a:latin typeface="Times New Roman" panose="02020603050405020304" pitchFamily="18" charset="0"/>
-                <a:ea typeface="DejaVu Sans"/>
-                <a:cs typeface="Times New Roman" panose="02020603050405020304" pitchFamily="18" charset="0"/>
-              </a:rPr>
-              <a:t>Start Here</a:t>
-            </a:r>
-            <a:endParaRPr lang="en-US" sz="4000" b="0" strike="noStrike" spc="-1" dirty="0">
-              <a:solidFill>
-                <a:srgbClr val="000000"/>
-              </a:solidFill>
-              <a:latin typeface="Times New Roman" panose="02020603050405020304" pitchFamily="18" charset="0"/>
-              <a:ea typeface="DejaVu Sans"/>
-              <a:cs typeface="Times New Roman" panose="02020603050405020304" pitchFamily="18" charset="0"/>
-            </a:endParaRPr>
-          </a:p>
-          <a:p>
-            <a:pPr marL="1143000" indent="-1143000">
-              <a:lnSpc>
-                <a:spcPct val="100000"/>
-              </a:lnSpc>
-              <a:buFont typeface="+mj-lt"/>
-              <a:buAutoNum type="arabicPeriod"/>
-            </a:pPr>
-            <a:r>
-              <a:rPr lang="en-US" sz="2800" spc="-1" dirty="0" err="1" b="0">
-                <a:solidFill>
-                  <a:srgbClr val="808080"/>
-                </a:solidFill>
-                <a:latin typeface="Times New Roman" panose="02020603050405020304" pitchFamily="18" charset="0"/>
-                <a:ea typeface="DejaVu Sans"/>
-                <a:cs typeface="Times New Roman" panose="02020603050405020304" pitchFamily="18" charset="0"/>
-              </a:rPr>
-              <a:t>The System You Will Build</a:t>
-            </a:r>
-            <a:endParaRPr lang="en-US" sz="4000" b="0" strike="noStrike" spc="-1" dirty="0">
-              <a:solidFill>
-                <a:srgbClr val="000000"/>
-              </a:solidFill>
-              <a:latin typeface="Times New Roman" panose="02020603050405020304" pitchFamily="18" charset="0"/>
-              <a:ea typeface="DejaVu Sans"/>
-              <a:cs typeface="Times New Roman" panose="02020603050405020304" pitchFamily="18" charset="0"/>
-            </a:endParaRPr>
-          </a:p>
-          <a:p>
-            <a:pPr marL="1143000" indent="-1143000">
-              <a:lnSpc>
-                <a:spcPct val="100000"/>
-              </a:lnSpc>
-              <a:buFont typeface="+mj-lt"/>
-              <a:buAutoNum type="arabicPeriod"/>
-            </a:pPr>
-            <a:r>
-              <a:rPr lang="en-US" sz="2800" spc="-1" dirty="0" err="1" b="0">
-                <a:solidFill>
-                  <a:srgbClr val="808080"/>
-                </a:solidFill>
-                <a:latin typeface="Times New Roman" panose="02020603050405020304" pitchFamily="18" charset="0"/>
-                <a:ea typeface="DejaVu Sans"/>
-                <a:cs typeface="Times New Roman" panose="02020603050405020304" pitchFamily="18" charset="0"/>
-              </a:rPr>
-              <a:t>SoC Configuration</a:t>
-            </a:r>
-            <a:endParaRPr lang="en-US" sz="4000" b="0" strike="noStrike" spc="-1" dirty="0">
-              <a:solidFill>
-                <a:srgbClr val="000000"/>
-              </a:solidFill>
-              <a:latin typeface="Times New Roman" panose="02020603050405020304" pitchFamily="18" charset="0"/>
-              <a:ea typeface="DejaVu Sans"/>
-              <a:cs typeface="Times New Roman" panose="02020603050405020304" pitchFamily="18" charset="0"/>
-            </a:endParaRPr>
-          </a:p>
-          <a:p>
-            <a:pPr marL="1143000" indent="-1143000">
-              <a:lnSpc>
-                <a:spcPct val="100000"/>
-              </a:lnSpc>
-              <a:buFont typeface="+mj-lt"/>
-              <a:buAutoNum type="arabicPeriod"/>
-            </a:pPr>
-            <a:r>
-              <a:rPr lang="en-US" sz="2800" spc="-1" dirty="0" err="1" b="1">
-                <a:solidFill>
-                  <a:srgbClr val="37863C"/>
-                </a:solidFill>
-                <a:latin typeface="Times New Roman" panose="02020603050405020304" pitchFamily="18" charset="0"/>
-                <a:ea typeface="DejaVu Sans"/>
-                <a:cs typeface="Times New Roman" panose="02020603050405020304" pitchFamily="18" charset="0"/>
-              </a:rPr>
-              <a:t>FPGA Pins &amp; Harness</a:t>
-            </a:r>
-            <a:endParaRPr lang="en-US" sz="4000" b="0" strike="noStrike" spc="-1" dirty="0">
-              <a:solidFill>
-                <a:srgbClr val="000000"/>
-              </a:solidFill>
-              <a:latin typeface="Times New Roman" panose="02020603050405020304" pitchFamily="18" charset="0"/>
-              <a:ea typeface="DejaVu Sans"/>
-              <a:cs typeface="Times New Roman" panose="02020603050405020304" pitchFamily="18" charset="0"/>
-            </a:endParaRPr>
-          </a:p>
-          <a:p>
-            <a:pPr marL="1143000" indent="-1143000">
-              <a:lnSpc>
-                <a:spcPct val="100000"/>
-              </a:lnSpc>
-              <a:buFont typeface="+mj-lt"/>
-              <a:buAutoNum type="arabicPeriod"/>
-            </a:pPr>
-            <a:r>
-              <a:rPr lang="en-US" sz="2800" spc="-1" dirty="0" err="1" b="0">
-                <a:solidFill>
-                  <a:srgbClr val="808080"/>
-                </a:solidFill>
-                <a:latin typeface="Times New Roman" panose="02020603050405020304" pitchFamily="18" charset="0"/>
-                <a:ea typeface="DejaVu Sans"/>
-                <a:cs typeface="Times New Roman" panose="02020603050405020304" pitchFamily="18" charset="0"/>
-              </a:rPr>
-              <a:t>Build &amp; Timing Closure</a:t>
-            </a:r>
-            <a:endParaRPr lang="en-US" sz="4000" b="0" strike="noStrike" spc="-1" dirty="0">
-              <a:solidFill>
-                <a:srgbClr val="000000"/>
-              </a:solidFill>
-              <a:latin typeface="Times New Roman" panose="02020603050405020304" pitchFamily="18" charset="0"/>
-              <a:ea typeface="DejaVu Sans"/>
-              <a:cs typeface="Times New Roman" panose="02020603050405020304" pitchFamily="18" charset="0"/>
-            </a:endParaRPr>
-          </a:p>
-          <a:p>
-            <a:pPr marL="1143000" indent="-1143000">
-              <a:lnSpc>
-                <a:spcPct val="100000"/>
-              </a:lnSpc>
-              <a:buFont typeface="+mj-lt"/>
-              <a:buAutoNum type="arabicPeriod"/>
-            </a:pPr>
-            <a:r>
-              <a:rPr lang="en-US" sz="2800" spc="-1" dirty="0" err="1" b="0">
-                <a:solidFill>
-                  <a:srgbClr val="808080"/>
-                </a:solidFill>
-                <a:latin typeface="Times New Roman" panose="02020603050405020304" pitchFamily="18" charset="0"/>
-                <a:ea typeface="DejaVu Sans"/>
-                <a:cs typeface="Times New Roman" panose="02020603050405020304" pitchFamily="18" charset="0"/>
-              </a:rPr>
-              <a:t>Programming &amp; Bring-up</a:t>
-            </a:r>
-            <a:endParaRPr lang="en-US" sz="4000" b="0" strike="noStrike" spc="-1" dirty="0">
-              <a:solidFill>
-                <a:srgbClr val="000000"/>
-              </a:solidFill>
-              <a:latin typeface="Times New Roman" panose="02020603050405020304" pitchFamily="18" charset="0"/>
-              <a:ea typeface="DejaVu Sans"/>
-              <a:cs typeface="Times New Roman" panose="02020603050405020304" pitchFamily="18" charset="0"/>
-            </a:endParaRPr>
-          </a:p>
-          <a:p>
-            <a:pPr marL="1143000" indent="-1143000">
-              <a:lnSpc>
-                <a:spcPct val="100000"/>
-              </a:lnSpc>
-              <a:buFont typeface="+mj-lt"/>
-              <a:buAutoNum type="arabicPeriod"/>
-            </a:pPr>
-            <a:r>
-              <a:rPr lang="en-US" sz="2800" spc="-1" dirty="0" err="1" b="0">
-                <a:solidFill>
-                  <a:srgbClr val="808080"/>
-                </a:solidFill>
-                <a:latin typeface="Times New Roman" panose="02020603050405020304" pitchFamily="18" charset="0"/>
-                <a:ea typeface="DejaVu Sans"/>
-                <a:cs typeface="Times New Roman" panose="02020603050405020304" pitchFamily="18" charset="0"/>
-              </a:rPr>
-              <a:t>Practice</a:t>
-            </a:r>
-            <a:endParaRPr lang="en-US" sz="4000" b="0" strike="noStrike" spc="-1" dirty="0">
-              <a:solidFill>
-                <a:srgbClr val="000000"/>
-              </a:solidFill>
-              <a:latin typeface="Times New Roman" panose="02020603050405020304" pitchFamily="18" charset="0"/>
-              <a:ea typeface="DejaVu Sans"/>
-              <a:cs typeface="Times New Roman" panose="02020603050405020304" pitchFamily="18" charset="0"/>
-            </a:endParaRPr>
-          </a:p>
-        </p:txBody>
-      </p:sp>
-      <p:pic>
-        <p:nvPicPr>
-          <p:cNvPr id="2" name="Picture 1">
-            <a:extLst>
-              <a:ext uri="{FF2B5EF4-FFF2-40B4-BE49-F238E27FC236}">
-                <a16:creationId xmlns:a16="http://schemas.microsoft.com/office/drawing/2014/main" id="{B2A62998-F8D0-DAA3-4400-008D3F20B2EE}"/>
-              </a:ext>
-            </a:extLst>
-          </p:cNvPr>
-          <p:cNvPicPr>
-            <a:picLocks noChangeAspect="1"/>
-          </p:cNvPicPr>
-          <p:nvPr/>
-        </p:nvPicPr>
-        <p:blipFill>
-          <a:blip r:embed="rId3">
-            <a:extLst>
-              <a:ext uri="{28A0092B-C50C-407E-A947-70E740481C1C}">
-                <a14:useLocalDpi xmlns:a14="http://schemas.microsoft.com/office/drawing/2010/main" val="0"/>
-              </a:ext>
-            </a:extLst>
-          </a:blip>
-          <a:stretch>
-            <a:fillRect/>
-          </a:stretch>
-        </p:blipFill>
-        <p:spPr>
-          <a:xfrm>
-            <a:off x="-6000" y="0"/>
-            <a:ext cx="5213520" cy="1363335"/>
-          </a:xfrm>
-          <a:prstGeom prst="rect">
-            <a:avLst/>
-          </a:prstGeom>
-        </p:spPr>
-      </p:pic>
     </p:spTree>
   </p:cSld>
   <p:clrMapOvr>
@@ -23092,18 +23101,18 @@
               </a:buClr>
             </a:pPr>
             <a:r>
-              <a:rPr lang="en-US" sz="3600" b="1" spc="-1" dirty="0">
+              <a:rPr lang="en-US" sz="3400" b="1" spc="-1" dirty="0">
                 <a:latin typeface="Times New Roman" panose="02020603050405020304" pitchFamily="18" charset="0"/>
                 <a:cs typeface="Times New Roman" panose="02020603050405020304" pitchFamily="18" charset="0"/>
               </a:rPr>
-              <a:t>4. FPGA Pins &amp; Harness </a:t>
-            </a:r>
-            <a:r>
-              <a:rPr lang="en-US" sz="3600" spc="-1" dirty="0">
+              <a:t>3. SoC Configuration </a:t>
+            </a:r>
+            <a:r>
+              <a:rPr lang="en-US" sz="3400" spc="-1" dirty="0">
                 <a:latin typeface="Times New Roman" panose="02020603050405020304" pitchFamily="18" charset="0"/>
                 <a:cs typeface="Times New Roman" panose="02020603050405020304" pitchFamily="18" charset="0"/>
               </a:rPr>
-              <a:t>(1/9) PMOD map</a:t>
+              <a:t>(6/7) One clock for the whole SoC</a:t>
             </a:r>
           </a:p>
         </p:txBody>
@@ -23159,6 +23168,1528 @@
                 <a:ea typeface="DejaVu Sans"/>
               </a:rPr>
               <a:t>27</a:t>
+            </a:fld>
+            <a:endParaRPr lang="en-US" sz="1600" b="0" strike="noStrike" spc="-1">
+              <a:latin typeface="Arial"/>
+            </a:endParaRPr>
+          </a:p>
+        </p:txBody>
+      </p:sp>
+      <p:sp>
+        <p:nvSpPr>
+          <p:cNvPr id="63" name="Rectangle 62"/>
+          <p:cNvSpPr/>
+          <p:nvPr/>
+        </p:nvSpPr>
+        <p:spPr>
+          <a:xfrm>
+            <a:off x="365760" y="868680"/>
+            <a:ext cx="7315200" cy="2697480"/>
+          </a:xfrm>
+          <a:prstGeom prst="rect">
+            <a:avLst/>
+          </a:prstGeom>
+          <a:solidFill>
+            <a:srgbClr val="F4F4F4"/>
+          </a:solidFill>
+          <a:ln>
+            <a:solidFill>
+              <a:srgbClr val="C8C8C8"/>
+            </a:solidFill>
+          </a:ln>
+          <a:effectLst/>
+        </p:spPr>
+        <p:style>
+          <a:lnRef idx="1">
+            <a:schemeClr val="accent1"/>
+          </a:lnRef>
+          <a:fillRef idx="3">
+            <a:schemeClr val="accent1"/>
+          </a:fillRef>
+          <a:effectRef idx="2">
+            <a:schemeClr val="accent1"/>
+          </a:effectRef>
+          <a:fontRef idx="minor">
+            <a:schemeClr val="lt1"/>
+          </a:fontRef>
+        </p:style>
+        <p:txBody>
+          <a:bodyPr rtlCol="0" anchor="t" wrap="none" lIns="73152" rIns="73152" tIns="73152" bIns="73152"/>
+          <a:lstStyle/>
+          <a:p>
+            <a:pPr algn="l"/>
+            <a:r>
+              <a:rPr sz="1150" b="1">
+                <a:solidFill>
+                  <a:srgbClr val="808080"/>
+                </a:solidFill>
+                <a:latin typeface="Consolas"/>
+              </a:rPr>
+              <a:t>fpga/src/main/scala/arty100t/Configs.scala</a:t>
+            </a:r>
+          </a:p>
+          <a:p>
+            <a:pPr algn="l">
+              <a:lnSpc>
+                <a:spcPct val="100000"/>
+              </a:lnSpc>
+            </a:pPr>
+            <a:r>
+              <a:rPr sz="1150">
+                <a:solidFill>
+                  <a:srgbClr val="1F1F1F"/>
+                </a:solidFill>
+                <a:latin typeface="Consolas"/>
+              </a:rPr>
+              <a:t>class WithTinyArty100TTweaks(freqMHz: Double = 50) extends Config(</a:t>
+            </a:r>
+          </a:p>
+          <a:p>
+            <a:pPr algn="l">
+              <a:lnSpc>
+                <a:spcPct val="100000"/>
+              </a:lnSpc>
+            </a:pPr>
+            <a:r>
+              <a:rPr sz="1150">
+                <a:solidFill>
+                  <a:srgbClr val="1F1F1F"/>
+                </a:solidFill>
+                <a:latin typeface="Consolas"/>
+              </a:rPr>
+              <a:t>  new chipyard.harness.WithHarnessBinderClockFreqMHz(freqMHz) ++</a:t>
+            </a:r>
+          </a:p>
+          <a:p>
+            <a:pPr algn="l">
+              <a:lnSpc>
+                <a:spcPct val="100000"/>
+              </a:lnSpc>
+            </a:pPr>
+            <a:r>
+              <a:rPr sz="1150">
+                <a:solidFill>
+                  <a:srgbClr val="1F1F1F"/>
+                </a:solidFill>
+                <a:latin typeface="Consolas"/>
+              </a:rPr>
+              <a:t>  new chipyard.config.WithMemoryBusFrequency(freqMHz) ++</a:t>
+            </a:r>
+          </a:p>
+          <a:p>
+            <a:pPr algn="l">
+              <a:lnSpc>
+                <a:spcPct val="100000"/>
+              </a:lnSpc>
+            </a:pPr>
+            <a:r>
+              <a:rPr sz="1150">
+                <a:solidFill>
+                  <a:srgbClr val="1F1F1F"/>
+                </a:solidFill>
+                <a:latin typeface="Consolas"/>
+              </a:rPr>
+              <a:t>  new chipyard.config.WithFrontBusFrequency(freqMHz) ++</a:t>
+            </a:r>
+          </a:p>
+          <a:p>
+            <a:pPr algn="l">
+              <a:lnSpc>
+                <a:spcPct val="100000"/>
+              </a:lnSpc>
+            </a:pPr>
+            <a:r>
+              <a:rPr sz="1150">
+                <a:solidFill>
+                  <a:srgbClr val="1F1F1F"/>
+                </a:solidFill>
+                <a:latin typeface="Consolas"/>
+              </a:rPr>
+              <a:t>  new chipyard.config.WithSystemBusFrequency(freqMHz) ++</a:t>
+            </a:r>
+          </a:p>
+          <a:p>
+            <a:pPr algn="l">
+              <a:lnSpc>
+                <a:spcPct val="100000"/>
+              </a:lnSpc>
+            </a:pPr>
+            <a:r>
+              <a:rPr sz="1150">
+                <a:solidFill>
+                  <a:srgbClr val="1F1F1F"/>
+                </a:solidFill>
+                <a:latin typeface="Consolas"/>
+              </a:rPr>
+              <a:t>  new chipyard.config.WithPeripheryBusFrequency(freqMHz) ++</a:t>
+            </a:r>
+          </a:p>
+          <a:p>
+            <a:pPr algn="l">
+              <a:lnSpc>
+                <a:spcPct val="100000"/>
+              </a:lnSpc>
+            </a:pPr>
+            <a:r>
+              <a:rPr sz="1150">
+                <a:solidFill>
+                  <a:srgbClr val="1F1F1F"/>
+                </a:solidFill>
+                <a:latin typeface="Consolas"/>
+              </a:rPr>
+              <a:t>  new chipyard.config.WithControlBusFrequency(freqMHz) ++</a:t>
+            </a:r>
+          </a:p>
+          <a:p>
+            <a:pPr algn="l">
+              <a:lnSpc>
+                <a:spcPct val="100000"/>
+              </a:lnSpc>
+            </a:pPr>
+            <a:r>
+              <a:rPr sz="1150">
+                <a:solidFill>
+                  <a:srgbClr val="1F1F1F"/>
+                </a:solidFill>
+                <a:latin typeface="Consolas"/>
+              </a:rPr>
+              <a:t>  new chipyard.config.WithOffchipBusFrequency(freqMHz) ++</a:t>
+            </a:r>
+          </a:p>
+          <a:p>
+            <a:pPr algn="l">
+              <a:lnSpc>
+                <a:spcPct val="100000"/>
+              </a:lnSpc>
+            </a:pPr>
+            <a:r>
+              <a:rPr sz="1150">
+                <a:solidFill>
+                  <a:srgbClr val="1F1F1F"/>
+                </a:solidFill>
+                <a:latin typeface="Consolas"/>
+              </a:rPr>
+              <a:t>  new chipyard.clocking.WithPassthroughClockGenerator ++</a:t>
+            </a:r>
+          </a:p>
+          <a:p>
+            <a:pPr algn="l">
+              <a:lnSpc>
+                <a:spcPct val="100000"/>
+              </a:lnSpc>
+            </a:pPr>
+            <a:r>
+              <a:rPr sz="1150">
+                <a:solidFill>
+                  <a:srgbClr val="1F1F1F"/>
+                </a:solidFill>
+                <a:latin typeface="Consolas"/>
+              </a:rPr>
+              <a:t>  new WithArty100TUARTHarnessBinder ++ new WithArty100TSPISDCardHarnessBinder ++</a:t>
+            </a:r>
+          </a:p>
+          <a:p>
+            <a:pPr algn="l">
+              <a:lnSpc>
+                <a:spcPct val="100000"/>
+              </a:lnSpc>
+            </a:pPr>
+            <a:r>
+              <a:rPr sz="1150">
+                <a:solidFill>
+                  <a:srgbClr val="1F1F1F"/>
+                </a:solidFill>
+                <a:latin typeface="Consolas"/>
+              </a:rPr>
+              <a:t>  new WithArty100TJTAGHarnessBinder ++ new WithArty100TGPIOHarnessBinder ++</a:t>
+            </a:r>
+          </a:p>
+          <a:p>
+            <a:pPr algn="l">
+              <a:lnSpc>
+                <a:spcPct val="100000"/>
+              </a:lnSpc>
+            </a:pPr>
+            <a:r>
+              <a:rPr sz="1150">
+                <a:solidFill>
+                  <a:srgbClr val="1F1F1F"/>
+                </a:solidFill>
+                <a:latin typeface="Consolas"/>
+              </a:rPr>
+              <a:t>  ...</a:t>
+            </a:r>
+          </a:p>
+          <a:p>
+            <a:pPr algn="l">
+              <a:lnSpc>
+                <a:spcPct val="100000"/>
+              </a:lnSpc>
+            </a:pPr>
+            <a:r>
+              <a:rPr sz="1150">
+                <a:solidFill>
+                  <a:srgbClr val="1F1F1F"/>
+                </a:solidFill>
+                <a:latin typeface="Consolas"/>
+              </a:rPr>
+              <a:t>  new WithDefaultPeripherals ++ new WithSystemModifications ++ ...)</a:t>
+            </a:r>
+          </a:p>
+        </p:txBody>
+      </p:sp>
+      <p:sp>
+        <p:nvSpPr>
+          <p:cNvPr id="64" name="TextBox 63"/>
+          <p:cNvSpPr txBox="1"/>
+          <p:nvPr/>
+        </p:nvSpPr>
+        <p:spPr>
+          <a:xfrm>
+            <a:off x="7863840" y="914400"/>
+            <a:ext cx="4114800" cy="4572000"/>
+          </a:xfrm>
+          <a:prstGeom prst="rect">
+            <a:avLst/>
+          </a:prstGeom>
+          <a:noFill/>
+        </p:spPr>
+        <p:txBody>
+          <a:bodyPr wrap="square" anchor="t">
+            <a:spAutoFit/>
+          </a:bodyPr>
+          <a:lstStyle/>
+          <a:p>
+            <a:pPr marL="256032" indent="-219456">
+              <a:spcAft>
+                <a:spcPts val="400"/>
+              </a:spcAft>
+              <a:buChar char="•"/>
+            </a:pPr>
+            <a:r>
+              <a:rPr sz="1500" b="0">
+                <a:solidFill>
+                  <a:srgbClr val="8B1A1A"/>
+                </a:solidFill>
+                <a:latin typeface="Consolas"/>
+              </a:rPr>
+              <a:t>(75)</a:t>
+            </a:r>
+            <a:r>
+              <a:rPr sz="1700" b="0">
+                <a:solidFill>
+                  <a:srgbClr val="000000"/>
+                </a:solidFill>
+                <a:latin typeface="Times New Roman"/>
+              </a:rPr>
+              <a:t> sets all seven bus clocks at once.</a:t>
+            </a:r>
+          </a:p>
+          <a:p>
+            <a:pPr marL="256032" indent="-219456">
+              <a:spcAft>
+                <a:spcPts val="400"/>
+              </a:spcAft>
+              <a:buChar char="•"/>
+            </a:pPr>
+            <a:r>
+              <a:rPr sz="1700" b="0">
+                <a:solidFill>
+                  <a:srgbClr val="000000"/>
+                </a:solidFill>
+                <a:latin typeface="Times New Roman"/>
+              </a:rPr>
+              <a:t>Chipyard 1.11 added front / control / off-chip bus clocks that default to 500 MHz; every bus in the clock group must ask for the same frequency.</a:t>
+            </a:r>
+          </a:p>
+          <a:p>
+            <a:pPr marL="256032" indent="-219456">
+              <a:spcAft>
+                <a:spcPts val="400"/>
+              </a:spcAft>
+              <a:buChar char="•"/>
+            </a:pPr>
+            <a:r>
+              <a:rPr sz="1700" b="0">
+                <a:solidFill>
+                  <a:srgbClr val="000000"/>
+                </a:solidFill>
+                <a:latin typeface="Times New Roman"/>
+              </a:rPr>
+              <a:t>The board’s 100 MHz oscillator (pin E3) feeds a PLL that makes 75 MHz.</a:t>
+            </a:r>
+          </a:p>
+        </p:txBody>
+      </p:sp>
+      <p:sp>
+        <p:nvSpPr>
+          <p:cNvPr id="65" name="TextBox 64"/>
+          <p:cNvSpPr txBox="1"/>
+          <p:nvPr/>
+        </p:nvSpPr>
+        <p:spPr>
+          <a:xfrm>
+            <a:off x="365760" y="3840480"/>
+            <a:ext cx="11430000" cy="914400"/>
+          </a:xfrm>
+          <a:prstGeom prst="rect">
+            <a:avLst/>
+          </a:prstGeom>
+          <a:noFill/>
+        </p:spPr>
+        <p:txBody>
+          <a:bodyPr wrap="square" anchor="t">
+            <a:spAutoFit/>
+          </a:bodyPr>
+          <a:lstStyle/>
+          <a:p>
+            <a:pPr>
+              <a:spcAft>
+                <a:spcPts val="400"/>
+              </a:spcAft>
+            </a:pPr>
+            <a:r>
+              <a:rPr sz="1700" b="0">
+                <a:solidFill>
+                  <a:srgbClr val="808080"/>
+                </a:solidFill>
+                <a:latin typeface="Times New Roman"/>
+              </a:rPr>
+              <a:t>Firmware must know the clock too: </a:t>
+            </a:r>
+            <a:r>
+              <a:rPr sz="1500" b="0">
+                <a:solidFill>
+                  <a:srgbClr val="8B1A1A"/>
+                </a:solidFill>
+                <a:latin typeface="Consolas"/>
+              </a:rPr>
+              <a:t>PERF_CPU_HZ</a:t>
+            </a:r>
+            <a:r>
+              <a:rPr sz="1700" b="0">
+                <a:solidFill>
+                  <a:srgbClr val="808080"/>
+                </a:solidFill>
+                <a:latin typeface="Times New Roman"/>
+              </a:rPr>
+              <a:t> / </a:t>
+            </a:r>
+            <a:r>
+              <a:rPr sz="1500" b="0">
+                <a:solidFill>
+                  <a:srgbClr val="8B1A1A"/>
+                </a:solidFill>
+                <a:latin typeface="Consolas"/>
+              </a:rPr>
+              <a:t>F_CPU</a:t>
+            </a:r>
+            <a:r>
+              <a:rPr sz="1700" b="0">
+                <a:solidFill>
+                  <a:srgbClr val="808080"/>
+                </a:solidFill>
+                <a:latin typeface="Times New Roman"/>
+              </a:rPr>
+              <a:t> = 75000000 (UART divider, SPI dividers, timing reports).</a:t>
+            </a:r>
+          </a:p>
+        </p:txBody>
+      </p:sp>
+    </p:spTree>
+  </p:cSld>
+  <p:clrMapOvr>
+    <a:masterClrMapping/>
+  </p:clrMapOvr>
+</p:sld>
+</file>
+
+<file path=ppt/slides/slide34.xml><?xml version="1.0" encoding="utf-8"?>
+<p:sld xmlns:a="http://schemas.openxmlformats.org/drawingml/2006/main" xmlns:p="http://schemas.openxmlformats.org/presentationml/2006/main" xmlns:r="http://schemas.openxmlformats.org/officeDocument/2006/relationships">
+  <p:cSld>
+    <p:spTree>
+      <p:nvGrpSpPr>
+        <p:cNvPr id="1" name=""/>
+        <p:cNvGrpSpPr/>
+        <p:nvPr/>
+      </p:nvGrpSpPr>
+      <p:grpSpPr/>
+      <p:sp>
+        <p:nvSpPr>
+          <p:cNvPr id="10" name="CustomShape 6">
+            <a:extLst>
+              <a:ext uri="{FF2B5EF4-FFF2-40B4-BE49-F238E27FC236}">
+                <a16:creationId xmlns:a16="http://schemas.microsoft.com/office/drawing/2014/main" id="{CB76DC60-C0C9-436D-8956-EE4CA394869E}"/>
+              </a:ext>
+            </a:extLst>
+          </p:cNvPr>
+          <p:cNvSpPr/>
+          <p:nvPr/>
+        </p:nvSpPr>
+        <p:spPr>
+          <a:xfrm>
+            <a:off x="-6000" y="0"/>
+            <a:ext cx="12198000" cy="644877"/>
+          </a:xfrm>
+          <a:prstGeom prst="rect">
+            <a:avLst/>
+          </a:prstGeom>
+          <a:solidFill>
+            <a:schemeClr val="accent6">
+              <a:lumMod val="40000"/>
+              <a:lumOff val="60000"/>
+            </a:schemeClr>
+          </a:solidFill>
+          <a:ln>
+            <a:noFill/>
+          </a:ln>
+        </p:spPr>
+        <p:style>
+          <a:lnRef idx="0">
+            <a:scrgbClr r="0" g="0" b="0"/>
+          </a:lnRef>
+          <a:fillRef idx="0">
+            <a:scrgbClr r="0" g="0" b="0"/>
+          </a:fillRef>
+          <a:effectRef idx="0">
+            <a:scrgbClr r="0" g="0" b="0"/>
+          </a:effectRef>
+          <a:fontRef idx="minor"/>
+        </p:style>
+        <p:txBody>
+          <a:bodyPr wrap="square" lIns="90000" tIns="45000" rIns="90000" bIns="45000">
+            <a:spAutoFit/>
+          </a:bodyPr>
+          <a:lstStyle/>
+          <a:p>
+            <a:pPr marL="360" algn="ctr">
+              <a:lnSpc>
+                <a:spcPct val="100000"/>
+              </a:lnSpc>
+              <a:buClr>
+                <a:srgbClr val="000000"/>
+              </a:buClr>
+            </a:pPr>
+            <a:r>
+              <a:rPr lang="en-US" sz="3600" b="1" spc="-1" dirty="0">
+                <a:latin typeface="Times New Roman" panose="02020603050405020304" pitchFamily="18" charset="0"/>
+                <a:cs typeface="Times New Roman" panose="02020603050405020304" pitchFamily="18" charset="0"/>
+              </a:rPr>
+              <a:t>3. SoC Configuration </a:t>
+            </a:r>
+            <a:r>
+              <a:rPr lang="en-US" sz="3600" spc="-1" dirty="0">
+                <a:latin typeface="Times New Roman" panose="02020603050405020304" pitchFamily="18" charset="0"/>
+                <a:cs typeface="Times New Roman" panose="02020603050405020304" pitchFamily="18" charset="0"/>
+              </a:rPr>
+              <a:t>(7/7) Boot ROM rebuilt for RV64</a:t>
+            </a:r>
+          </a:p>
+        </p:txBody>
+      </p:sp>
+      <p:sp>
+        <p:nvSpPr>
+          <p:cNvPr id="62" name="CustomShape 2"/>
+          <p:cNvSpPr/>
+          <p:nvPr/>
+        </p:nvSpPr>
+        <p:spPr>
+          <a:xfrm>
+            <a:off x="11291400" y="6492960"/>
+            <a:ext cx="894600" cy="358920"/>
+          </a:xfrm>
+          <a:prstGeom prst="rect">
+            <a:avLst/>
+          </a:prstGeom>
+          <a:noFill/>
+          <a:ln>
+            <a:noFill/>
+          </a:ln>
+        </p:spPr>
+        <p:style>
+          <a:lnRef idx="0">
+            <a:scrgbClr r="0" g="0" b="0"/>
+          </a:lnRef>
+          <a:fillRef idx="0">
+            <a:scrgbClr r="0" g="0" b="0"/>
+          </a:fillRef>
+          <a:effectRef idx="0">
+            <a:scrgbClr r="0" g="0" b="0"/>
+          </a:effectRef>
+          <a:fontRef idx="minor"/>
+        </p:style>
+        <p:txBody>
+          <a:bodyPr lIns="90000" tIns="45000" rIns="90000" bIns="45000" anchor="ctr">
+            <a:noAutofit/>
+          </a:bodyPr>
+          <a:lstStyle/>
+          <a:p>
+            <a:pPr algn="ctr">
+              <a:lnSpc>
+                <a:spcPct val="100000"/>
+              </a:lnSpc>
+            </a:pPr>
+            <a:fld id="{32452110-F6D1-439F-92C4-7A3912DA20B0}" type="slidenum">
+              <a:rPr lang="en-US" sz="1600" b="1" strike="noStrike" spc="-1">
+                <a:solidFill>
+                  <a:srgbClr val="000000"/>
+                </a:solidFill>
+                <a:latin typeface="Times New Roman"/>
+                <a:ea typeface="DejaVu Sans"/>
+              </a:rPr>
+              <a:t>28</a:t>
+            </a:fld>
+            <a:endParaRPr lang="en-US" sz="1600" b="0" strike="noStrike" spc="-1">
+              <a:latin typeface="Arial"/>
+            </a:endParaRPr>
+          </a:p>
+        </p:txBody>
+      </p:sp>
+      <p:sp>
+        <p:nvSpPr>
+          <p:cNvPr id="63" name="Rectangle 62"/>
+          <p:cNvSpPr/>
+          <p:nvPr/>
+        </p:nvSpPr>
+        <p:spPr>
+          <a:xfrm>
+            <a:off x="365760" y="868680"/>
+            <a:ext cx="11430000" cy="2416810"/>
+          </a:xfrm>
+          <a:prstGeom prst="rect">
+            <a:avLst/>
+          </a:prstGeom>
+          <a:solidFill>
+            <a:srgbClr val="F4F4F4"/>
+          </a:solidFill>
+          <a:ln>
+            <a:solidFill>
+              <a:srgbClr val="C8C8C8"/>
+            </a:solidFill>
+          </a:ln>
+          <a:effectLst/>
+        </p:spPr>
+        <p:style>
+          <a:lnRef idx="1">
+            <a:schemeClr val="accent1"/>
+          </a:lnRef>
+          <a:fillRef idx="3">
+            <a:schemeClr val="accent1"/>
+          </a:fillRef>
+          <a:effectRef idx="2">
+            <a:schemeClr val="accent1"/>
+          </a:effectRef>
+          <a:fontRef idx="minor">
+            <a:schemeClr val="lt1"/>
+          </a:fontRef>
+        </p:style>
+        <p:txBody>
+          <a:bodyPr rtlCol="0" anchor="t" wrap="none" lIns="73152" rIns="73152" tIns="73152" bIns="73152"/>
+          <a:lstStyle/>
+          <a:p>
+            <a:pPr algn="l"/>
+            <a:r>
+              <a:rPr sz="1300" b="1">
+                <a:solidFill>
+                  <a:srgbClr val="808080"/>
+                </a:solidFill>
+                <a:latin typeface="Consolas"/>
+              </a:rPr>
+              <a:t>fpga/src/main/scala/arty100t/Configs.scala</a:t>
+            </a:r>
+          </a:p>
+          <a:p>
+            <a:pPr algn="l">
+              <a:lnSpc>
+                <a:spcPct val="100000"/>
+              </a:lnSpc>
+            </a:pPr>
+            <a:r>
+              <a:rPr sz="1300">
+                <a:solidFill>
+                  <a:srgbClr val="1F1F1F"/>
+                </a:solidFill>
+                <a:latin typeface="Consolas"/>
+              </a:rPr>
+              <a:t>class WithSystemModifications extends Config((site, here, up) =&gt; {</a:t>
+            </a:r>
+          </a:p>
+          <a:p>
+            <a:pPr algn="l">
+              <a:lnSpc>
+                <a:spcPct val="100000"/>
+              </a:lnSpc>
+            </a:pPr>
+            <a:r>
+              <a:rPr sz="1300">
+                <a:solidFill>
+                  <a:srgbClr val="1F1F1F"/>
+                </a:solidFill>
+                <a:latin typeface="Consolas"/>
+              </a:rPr>
+              <a:t>  case BootROMLocated(x) =&gt; up(BootROMLocated(x), site).map{ p =&gt;</a:t>
+            </a:r>
+          </a:p>
+          <a:p>
+            <a:pPr algn="l">
+              <a:lnSpc>
+                <a:spcPct val="100000"/>
+              </a:lnSpc>
+            </a:pPr>
+            <a:r>
+              <a:rPr sz="1300">
+                <a:solidFill>
+                  <a:srgbClr val="1F1F1F"/>
+                </a:solidFill>
+                <a:latin typeface="Consolas"/>
+              </a:rPr>
+              <a:t>    val freqMHz = (site(SystemBusKey).dtsFrequency.get / (1000 * 1000)).toLong</a:t>
+            </a:r>
+          </a:p>
+          <a:p>
+            <a:pPr algn="l">
+              <a:lnSpc>
+                <a:spcPct val="100000"/>
+              </a:lnSpc>
+            </a:pPr>
+            <a:r>
+              <a:rPr sz="1300">
+                <a:solidFill>
+                  <a:srgbClr val="1F1F1F"/>
+                </a:solidFill>
+                <a:latin typeface="Consolas"/>
+              </a:rPr>
+              <a:t>    val make = s"make -C fpga/src/main/resources/arty35t/sdboot " +</a:t>
+            </a:r>
+          </a:p>
+          <a:p>
+            <a:pPr algn="l">
+              <a:lnSpc>
+                <a:spcPct val="100000"/>
+              </a:lnSpc>
+            </a:pPr>
+            <a:r>
+              <a:rPr sz="1300">
+                <a:solidFill>
+                  <a:srgbClr val="1F1F1F"/>
+                </a:solidFill>
+                <a:latin typeface="Consolas"/>
+              </a:rPr>
+              <a:t>               s"XLEN=${site(XLen)} PBUS_CLK=${freqMHz}"</a:t>
+            </a:r>
+          </a:p>
+          <a:p>
+            <a:pPr algn="l">
+              <a:lnSpc>
+                <a:spcPct val="100000"/>
+              </a:lnSpc>
+            </a:pPr>
+            <a:r>
+              <a:rPr sz="1300">
+                <a:solidFill>
+                  <a:srgbClr val="1F1F1F"/>
+                </a:solidFill>
+                <a:latin typeface="Consolas"/>
+              </a:rPr>
+              <a:t>    require (make.! == 0, "Failed to build bootrom")</a:t>
+            </a:r>
+          </a:p>
+          <a:p>
+            <a:pPr algn="l">
+              <a:lnSpc>
+                <a:spcPct val="100000"/>
+              </a:lnSpc>
+            </a:pPr>
+            <a:r>
+              <a:rPr sz="1300">
+                <a:solidFill>
+                  <a:srgbClr val="1F1F1F"/>
+                </a:solidFill>
+                <a:latin typeface="Consolas"/>
+              </a:rPr>
+              <a:t>    p.copy(hang = 0x10000, size = 0x2000,</a:t>
+            </a:r>
+          </a:p>
+          <a:p>
+            <a:pPr algn="l">
+              <a:lnSpc>
+                <a:spcPct val="100000"/>
+              </a:lnSpc>
+            </a:pPr>
+            <a:r>
+              <a:rPr sz="1300">
+                <a:solidFill>
+                  <a:srgbClr val="1F1F1F"/>
+                </a:solidFill>
+                <a:latin typeface="Consolas"/>
+              </a:rPr>
+              <a:t>           contentFileName = s"./fpga/src/main/resources/arty35t/sdboot/build/sdboot.bin")</a:t>
+            </a:r>
+          </a:p>
+          <a:p>
+            <a:pPr algn="l">
+              <a:lnSpc>
+                <a:spcPct val="100000"/>
+              </a:lnSpc>
+            </a:pPr>
+            <a:r>
+              <a:rPr sz="1300">
+                <a:solidFill>
+                  <a:srgbClr val="1F1F1F"/>
+                </a:solidFill>
+                <a:latin typeface="Consolas"/>
+              </a:rPr>
+              <a:t>  }</a:t>
+            </a:r>
+          </a:p>
+          <a:p>
+            <a:pPr algn="l">
+              <a:lnSpc>
+                <a:spcPct val="100000"/>
+              </a:lnSpc>
+            </a:pPr>
+            <a:r>
+              <a:rPr sz="1300">
+                <a:solidFill>
+                  <a:srgbClr val="1F1F1F"/>
+                </a:solidFill>
+                <a:latin typeface="Consolas"/>
+              </a:rPr>
+              <a:t>  ...</a:t>
+            </a:r>
+          </a:p>
+        </p:txBody>
+      </p:sp>
+      <p:sp>
+        <p:nvSpPr>
+          <p:cNvPr id="64" name="TextBox 63"/>
+          <p:cNvSpPr txBox="1"/>
+          <p:nvPr/>
+        </p:nvSpPr>
+        <p:spPr>
+          <a:xfrm>
+            <a:off x="365760" y="3559809"/>
+            <a:ext cx="11430000" cy="2468880"/>
+          </a:xfrm>
+          <a:prstGeom prst="rect">
+            <a:avLst/>
+          </a:prstGeom>
+          <a:noFill/>
+        </p:spPr>
+        <p:txBody>
+          <a:bodyPr wrap="square" anchor="t">
+            <a:spAutoFit/>
+          </a:bodyPr>
+          <a:lstStyle/>
+          <a:p>
+            <a:pPr marL="256032" indent="-219456">
+              <a:spcAft>
+                <a:spcPts val="400"/>
+              </a:spcAft>
+              <a:buChar char="•"/>
+            </a:pPr>
+            <a:r>
+              <a:rPr sz="1900" b="0">
+                <a:solidFill>
+                  <a:srgbClr val="000000"/>
+                </a:solidFill>
+                <a:latin typeface="Times New Roman"/>
+              </a:rPr>
+              <a:t>Every bitstream build recompiles the boot ROM for the core width (</a:t>
+            </a:r>
+            <a:r>
+              <a:rPr sz="1700" b="0">
+                <a:solidFill>
+                  <a:srgbClr val="8B1A1A"/>
+                </a:solidFill>
+                <a:latin typeface="Consolas"/>
+              </a:rPr>
+              <a:t>XLEN=64</a:t>
+            </a:r>
+            <a:r>
+              <a:rPr sz="1900" b="0">
+                <a:solidFill>
+                  <a:srgbClr val="000000"/>
+                </a:solidFill>
+                <a:latin typeface="Times New Roman"/>
+              </a:rPr>
+              <a:t>) and the bus clock (</a:t>
+            </a:r>
+            <a:r>
+              <a:rPr sz="1700" b="0">
+                <a:solidFill>
+                  <a:srgbClr val="8B1A1A"/>
+                </a:solidFill>
+                <a:latin typeface="Consolas"/>
+              </a:rPr>
+              <a:t>PBUS_CLK=75</a:t>
+            </a:r>
+            <a:r>
+              <a:rPr sz="1900" b="0">
+                <a:solidFill>
+                  <a:srgbClr val="000000"/>
+                </a:solidFill>
+                <a:latin typeface="Times New Roman"/>
+              </a:rPr>
+              <a:t>).</a:t>
+            </a:r>
+          </a:p>
+          <a:p>
+            <a:pPr marL="256032" indent="-219456">
+              <a:spcAft>
+                <a:spcPts val="400"/>
+              </a:spcAft>
+              <a:buChar char="•"/>
+            </a:pPr>
+            <a:r>
+              <a:rPr sz="1900" b="0">
+                <a:solidFill>
+                  <a:srgbClr val="000000"/>
+                </a:solidFill>
+                <a:latin typeface="Times New Roman"/>
+              </a:rPr>
+              <a:t>At reset the boot ROM copies the firmware from the SD card (LBA 2048) into the scratchpad and jumps to 0x8000_0000.</a:t>
+            </a:r>
+          </a:p>
+          <a:p>
+            <a:pPr marL="256032" indent="-219456">
+              <a:spcAft>
+                <a:spcPts val="400"/>
+              </a:spcAft>
+              <a:buChar char="•"/>
+            </a:pPr>
+            <a:r>
+              <a:rPr sz="1900" b="0">
+                <a:solidFill>
+                  <a:srgbClr val="000000"/>
+                </a:solidFill>
+                <a:latin typeface="Times New Roman"/>
+              </a:rPr>
+              <a:t>During development you can skip it: firmware is loaded over JTAG in seconds (section 6).</a:t>
+            </a:r>
+          </a:p>
+        </p:txBody>
+      </p:sp>
+    </p:spTree>
+  </p:cSld>
+  <p:clrMapOvr>
+    <a:masterClrMapping/>
+  </p:clrMapOvr>
+</p:sld>
+</file>
+
+<file path=ppt/slides/slide35.xml><?xml version="1.0" encoding="utf-8"?>
+<p:sld xmlns:a="http://schemas.openxmlformats.org/drawingml/2006/main" xmlns:p="http://schemas.openxmlformats.org/presentationml/2006/main" xmlns:r="http://schemas.openxmlformats.org/officeDocument/2006/relationships">
+  <p:cSld>
+    <p:spTree>
+      <p:nvGrpSpPr>
+        <p:cNvPr id="1" name=""/>
+        <p:cNvGrpSpPr/>
+        <p:nvPr/>
+      </p:nvGrpSpPr>
+      <p:grpSpPr/>
+      <p:sp>
+        <p:nvSpPr>
+          <p:cNvPr id="41" name="CustomShape 3"/>
+          <p:cNvSpPr/>
+          <p:nvPr/>
+        </p:nvSpPr>
+        <p:spPr>
+          <a:xfrm>
+            <a:off x="0" y="1277373"/>
+            <a:ext cx="12186000" cy="1014209"/>
+          </a:xfrm>
+          <a:prstGeom prst="rect">
+            <a:avLst/>
+          </a:prstGeom>
+          <a:noFill/>
+          <a:ln>
+            <a:noFill/>
+          </a:ln>
+        </p:spPr>
+        <p:style>
+          <a:lnRef idx="0">
+            <a:scrgbClr r="0" g="0" b="0"/>
+          </a:lnRef>
+          <a:fillRef idx="0">
+            <a:scrgbClr r="0" g="0" b="0"/>
+          </a:fillRef>
+          <a:effectRef idx="0">
+            <a:scrgbClr r="0" g="0" b="0"/>
+          </a:effectRef>
+          <a:fontRef idx="minor"/>
+        </p:style>
+        <p:txBody>
+          <a:bodyPr wrap="square" lIns="90000" tIns="45000" rIns="90000" bIns="45000">
+            <a:spAutoFit/>
+          </a:bodyPr>
+          <a:lstStyle/>
+          <a:p>
+            <a:pPr algn="ctr">
+              <a:lnSpc>
+                <a:spcPct val="100000"/>
+              </a:lnSpc>
+            </a:pPr>
+            <a:r>
+              <a:rPr lang="en-US" sz="6000" b="0" strike="noStrike" spc="-1" dirty="0">
+                <a:solidFill>
+                  <a:srgbClr val="000000"/>
+                </a:solidFill>
+                <a:latin typeface="Times New Roman"/>
+                <a:ea typeface="DejaVu Sans"/>
+              </a:rPr>
+              <a:t>Outline</a:t>
+            </a:r>
+            <a:endParaRPr lang="en-US" sz="6000" b="0" strike="noStrike" spc="-1" dirty="0">
+              <a:latin typeface="Arial"/>
+            </a:endParaRPr>
+          </a:p>
+        </p:txBody>
+      </p:sp>
+      <p:sp>
+        <p:nvSpPr>
+          <p:cNvPr id="42" name="CustomShape 4"/>
+          <p:cNvSpPr/>
+          <p:nvPr/>
+        </p:nvSpPr>
+        <p:spPr>
+          <a:xfrm>
+            <a:off x="6972480" y="105480"/>
+            <a:ext cx="5213520" cy="1110240"/>
+          </a:xfrm>
+          <a:prstGeom prst="rect">
+            <a:avLst/>
+          </a:prstGeom>
+          <a:solidFill>
+            <a:schemeClr val="bg2">
+              <a:lumMod val="75000"/>
+            </a:schemeClr>
+          </a:solidFill>
+          <a:ln>
+            <a:noFill/>
+          </a:ln>
+        </p:spPr>
+        <p:style>
+          <a:lnRef idx="2">
+            <a:schemeClr val="accent1">
+              <a:shade val="50000"/>
+            </a:schemeClr>
+          </a:lnRef>
+          <a:fillRef idx="1">
+            <a:schemeClr val="accent1"/>
+          </a:fillRef>
+          <a:effectRef idx="0">
+            <a:schemeClr val="accent1"/>
+          </a:effectRef>
+          <a:fontRef idx="minor"/>
+        </p:style>
+        <p:txBody>
+          <a:bodyPr/>
+          <a:lstStyle/>
+          <a:p>
+            <a:endParaRPr lang="en-US"/>
+          </a:p>
+        </p:txBody>
+      </p:sp>
+      <p:pic>
+        <p:nvPicPr>
+          <p:cNvPr id="43" name="Picture 4" descr="http://vlsilab.ee.uec.ac.jp/images/logo.png"/>
+          <p:cNvPicPr/>
+          <p:nvPr/>
+        </p:nvPicPr>
+        <p:blipFill>
+          <a:blip r:embed="rId2"/>
+          <a:stretch/>
+        </p:blipFill>
+        <p:spPr>
+          <a:xfrm>
+            <a:off x="7713720" y="152280"/>
+            <a:ext cx="3730320" cy="1035720"/>
+          </a:xfrm>
+          <a:prstGeom prst="rect">
+            <a:avLst/>
+          </a:prstGeom>
+          <a:ln>
+            <a:noFill/>
+          </a:ln>
+        </p:spPr>
+      </p:pic>
+      <p:sp>
+        <p:nvSpPr>
+          <p:cNvPr id="45" name="CustomShape 6"/>
+          <p:cNvSpPr/>
+          <p:nvPr/>
+        </p:nvSpPr>
+        <p:spPr>
+          <a:xfrm>
+            <a:off x="11291400" y="6492960"/>
+            <a:ext cx="894600" cy="358920"/>
+          </a:xfrm>
+          <a:prstGeom prst="rect">
+            <a:avLst/>
+          </a:prstGeom>
+          <a:noFill/>
+          <a:ln>
+            <a:noFill/>
+          </a:ln>
+        </p:spPr>
+        <p:style>
+          <a:lnRef idx="0">
+            <a:scrgbClr r="0" g="0" b="0"/>
+          </a:lnRef>
+          <a:fillRef idx="0">
+            <a:scrgbClr r="0" g="0" b="0"/>
+          </a:fillRef>
+          <a:effectRef idx="0">
+            <a:scrgbClr r="0" g="0" b="0"/>
+          </a:effectRef>
+          <a:fontRef idx="minor"/>
+        </p:style>
+        <p:txBody>
+          <a:bodyPr lIns="90000" tIns="45000" rIns="90000" bIns="45000" anchor="ctr">
+            <a:noAutofit/>
+          </a:bodyPr>
+          <a:lstStyle/>
+          <a:p>
+            <a:pPr algn="ctr">
+              <a:lnSpc>
+                <a:spcPct val="100000"/>
+              </a:lnSpc>
+            </a:pPr>
+            <a:fld id="{976D1C0D-8C0B-4FED-8F9E-AAED3AF2BED7}" type="slidenum">
+              <a:rPr lang="en-US" sz="1600" b="1" strike="noStrike" spc="-1">
+                <a:solidFill>
+                  <a:srgbClr val="000000"/>
+                </a:solidFill>
+                <a:latin typeface="Times New Roman"/>
+                <a:ea typeface="DejaVu Sans"/>
+              </a:rPr>
+              <a:t>29</a:t>
+            </a:fld>
+            <a:endParaRPr lang="en-US" sz="1600" b="0" strike="noStrike" spc="-1">
+              <a:latin typeface="Arial"/>
+            </a:endParaRPr>
+          </a:p>
+        </p:txBody>
+      </p:sp>
+      <p:sp>
+        <p:nvSpPr>
+          <p:cNvPr id="10" name="CustomShape 3">
+            <a:extLst>
+              <a:ext uri="{FF2B5EF4-FFF2-40B4-BE49-F238E27FC236}">
+                <a16:creationId xmlns:a16="http://schemas.microsoft.com/office/drawing/2014/main" id="{F22CA456-F1E3-4191-9864-00187BF37E54}"/>
+              </a:ext>
+            </a:extLst>
+          </p:cNvPr>
+          <p:cNvSpPr/>
+          <p:nvPr/>
+        </p:nvSpPr>
+        <p:spPr>
+          <a:xfrm>
+            <a:off x="402300" y="2353236"/>
+            <a:ext cx="11381400" cy="2553091"/>
+          </a:xfrm>
+          <a:prstGeom prst="rect">
+            <a:avLst/>
+          </a:prstGeom>
+          <a:noFill/>
+          <a:ln>
+            <a:noFill/>
+          </a:ln>
+        </p:spPr>
+        <p:style>
+          <a:lnRef idx="0">
+            <a:scrgbClr r="0" g="0" b="0"/>
+          </a:lnRef>
+          <a:fillRef idx="0">
+            <a:scrgbClr r="0" g="0" b="0"/>
+          </a:fillRef>
+          <a:effectRef idx="0">
+            <a:scrgbClr r="0" g="0" b="0"/>
+          </a:effectRef>
+          <a:fontRef idx="minor"/>
+        </p:style>
+        <p:txBody>
+          <a:bodyPr wrap="square" lIns="90000" tIns="45000" rIns="90000" bIns="45000">
+            <a:spAutoFit/>
+          </a:bodyPr>
+          <a:lstStyle/>
+          <a:p>
+            <a:pPr marL="1143000" indent="-1143000">
+              <a:lnSpc>
+                <a:spcPct val="100000"/>
+              </a:lnSpc>
+              <a:buFont typeface="+mj-lt"/>
+              <a:buAutoNum type="arabicPeriod"/>
+            </a:pPr>
+            <a:r>
+              <a:rPr lang="en-US" sz="2800" spc="-1" dirty="0" err="1" b="0">
+                <a:solidFill>
+                  <a:srgbClr val="808080"/>
+                </a:solidFill>
+                <a:latin typeface="Times New Roman" panose="02020603050405020304" pitchFamily="18" charset="0"/>
+                <a:ea typeface="DejaVu Sans"/>
+                <a:cs typeface="Times New Roman" panose="02020603050405020304" pitchFamily="18" charset="0"/>
+              </a:rPr>
+              <a:t>Start Here</a:t>
+            </a:r>
+            <a:endParaRPr lang="en-US" sz="4000" b="0" strike="noStrike" spc="-1" dirty="0">
+              <a:solidFill>
+                <a:srgbClr val="000000"/>
+              </a:solidFill>
+              <a:latin typeface="Times New Roman" panose="02020603050405020304" pitchFamily="18" charset="0"/>
+              <a:ea typeface="DejaVu Sans"/>
+              <a:cs typeface="Times New Roman" panose="02020603050405020304" pitchFamily="18" charset="0"/>
+            </a:endParaRPr>
+          </a:p>
+          <a:p>
+            <a:pPr marL="1143000" indent="-1143000">
+              <a:lnSpc>
+                <a:spcPct val="100000"/>
+              </a:lnSpc>
+              <a:buFont typeface="+mj-lt"/>
+              <a:buAutoNum type="arabicPeriod"/>
+            </a:pPr>
+            <a:r>
+              <a:rPr lang="en-US" sz="2800" spc="-1" dirty="0" err="1" b="0">
+                <a:solidFill>
+                  <a:srgbClr val="808080"/>
+                </a:solidFill>
+                <a:latin typeface="Times New Roman" panose="02020603050405020304" pitchFamily="18" charset="0"/>
+                <a:ea typeface="DejaVu Sans"/>
+                <a:cs typeface="Times New Roman" panose="02020603050405020304" pitchFamily="18" charset="0"/>
+              </a:rPr>
+              <a:t>The System You Will Build</a:t>
+            </a:r>
+            <a:endParaRPr lang="en-US" sz="4000" b="0" strike="noStrike" spc="-1" dirty="0">
+              <a:solidFill>
+                <a:srgbClr val="000000"/>
+              </a:solidFill>
+              <a:latin typeface="Times New Roman" panose="02020603050405020304" pitchFamily="18" charset="0"/>
+              <a:ea typeface="DejaVu Sans"/>
+              <a:cs typeface="Times New Roman" panose="02020603050405020304" pitchFamily="18" charset="0"/>
+            </a:endParaRPr>
+          </a:p>
+          <a:p>
+            <a:pPr marL="1143000" indent="-1143000">
+              <a:lnSpc>
+                <a:spcPct val="100000"/>
+              </a:lnSpc>
+              <a:buFont typeface="+mj-lt"/>
+              <a:buAutoNum type="arabicPeriod"/>
+            </a:pPr>
+            <a:r>
+              <a:rPr lang="en-US" sz="2800" spc="-1" dirty="0" err="1" b="0">
+                <a:solidFill>
+                  <a:srgbClr val="808080"/>
+                </a:solidFill>
+                <a:latin typeface="Times New Roman" panose="02020603050405020304" pitchFamily="18" charset="0"/>
+                <a:ea typeface="DejaVu Sans"/>
+                <a:cs typeface="Times New Roman" panose="02020603050405020304" pitchFamily="18" charset="0"/>
+              </a:rPr>
+              <a:t>SoC Configuration</a:t>
+            </a:r>
+            <a:endParaRPr lang="en-US" sz="4000" b="0" strike="noStrike" spc="-1" dirty="0">
+              <a:solidFill>
+                <a:srgbClr val="000000"/>
+              </a:solidFill>
+              <a:latin typeface="Times New Roman" panose="02020603050405020304" pitchFamily="18" charset="0"/>
+              <a:ea typeface="DejaVu Sans"/>
+              <a:cs typeface="Times New Roman" panose="02020603050405020304" pitchFamily="18" charset="0"/>
+            </a:endParaRPr>
+          </a:p>
+          <a:p>
+            <a:pPr marL="1143000" indent="-1143000">
+              <a:lnSpc>
+                <a:spcPct val="100000"/>
+              </a:lnSpc>
+              <a:buFont typeface="+mj-lt"/>
+              <a:buAutoNum type="arabicPeriod"/>
+            </a:pPr>
+            <a:r>
+              <a:rPr lang="en-US" sz="2800" spc="-1" dirty="0" err="1" b="1">
+                <a:solidFill>
+                  <a:srgbClr val="37863C"/>
+                </a:solidFill>
+                <a:latin typeface="Times New Roman" panose="02020603050405020304" pitchFamily="18" charset="0"/>
+                <a:ea typeface="DejaVu Sans"/>
+                <a:cs typeface="Times New Roman" panose="02020603050405020304" pitchFamily="18" charset="0"/>
+              </a:rPr>
+              <a:t>FPGA Pins &amp; Harness</a:t>
+            </a:r>
+            <a:endParaRPr lang="en-US" sz="4000" b="0" strike="noStrike" spc="-1" dirty="0">
+              <a:solidFill>
+                <a:srgbClr val="000000"/>
+              </a:solidFill>
+              <a:latin typeface="Times New Roman" panose="02020603050405020304" pitchFamily="18" charset="0"/>
+              <a:ea typeface="DejaVu Sans"/>
+              <a:cs typeface="Times New Roman" panose="02020603050405020304" pitchFamily="18" charset="0"/>
+            </a:endParaRPr>
+          </a:p>
+          <a:p>
+            <a:pPr marL="1143000" indent="-1143000">
+              <a:lnSpc>
+                <a:spcPct val="100000"/>
+              </a:lnSpc>
+              <a:buFont typeface="+mj-lt"/>
+              <a:buAutoNum type="arabicPeriod"/>
+            </a:pPr>
+            <a:r>
+              <a:rPr lang="en-US" sz="2800" spc="-1" dirty="0" err="1" b="0">
+                <a:solidFill>
+                  <a:srgbClr val="808080"/>
+                </a:solidFill>
+                <a:latin typeface="Times New Roman" panose="02020603050405020304" pitchFamily="18" charset="0"/>
+                <a:ea typeface="DejaVu Sans"/>
+                <a:cs typeface="Times New Roman" panose="02020603050405020304" pitchFamily="18" charset="0"/>
+              </a:rPr>
+              <a:t>Build &amp; Timing Closure</a:t>
+            </a:r>
+            <a:endParaRPr lang="en-US" sz="4000" b="0" strike="noStrike" spc="-1" dirty="0">
+              <a:solidFill>
+                <a:srgbClr val="000000"/>
+              </a:solidFill>
+              <a:latin typeface="Times New Roman" panose="02020603050405020304" pitchFamily="18" charset="0"/>
+              <a:ea typeface="DejaVu Sans"/>
+              <a:cs typeface="Times New Roman" panose="02020603050405020304" pitchFamily="18" charset="0"/>
+            </a:endParaRPr>
+          </a:p>
+          <a:p>
+            <a:pPr marL="1143000" indent="-1143000">
+              <a:lnSpc>
+                <a:spcPct val="100000"/>
+              </a:lnSpc>
+              <a:buFont typeface="+mj-lt"/>
+              <a:buAutoNum type="arabicPeriod"/>
+            </a:pPr>
+            <a:r>
+              <a:rPr lang="en-US" sz="2800" spc="-1" dirty="0" err="1" b="0">
+                <a:solidFill>
+                  <a:srgbClr val="808080"/>
+                </a:solidFill>
+                <a:latin typeface="Times New Roman" panose="02020603050405020304" pitchFamily="18" charset="0"/>
+                <a:ea typeface="DejaVu Sans"/>
+                <a:cs typeface="Times New Roman" panose="02020603050405020304" pitchFamily="18" charset="0"/>
+              </a:rPr>
+              <a:t>Programming &amp; Bring-up</a:t>
+            </a:r>
+            <a:endParaRPr lang="en-US" sz="4000" b="0" strike="noStrike" spc="-1" dirty="0">
+              <a:solidFill>
+                <a:srgbClr val="000000"/>
+              </a:solidFill>
+              <a:latin typeface="Times New Roman" panose="02020603050405020304" pitchFamily="18" charset="0"/>
+              <a:ea typeface="DejaVu Sans"/>
+              <a:cs typeface="Times New Roman" panose="02020603050405020304" pitchFamily="18" charset="0"/>
+            </a:endParaRPr>
+          </a:p>
+          <a:p>
+            <a:pPr marL="1143000" indent="-1143000">
+              <a:lnSpc>
+                <a:spcPct val="100000"/>
+              </a:lnSpc>
+              <a:buFont typeface="+mj-lt"/>
+              <a:buAutoNum type="arabicPeriod"/>
+            </a:pPr>
+            <a:r>
+              <a:rPr lang="en-US" sz="2800" spc="-1" dirty="0" err="1" b="0">
+                <a:solidFill>
+                  <a:srgbClr val="808080"/>
+                </a:solidFill>
+                <a:latin typeface="Times New Roman" panose="02020603050405020304" pitchFamily="18" charset="0"/>
+                <a:ea typeface="DejaVu Sans"/>
+                <a:cs typeface="Times New Roman" panose="02020603050405020304" pitchFamily="18" charset="0"/>
+              </a:rPr>
+              <a:t>Practice</a:t>
+            </a:r>
+            <a:endParaRPr lang="en-US" sz="4000" b="0" strike="noStrike" spc="-1" dirty="0">
+              <a:solidFill>
+                <a:srgbClr val="000000"/>
+              </a:solidFill>
+              <a:latin typeface="Times New Roman" panose="02020603050405020304" pitchFamily="18" charset="0"/>
+              <a:ea typeface="DejaVu Sans"/>
+              <a:cs typeface="Times New Roman" panose="02020603050405020304" pitchFamily="18" charset="0"/>
+            </a:endParaRPr>
+          </a:p>
+        </p:txBody>
+      </p:sp>
+      <p:pic>
+        <p:nvPicPr>
+          <p:cNvPr id="2" name="Picture 1">
+            <a:extLst>
+              <a:ext uri="{FF2B5EF4-FFF2-40B4-BE49-F238E27FC236}">
+                <a16:creationId xmlns:a16="http://schemas.microsoft.com/office/drawing/2014/main" id="{B2A62998-F8D0-DAA3-4400-008D3F20B2EE}"/>
+              </a:ext>
+            </a:extLst>
+          </p:cNvPr>
+          <p:cNvPicPr>
+            <a:picLocks noChangeAspect="1"/>
+          </p:cNvPicPr>
+          <p:nvPr/>
+        </p:nvPicPr>
+        <p:blipFill>
+          <a:blip r:embed="rId3">
+            <a:extLst>
+              <a:ext uri="{28A0092B-C50C-407E-A947-70E740481C1C}">
+                <a14:useLocalDpi xmlns:a14="http://schemas.microsoft.com/office/drawing/2010/main" val="0"/>
+              </a:ext>
+            </a:extLst>
+          </a:blip>
+          <a:stretch>
+            <a:fillRect/>
+          </a:stretch>
+        </p:blipFill>
+        <p:spPr>
+          <a:xfrm>
+            <a:off x="-6000" y="0"/>
+            <a:ext cx="5213520" cy="1363335"/>
+          </a:xfrm>
+          <a:prstGeom prst="rect">
+            <a:avLst/>
+          </a:prstGeom>
+        </p:spPr>
+      </p:pic>
+    </p:spTree>
+  </p:cSld>
+  <p:clrMapOvr>
+    <a:masterClrMapping/>
+  </p:clrMapOvr>
+</p:sld>
+</file>
+
+<file path=ppt/slides/slide36.xml><?xml version="1.0" encoding="utf-8"?>
+<p:sld xmlns:a="http://schemas.openxmlformats.org/drawingml/2006/main" xmlns:p="http://schemas.openxmlformats.org/presentationml/2006/main" xmlns:r="http://schemas.openxmlformats.org/officeDocument/2006/relationships">
+  <p:cSld>
+    <p:spTree>
+      <p:nvGrpSpPr>
+        <p:cNvPr id="1" name=""/>
+        <p:cNvGrpSpPr/>
+        <p:nvPr/>
+      </p:nvGrpSpPr>
+      <p:grpSpPr/>
+      <p:sp>
+        <p:nvSpPr>
+          <p:cNvPr id="10" name="CustomShape 6">
+            <a:extLst>
+              <a:ext uri="{FF2B5EF4-FFF2-40B4-BE49-F238E27FC236}">
+                <a16:creationId xmlns:a16="http://schemas.microsoft.com/office/drawing/2014/main" id="{CB76DC60-C0C9-436D-8956-EE4CA394869E}"/>
+              </a:ext>
+            </a:extLst>
+          </p:cNvPr>
+          <p:cNvSpPr/>
+          <p:nvPr/>
+        </p:nvSpPr>
+        <p:spPr>
+          <a:xfrm>
+            <a:off x="-6000" y="0"/>
+            <a:ext cx="12198000" cy="644877"/>
+          </a:xfrm>
+          <a:prstGeom prst="rect">
+            <a:avLst/>
+          </a:prstGeom>
+          <a:solidFill>
+            <a:schemeClr val="accent6">
+              <a:lumMod val="40000"/>
+              <a:lumOff val="60000"/>
+            </a:schemeClr>
+          </a:solidFill>
+          <a:ln>
+            <a:noFill/>
+          </a:ln>
+        </p:spPr>
+        <p:style>
+          <a:lnRef idx="0">
+            <a:scrgbClr r="0" g="0" b="0"/>
+          </a:lnRef>
+          <a:fillRef idx="0">
+            <a:scrgbClr r="0" g="0" b="0"/>
+          </a:fillRef>
+          <a:effectRef idx="0">
+            <a:scrgbClr r="0" g="0" b="0"/>
+          </a:effectRef>
+          <a:fontRef idx="minor"/>
+        </p:style>
+        <p:txBody>
+          <a:bodyPr wrap="square" lIns="90000" tIns="45000" rIns="90000" bIns="45000">
+            <a:spAutoFit/>
+          </a:bodyPr>
+          <a:lstStyle/>
+          <a:p>
+            <a:pPr marL="360" algn="ctr">
+              <a:lnSpc>
+                <a:spcPct val="100000"/>
+              </a:lnSpc>
+              <a:buClr>
+                <a:srgbClr val="000000"/>
+              </a:buClr>
+            </a:pPr>
+            <a:r>
+              <a:rPr lang="en-US" sz="3600" b="1" spc="-1" dirty="0">
+                <a:latin typeface="Times New Roman" panose="02020603050405020304" pitchFamily="18" charset="0"/>
+                <a:cs typeface="Times New Roman" panose="02020603050405020304" pitchFamily="18" charset="0"/>
+              </a:rPr>
+              <a:t>4. FPGA Pins &amp; Harness </a:t>
+            </a:r>
+            <a:r>
+              <a:rPr lang="en-US" sz="3600" spc="-1" dirty="0">
+                <a:latin typeface="Times New Roman" panose="02020603050405020304" pitchFamily="18" charset="0"/>
+                <a:cs typeface="Times New Roman" panose="02020603050405020304" pitchFamily="18" charset="0"/>
+              </a:rPr>
+              <a:t>(1/9) PMOD map</a:t>
+            </a:r>
+          </a:p>
+        </p:txBody>
+      </p:sp>
+      <p:sp>
+        <p:nvSpPr>
+          <p:cNvPr id="62" name="CustomShape 2"/>
+          <p:cNvSpPr/>
+          <p:nvPr/>
+        </p:nvSpPr>
+        <p:spPr>
+          <a:xfrm>
+            <a:off x="11291400" y="6492960"/>
+            <a:ext cx="894600" cy="358920"/>
+          </a:xfrm>
+          <a:prstGeom prst="rect">
+            <a:avLst/>
+          </a:prstGeom>
+          <a:noFill/>
+          <a:ln>
+            <a:noFill/>
+          </a:ln>
+        </p:spPr>
+        <p:style>
+          <a:lnRef idx="0">
+            <a:scrgbClr r="0" g="0" b="0"/>
+          </a:lnRef>
+          <a:fillRef idx="0">
+            <a:scrgbClr r="0" g="0" b="0"/>
+          </a:fillRef>
+          <a:effectRef idx="0">
+            <a:scrgbClr r="0" g="0" b="0"/>
+          </a:effectRef>
+          <a:fontRef idx="minor"/>
+        </p:style>
+        <p:txBody>
+          <a:bodyPr lIns="90000" tIns="45000" rIns="90000" bIns="45000" anchor="ctr">
+            <a:noAutofit/>
+          </a:bodyPr>
+          <a:lstStyle/>
+          <a:p>
+            <a:pPr algn="ctr">
+              <a:lnSpc>
+                <a:spcPct val="100000"/>
+              </a:lnSpc>
+            </a:pPr>
+            <a:fld id="{32452110-F6D1-439F-92C4-7A3912DA20B0}" type="slidenum">
+              <a:rPr lang="en-US" sz="1600" b="1" strike="noStrike" spc="-1">
+                <a:solidFill>
+                  <a:srgbClr val="000000"/>
+                </a:solidFill>
+                <a:latin typeface="Times New Roman"/>
+                <a:ea typeface="DejaVu Sans"/>
+              </a:rPr>
+              <a:t>30</a:t>
             </a:fld>
             <a:endParaRPr lang="en-US" sz="1600" b="0" strike="noStrike" spc="-1">
               <a:latin typeface="Arial"/>
@@ -23759,7 +25290,7 @@
 </p:sld>
 </file>
 
-<file path=ppt/slides/slide34.xml><?xml version="1.0" encoding="utf-8"?>
+<file path=ppt/slides/slide37.xml><?xml version="1.0" encoding="utf-8"?>
 <p:sld xmlns:a="http://schemas.openxmlformats.org/drawingml/2006/main" xmlns:p="http://schemas.openxmlformats.org/presentationml/2006/main" xmlns:r="http://schemas.openxmlformats.org/officeDocument/2006/relationships">
   <p:cSld>
     <p:spTree>
@@ -23892,7 +25423,7 @@
                 <a:latin typeface="Times New Roman"/>
                 <a:ea typeface="DejaVu Sans"/>
               </a:rPr>
-              <a:t>28</a:t>
+              <a:t>31</a:t>
             </a:fld>
             <a:endParaRPr lang="en-US" sz="1600" b="0" strike="noStrike" spc="-1">
               <a:latin typeface="Arial"/>
@@ -25143,7 +26674,7 @@
 </p:sld>
 </file>
 
-<file path=ppt/slides/slide35.xml><?xml version="1.0" encoding="utf-8"?>
+<file path=ppt/slides/slide38.xml><?xml version="1.0" encoding="utf-8"?>
 <p:sld xmlns:a="http://schemas.openxmlformats.org/drawingml/2006/main" xmlns:p="http://schemas.openxmlformats.org/presentationml/2006/main" xmlns:r="http://schemas.openxmlformats.org/officeDocument/2006/relationships">
   <p:cSld>
     <p:spTree>
@@ -25276,7 +26807,7 @@
                 <a:latin typeface="Times New Roman"/>
                 <a:ea typeface="DejaVu Sans"/>
               </a:rPr>
-              <a:t>29</a:t>
+              <a:t>32</a:t>
             </a:fld>
             <a:endParaRPr lang="en-US" sz="1600" b="0" strike="noStrike" spc="-1">
               <a:latin typeface="Arial"/>
@@ -26057,7 +27588,7 @@
 </p:sld>
 </file>
 
-<file path=ppt/slides/slide36.xml><?xml version="1.0" encoding="utf-8"?>
+<file path=ppt/slides/slide39.xml><?xml version="1.0" encoding="utf-8"?>
 <p:sld xmlns:a="http://schemas.openxmlformats.org/drawingml/2006/main" xmlns:p="http://schemas.openxmlformats.org/presentationml/2006/main" xmlns:r="http://schemas.openxmlformats.org/officeDocument/2006/relationships">
   <p:cSld>
     <p:spTree>
@@ -26190,7 +27721,7 @@
                 <a:latin typeface="Times New Roman"/>
                 <a:ea typeface="DejaVu Sans"/>
               </a:rPr>
-              <a:t>30</a:t>
+              <a:t>33</a:t>
             </a:fld>
             <a:endParaRPr lang="en-US" sz="1600" b="0" strike="noStrike" spc="-1">
               <a:latin typeface="Arial"/>
@@ -27043,7 +28574,7 @@
 </p:sld>
 </file>
 
-<file path=ppt/slides/slide37.xml><?xml version="1.0" encoding="utf-8"?>
+<file path=ppt/slides/slide40.xml><?xml version="1.0" encoding="utf-8"?>
 <p:sld xmlns:a="http://schemas.openxmlformats.org/drawingml/2006/main" xmlns:p="http://schemas.openxmlformats.org/presentationml/2006/main" xmlns:r="http://schemas.openxmlformats.org/officeDocument/2006/relationships">
   <p:cSld>
     <p:spTree>
@@ -27176,7 +28707,7 @@
                 <a:latin typeface="Times New Roman"/>
                 <a:ea typeface="DejaVu Sans"/>
               </a:rPr>
-              <a:t>31</a:t>
+              <a:t>34</a:t>
             </a:fld>
             <a:endParaRPr lang="en-US" sz="1600" b="0" strike="noStrike" spc="-1">
               <a:latin typeface="Arial"/>
@@ -27675,7 +29206,7 @@
 </p:sld>
 </file>
 
-<file path=ppt/slides/slide38.xml><?xml version="1.0" encoding="utf-8"?>
+<file path=ppt/slides/slide41.xml><?xml version="1.0" encoding="utf-8"?>
 <p:sld xmlns:a="http://schemas.openxmlformats.org/drawingml/2006/main" xmlns:p="http://schemas.openxmlformats.org/presentationml/2006/main" xmlns:r="http://schemas.openxmlformats.org/officeDocument/2006/relationships">
   <p:cSld>
     <p:spTree>
@@ -27808,7 +29339,7 @@
                 <a:latin typeface="Times New Roman"/>
                 <a:ea typeface="DejaVu Sans"/>
               </a:rPr>
-              <a:t>32</a:t>
+              <a:t>35</a:t>
             </a:fld>
             <a:endParaRPr lang="en-US" sz="1600" b="0" strike="noStrike" spc="-1">
               <a:latin typeface="Arial"/>
@@ -29030,7 +30561,7 @@
 </p:sld>
 </file>
 
-<file path=ppt/slides/slide39.xml><?xml version="1.0" encoding="utf-8"?>
+<file path=ppt/slides/slide42.xml><?xml version="1.0" encoding="utf-8"?>
 <p:sld xmlns:a="http://schemas.openxmlformats.org/drawingml/2006/main" xmlns:p="http://schemas.openxmlformats.org/presentationml/2006/main" xmlns:r="http://schemas.openxmlformats.org/officeDocument/2006/relationships">
   <p:cSld>
     <p:spTree>
@@ -29163,7 +30694,7 @@
                 <a:latin typeface="Times New Roman"/>
                 <a:ea typeface="DejaVu Sans"/>
               </a:rPr>
-              <a:t>33</a:t>
+              <a:t>36</a:t>
             </a:fld>
             <a:endParaRPr lang="en-US" sz="1600" b="0" strike="noStrike" spc="-1">
               <a:latin typeface="Arial"/>
@@ -29524,7 +31055,7 @@
 </p:sld>
 </file>
 
-<file path=ppt/slides/slide40.xml><?xml version="1.0" encoding="utf-8"?>
+<file path=ppt/slides/slide43.xml><?xml version="1.0" encoding="utf-8"?>
 <p:sld xmlns:a="http://schemas.openxmlformats.org/drawingml/2006/main" xmlns:p="http://schemas.openxmlformats.org/presentationml/2006/main" xmlns:r="http://schemas.openxmlformats.org/officeDocument/2006/relationships">
   <p:cSld>
     <p:spTree>
@@ -29657,7 +31188,7 @@
                 <a:latin typeface="Times New Roman"/>
                 <a:ea typeface="DejaVu Sans"/>
               </a:rPr>
-              <a:t>34</a:t>
+              <a:t>37</a:t>
             </a:fld>
             <a:endParaRPr lang="en-US" sz="1600" b="0" strike="noStrike" spc="-1">
               <a:latin typeface="Arial"/>
@@ -30698,7 +32229,7 @@
 </p:sld>
 </file>
 
-<file path=ppt/slides/slide41.xml><?xml version="1.0" encoding="utf-8"?>
+<file path=ppt/slides/slide44.xml><?xml version="1.0" encoding="utf-8"?>
 <p:sld xmlns:a="http://schemas.openxmlformats.org/drawingml/2006/main" xmlns:p="http://schemas.openxmlformats.org/presentationml/2006/main" xmlns:r="http://schemas.openxmlformats.org/officeDocument/2006/relationships">
   <p:cSld>
     <p:spTree>
@@ -30831,7 +32362,7 @@
                 <a:latin typeface="Times New Roman"/>
                 <a:ea typeface="DejaVu Sans"/>
               </a:rPr>
-              <a:t>35</a:t>
+              <a:t>38</a:t>
             </a:fld>
             <a:endParaRPr lang="en-US" sz="1600" b="0" strike="noStrike" spc="-1">
               <a:latin typeface="Arial"/>
@@ -31156,7 +32687,7 @@
 </p:sld>
 </file>
 
-<file path=ppt/slides/slide42.xml><?xml version="1.0" encoding="utf-8"?>
+<file path=ppt/slides/slide45.xml><?xml version="1.0" encoding="utf-8"?>
 <p:sld xmlns:a="http://schemas.openxmlformats.org/drawingml/2006/main" xmlns:p="http://schemas.openxmlformats.org/presentationml/2006/main" xmlns:r="http://schemas.openxmlformats.org/officeDocument/2006/relationships">
   <p:cSld>
     <p:spTree>
@@ -31342,7 +32873,7 @@
                 <a:latin typeface="Times New Roman"/>
                 <a:ea typeface="DejaVu Sans"/>
               </a:rPr>
-              <a:t>36</a:t>
+              <a:t>39</a:t>
             </a:fld>
             <a:endParaRPr lang="en-US" sz="1600" b="0" strike="noStrike" spc="-1">
               <a:latin typeface="Arial"/>
@@ -31634,7 +33165,7 @@
 </p:sld>
 </file>
 
-<file path=ppt/slides/slide43.xml><?xml version="1.0" encoding="utf-8"?>
+<file path=ppt/slides/slide46.xml><?xml version="1.0" encoding="utf-8"?>
 <p:sld xmlns:a="http://schemas.openxmlformats.org/drawingml/2006/main" xmlns:p="http://schemas.openxmlformats.org/presentationml/2006/main" xmlns:r="http://schemas.openxmlformats.org/officeDocument/2006/relationships">
   <p:cSld>
     <p:spTree>
@@ -31767,7 +33298,7 @@
                 <a:latin typeface="Times New Roman"/>
                 <a:ea typeface="DejaVu Sans"/>
               </a:rPr>
-              <a:t>37</a:t>
+              <a:t>40</a:t>
             </a:fld>
             <a:endParaRPr lang="en-US" sz="1600" b="0" strike="noStrike" spc="-1">
               <a:latin typeface="Arial"/>
@@ -31784,7 +33315,7 @@
         <p:spPr>
           <a:xfrm>
             <a:off x="365760" y="914400"/>
-            <a:ext cx="11430000" cy="1688592"/>
+            <a:ext cx="11430000" cy="1440687"/>
           </a:xfrm>
           <a:prstGeom prst="rect">
             <a:avLst/>
@@ -31841,23 +33372,7 @@
                 </a:solidFill>
                 <a:latin typeface="Consolas"/>
               </a:rPr>
-              <a:t>cd chipyard                # repository root, route A set up (section 1)</a:t>
-            </a:r>
-          </a:p>
-          <a:p>
-            <a:pPr algn="l">
-              <a:lnSpc>
-                <a:spcPct val="100000"/>
-              </a:lnSpc>
-            </a:pPr>
-            <a:r>
-              <a:rPr sz="1600">
-                <a:solidFill>
-                  <a:srgbClr val="1F1F1F"/>
-                </a:solidFill>
-                <a:latin typeface="Consolas"/>
-              </a:rPr>
-              <a:t>source env.sh</a:t>
+              <a:t>cd chipyard                # the three exports of section 1, (8/11), are set</a:t>
             </a:r>
           </a:p>
           <a:p>
@@ -31918,7 +33433,7 @@
         </p:nvSpPr>
         <p:spPr>
           <a:xfrm>
-            <a:off x="365760" y="2877312"/>
+            <a:off x="365760" y="2629407"/>
             <a:ext cx="11430000" cy="3749039"/>
           </a:xfrm>
           <a:prstGeom prst="rect">
@@ -32178,7 +33693,7 @@
 </p:sld>
 </file>
 
-<file path=ppt/slides/slide44.xml><?xml version="1.0" encoding="utf-8"?>
+<file path=ppt/slides/slide47.xml><?xml version="1.0" encoding="utf-8"?>
 <p:sld xmlns:a="http://schemas.openxmlformats.org/drawingml/2006/main" xmlns:p="http://schemas.openxmlformats.org/presentationml/2006/main" xmlns:r="http://schemas.openxmlformats.org/officeDocument/2006/relationships">
   <p:cSld>
     <p:spTree>
@@ -32311,7 +33826,7 @@
                 <a:latin typeface="Times New Roman"/>
                 <a:ea typeface="DejaVu Sans"/>
               </a:rPr>
-              <a:t>38</a:t>
+              <a:t>41</a:t>
             </a:fld>
             <a:endParaRPr lang="en-US" sz="1600" b="0" strike="noStrike" spc="-1">
               <a:latin typeface="Arial"/>
@@ -33077,7 +34592,7 @@
 </p:sld>
 </file>
 
-<file path=ppt/slides/slide45.xml><?xml version="1.0" encoding="utf-8"?>
+<file path=ppt/slides/slide48.xml><?xml version="1.0" encoding="utf-8"?>
 <p:sld xmlns:a="http://schemas.openxmlformats.org/drawingml/2006/main" xmlns:p="http://schemas.openxmlformats.org/presentationml/2006/main" xmlns:r="http://schemas.openxmlformats.org/officeDocument/2006/relationships">
   <p:cSld>
     <p:spTree>
@@ -33210,7 +34725,7 @@
                 <a:latin typeface="Times New Roman"/>
                 <a:ea typeface="DejaVu Sans"/>
               </a:rPr>
-              <a:t>39</a:t>
+              <a:t>42</a:t>
             </a:fld>
             <a:endParaRPr lang="en-US" sz="1600" b="0" strike="noStrike" spc="-1">
               <a:latin typeface="Arial"/>
@@ -33508,7 +35023,7 @@
 </p:sld>
 </file>
 
-<file path=ppt/slides/slide46.xml><?xml version="1.0" encoding="utf-8"?>
+<file path=ppt/slides/slide49.xml><?xml version="1.0" encoding="utf-8"?>
 <p:sld xmlns:a="http://schemas.openxmlformats.org/drawingml/2006/main" xmlns:p="http://schemas.openxmlformats.org/presentationml/2006/main" xmlns:r="http://schemas.openxmlformats.org/officeDocument/2006/relationships">
   <p:cSld>
     <p:spTree>
@@ -33586,7 +35101,7 @@
                 <a:latin typeface="Times New Roman" panose="02020603050405020304" pitchFamily="18" charset="0"/>
                 <a:cs typeface="Times New Roman" panose="02020603050405020304" pitchFamily="18" charset="0"/>
               </a:rPr>
-              <a:t>(4/5) If WNS is slightly negative: the closure recipe</a:t>
+              <a:t>(4/5) If WNS is negative or Vivado crashes: the closure recipe</a:t>
             </a:r>
           </a:p>
         </p:txBody>
@@ -33641,7 +35156,7 @@
                 <a:latin typeface="Times New Roman"/>
                 <a:ea typeface="DejaVu Sans"/>
               </a:rPr>
-              <a:t>40</a:t>
+              <a:t>43</a:t>
             </a:fld>
             <a:endParaRPr lang="en-US" sz="1600" b="0" strike="noStrike" spc="-1">
               <a:latin typeface="Arial"/>
@@ -33684,7 +35199,25 @@
                 </a:solidFill>
                 <a:latin typeface="Times New Roman"/>
               </a:rPr>
-              <a:t>75 MHz has little margin in this design: a change of pins or flow can move WNS a little below 0 (e.g. −0.17 ns). Then do not rebuild from scratch.</a:t>
+              <a:t>Use it when WNS is a little below 0 (e.g. −0.17 ns), or when make stops with error 139 (“Abnormal program termination (11)”) after routing. Do not rebuild from scratch: </a:t>
+            </a:r>
+            <a:r>
+              <a:rPr sz="1800" b="0" i="1">
+                <a:solidFill>
+                  <a:srgbClr val="000000"/>
+                </a:solidFill>
+                <a:latin typeface="Times New Roman"/>
+              </a:rPr>
+              <a:t>post_opt.dcp</a:t>
+            </a:r>
+            <a:r>
+              <a:rPr sz="1800" b="0">
+                <a:solidFill>
+                  <a:srgbClr val="000000"/>
+                </a:solidFill>
+                <a:latin typeface="Times New Roman"/>
+              </a:rPr>
+              <a:t> is already written.</a:t>
             </a:r>
           </a:p>
           <a:p>
@@ -33701,7 +35234,7 @@
                 </a:solidFill>
                 <a:latin typeface="Times New Roman"/>
               </a:rPr>
-              <a:t>Run this in Vivado (Tcl console), from the </a:t>
+              <a:t>Run each part in its own Vivado (Tcl console), from the </a:t>
             </a:r>
             <a:r>
               <a:rPr sz="1800" b="0" i="1">
@@ -33732,8 +35265,8 @@
         </p:nvSpPr>
         <p:spPr>
           <a:xfrm>
-            <a:off x="365760" y="2331720"/>
-            <a:ext cx="7498079" cy="2215388"/>
+            <a:off x="365760" y="2240280"/>
+            <a:ext cx="7498079" cy="1409699"/>
           </a:xfrm>
           <a:prstGeom prst="rect">
             <a:avLst/>
@@ -33766,6 +35299,18 @@
           <a:bodyPr rtlCol="0" anchor="t" wrap="none" lIns="73152" rIns="73152" tIns="73152" bIns="73152"/>
           <a:lstStyle/>
           <a:p>
+            <a:pPr algn="l"/>
+            <a:r>
+              <a:rPr sz="1300" b="1">
+                <a:solidFill>
+                  <a:srgbClr val="808080"/>
+                </a:solidFill>
+                <a:latin typeface="Consolas"/>
+              </a:rPr>
+              <a:t>Part 1 — place and route again (~15 min)</a:t>
+            </a:r>
+          </a:p>
+          <a:p>
             <a:pPr algn="l">
               <a:lnSpc>
                 <a:spcPct val="100000"/>
@@ -33842,7 +35387,62 @@
                 </a:solidFill>
                 <a:latin typeface="Consolas"/>
               </a:rPr>
-              <a:t>phys_opt_design -directive Explore</a:t>
+              <a:t>write_checkpoint -force post_route.dcp</a:t>
+            </a:r>
+          </a:p>
+        </p:txBody>
+      </p:sp>
+      <p:sp>
+        <p:nvSpPr>
+          <p:cNvPr id="65" name="Rectangle 64"/>
+          <p:cNvSpPr/>
+          <p:nvPr/>
+        </p:nvSpPr>
+        <p:spPr>
+          <a:xfrm>
+            <a:off x="365760" y="3832858"/>
+            <a:ext cx="7498079" cy="1409699"/>
+          </a:xfrm>
+          <a:prstGeom prst="rect">
+            <a:avLst/>
+          </a:prstGeom>
+          <a:solidFill>
+            <a:srgbClr val="F4F4F4"/>
+          </a:solidFill>
+          <a:ln>
+            <a:solidFill>
+              <a:srgbClr val="C8C8C8"/>
+            </a:solidFill>
+          </a:ln>
+          <a:effectLst/>
+        </p:spPr>
+        <p:style>
+          <a:lnRef idx="1">
+            <a:schemeClr val="accent1"/>
+          </a:lnRef>
+          <a:fillRef idx="3">
+            <a:schemeClr val="accent1"/>
+          </a:fillRef>
+          <a:effectRef idx="2">
+            <a:schemeClr val="accent1"/>
+          </a:effectRef>
+          <a:fontRef idx="minor">
+            <a:schemeClr val="lt1"/>
+          </a:fontRef>
+        </p:style>
+        <p:txBody>
+          <a:bodyPr rtlCol="0" anchor="t" wrap="none" lIns="73152" rIns="73152" tIns="73152" bIns="73152"/>
+          <a:lstStyle/>
+          <a:p>
+            <a:pPr algn="l"/>
+            <a:r>
+              <a:rPr sz="1300" b="1">
+                <a:solidFill>
+                  <a:srgbClr val="808080"/>
+                </a:solidFill>
+                <a:latin typeface="Consolas"/>
+              </a:rPr>
+              <a:t>Part 2 — new Vivado; if it crashes, run part 2 again</a:t>
             </a:r>
           </a:p>
           <a:p>
@@ -33858,7 +35458,7 @@
                 </a:solidFill>
                 <a:latin typeface="Consolas"/>
               </a:rPr>
-              <a:t>route_design    -directive AggressiveExplore -tns_cleanup</a:t>
+              <a:t>open_checkpoint post_route.dcp</a:t>
             </a:r>
           </a:p>
           <a:p>
@@ -33906,7 +35506,7 @@
                 </a:solidFill>
                 <a:latin typeface="Consolas"/>
               </a:rPr>
-              <a:t>report_timing_summary -file report/timing.txt ;# check WNS and WHS &gt;= 0</a:t>
+              <a:t>report_timing_summary -file report/timing.txt ;# WNS and WHS &gt;= 0?</a:t>
             </a:r>
           </a:p>
           <a:p>
@@ -33922,21 +35522,21 @@
                 </a:solidFill>
                 <a:latin typeface="Consolas"/>
               </a:rPr>
-              <a:t>write_bitstream Arty100TWithoutDDRHarness.bit</a:t>
+              <a:t>write_bitstream -force Arty100TWithoutDDRHarness.bit</a:t>
             </a:r>
           </a:p>
         </p:txBody>
       </p:sp>
       <p:sp>
         <p:nvSpPr>
-          <p:cNvPr id="65" name="TextBox 64"/>
+          <p:cNvPr id="66" name="TextBox 65"/>
           <p:cNvSpPr txBox="1"/>
           <p:nvPr/>
         </p:nvSpPr>
         <p:spPr>
           <a:xfrm>
-            <a:off x="8046720" y="2331720"/>
-            <a:ext cx="3931920" cy="4023360"/>
+            <a:off x="8046720" y="2240280"/>
+            <a:ext cx="3931920" cy="4206240"/>
           </a:xfrm>
           <a:prstGeom prst="rect">
             <a:avLst/>
@@ -33956,13 +35556,13 @@
               <a:buChar char="•"/>
             </a:pPr>
             <a:r>
-              <a:rPr sz="1600" b="0">
+              <a:rPr sz="1500" b="0">
                 <a:solidFill>
                   <a:srgbClr val="000000"/>
                 </a:solidFill>
                 <a:latin typeface="Times New Roman"/>
               </a:rPr>
-              <a:t>Expect setup and hold met (WNS, WHS ≥ 0); then accept the bitstream as in (5/5).</a:t>
+              <a:t>Example: WNS −0.740 ns after part 1, +0.006 ns after part 2 (WHS +0.026 ns).</a:t>
             </a:r>
           </a:p>
           <a:p>
@@ -33973,13 +35573,67 @@
               <a:buChar char="•"/>
             </a:pPr>
             <a:r>
-              <a:rPr sz="1600" b="0">
+              <a:rPr sz="1500" b="0">
                 <a:solidFill>
                   <a:srgbClr val="000000"/>
                 </a:solidFill>
                 <a:latin typeface="Times New Roman"/>
               </a:rPr>
-              <a:t>Extra clock uncertainty did not improve the measured implementation; do not assume it will repair a timing failure.</a:t>
+              <a:t>Still negative after part 2? Before </a:t>
+            </a:r>
+            <a:r>
+              <a:rPr sz="1500" b="0" i="1">
+                <a:solidFill>
+                  <a:srgbClr val="000000"/>
+                </a:solidFill>
+                <a:latin typeface="Times New Roman"/>
+              </a:rPr>
+              <a:t>report_timing_summary</a:t>
+            </a:r>
+            <a:r>
+              <a:rPr sz="1500" b="0">
+                <a:solidFill>
+                  <a:srgbClr val="000000"/>
+                </a:solidFill>
+                <a:latin typeface="Times New Roman"/>
+              </a:rPr>
+              <a:t> add </a:t>
+            </a:r>
+            <a:r>
+              <a:rPr sz="1300" b="0">
+                <a:solidFill>
+                  <a:srgbClr val="8B1A1A"/>
+                </a:solidFill>
+                <a:latin typeface="Consolas"/>
+              </a:rPr>
+              <a:t>route_design -directive AggressiveExplore -tns_cleanup</a:t>
+            </a:r>
+            <a:r>
+              <a:rPr sz="1500" b="0">
+                <a:solidFill>
+                  <a:srgbClr val="000000"/>
+                </a:solidFill>
+                <a:latin typeface="Times New Roman"/>
+              </a:rPr>
+              <a:t> and one more </a:t>
+            </a:r>
+            <a:r>
+              <a:rPr sz="1300" b="0">
+                <a:solidFill>
+                  <a:srgbClr val="8B1A1A"/>
+                </a:solidFill>
+                <a:latin typeface="Consolas"/>
+              </a:rPr>
+              <a:t>phys_opt_design -directive Explore</a:t>
+            </a:r>
+            <a:r>
+              <a:rPr sz="1500" b="0">
+                <a:solidFill>
+                  <a:srgbClr val="000000"/>
+                </a:solidFill>
+                <a:latin typeface="Times New Roman"/>
+              </a:rPr>
+              <a:t>.</a:t>
             </a:r>
           </a:p>
           <a:p>
@@ -33990,31 +35644,13 @@
               <a:buChar char="•"/>
             </a:pPr>
             <a:r>
-              <a:rPr sz="1600" b="0">
+              <a:rPr sz="1500" b="0">
                 <a:solidFill>
                   <a:srgbClr val="000000"/>
                 </a:solidFill>
                 <a:latin typeface="Times New Roman"/>
               </a:rPr>
-              <a:t>Vivado 2024.2 </a:t>
-            </a:r>
-            <a:r>
-              <a:rPr sz="1600" b="0" i="1">
-                <a:solidFill>
-                  <a:srgbClr val="000000"/>
-                </a:solidFill>
-                <a:latin typeface="Times New Roman"/>
-              </a:rPr>
-              <a:t>phys_opt_design</a:t>
-            </a:r>
-            <a:r>
-              <a:rPr sz="1600" b="0">
-                <a:solidFill>
-                  <a:srgbClr val="000000"/>
-                </a:solidFill>
-                <a:latin typeface="Times New Roman"/>
-              </a:rPr>
-              <a:t> sometimes crashes after routing (exit 139): run each attempt as its own process from a checkpoint.</a:t>
+              <a:t>Then accept the bitstream as in (5/5).</a:t>
             </a:r>
           </a:p>
         </p:txBody>
@@ -34027,7 +35663,7 @@
 </p:sld>
 </file>
 
-<file path=ppt/slides/slide47.xml><?xml version="1.0" encoding="utf-8"?>
+<file path=ppt/slides/slide50.xml><?xml version="1.0" encoding="utf-8"?>
 <p:sld xmlns:a="http://schemas.openxmlformats.org/drawingml/2006/main" xmlns:p="http://schemas.openxmlformats.org/presentationml/2006/main" xmlns:r="http://schemas.openxmlformats.org/officeDocument/2006/relationships">
   <p:cSld>
     <p:spTree>
@@ -34160,7 +35796,7 @@
                 <a:latin typeface="Times New Roman"/>
                 <a:ea typeface="DejaVu Sans"/>
               </a:rPr>
-              <a:t>41</a:t>
+              <a:t>44</a:t>
             </a:fld>
             <a:endParaRPr lang="en-US" sz="1600" b="0" strike="noStrike" spc="-1">
               <a:latin typeface="Arial"/>
@@ -34805,7 +36441,7 @@
 </p:sld>
 </file>
 
-<file path=ppt/slides/slide48.xml><?xml version="1.0" encoding="utf-8"?>
+<file path=ppt/slides/slide51.xml><?xml version="1.0" encoding="utf-8"?>
 <p:sld xmlns:a="http://schemas.openxmlformats.org/drawingml/2006/main" xmlns:p="http://schemas.openxmlformats.org/presentationml/2006/main" xmlns:r="http://schemas.openxmlformats.org/officeDocument/2006/relationships">
   <p:cSld>
     <p:spTree>
@@ -34991,7 +36627,7 @@
                 <a:latin typeface="Times New Roman"/>
                 <a:ea typeface="DejaVu Sans"/>
               </a:rPr>
-              <a:t>42</a:t>
+              <a:t>45</a:t>
             </a:fld>
             <a:endParaRPr lang="en-US" sz="1600" b="0" strike="noStrike" spc="-1">
               <a:latin typeface="Arial"/>
@@ -35275,1700 +36911,6 @@
           </a:prstGeom>
         </p:spPr>
       </p:pic>
-    </p:spTree>
-  </p:cSld>
-  <p:clrMapOvr>
-    <a:masterClrMapping/>
-  </p:clrMapOvr>
-</p:sld>
-</file>
-
-<file path=ppt/slides/slide49.xml><?xml version="1.0" encoding="utf-8"?>
-<p:sld xmlns:a="http://schemas.openxmlformats.org/drawingml/2006/main" xmlns:p="http://schemas.openxmlformats.org/presentationml/2006/main" xmlns:r="http://schemas.openxmlformats.org/officeDocument/2006/relationships">
-  <p:cSld>
-    <p:spTree>
-      <p:nvGrpSpPr>
-        <p:cNvPr id="1" name=""/>
-        <p:cNvGrpSpPr/>
-        <p:nvPr/>
-      </p:nvGrpSpPr>
-      <p:grpSpPr/>
-      <p:sp>
-        <p:nvSpPr>
-          <p:cNvPr id="10" name="CustomShape 6">
-            <a:extLst>
-              <a:ext uri="{FF2B5EF4-FFF2-40B4-BE49-F238E27FC236}">
-                <a16:creationId xmlns:a16="http://schemas.microsoft.com/office/drawing/2014/main" id="{CB76DC60-C0C9-436D-8956-EE4CA394869E}"/>
-              </a:ext>
-            </a:extLst>
-          </p:cNvPr>
-          <p:cNvSpPr/>
-          <p:nvPr/>
-        </p:nvSpPr>
-        <p:spPr>
-          <a:xfrm>
-            <a:off x="-6000" y="0"/>
-            <a:ext cx="12198000" cy="644877"/>
-          </a:xfrm>
-          <a:prstGeom prst="rect">
-            <a:avLst/>
-          </a:prstGeom>
-          <a:solidFill>
-            <a:schemeClr val="accent6">
-              <a:lumMod val="40000"/>
-              <a:lumOff val="60000"/>
-            </a:schemeClr>
-          </a:solidFill>
-          <a:ln>
-            <a:noFill/>
-          </a:ln>
-        </p:spPr>
-        <p:style>
-          <a:lnRef idx="0">
-            <a:scrgbClr r="0" g="0" b="0"/>
-          </a:lnRef>
-          <a:fillRef idx="0">
-            <a:scrgbClr r="0" g="0" b="0"/>
-          </a:fillRef>
-          <a:effectRef idx="0">
-            <a:scrgbClr r="0" g="0" b="0"/>
-          </a:effectRef>
-          <a:fontRef idx="minor"/>
-        </p:style>
-        <p:txBody>
-          <a:bodyPr wrap="square" lIns="90000" tIns="45000" rIns="90000" bIns="45000">
-            <a:spAutoFit/>
-          </a:bodyPr>
-          <a:lstStyle/>
-          <a:p>
-            <a:pPr marL="360" algn="ctr">
-              <a:lnSpc>
-                <a:spcPct val="100000"/>
-              </a:lnSpc>
-              <a:buClr>
-                <a:srgbClr val="000000"/>
-              </a:buClr>
-            </a:pPr>
-            <a:r>
-              <a:rPr lang="en-US" sz="3600" b="1" spc="-1" dirty="0">
-                <a:latin typeface="Times New Roman" panose="02020603050405020304" pitchFamily="18" charset="0"/>
-                <a:cs typeface="Times New Roman" panose="02020603050405020304" pitchFamily="18" charset="0"/>
-              </a:rPr>
-              <a:t>6. Programming &amp; Bring-up </a:t>
-            </a:r>
-            <a:r>
-              <a:rPr lang="en-US" sz="3600" spc="-1" dirty="0">
-                <a:latin typeface="Times New Roman" panose="02020603050405020304" pitchFamily="18" charset="0"/>
-                <a:cs typeface="Times New Roman" panose="02020603050405020304" pitchFamily="18" charset="0"/>
-              </a:rPr>
-              <a:t>(1/5) Program both FPGAs</a:t>
-            </a:r>
-          </a:p>
-        </p:txBody>
-      </p:sp>
-      <p:sp>
-        <p:nvSpPr>
-          <p:cNvPr id="62" name="CustomShape 2"/>
-          <p:cNvSpPr/>
-          <p:nvPr/>
-        </p:nvSpPr>
-        <p:spPr>
-          <a:xfrm>
-            <a:off x="11291400" y="6492960"/>
-            <a:ext cx="894600" cy="358920"/>
-          </a:xfrm>
-          <a:prstGeom prst="rect">
-            <a:avLst/>
-          </a:prstGeom>
-          <a:noFill/>
-          <a:ln>
-            <a:noFill/>
-          </a:ln>
-        </p:spPr>
-        <p:style>
-          <a:lnRef idx="0">
-            <a:scrgbClr r="0" g="0" b="0"/>
-          </a:lnRef>
-          <a:fillRef idx="0">
-            <a:scrgbClr r="0" g="0" b="0"/>
-          </a:fillRef>
-          <a:effectRef idx="0">
-            <a:scrgbClr r="0" g="0" b="0"/>
-          </a:effectRef>
-          <a:fontRef idx="minor"/>
-        </p:style>
-        <p:txBody>
-          <a:bodyPr lIns="90000" tIns="45000" rIns="90000" bIns="45000" anchor="ctr">
-            <a:noAutofit/>
-          </a:bodyPr>
-          <a:lstStyle/>
-          <a:p>
-            <a:pPr algn="ctr">
-              <a:lnSpc>
-                <a:spcPct val="100000"/>
-              </a:lnSpc>
-            </a:pPr>
-            <a:fld id="{32452110-F6D1-439F-92C4-7A3912DA20B0}" type="slidenum">
-              <a:rPr lang="en-US" sz="1600" b="1" strike="noStrike" spc="-1">
-                <a:solidFill>
-                  <a:srgbClr val="000000"/>
-                </a:solidFill>
-                <a:latin typeface="Times New Roman"/>
-                <a:ea typeface="DejaVu Sans"/>
-              </a:rPr>
-              <a:t>43</a:t>
-            </a:fld>
-            <a:endParaRPr lang="en-US" sz="1600" b="0" strike="noStrike" spc="-1">
-              <a:latin typeface="Arial"/>
-            </a:endParaRPr>
-          </a:p>
-        </p:txBody>
-      </p:sp>
-      <p:sp>
-        <p:nvSpPr>
-          <p:cNvPr id="63" name="Rectangle 62"/>
-          <p:cNvSpPr/>
-          <p:nvPr/>
-        </p:nvSpPr>
-        <p:spPr>
-          <a:xfrm>
-            <a:off x="365760" y="868680"/>
-            <a:ext cx="11430000" cy="1502664"/>
-          </a:xfrm>
-          <a:prstGeom prst="rect">
-            <a:avLst/>
-          </a:prstGeom>
-          <a:solidFill>
-            <a:srgbClr val="F4F4F4"/>
-          </a:solidFill>
-          <a:ln>
-            <a:solidFill>
-              <a:srgbClr val="C8C8C8"/>
-            </a:solidFill>
-          </a:ln>
-          <a:effectLst/>
-        </p:spPr>
-        <p:style>
-          <a:lnRef idx="1">
-            <a:schemeClr val="accent1"/>
-          </a:lnRef>
-          <a:fillRef idx="3">
-            <a:schemeClr val="accent1"/>
-          </a:fillRef>
-          <a:effectRef idx="2">
-            <a:schemeClr val="accent1"/>
-          </a:effectRef>
-          <a:fontRef idx="minor">
-            <a:schemeClr val="lt1"/>
-          </a:fontRef>
-        </p:style>
-        <p:txBody>
-          <a:bodyPr rtlCol="0" anchor="t" wrap="none" lIns="73152" rIns="73152" tIns="73152" bIns="73152"/>
-          <a:lstStyle/>
-          <a:p>
-            <a:pPr algn="l"/>
-            <a:r>
-              <a:rPr sz="1400" b="1">
-                <a:solidFill>
-                  <a:srgbClr val="808080"/>
-                </a:solidFill>
-                <a:latin typeface="Consolas"/>
-              </a:rPr>
-              <a:t>Run this — SERIALS are our boards: use your two Arty serials (list_boards.sh)</a:t>
-            </a:r>
-          </a:p>
-          <a:p>
-            <a:pPr algn="l">
-              <a:lnSpc>
-                <a:spcPct val="100000"/>
-              </a:lnSpc>
-            </a:pPr>
-            <a:r>
-              <a:rPr sz="1400">
-                <a:solidFill>
-                  <a:srgbClr val="1F1F1F"/>
-                </a:solidFill>
-                <a:latin typeface="Consolas"/>
-              </a:rPr>
-              <a:t>cd fpga/sw/export</a:t>
-            </a:r>
-          </a:p>
-          <a:p>
-            <a:pPr algn="l">
-              <a:lnSpc>
-                <a:spcPct val="100000"/>
-              </a:lnSpc>
-            </a:pPr>
-            <a:r>
-              <a:rPr sz="1400">
-                <a:solidFill>
-                  <a:srgbClr val="1F1F1F"/>
-                </a:solidFill>
-                <a:latin typeface="Consolas"/>
-              </a:rPr>
-              <a:t>BIT=../../generated-src/chipyard.fpga.arty100t.Arty100TWithoutDDRHarness.\</a:t>
-            </a:r>
-          </a:p>
-          <a:p>
-            <a:pPr algn="l">
-              <a:lnSpc>
-                <a:spcPct val="100000"/>
-              </a:lnSpc>
-            </a:pPr>
-            <a:r>
-              <a:rPr sz="1400">
-                <a:solidFill>
-                  <a:srgbClr val="1F1F1F"/>
-                </a:solidFill>
-                <a:latin typeface="Consolas"/>
-              </a:rPr>
-              <a:t>EdhocRocket6475MHzArty100TConfig/obj/Arty100TWithoutDDRHarness.bit \</a:t>
-            </a:r>
-          </a:p>
-          <a:p>
-            <a:pPr algn="l">
-              <a:lnSpc>
-                <a:spcPct val="100000"/>
-              </a:lnSpc>
-            </a:pPr>
-            <a:r>
-              <a:rPr sz="1400">
-                <a:solidFill>
-                  <a:srgbClr val="1F1F1F"/>
-                </a:solidFill>
-                <a:latin typeface="Consolas"/>
-              </a:rPr>
-              <a:t>SERIALS="210319B269F6 210319B4A439" \</a:t>
-            </a:r>
-          </a:p>
-          <a:p>
-            <a:pPr algn="l">
-              <a:lnSpc>
-                <a:spcPct val="100000"/>
-              </a:lnSpc>
-            </a:pPr>
-            <a:r>
-              <a:rPr sz="1400">
-                <a:solidFill>
-                  <a:srgbClr val="1F1F1F"/>
-                </a:solidFill>
-                <a:latin typeface="Consolas"/>
-              </a:rPr>
-              <a:t>vivado -mode batch -source common/board/program_two.tcl</a:t>
-            </a:r>
-          </a:p>
-        </p:txBody>
-      </p:sp>
-      <p:sp>
-        <p:nvSpPr>
-          <p:cNvPr id="64" name="Rectangle 63"/>
-          <p:cNvSpPr/>
-          <p:nvPr/>
-        </p:nvSpPr>
-        <p:spPr>
-          <a:xfrm>
-            <a:off x="365760" y="2554224"/>
-            <a:ext cx="3840480" cy="604012"/>
-          </a:xfrm>
-          <a:prstGeom prst="rect">
-            <a:avLst/>
-          </a:prstGeom>
-          <a:solidFill>
-            <a:srgbClr val="1E1E1E"/>
-          </a:solidFill>
-          <a:ln>
-            <a:solidFill>
-              <a:srgbClr val="C8C8C8"/>
-            </a:solidFill>
-          </a:ln>
-          <a:effectLst/>
-        </p:spPr>
-        <p:style>
-          <a:lnRef idx="1">
-            <a:schemeClr val="accent1"/>
-          </a:lnRef>
-          <a:fillRef idx="3">
-            <a:schemeClr val="accent1"/>
-          </a:fillRef>
-          <a:effectRef idx="2">
-            <a:schemeClr val="accent1"/>
-          </a:effectRef>
-          <a:fontRef idx="minor">
-            <a:schemeClr val="lt1"/>
-          </a:fontRef>
-        </p:style>
-        <p:txBody>
-          <a:bodyPr rtlCol="0" anchor="t" wrap="none" lIns="73152" rIns="73152" tIns="73152" bIns="73152"/>
-          <a:lstStyle/>
-          <a:p>
-            <a:pPr algn="l">
-              <a:lnSpc>
-                <a:spcPct val="100000"/>
-              </a:lnSpc>
-            </a:pPr>
-            <a:r>
-              <a:rPr sz="1300">
-                <a:solidFill>
-                  <a:srgbClr val="E6E6E6"/>
-                </a:solidFill>
-                <a:latin typeface="Consolas"/>
-              </a:rPr>
-              <a:t>PROGRAMMED 210319B269F6</a:t>
-            </a:r>
-          </a:p>
-          <a:p>
-            <a:pPr algn="l">
-              <a:lnSpc>
-                <a:spcPct val="100000"/>
-              </a:lnSpc>
-            </a:pPr>
-            <a:r>
-              <a:rPr sz="1300">
-                <a:solidFill>
-                  <a:srgbClr val="E6E6E6"/>
-                </a:solidFill>
-                <a:latin typeface="Consolas"/>
-              </a:rPr>
-              <a:t>PROGRAMMED 210319B4A439</a:t>
-            </a:r>
-          </a:p>
-        </p:txBody>
-      </p:sp>
-      <p:sp>
-        <p:nvSpPr>
-          <p:cNvPr id="65" name="TextBox 64"/>
-          <p:cNvSpPr txBox="1"/>
-          <p:nvPr/>
-        </p:nvSpPr>
-        <p:spPr>
-          <a:xfrm>
-            <a:off x="365760" y="3432555"/>
-            <a:ext cx="11430000" cy="2743200"/>
-          </a:xfrm>
-          <a:prstGeom prst="rect">
-            <a:avLst/>
-          </a:prstGeom>
-          <a:noFill/>
-        </p:spPr>
-        <p:txBody>
-          <a:bodyPr wrap="square" anchor="t">
-            <a:spAutoFit/>
-          </a:bodyPr>
-          <a:lstStyle/>
-          <a:p>
-            <a:pPr marL="256032" indent="-219456">
-              <a:spcAft>
-                <a:spcPts val="400"/>
-              </a:spcAft>
-              <a:buChar char="•"/>
-            </a:pPr>
-            <a:r>
-              <a:rPr sz="1800" b="0">
-                <a:solidFill>
-                  <a:srgbClr val="000000"/>
-                </a:solidFill>
-                <a:latin typeface="Times New Roman"/>
-              </a:rPr>
-              <a:t>SERIALS = the Digilent USB serial of each Arty, as printed by </a:t>
-            </a:r>
-            <a:r>
-              <a:rPr sz="1800" b="0" i="1">
-                <a:solidFill>
-                  <a:srgbClr val="000000"/>
-                </a:solidFill>
-                <a:latin typeface="Times New Roman"/>
-              </a:rPr>
-              <a:t>common/board/list_boards.sh</a:t>
-            </a:r>
-            <a:r>
-              <a:rPr sz="1800" b="0">
-                <a:solidFill>
-                  <a:srgbClr val="000000"/>
-                </a:solidFill>
-                <a:latin typeface="Times New Roman"/>
-              </a:rPr>
-              <a:t>. The script uses a running Vivado GUI’s hardware server if there is one.</a:t>
-            </a:r>
-          </a:p>
-          <a:p>
-            <a:pPr marL="256032" indent="-219456">
-              <a:spcAft>
-                <a:spcPts val="400"/>
-              </a:spcAft>
-              <a:buChar char="•"/>
-            </a:pPr>
-            <a:r>
-              <a:rPr sz="1800" b="0">
-                <a:solidFill>
-                  <a:srgbClr val="000000"/>
-                </a:solidFill>
-                <a:latin typeface="Times New Roman"/>
-              </a:rPr>
-              <a:t>At power-up the FPGA loads whatever its QSPI flash holds (e.g. an older design). Symptom: OpenOCD reports “</a:t>
-            </a:r>
-            <a:r>
-              <a:rPr sz="1800" b="0" i="1">
-                <a:solidFill>
-                  <a:srgbClr val="000000"/>
-                </a:solidFill>
-                <a:latin typeface="Times New Roman"/>
-              </a:rPr>
-              <a:t>dtmcontrol is 0</a:t>
-            </a:r>
-            <a:r>
-              <a:rPr sz="1800" b="0">
-                <a:solidFill>
-                  <a:srgbClr val="000000"/>
-                </a:solidFill>
-                <a:latin typeface="Times New Roman"/>
-              </a:rPr>
-              <a:t>” → program again.</a:t>
-            </a:r>
-          </a:p>
-          <a:p>
-            <a:pPr marL="256032" indent="-219456">
-              <a:spcAft>
-                <a:spcPts val="400"/>
-              </a:spcAft>
-              <a:buChar char="•"/>
-            </a:pPr>
-            <a:r>
-              <a:rPr sz="1800" b="0">
-                <a:solidFill>
-                  <a:srgbClr val="000000"/>
-                </a:solidFill>
-                <a:latin typeface="Times New Roman"/>
-              </a:rPr>
-              <a:t>For a board that starts the EDHOC SoC by itself, write the bitstream to the QSPI flash (Vivado → Add Configuration Memory Device).</a:t>
-            </a:r>
-          </a:p>
-        </p:txBody>
-      </p:sp>
-    </p:spTree>
-  </p:cSld>
-  <p:clrMapOvr>
-    <a:masterClrMapping/>
-  </p:clrMapOvr>
-</p:sld>
-</file>
-
-<file path=ppt/slides/slide50.xml><?xml version="1.0" encoding="utf-8"?>
-<p:sld xmlns:a="http://schemas.openxmlformats.org/drawingml/2006/main" xmlns:p="http://schemas.openxmlformats.org/presentationml/2006/main" xmlns:r="http://schemas.openxmlformats.org/officeDocument/2006/relationships">
-  <p:cSld>
-    <p:spTree>
-      <p:nvGrpSpPr>
-        <p:cNvPr id="1" name=""/>
-        <p:cNvGrpSpPr/>
-        <p:nvPr/>
-      </p:nvGrpSpPr>
-      <p:grpSpPr/>
-      <p:sp>
-        <p:nvSpPr>
-          <p:cNvPr id="10" name="CustomShape 6">
-            <a:extLst>
-              <a:ext uri="{FF2B5EF4-FFF2-40B4-BE49-F238E27FC236}">
-                <a16:creationId xmlns:a16="http://schemas.microsoft.com/office/drawing/2014/main" id="{CB76DC60-C0C9-436D-8956-EE4CA394869E}"/>
-              </a:ext>
-            </a:extLst>
-          </p:cNvPr>
-          <p:cNvSpPr/>
-          <p:nvPr/>
-        </p:nvSpPr>
-        <p:spPr>
-          <a:xfrm>
-            <a:off x="-6000" y="0"/>
-            <a:ext cx="12198000" cy="644877"/>
-          </a:xfrm>
-          <a:prstGeom prst="rect">
-            <a:avLst/>
-          </a:prstGeom>
-          <a:solidFill>
-            <a:schemeClr val="accent6">
-              <a:lumMod val="40000"/>
-              <a:lumOff val="60000"/>
-            </a:schemeClr>
-          </a:solidFill>
-          <a:ln>
-            <a:noFill/>
-          </a:ln>
-        </p:spPr>
-        <p:style>
-          <a:lnRef idx="0">
-            <a:scrgbClr r="0" g="0" b="0"/>
-          </a:lnRef>
-          <a:fillRef idx="0">
-            <a:scrgbClr r="0" g="0" b="0"/>
-          </a:fillRef>
-          <a:effectRef idx="0">
-            <a:scrgbClr r="0" g="0" b="0"/>
-          </a:effectRef>
-          <a:fontRef idx="minor"/>
-        </p:style>
-        <p:txBody>
-          <a:bodyPr wrap="square" lIns="90000" tIns="45000" rIns="90000" bIns="45000">
-            <a:spAutoFit/>
-          </a:bodyPr>
-          <a:lstStyle/>
-          <a:p>
-            <a:pPr marL="360" algn="ctr">
-              <a:lnSpc>
-                <a:spcPct val="100000"/>
-              </a:lnSpc>
-              <a:buClr>
-                <a:srgbClr val="000000"/>
-              </a:buClr>
-            </a:pPr>
-            <a:r>
-              <a:rPr lang="en-US" sz="3400" b="1" spc="-1" dirty="0">
-                <a:latin typeface="Times New Roman" panose="02020603050405020304" pitchFamily="18" charset="0"/>
-                <a:cs typeface="Times New Roman" panose="02020603050405020304" pitchFamily="18" charset="0"/>
-              </a:rPr>
-              <a:t>6. Programming &amp; Bring-up </a:t>
-            </a:r>
-            <a:r>
-              <a:rPr lang="en-US" sz="3400" spc="-1" dirty="0">
-                <a:latin typeface="Times New Roman" panose="02020603050405020304" pitchFamily="18" charset="0"/>
-                <a:cs typeface="Times New Roman" panose="02020603050405020304" pitchFamily="18" charset="0"/>
-              </a:rPr>
-              <a:t>(2/5) Load firmware over JTAG</a:t>
-            </a:r>
-          </a:p>
-        </p:txBody>
-      </p:sp>
-      <p:sp>
-        <p:nvSpPr>
-          <p:cNvPr id="62" name="CustomShape 2"/>
-          <p:cNvSpPr/>
-          <p:nvPr/>
-        </p:nvSpPr>
-        <p:spPr>
-          <a:xfrm>
-            <a:off x="11291400" y="6492960"/>
-            <a:ext cx="894600" cy="358920"/>
-          </a:xfrm>
-          <a:prstGeom prst="rect">
-            <a:avLst/>
-          </a:prstGeom>
-          <a:noFill/>
-          <a:ln>
-            <a:noFill/>
-          </a:ln>
-        </p:spPr>
-        <p:style>
-          <a:lnRef idx="0">
-            <a:scrgbClr r="0" g="0" b="0"/>
-          </a:lnRef>
-          <a:fillRef idx="0">
-            <a:scrgbClr r="0" g="0" b="0"/>
-          </a:fillRef>
-          <a:effectRef idx="0">
-            <a:scrgbClr r="0" g="0" b="0"/>
-          </a:effectRef>
-          <a:fontRef idx="minor"/>
-        </p:style>
-        <p:txBody>
-          <a:bodyPr lIns="90000" tIns="45000" rIns="90000" bIns="45000" anchor="ctr">
-            <a:noAutofit/>
-          </a:bodyPr>
-          <a:lstStyle/>
-          <a:p>
-            <a:pPr algn="ctr">
-              <a:lnSpc>
-                <a:spcPct val="100000"/>
-              </a:lnSpc>
-            </a:pPr>
-            <a:fld id="{32452110-F6D1-439F-92C4-7A3912DA20B0}" type="slidenum">
-              <a:rPr lang="en-US" sz="1600" b="1" strike="noStrike" spc="-1">
-                <a:solidFill>
-                  <a:srgbClr val="000000"/>
-                </a:solidFill>
-                <a:latin typeface="Times New Roman"/>
-                <a:ea typeface="DejaVu Sans"/>
-              </a:rPr>
-              <a:t>44</a:t>
-            </a:fld>
-            <a:endParaRPr lang="en-US" sz="1600" b="0" strike="noStrike" spc="-1">
-              <a:latin typeface="Arial"/>
-            </a:endParaRPr>
-          </a:p>
-        </p:txBody>
-      </p:sp>
-      <p:sp>
-        <p:nvSpPr>
-          <p:cNvPr id="63" name="Rectangle 62"/>
-          <p:cNvSpPr/>
-          <p:nvPr/>
-        </p:nvSpPr>
-        <p:spPr>
-          <a:xfrm>
-            <a:off x="365760" y="868680"/>
-            <a:ext cx="7315200" cy="1139631"/>
-          </a:xfrm>
-          <a:prstGeom prst="rect">
-            <a:avLst/>
-          </a:prstGeom>
-          <a:solidFill>
-            <a:srgbClr val="F4F4F4"/>
-          </a:solidFill>
-          <a:ln>
-            <a:solidFill>
-              <a:srgbClr val="C8C8C8"/>
-            </a:solidFill>
-          </a:ln>
-          <a:effectLst/>
-        </p:spPr>
-        <p:style>
-          <a:lnRef idx="1">
-            <a:schemeClr val="accent1"/>
-          </a:lnRef>
-          <a:fillRef idx="3">
-            <a:schemeClr val="accent1"/>
-          </a:fillRef>
-          <a:effectRef idx="2">
-            <a:schemeClr val="accent1"/>
-          </a:effectRef>
-          <a:fontRef idx="minor">
-            <a:schemeClr val="lt1"/>
-          </a:fontRef>
-        </p:style>
-        <p:txBody>
-          <a:bodyPr rtlCol="0" anchor="t" wrap="none" lIns="73152" rIns="73152" tIns="73152" bIns="73152"/>
-          <a:lstStyle/>
-          <a:p>
-            <a:pPr algn="l"/>
-            <a:r>
-              <a:rPr sz="1211" b="1">
-                <a:solidFill>
-                  <a:srgbClr val="808080"/>
-                </a:solidFill>
-                <a:latin typeface="Consolas"/>
-              </a:rPr>
-              <a:t>Run this — from the repository root</a:t>
-            </a:r>
-          </a:p>
-          <a:p>
-            <a:pPr algn="l">
-              <a:lnSpc>
-                <a:spcPct val="100000"/>
-              </a:lnSpc>
-            </a:pPr>
-            <a:r>
-              <a:rPr sz="1211">
-                <a:solidFill>
-                  <a:srgbClr val="1F1F1F"/>
-                </a:solidFill>
-                <a:latin typeface="Consolas"/>
-              </a:rPr>
-              <a:t>cd fpga/sw/export/tests</a:t>
-            </a:r>
-          </a:p>
-          <a:p>
-            <a:pPr algn="l">
-              <a:lnSpc>
-                <a:spcPct val="100000"/>
-              </a:lnSpc>
-            </a:pPr>
-            <a:r>
-              <a:rPr sz="1211">
-                <a:solidFill>
-                  <a:srgbClr val="1F1F1F"/>
-                </a:solidFill>
-                <a:latin typeface="Consolas"/>
-              </a:rPr>
-              <a:t>make gpio_test                          # build a test program</a:t>
-            </a:r>
-          </a:p>
-          <a:p>
-            <a:pPr algn="l">
-              <a:lnSpc>
-                <a:spcPct val="100000"/>
-              </a:lnSpc>
-            </a:pPr>
-            <a:r>
-              <a:rPr sz="1211">
-                <a:solidFill>
-                  <a:srgbClr val="1F1F1F"/>
-                </a:solidFill>
-                <a:latin typeface="Consolas"/>
-              </a:rPr>
-              <a:t>BOARD=initiator ../common/board/run_one.sh build/gpio_test.elf 5   # board A</a:t>
-            </a:r>
-          </a:p>
-          <a:p>
-            <a:pPr algn="l">
-              <a:lnSpc>
-                <a:spcPct val="100000"/>
-              </a:lnSpc>
-            </a:pPr>
-            <a:r>
-              <a:rPr sz="1211">
-                <a:solidFill>
-                  <a:srgbClr val="1F1F1F"/>
-                </a:solidFill>
-                <a:latin typeface="Consolas"/>
-              </a:rPr>
-              <a:t>BOARD=responder ../common/board/run_one.sh build/gpio_test.elf 5   # board B</a:t>
-            </a:r>
-          </a:p>
-        </p:txBody>
-      </p:sp>
-      <p:sp>
-        <p:nvSpPr>
-          <p:cNvPr id="64" name="Rectangle 63"/>
-          <p:cNvSpPr/>
-          <p:nvPr/>
-        </p:nvSpPr>
-        <p:spPr>
-          <a:xfrm>
-            <a:off x="365760" y="2191191"/>
-            <a:ext cx="7315200" cy="1004809"/>
-          </a:xfrm>
-          <a:prstGeom prst="rect">
-            <a:avLst/>
-          </a:prstGeom>
-          <a:solidFill>
-            <a:srgbClr val="F4F4F4"/>
-          </a:solidFill>
-          <a:ln>
-            <a:solidFill>
-              <a:srgbClr val="C8C8C8"/>
-            </a:solidFill>
-          </a:ln>
-          <a:effectLst/>
-        </p:spPr>
-        <p:style>
-          <a:lnRef idx="1">
-            <a:schemeClr val="accent1"/>
-          </a:lnRef>
-          <a:fillRef idx="3">
-            <a:schemeClr val="accent1"/>
-          </a:fillRef>
-          <a:effectRef idx="2">
-            <a:schemeClr val="accent1"/>
-          </a:effectRef>
-          <a:fontRef idx="minor">
-            <a:schemeClr val="lt1"/>
-          </a:fontRef>
-        </p:style>
-        <p:txBody>
-          <a:bodyPr rtlCol="0" anchor="t" wrap="none" lIns="73152" rIns="73152" tIns="73152" bIns="73152"/>
-          <a:lstStyle/>
-          <a:p>
-            <a:pPr algn="l"/>
-            <a:r>
-              <a:rPr sz="1296" b="1">
-                <a:solidFill>
-                  <a:srgbClr val="808080"/>
-                </a:solidFill>
-                <a:latin typeface="Consolas"/>
-              </a:rPr>
-              <a:t>Simplified — what run_one.sh does ($SERIAL, $ELF are set by the script)</a:t>
-            </a:r>
-          </a:p>
-          <a:p>
-            <a:pPr algn="l">
-              <a:lnSpc>
-                <a:spcPct val="100000"/>
-              </a:lnSpc>
-            </a:pPr>
-            <a:r>
-              <a:rPr sz="1296">
-                <a:solidFill>
-                  <a:srgbClr val="1F1F1F"/>
-                </a:solidFill>
-                <a:latin typeface="Consolas"/>
-              </a:rPr>
-              <a:t>openocd -c "adapter serial $SERIAL" -f c232hm.cfg \</a:t>
-            </a:r>
-          </a:p>
-          <a:p>
-            <a:pPr algn="l">
-              <a:lnSpc>
-                <a:spcPct val="100000"/>
-              </a:lnSpc>
-            </a:pPr>
-            <a:r>
-              <a:rPr sz="1296">
-                <a:solidFill>
-                  <a:srgbClr val="1F1F1F"/>
-                </a:solidFill>
-                <a:latin typeface="Consolas"/>
-              </a:rPr>
-              <a:t>  -c "halt" -c "load_image $ELF" \</a:t>
-            </a:r>
-          </a:p>
-          <a:p>
-            <a:pPr algn="l">
-              <a:lnSpc>
-                <a:spcPct val="100000"/>
-              </a:lnSpc>
-            </a:pPr>
-            <a:r>
-              <a:rPr sz="1296">
-                <a:solidFill>
-                  <a:srgbClr val="1F1F1F"/>
-                </a:solidFill>
-                <a:latin typeface="Consolas"/>
-              </a:rPr>
-              <a:t>  -c "resume 0x80000000" -c "shutdown"</a:t>
-            </a:r>
-          </a:p>
-        </p:txBody>
-      </p:sp>
-      <p:sp>
-        <p:nvSpPr>
-          <p:cNvPr id="65" name="TextBox 64"/>
-          <p:cNvSpPr txBox="1"/>
-          <p:nvPr/>
-        </p:nvSpPr>
-        <p:spPr>
-          <a:xfrm>
-            <a:off x="7863840" y="914400"/>
-            <a:ext cx="4114800" cy="5394960"/>
-          </a:xfrm>
-          <a:prstGeom prst="rect">
-            <a:avLst/>
-          </a:prstGeom>
-          <a:noFill/>
-        </p:spPr>
-        <p:txBody>
-          <a:bodyPr wrap="square" anchor="t">
-            <a:spAutoFit/>
-          </a:bodyPr>
-          <a:lstStyle/>
-          <a:p>
-            <a:pPr marL="256032" indent="-219456">
-              <a:spcAft>
-                <a:spcPts val="400"/>
-              </a:spcAft>
-              <a:buChar char="•"/>
-            </a:pPr>
-            <a:r>
-              <a:rPr sz="1400" b="0">
-                <a:solidFill>
-                  <a:srgbClr val="8B1A1A"/>
-                </a:solidFill>
-                <a:latin typeface="Consolas"/>
-              </a:rPr>
-              <a:t>run_one.sh</a:t>
-            </a:r>
-            <a:r>
-              <a:rPr sz="1600" b="0">
-                <a:solidFill>
-                  <a:srgbClr val="000000"/>
-                </a:solidFill>
-                <a:latin typeface="Times New Roman"/>
-              </a:rPr>
-              <a:t>: halt the core, write the ELF into the scratchpad, start at 0x8000_0000, show the console.</a:t>
-            </a:r>
-          </a:p>
-          <a:p>
-            <a:pPr marL="256032" indent="-219456">
-              <a:spcAft>
-                <a:spcPts val="400"/>
-              </a:spcAft>
-              <a:buChar char="•"/>
-            </a:pPr>
-            <a:r>
-              <a:rPr sz="1600" b="0">
-                <a:solidFill>
-                  <a:srgbClr val="000000"/>
-                </a:solidFill>
-                <a:latin typeface="Times New Roman"/>
-              </a:rPr>
-              <a:t>Both boards at once (responder first): </a:t>
-            </a:r>
-            <a:r>
-              <a:rPr sz="1400" b="0">
-                <a:solidFill>
-                  <a:srgbClr val="8B1A1A"/>
-                </a:solidFill>
-                <a:latin typeface="Consolas"/>
-              </a:rPr>
-              <a:t>load_both.sh &lt;initiator.elf&gt; &lt;responder.elf&gt;</a:t>
-            </a:r>
-            <a:r>
-              <a:rPr sz="1600" b="0">
-                <a:solidFill>
-                  <a:srgbClr val="000000"/>
-                </a:solidFill>
-                <a:latin typeface="Times New Roman"/>
-              </a:rPr>
-              <a:t>, used from Lesson 3 on.</a:t>
-            </a:r>
-          </a:p>
-          <a:p>
-            <a:pPr marL="256032" indent="-219456">
-              <a:spcAft>
-                <a:spcPts val="400"/>
-              </a:spcAft>
-              <a:buChar char="•"/>
-            </a:pPr>
-            <a:r>
-              <a:rPr sz="1600" b="0">
-                <a:solidFill>
-                  <a:srgbClr val="000000"/>
-                </a:solidFill>
-                <a:latin typeface="Times New Roman"/>
-              </a:rPr>
-              <a:t>Cable and console of each board come from </a:t>
-            </a:r>
-            <a:r>
-              <a:rPr sz="1600" b="0" i="1">
-                <a:solidFill>
-                  <a:srgbClr val="000000"/>
-                </a:solidFill>
-                <a:latin typeface="Times New Roman"/>
-              </a:rPr>
-              <a:t>boards.env</a:t>
-            </a:r>
-            <a:r>
-              <a:rPr sz="1600" b="0">
-                <a:solidFill>
-                  <a:srgbClr val="000000"/>
-                </a:solidFill>
-                <a:latin typeface="Times New Roman"/>
-              </a:rPr>
-              <a:t>. It ships with our serials: put yours in first (Lesson 2, section 2, (1/3)–(2/3)).</a:t>
-            </a:r>
-          </a:p>
-          <a:p>
-            <a:pPr marL="256032" indent="-219456">
-              <a:spcAft>
-                <a:spcPts val="400"/>
-              </a:spcAft>
-              <a:buChar char="•"/>
-            </a:pPr>
-            <a:r>
-              <a:rPr sz="1600" b="0">
-                <a:solidFill>
-                  <a:srgbClr val="000000"/>
-                </a:solidFill>
-                <a:latin typeface="Times New Roman"/>
-              </a:rPr>
-              <a:t>The console tty is found by the board's serial, so moving ttyUSB numbers do not matter (57600 baud).</a:t>
-            </a:r>
-          </a:p>
-        </p:txBody>
-      </p:sp>
-      <p:sp>
-        <p:nvSpPr>
-          <p:cNvPr id="66" name="Rectangle 65"/>
-          <p:cNvSpPr/>
-          <p:nvPr/>
-        </p:nvSpPr>
-        <p:spPr>
-          <a:xfrm>
-            <a:off x="365760" y="3378880"/>
-            <a:ext cx="7315200" cy="576553"/>
-          </a:xfrm>
-          <a:prstGeom prst="rect">
-            <a:avLst/>
-          </a:prstGeom>
-          <a:solidFill>
-            <a:srgbClr val="F4F4F4"/>
-          </a:solidFill>
-          <a:ln>
-            <a:solidFill>
-              <a:srgbClr val="C8C8C8"/>
-            </a:solidFill>
-          </a:ln>
-          <a:effectLst/>
-        </p:spPr>
-        <p:style>
-          <a:lnRef idx="1">
-            <a:schemeClr val="accent1"/>
-          </a:lnRef>
-          <a:fillRef idx="3">
-            <a:schemeClr val="accent1"/>
-          </a:fillRef>
-          <a:effectRef idx="2">
-            <a:schemeClr val="accent1"/>
-          </a:effectRef>
-          <a:fontRef idx="minor">
-            <a:schemeClr val="lt1"/>
-          </a:fontRef>
-        </p:style>
-        <p:txBody>
-          <a:bodyPr rtlCol="0" anchor="t" wrap="none" lIns="73152" rIns="73152" tIns="73152" bIns="73152"/>
-          <a:lstStyle/>
-          <a:p>
-            <a:pPr algn="l"/>
-            <a:r>
-              <a:rPr sz="1211" b="1">
-                <a:solidFill>
-                  <a:srgbClr val="808080"/>
-                </a:solidFill>
-                <a:latin typeface="Consolas"/>
-              </a:rPr>
-              <a:t>Run this — which tty is which board?</a:t>
-            </a:r>
-          </a:p>
-          <a:p>
-            <a:pPr algn="l">
-              <a:lnSpc>
-                <a:spcPct val="100000"/>
-              </a:lnSpc>
-            </a:pPr>
-            <a:r>
-              <a:rPr sz="1211">
-                <a:solidFill>
-                  <a:srgbClr val="1F1F1F"/>
-                </a:solidFill>
-                <a:latin typeface="Consolas"/>
-              </a:rPr>
-              <a:t>../common/board/list_boards.sh     # serial and tty of every board and cable</a:t>
-            </a:r>
-          </a:p>
-        </p:txBody>
-      </p:sp>
-    </p:spTree>
-  </p:cSld>
-  <p:clrMapOvr>
-    <a:masterClrMapping/>
-  </p:clrMapOvr>
-</p:sld>
-</file>
-
-<file path=ppt/slides/slide51.xml><?xml version="1.0" encoding="utf-8"?>
-<p:sld xmlns:a="http://schemas.openxmlformats.org/drawingml/2006/main" xmlns:p="http://schemas.openxmlformats.org/presentationml/2006/main" xmlns:r="http://schemas.openxmlformats.org/officeDocument/2006/relationships">
-  <p:cSld>
-    <p:spTree>
-      <p:nvGrpSpPr>
-        <p:cNvPr id="1" name=""/>
-        <p:cNvGrpSpPr/>
-        <p:nvPr/>
-      </p:nvGrpSpPr>
-      <p:grpSpPr/>
-      <p:sp>
-        <p:nvSpPr>
-          <p:cNvPr id="10" name="CustomShape 6">
-            <a:extLst>
-              <a:ext uri="{FF2B5EF4-FFF2-40B4-BE49-F238E27FC236}">
-                <a16:creationId xmlns:a16="http://schemas.microsoft.com/office/drawing/2014/main" id="{CB76DC60-C0C9-436D-8956-EE4CA394869E}"/>
-              </a:ext>
-            </a:extLst>
-          </p:cNvPr>
-          <p:cNvSpPr/>
-          <p:nvPr/>
-        </p:nvSpPr>
-        <p:spPr>
-          <a:xfrm>
-            <a:off x="-6000" y="0"/>
-            <a:ext cx="12198000" cy="644877"/>
-          </a:xfrm>
-          <a:prstGeom prst="rect">
-            <a:avLst/>
-          </a:prstGeom>
-          <a:solidFill>
-            <a:schemeClr val="accent6">
-              <a:lumMod val="40000"/>
-              <a:lumOff val="60000"/>
-            </a:schemeClr>
-          </a:solidFill>
-          <a:ln>
-            <a:noFill/>
-          </a:ln>
-        </p:spPr>
-        <p:style>
-          <a:lnRef idx="0">
-            <a:scrgbClr r="0" g="0" b="0"/>
-          </a:lnRef>
-          <a:fillRef idx="0">
-            <a:scrgbClr r="0" g="0" b="0"/>
-          </a:fillRef>
-          <a:effectRef idx="0">
-            <a:scrgbClr r="0" g="0" b="0"/>
-          </a:effectRef>
-          <a:fontRef idx="minor"/>
-        </p:style>
-        <p:txBody>
-          <a:bodyPr wrap="square" lIns="90000" tIns="45000" rIns="90000" bIns="45000">
-            <a:spAutoFit/>
-          </a:bodyPr>
-          <a:lstStyle/>
-          <a:p>
-            <a:pPr marL="360" algn="ctr">
-              <a:lnSpc>
-                <a:spcPct val="100000"/>
-              </a:lnSpc>
-              <a:buClr>
-                <a:srgbClr val="000000"/>
-              </a:buClr>
-            </a:pPr>
-            <a:r>
-              <a:rPr lang="en-US" sz="3400" b="1" spc="-1" dirty="0">
-                <a:latin typeface="Times New Roman" panose="02020603050405020304" pitchFamily="18" charset="0"/>
-                <a:cs typeface="Times New Roman" panose="02020603050405020304" pitchFamily="18" charset="0"/>
-              </a:rPr>
-              <a:t>6. Programming &amp; Bring-up </a:t>
-            </a:r>
-            <a:r>
-              <a:rPr lang="en-US" sz="3400" spc="-1" dirty="0">
-                <a:latin typeface="Times New Roman" panose="02020603050405020304" pitchFamily="18" charset="0"/>
-                <a:cs typeface="Times New Roman" panose="02020603050405020304" pitchFamily="18" charset="0"/>
-              </a:rPr>
-              <a:t>(3/5) Bring-up: GPIO and JTAG</a:t>
-            </a:r>
-          </a:p>
-        </p:txBody>
-      </p:sp>
-      <p:sp>
-        <p:nvSpPr>
-          <p:cNvPr id="62" name="CustomShape 2"/>
-          <p:cNvSpPr/>
-          <p:nvPr/>
-        </p:nvSpPr>
-        <p:spPr>
-          <a:xfrm>
-            <a:off x="11291400" y="6492960"/>
-            <a:ext cx="894600" cy="358920"/>
-          </a:xfrm>
-          <a:prstGeom prst="rect">
-            <a:avLst/>
-          </a:prstGeom>
-          <a:noFill/>
-          <a:ln>
-            <a:noFill/>
-          </a:ln>
-        </p:spPr>
-        <p:style>
-          <a:lnRef idx="0">
-            <a:scrgbClr r="0" g="0" b="0"/>
-          </a:lnRef>
-          <a:fillRef idx="0">
-            <a:scrgbClr r="0" g="0" b="0"/>
-          </a:fillRef>
-          <a:effectRef idx="0">
-            <a:scrgbClr r="0" g="0" b="0"/>
-          </a:effectRef>
-          <a:fontRef idx="minor"/>
-        </p:style>
-        <p:txBody>
-          <a:bodyPr lIns="90000" tIns="45000" rIns="90000" bIns="45000" anchor="ctr">
-            <a:noAutofit/>
-          </a:bodyPr>
-          <a:lstStyle/>
-          <a:p>
-            <a:pPr algn="ctr">
-              <a:lnSpc>
-                <a:spcPct val="100000"/>
-              </a:lnSpc>
-            </a:pPr>
-            <a:fld id="{32452110-F6D1-439F-92C4-7A3912DA20B0}" type="slidenum">
-              <a:rPr lang="en-US" sz="1600" b="1" strike="noStrike" spc="-1">
-                <a:solidFill>
-                  <a:srgbClr val="000000"/>
-                </a:solidFill>
-                <a:latin typeface="Times New Roman"/>
-                <a:ea typeface="DejaVu Sans"/>
-              </a:rPr>
-              <a:t>45</a:t>
-            </a:fld>
-            <a:endParaRPr lang="en-US" sz="1600" b="0" strike="noStrike" spc="-1">
-              <a:latin typeface="Arial"/>
-            </a:endParaRPr>
-          </a:p>
-        </p:txBody>
-      </p:sp>
-      <p:sp>
-        <p:nvSpPr>
-          <p:cNvPr id="63" name="Rectangle 62"/>
-          <p:cNvSpPr/>
-          <p:nvPr/>
-        </p:nvSpPr>
-        <p:spPr>
-          <a:xfrm>
-            <a:off x="365760" y="914400"/>
-            <a:ext cx="5669280" cy="2416810"/>
-          </a:xfrm>
-          <a:prstGeom prst="rect">
-            <a:avLst/>
-          </a:prstGeom>
-          <a:solidFill>
-            <a:srgbClr val="1E1E1E"/>
-          </a:solidFill>
-          <a:ln>
-            <a:solidFill>
-              <a:srgbClr val="C8C8C8"/>
-            </a:solidFill>
-          </a:ln>
-          <a:effectLst/>
-        </p:spPr>
-        <p:style>
-          <a:lnRef idx="1">
-            <a:schemeClr val="accent1"/>
-          </a:lnRef>
-          <a:fillRef idx="3">
-            <a:schemeClr val="accent1"/>
-          </a:fillRef>
-          <a:effectRef idx="2">
-            <a:schemeClr val="accent1"/>
-          </a:effectRef>
-          <a:fontRef idx="minor">
-            <a:schemeClr val="lt1"/>
-          </a:fontRef>
-        </p:style>
-        <p:txBody>
-          <a:bodyPr rtlCol="0" anchor="t" wrap="none" lIns="73152" rIns="73152" tIns="73152" bIns="73152"/>
-          <a:lstStyle/>
-          <a:p>
-            <a:pPr algn="l"/>
-            <a:r>
-              <a:rPr sz="1300" b="1">
-                <a:solidFill>
-                  <a:srgbClr val="AAAAAA"/>
-                </a:solidFill>
-                <a:latin typeface="Consolas"/>
-              </a:rPr>
-              <a:t>tests/build/gpio_test.elf</a:t>
-            </a:r>
-          </a:p>
-          <a:p>
-            <a:pPr algn="l">
-              <a:lnSpc>
-                <a:spcPct val="100000"/>
-              </a:lnSpc>
-            </a:pPr>
-            <a:r>
-              <a:rPr sz="1300">
-                <a:solidFill>
-                  <a:srgbClr val="E6E6E6"/>
-                </a:solidFill>
-                <a:latin typeface="Consolas"/>
-              </a:rPr>
-              <a:t>=== GPIO test (0x64002000, 8 pins) ===</a:t>
-            </a:r>
-          </a:p>
-          <a:p>
-            <a:pPr algn="l">
-              <a:lnSpc>
-                <a:spcPct val="100000"/>
-              </a:lnSpc>
-            </a:pPr>
-            <a:r>
-              <a:rPr sz="1300">
-                <a:solidFill>
-                  <a:srgbClr val="8BE98B"/>
-                </a:solidFill>
-                <a:latin typeface="Consolas"/>
-              </a:rPr>
-              <a:t>  output_en   : got=ff want=ff PASS</a:t>
-            </a:r>
-          </a:p>
-          <a:p>
-            <a:pPr algn="l">
-              <a:lnSpc>
-                <a:spcPct val="100000"/>
-              </a:lnSpc>
-            </a:pPr>
-            <a:r>
-              <a:rPr sz="1300">
-                <a:solidFill>
-                  <a:srgbClr val="8BE98B"/>
-                </a:solidFill>
-                <a:latin typeface="Consolas"/>
-              </a:rPr>
-              <a:t>  all low     : got=0 want=0 PASS</a:t>
-            </a:r>
-          </a:p>
-          <a:p>
-            <a:pPr algn="l">
-              <a:lnSpc>
-                <a:spcPct val="100000"/>
-              </a:lnSpc>
-            </a:pPr>
-            <a:r>
-              <a:rPr sz="1300">
-                <a:solidFill>
-                  <a:srgbClr val="8BE98B"/>
-                </a:solidFill>
-                <a:latin typeface="Consolas"/>
-              </a:rPr>
-              <a:t>  all high    : got=ff want=ff PASS</a:t>
-            </a:r>
-          </a:p>
-          <a:p>
-            <a:pPr algn="l">
-              <a:lnSpc>
-                <a:spcPct val="100000"/>
-              </a:lnSpc>
-            </a:pPr>
-            <a:r>
-              <a:rPr sz="1300">
-                <a:solidFill>
-                  <a:srgbClr val="E6E6E6"/>
-                </a:solidFill>
-                <a:latin typeface="Consolas"/>
-              </a:rPr>
-              <a:t>  walking ones (watch the LEDs):</a:t>
-            </a:r>
-          </a:p>
-          <a:p>
-            <a:pPr algn="l">
-              <a:lnSpc>
-                <a:spcPct val="100000"/>
-              </a:lnSpc>
-            </a:pPr>
-            <a:r>
-              <a:rPr sz="1300">
-                <a:solidFill>
-                  <a:srgbClr val="8BE98B"/>
-                </a:solidFill>
-                <a:latin typeface="Consolas"/>
-              </a:rPr>
-              <a:t>    walk: PASS</a:t>
-            </a:r>
-          </a:p>
-          <a:p>
-            <a:pPr algn="l">
-              <a:lnSpc>
-                <a:spcPct val="100000"/>
-              </a:lnSpc>
-            </a:pPr>
-            <a:r>
-              <a:rPr sz="1300">
-                <a:solidFill>
-                  <a:srgbClr val="8BE98B"/>
-                </a:solidFill>
-                <a:latin typeface="Consolas"/>
-              </a:rPr>
-              <a:t>  xor set     : got=ff want=ff PASS</a:t>
-            </a:r>
-          </a:p>
-          <a:p>
-            <a:pPr algn="l">
-              <a:lnSpc>
-                <a:spcPct val="100000"/>
-              </a:lnSpc>
-            </a:pPr>
-            <a:r>
-              <a:rPr sz="1300">
-                <a:solidFill>
-                  <a:srgbClr val="8BE98B"/>
-                </a:solidFill>
-                <a:latin typeface="Consolas"/>
-              </a:rPr>
-              <a:t>  pattern AA  : got=aa want=aa PASS</a:t>
-            </a:r>
-          </a:p>
-          <a:p>
-            <a:pPr algn="l">
-              <a:lnSpc>
-                <a:spcPct val="100000"/>
-              </a:lnSpc>
-            </a:pPr>
-            <a:r>
-              <a:rPr sz="1300">
-                <a:solidFill>
-                  <a:srgbClr val="8BE98B"/>
-                </a:solidFill>
-                <a:latin typeface="Consolas"/>
-              </a:rPr>
-              <a:t>  pattern 55  : got=55 want=55 PASS</a:t>
-            </a:r>
-          </a:p>
-          <a:p>
-            <a:pPr algn="l">
-              <a:lnSpc>
-                <a:spcPct val="100000"/>
-              </a:lnSpc>
-            </a:pPr>
-            <a:r>
-              <a:rPr sz="1300">
-                <a:solidFill>
-                  <a:srgbClr val="8BE98B"/>
-                </a:solidFill>
-                <a:latin typeface="Consolas"/>
-              </a:rPr>
-              <a:t>GPIO TEST: PASS (0 failures)</a:t>
-            </a:r>
-          </a:p>
-        </p:txBody>
-      </p:sp>
-      <p:sp>
-        <p:nvSpPr>
-          <p:cNvPr id="64" name="Rectangle 63"/>
-          <p:cNvSpPr/>
-          <p:nvPr/>
-        </p:nvSpPr>
-        <p:spPr>
-          <a:xfrm>
-            <a:off x="6217920" y="914400"/>
-            <a:ext cx="5760720" cy="1971910"/>
-          </a:xfrm>
-          <a:prstGeom prst="rect">
-            <a:avLst/>
-          </a:prstGeom>
-          <a:solidFill>
-            <a:srgbClr val="1E1E1E"/>
-          </a:solidFill>
-          <a:ln>
-            <a:solidFill>
-              <a:srgbClr val="C8C8C8"/>
-            </a:solidFill>
-          </a:ln>
-          <a:effectLst/>
-        </p:spPr>
-        <p:style>
-          <a:lnRef idx="1">
-            <a:schemeClr val="accent1"/>
-          </a:lnRef>
-          <a:fillRef idx="3">
-            <a:schemeClr val="accent1"/>
-          </a:fillRef>
-          <a:effectRef idx="2">
-            <a:schemeClr val="accent1"/>
-          </a:effectRef>
-          <a:fontRef idx="minor">
-            <a:schemeClr val="lt1"/>
-          </a:fontRef>
-        </p:style>
-        <p:txBody>
-          <a:bodyPr rtlCol="0" anchor="t" wrap="none" lIns="73152" rIns="73152" tIns="73152" bIns="73152"/>
-          <a:lstStyle/>
-          <a:p>
-            <a:pPr algn="l"/>
-            <a:r>
-              <a:rPr sz="1142" b="1">
-                <a:solidFill>
-                  <a:srgbClr val="AAAAAA"/>
-                </a:solidFill>
-                <a:latin typeface="Consolas"/>
-              </a:rPr>
-              <a:t>tests/build/jtag_test.elf</a:t>
-            </a:r>
-          </a:p>
-          <a:p>
-            <a:pPr algn="l">
-              <a:lnSpc>
-                <a:spcPct val="100000"/>
-              </a:lnSpc>
-            </a:pPr>
-            <a:r>
-              <a:rPr sz="1142">
-                <a:solidFill>
-                  <a:srgbClr val="E6E6E6"/>
-                </a:solidFill>
-                <a:latin typeface="Consolas"/>
-              </a:rPr>
-              <a:t>=== JTAG / debug module test ===</a:t>
-            </a:r>
-          </a:p>
-          <a:p>
-            <a:pPr algn="l">
-              <a:lnSpc>
-                <a:spcPct val="100000"/>
-              </a:lnSpc>
-            </a:pPr>
-            <a:r>
-              <a:rPr sz="1142">
-                <a:solidFill>
-                  <a:srgbClr val="8BE98B"/>
-                </a:solidFill>
-                <a:latin typeface="Consolas"/>
-              </a:rPr>
-              <a:t>  Loaded and resumed over JTAG: PASS (this output is the proof)</a:t>
-            </a:r>
-          </a:p>
-          <a:p>
-            <a:pPr algn="l">
-              <a:lnSpc>
-                <a:spcPct val="100000"/>
-              </a:lnSpc>
-            </a:pPr>
-            <a:r>
-              <a:rPr sz="1142">
-                <a:solidFill>
-                  <a:srgbClr val="E6E6E6"/>
-                </a:solidFill>
-                <a:latin typeface="Consolas"/>
-              </a:rPr>
-              <a:t>  mhartid     : 0</a:t>
-            </a:r>
-          </a:p>
-          <a:p>
-            <a:pPr algn="l">
-              <a:lnSpc>
-                <a:spcPct val="100000"/>
-              </a:lnSpc>
-            </a:pPr>
-            <a:r>
-              <a:rPr sz="1142">
-                <a:solidFill>
-                  <a:srgbClr val="E6E6E6"/>
-                </a:solidFill>
-                <a:latin typeface="Consolas"/>
-              </a:rPr>
-              <a:t>  mvendorid   : 0</a:t>
-            </a:r>
-          </a:p>
-          <a:p>
-            <a:pPr algn="l">
-              <a:lnSpc>
-                <a:spcPct val="100000"/>
-              </a:lnSpc>
-            </a:pPr>
-            <a:r>
-              <a:rPr sz="1142">
-                <a:solidFill>
-                  <a:srgbClr val="E6E6E6"/>
-                </a:solidFill>
-                <a:latin typeface="Consolas"/>
-              </a:rPr>
-              <a:t>  marchid     : 1</a:t>
-            </a:r>
-          </a:p>
-          <a:p>
-            <a:pPr algn="l">
-              <a:lnSpc>
-                <a:spcPct val="100000"/>
-              </a:lnSpc>
-            </a:pPr>
-            <a:r>
-              <a:rPr sz="1142">
-                <a:solidFill>
-                  <a:srgbClr val="E6E6E6"/>
-                </a:solidFill>
-                <a:latin typeface="Consolas"/>
-              </a:rPr>
-              <a:t>  mimpid      : 20181004</a:t>
-            </a:r>
-          </a:p>
-          <a:p>
-            <a:pPr algn="l">
-              <a:lnSpc>
-                <a:spcPct val="100000"/>
-              </a:lnSpc>
-            </a:pPr>
-            <a:r>
-              <a:rPr sz="1142">
-                <a:solidFill>
-                  <a:srgbClr val="E6E6E6"/>
-                </a:solidFill>
-                <a:latin typeface="Consolas"/>
-              </a:rPr>
-              <a:t>  misa low32  : 801105  (MXL=2 -&gt; RV64)</a:t>
-            </a:r>
-          </a:p>
-          <a:p>
-            <a:pPr algn="l">
-              <a:lnSpc>
-                <a:spcPct val="100000"/>
-              </a:lnSpc>
-            </a:pPr>
-            <a:r>
-              <a:rPr sz="1142">
-                <a:solidFill>
-                  <a:srgbClr val="E6E6E6"/>
-                </a:solidFill>
-                <a:latin typeface="Consolas"/>
-              </a:rPr>
-              <a:t>  extensions  : ACIMX</a:t>
-            </a:r>
-          </a:p>
-          <a:p>
-            <a:pPr algn="l">
-              <a:lnSpc>
-                <a:spcPct val="100000"/>
-              </a:lnSpc>
-            </a:pPr>
-            <a:r>
-              <a:rPr sz="1142">
-                <a:solidFill>
-                  <a:srgbClr val="8BE98B"/>
-                </a:solidFill>
-                <a:latin typeface="Consolas"/>
-              </a:rPr>
-              <a:t>JTAG TEST: PASS (0 failures)</a:t>
-            </a:r>
-          </a:p>
-        </p:txBody>
-      </p:sp>
-      <p:sp>
-        <p:nvSpPr>
-          <p:cNvPr id="65" name="TextBox 64"/>
-          <p:cNvSpPr txBox="1"/>
-          <p:nvPr/>
-        </p:nvSpPr>
-        <p:spPr>
-          <a:xfrm>
-            <a:off x="365760" y="3605530"/>
-            <a:ext cx="11612880" cy="1645920"/>
-          </a:xfrm>
-          <a:prstGeom prst="rect">
-            <a:avLst/>
-          </a:prstGeom>
-          <a:noFill/>
-        </p:spPr>
-        <p:txBody>
-          <a:bodyPr wrap="square" anchor="t">
-            <a:spAutoFit/>
-          </a:bodyPr>
-          <a:lstStyle/>
-          <a:p>
-            <a:pPr marL="256032" indent="-219456">
-              <a:spcAft>
-                <a:spcPts val="400"/>
-              </a:spcAft>
-              <a:buChar char="•"/>
-            </a:pPr>
-            <a:r>
-              <a:rPr sz="1800" b="0">
-                <a:solidFill>
-                  <a:srgbClr val="000000"/>
-                </a:solidFill>
-                <a:latin typeface="Times New Roman"/>
-              </a:rPr>
-              <a:t>Real output from board A. The GPIO walk lights the four LEDs one after another.</a:t>
-            </a:r>
-          </a:p>
-          <a:p>
-            <a:pPr marL="256032" indent="-219456">
-              <a:spcAft>
-                <a:spcPts val="400"/>
-              </a:spcAft>
-              <a:buChar char="•"/>
-            </a:pPr>
-            <a:r>
-              <a:rPr sz="1800" b="0" i="1">
-                <a:solidFill>
-                  <a:srgbClr val="000000"/>
-                </a:solidFill>
-                <a:latin typeface="Times New Roman"/>
-              </a:rPr>
-              <a:t>misa</a:t>
-            </a:r>
-            <a:r>
-              <a:rPr sz="1800" b="0">
-                <a:solidFill>
-                  <a:srgbClr val="000000"/>
-                </a:solidFill>
-                <a:latin typeface="Times New Roman"/>
-              </a:rPr>
-              <a:t> confirms the hardware: MXL = 2 → 64-bit; extensions A, C, I, M (X = non-standard extensions present); </a:t>
-            </a:r>
-            <a:r>
-              <a:rPr sz="1800" b="0" i="1">
-                <a:solidFill>
-                  <a:srgbClr val="000000"/>
-                </a:solidFill>
-                <a:latin typeface="Times New Roman"/>
-              </a:rPr>
-              <a:t>marchid</a:t>
-            </a:r>
-            <a:r>
-              <a:rPr sz="1800" b="0">
-                <a:solidFill>
-                  <a:srgbClr val="000000"/>
-                </a:solidFill>
-                <a:latin typeface="Times New Roman"/>
-              </a:rPr>
-              <a:t> 1 = Rocket.</a:t>
-            </a:r>
-          </a:p>
-        </p:txBody>
-      </p:sp>
     </p:spTree>
   </p:cSld>
   <p:clrMapOvr>
@@ -37044,18 +36986,18 @@
               </a:buClr>
             </a:pPr>
             <a:r>
-              <a:rPr lang="en-US" sz="2900" b="1" spc="-1" dirty="0">
+              <a:rPr lang="en-US" sz="3600" b="1" spc="-1" dirty="0">
                 <a:latin typeface="Times New Roman" panose="02020603050405020304" pitchFamily="18" charset="0"/>
                 <a:cs typeface="Times New Roman" panose="02020603050405020304" pitchFamily="18" charset="0"/>
               </a:rPr>
               <a:t>6. Programming &amp; Bring-up </a:t>
             </a:r>
             <a:r>
-              <a:rPr lang="en-US" sz="2900" spc="-1" dirty="0">
+              <a:rPr lang="en-US" sz="3600" spc="-1" dirty="0">
                 <a:latin typeface="Times New Roman" panose="02020603050405020304" pitchFamily="18" charset="0"/>
                 <a:cs typeface="Times New Roman" panose="02020603050405020304" pitchFamily="18" charset="0"/>
               </a:rPr>
-              <a:t>(4/5) Bring-up: SPI (SD card) and UART</a:t>
+              <a:t>(1/5) Program both FPGAs</a:t>
             </a:r>
           </a:p>
         </p:txBody>
@@ -37126,8 +37068,143 @@
         </p:nvSpPr>
         <p:spPr>
           <a:xfrm>
-            <a:off x="365760" y="914400"/>
-            <a:ext cx="5669280" cy="1611121"/>
+            <a:off x="365760" y="868680"/>
+            <a:ext cx="11430000" cy="1502664"/>
+          </a:xfrm>
+          <a:prstGeom prst="rect">
+            <a:avLst/>
+          </a:prstGeom>
+          <a:solidFill>
+            <a:srgbClr val="F4F4F4"/>
+          </a:solidFill>
+          <a:ln>
+            <a:solidFill>
+              <a:srgbClr val="C8C8C8"/>
+            </a:solidFill>
+          </a:ln>
+          <a:effectLst/>
+        </p:spPr>
+        <p:style>
+          <a:lnRef idx="1">
+            <a:schemeClr val="accent1"/>
+          </a:lnRef>
+          <a:fillRef idx="3">
+            <a:schemeClr val="accent1"/>
+          </a:fillRef>
+          <a:effectRef idx="2">
+            <a:schemeClr val="accent1"/>
+          </a:effectRef>
+          <a:fontRef idx="minor">
+            <a:schemeClr val="lt1"/>
+          </a:fontRef>
+        </p:style>
+        <p:txBody>
+          <a:bodyPr rtlCol="0" anchor="t" wrap="none" lIns="73152" rIns="73152" tIns="73152" bIns="73152"/>
+          <a:lstStyle/>
+          <a:p>
+            <a:pPr algn="l"/>
+            <a:r>
+              <a:rPr sz="1400" b="1">
+                <a:solidFill>
+                  <a:srgbClr val="808080"/>
+                </a:solidFill>
+                <a:latin typeface="Consolas"/>
+              </a:rPr>
+              <a:t>Run this — SERIALS are our boards: use your two Arty serials (list_boards.sh)</a:t>
+            </a:r>
+          </a:p>
+          <a:p>
+            <a:pPr algn="l">
+              <a:lnSpc>
+                <a:spcPct val="100000"/>
+              </a:lnSpc>
+            </a:pPr>
+            <a:r>
+              <a:rPr sz="1400">
+                <a:solidFill>
+                  <a:srgbClr val="1F1F1F"/>
+                </a:solidFill>
+                <a:latin typeface="Consolas"/>
+              </a:rPr>
+              <a:t>cd fpga/sw/export</a:t>
+            </a:r>
+          </a:p>
+          <a:p>
+            <a:pPr algn="l">
+              <a:lnSpc>
+                <a:spcPct val="100000"/>
+              </a:lnSpc>
+            </a:pPr>
+            <a:r>
+              <a:rPr sz="1400">
+                <a:solidFill>
+                  <a:srgbClr val="1F1F1F"/>
+                </a:solidFill>
+                <a:latin typeface="Consolas"/>
+              </a:rPr>
+              <a:t>BIT=../../generated-src/chipyard.fpga.arty100t.Arty100TWithoutDDRHarness.\</a:t>
+            </a:r>
+          </a:p>
+          <a:p>
+            <a:pPr algn="l">
+              <a:lnSpc>
+                <a:spcPct val="100000"/>
+              </a:lnSpc>
+            </a:pPr>
+            <a:r>
+              <a:rPr sz="1400">
+                <a:solidFill>
+                  <a:srgbClr val="1F1F1F"/>
+                </a:solidFill>
+                <a:latin typeface="Consolas"/>
+              </a:rPr>
+              <a:t>EdhocRocket6475MHzArty100TConfig/obj/Arty100TWithoutDDRHarness.bit \</a:t>
+            </a:r>
+          </a:p>
+          <a:p>
+            <a:pPr algn="l">
+              <a:lnSpc>
+                <a:spcPct val="100000"/>
+              </a:lnSpc>
+            </a:pPr>
+            <a:r>
+              <a:rPr sz="1400">
+                <a:solidFill>
+                  <a:srgbClr val="1F1F1F"/>
+                </a:solidFill>
+                <a:latin typeface="Consolas"/>
+              </a:rPr>
+              <a:t>SERIALS="210319B269F6 210319B4A439" \</a:t>
+            </a:r>
+          </a:p>
+          <a:p>
+            <a:pPr algn="l">
+              <a:lnSpc>
+                <a:spcPct val="100000"/>
+              </a:lnSpc>
+            </a:pPr>
+            <a:r>
+              <a:rPr sz="1400">
+                <a:solidFill>
+                  <a:srgbClr val="1F1F1F"/>
+                </a:solidFill>
+                <a:latin typeface="Consolas"/>
+              </a:rPr>
+              <a:t>vivado -mode batch -source common/board/program_two.tcl</a:t>
+            </a:r>
+          </a:p>
+        </p:txBody>
+      </p:sp>
+      <p:sp>
+        <p:nvSpPr>
+          <p:cNvPr id="64" name="Rectangle 63"/>
+          <p:cNvSpPr/>
+          <p:nvPr/>
+        </p:nvSpPr>
+        <p:spPr>
+          <a:xfrm>
+            <a:off x="365760" y="2554224"/>
+            <a:ext cx="3840480" cy="604012"/>
           </a:xfrm>
           <a:prstGeom prst="rect">
             <a:avLst/>
@@ -37160,18 +37237,6 @@
           <a:bodyPr rtlCol="0" anchor="t" wrap="none" lIns="73152" rIns="73152" tIns="73152" bIns="73152"/>
           <a:lstStyle/>
           <a:p>
-            <a:pPr algn="l"/>
-            <a:r>
-              <a:rPr sz="1300" b="1">
-                <a:solidFill>
-                  <a:srgbClr val="AAAAAA"/>
-                </a:solidFill>
-                <a:latin typeface="Consolas"/>
-              </a:rPr>
-              <a:t>tests/build/spi_test.elf</a:t>
-            </a:r>
-          </a:p>
-          <a:p>
             <a:pPr algn="l">
               <a:lnSpc>
                 <a:spcPct val="100000"/>
@@ -37184,7 +37249,7 @@
                 </a:solidFill>
                 <a:latin typeface="Consolas"/>
               </a:rPr>
-              <a:t>=== SPI test (SPI0 @ 0x64001000, SD slot) ===</a:t>
+              <a:t>PROGRAMMED 210319B269F6</a:t>
             </a:r>
           </a:p>
           <a:p>
@@ -37196,274 +37261,11 @@
             <a:r>
               <a:rPr sz="1300">
                 <a:solidFill>
-                  <a:srgbClr val="8BE98B"/>
+                  <a:srgbClr val="E6E6E6"/>
                 </a:solidFill>
                 <a:latin typeface="Consolas"/>
               </a:rPr>
-              <a:t>  sckdiv      : got=c want=c PASS</a:t>
-            </a:r>
-          </a:p>
-          <a:p>
-            <a:pPr algn="l">
-              <a:lnSpc>
-                <a:spcPct val="100000"/>
-              </a:lnSpc>
-            </a:pPr>
-            <a:r>
-              <a:rPr sz="1300">
-                <a:solidFill>
-                  <a:srgbClr val="8BE98B"/>
-                </a:solidFill>
-                <a:latin typeface="Consolas"/>
-              </a:rPr>
-              <a:t>  sckmode     : got=0 want=0 PASS</a:t>
-            </a:r>
-          </a:p>
-          <a:p>
-            <a:pPr algn="l">
-              <a:lnSpc>
-                <a:spcPct val="100000"/>
-              </a:lnSpc>
-            </a:pPr>
-            <a:r>
-              <a:rPr sz="1300">
-                <a:solidFill>
-                  <a:srgbClr val="8BE98B"/>
-                </a:solidFill>
-                <a:latin typeface="Consolas"/>
-              </a:rPr>
-              <a:t>  csdef       : got=1 want=1 PASS</a:t>
-            </a:r>
-          </a:p>
-          <a:p>
-            <a:pPr algn="l">
-              <a:lnSpc>
-                <a:spcPct val="100000"/>
-              </a:lnSpc>
-            </a:pPr>
-            <a:r>
-              <a:rPr sz="1300">
-                <a:solidFill>
-                  <a:srgbClr val="8BE98B"/>
-                </a:solidFill>
-                <a:latin typeface="Consolas"/>
-              </a:rPr>
-              <a:t>  SD CMD0     : R1=1 PASS (card in idle state)</a:t>
-            </a:r>
-          </a:p>
-          <a:p>
-            <a:pPr algn="l">
-              <a:lnSpc>
-                <a:spcPct val="100000"/>
-              </a:lnSpc>
-            </a:pPr>
-            <a:r>
-              <a:rPr sz="1300">
-                <a:solidFill>
-                  <a:srgbClr val="8BE98B"/>
-                </a:solidFill>
-                <a:latin typeface="Consolas"/>
-              </a:rPr>
-              <a:t>SPI TEST: PASS (0 failures)</a:t>
-            </a:r>
-          </a:p>
-        </p:txBody>
-      </p:sp>
-      <p:sp>
-        <p:nvSpPr>
-          <p:cNvPr id="64" name="Rectangle 63"/>
-          <p:cNvSpPr/>
-          <p:nvPr/>
-        </p:nvSpPr>
-        <p:spPr>
-          <a:xfrm>
-            <a:off x="6217920" y="914400"/>
-            <a:ext cx="5760720" cy="2060448"/>
-          </a:xfrm>
-          <a:prstGeom prst="rect">
-            <a:avLst/>
-          </a:prstGeom>
-          <a:solidFill>
-            <a:srgbClr val="1E1E1E"/>
-          </a:solidFill>
-          <a:ln>
-            <a:solidFill>
-              <a:srgbClr val="C8C8C8"/>
-            </a:solidFill>
-          </a:ln>
-          <a:effectLst/>
-        </p:spPr>
-        <p:style>
-          <a:lnRef idx="1">
-            <a:schemeClr val="accent1"/>
-          </a:lnRef>
-          <a:fillRef idx="3">
-            <a:schemeClr val="accent1"/>
-          </a:fillRef>
-          <a:effectRef idx="2">
-            <a:schemeClr val="accent1"/>
-          </a:effectRef>
-          <a:fontRef idx="minor">
-            <a:schemeClr val="lt1"/>
-          </a:fontRef>
-        </p:style>
-        <p:txBody>
-          <a:bodyPr rtlCol="0" anchor="t" wrap="none" lIns="73152" rIns="73152" tIns="73152" bIns="73152"/>
-          <a:lstStyle/>
-          <a:p>
-            <a:pPr algn="l"/>
-            <a:r>
-              <a:rPr sz="1200" b="1">
-                <a:solidFill>
-                  <a:srgbClr val="AAAAAA"/>
-                </a:solidFill>
-                <a:latin typeface="Consolas"/>
-              </a:rPr>
-              <a:t>tests/build/uart_test.elf</a:t>
-            </a:r>
-          </a:p>
-          <a:p>
-            <a:pPr algn="l">
-              <a:lnSpc>
-                <a:spcPct val="100000"/>
-              </a:lnSpc>
-            </a:pPr>
-            <a:r>
-              <a:rPr sz="1200">
-                <a:solidFill>
-                  <a:srgbClr val="E6E6E6"/>
-                </a:solidFill>
-                <a:latin typeface="Consolas"/>
-              </a:rPr>
-              <a:t>=== UART test ===</a:t>
-            </a:r>
-          </a:p>
-          <a:p>
-            <a:pPr algn="l">
-              <a:lnSpc>
-                <a:spcPct val="100000"/>
-              </a:lnSpc>
-            </a:pPr>
-            <a:r>
-              <a:rPr sz="1200">
-                <a:solidFill>
-                  <a:srgbClr val="E6E6E6"/>
-                </a:solidFill>
-                <a:latin typeface="Consolas"/>
-              </a:rPr>
-              <a:t>  UART0 @ 0x64000000 (console), UART1 @ 0x64003000 (PMOD JB)</a:t>
-            </a:r>
-          </a:p>
-          <a:p>
-            <a:pPr algn="l">
-              <a:lnSpc>
-                <a:spcPct val="100000"/>
-              </a:lnSpc>
-            </a:pPr>
-            <a:r>
-              <a:rPr sz="1200">
-                <a:solidFill>
-                  <a:srgbClr val="8BE98B"/>
-                </a:solidFill>
-                <a:latin typeface="Consolas"/>
-              </a:rPr>
-              <a:t>  UART0 console TX: PASS (you are reading it)</a:t>
-            </a:r>
-          </a:p>
-          <a:p>
-            <a:pPr algn="l">
-              <a:lnSpc>
-                <a:spcPct val="100000"/>
-              </a:lnSpc>
-            </a:pPr>
-            <a:r>
-              <a:rPr sz="1200">
-                <a:solidFill>
-                  <a:srgbClr val="8BE98B"/>
-                </a:solidFill>
-                <a:latin typeface="Consolas"/>
-              </a:rPr>
-              <a:t>  UART0 div   : got=2a want=2a PASS</a:t>
-            </a:r>
-          </a:p>
-          <a:p>
-            <a:pPr algn="l">
-              <a:lnSpc>
-                <a:spcPct val="100000"/>
-              </a:lnSpc>
-            </a:pPr>
-            <a:r>
-              <a:rPr sz="1200">
-                <a:solidFill>
-                  <a:srgbClr val="8BE98B"/>
-                </a:solidFill>
-                <a:latin typeface="Consolas"/>
-              </a:rPr>
-              <a:t>  UART1 div   : got=2a want=2a PASS</a:t>
-            </a:r>
-          </a:p>
-          <a:p>
-            <a:pPr algn="l">
-              <a:lnSpc>
-                <a:spcPct val="100000"/>
-              </a:lnSpc>
-            </a:pPr>
-            <a:r>
-              <a:rPr sz="1200">
-                <a:solidFill>
-                  <a:srgbClr val="8BE98B"/>
-                </a:solidFill>
-                <a:latin typeface="Consolas"/>
-              </a:rPr>
-              <a:t>  UART1 txen  : got=1 want=1 PASS</a:t>
-            </a:r>
-          </a:p>
-          <a:p>
-            <a:pPr algn="l">
-              <a:lnSpc>
-                <a:spcPct val="100000"/>
-              </a:lnSpc>
-            </a:pPr>
-            <a:r>
-              <a:rPr sz="1200">
-                <a:solidFill>
-                  <a:srgbClr val="8BE98B"/>
-                </a:solidFill>
-                <a:latin typeface="Consolas"/>
-              </a:rPr>
-              <a:t>  UART1 rxen  : got=1 want=1 PASS</a:t>
-            </a:r>
-          </a:p>
-          <a:p>
-            <a:pPr algn="l">
-              <a:lnSpc>
-                <a:spcPct val="100000"/>
-              </a:lnSpc>
-            </a:pPr>
-            <a:r>
-              <a:rPr sz="1200">
-                <a:solidFill>
-                  <a:srgbClr val="E6E6E6"/>
-                </a:solidFill>
-                <a:latin typeface="Consolas"/>
-              </a:rPr>
-              <a:t>  UART1 loop  : SKIP (no echo; jumper JB1-JB2 to test)</a:t>
-            </a:r>
-          </a:p>
-          <a:p>
-            <a:pPr algn="l">
-              <a:lnSpc>
-                <a:spcPct val="100000"/>
-              </a:lnSpc>
-            </a:pPr>
-            <a:r>
-              <a:rPr sz="1200">
-                <a:solidFill>
-                  <a:srgbClr val="8BE98B"/>
-                </a:solidFill>
-                <a:latin typeface="Consolas"/>
-              </a:rPr>
-              <a:t>UART TEST: PASS (0 failures)</a:t>
+              <a:t>PROGRAMMED 210319B4A439</a:t>
             </a:r>
           </a:p>
         </p:txBody>
@@ -37476,8 +37278,8 @@
         </p:nvSpPr>
         <p:spPr>
           <a:xfrm>
-            <a:off x="365760" y="3249168"/>
-            <a:ext cx="11612880" cy="2011680"/>
+            <a:off x="365760" y="3432555"/>
+            <a:ext cx="11430000" cy="2743200"/>
           </a:xfrm>
           <a:prstGeom prst="rect">
             <a:avLst/>
@@ -37497,22 +37299,31 @@
               <a:buChar char="•"/>
             </a:pPr>
             <a:r>
-              <a:rPr sz="1700" b="1">
+              <a:rPr sz="1800" b="0">
                 <a:solidFill>
                   <a:srgbClr val="000000"/>
                 </a:solidFill>
                 <a:latin typeface="Times New Roman"/>
               </a:rPr>
-              <a:t>SD CMD0 → R1 = 0x01</a:t>
-            </a:r>
-            <a:r>
-              <a:rPr sz="1700" b="0">
+              <a:t>SERIALS = the Digilent USB serial of each Arty, as printed by </a:t>
+            </a:r>
+            <a:r>
+              <a:rPr sz="1800" b="0" i="1">
                 <a:solidFill>
                   <a:srgbClr val="000000"/>
                 </a:solidFill>
                 <a:latin typeface="Times New Roman"/>
               </a:rPr>
-              <a:t> proves clock, chip select and both data lines work against a real card.</a:t>
+              <a:t>common/board/list_boards.sh</a:t>
+            </a:r>
+            <a:r>
+              <a:rPr sz="1800" b="0">
+                <a:solidFill>
+                  <a:srgbClr val="000000"/>
+                </a:solidFill>
+                <a:latin typeface="Times New Roman"/>
+              </a:rPr>
+              <a:t>. The script uses a running Vivado GUI’s hardware server if there is one.</a:t>
             </a:r>
           </a:p>
           <a:p>
@@ -37523,13 +37334,31 @@
               <a:buChar char="•"/>
             </a:pPr>
             <a:r>
-              <a:rPr sz="1700" b="0">
+              <a:rPr sz="1800" b="0">
                 <a:solidFill>
                   <a:srgbClr val="000000"/>
                 </a:solidFill>
                 <a:latin typeface="Times New Roman"/>
               </a:rPr>
-              <a:t>Right after power-up the card can answer the first CMD0 with one junk byte (e.g. 0x3f). The boot ROM, this test and the firmware send CMD0 again; the second answer is clean.</a:t>
+              <a:t>At power-up the FPGA loads whatever its QSPI flash holds (e.g. an older design). Symptom: OpenOCD reports “</a:t>
+            </a:r>
+            <a:r>
+              <a:rPr sz="1800" b="0" i="1">
+                <a:solidFill>
+                  <a:srgbClr val="000000"/>
+                </a:solidFill>
+                <a:latin typeface="Times New Roman"/>
+              </a:rPr>
+              <a:t>dtmcontrol is 0</a:t>
+            </a:r>
+            <a:r>
+              <a:rPr sz="1800" b="0">
+                <a:solidFill>
+                  <a:srgbClr val="000000"/>
+                </a:solidFill>
+                <a:latin typeface="Times New Roman"/>
+              </a:rPr>
+              <a:t>” → program again.</a:t>
             </a:r>
           </a:p>
           <a:p>
@@ -37540,13 +37369,13 @@
               <a:buChar char="•"/>
             </a:pPr>
             <a:r>
-              <a:rPr sz="1700" b="0">
+              <a:rPr sz="1800" b="0">
                 <a:solidFill>
                   <a:srgbClr val="000000"/>
                 </a:solidFill>
                 <a:latin typeface="Times New Roman"/>
               </a:rPr>
-              <a:t>UART1 loopback needs a jumper JB1–JB2; without it the step is skipped, not failed.</a:t>
+              <a:t>For a board that starts the EDHOC SoC by itself, write the bitstream to the QSPI flash (Vivado → Add Configuration Memory Device).</a:t>
             </a:r>
           </a:p>
         </p:txBody>
@@ -37626,18 +37455,18 @@
               </a:buClr>
             </a:pPr>
             <a:r>
-              <a:rPr lang="en-US" sz="3300" b="1" spc="-1" dirty="0">
+              <a:rPr lang="en-US" sz="3400" b="1" spc="-1" dirty="0">
                 <a:latin typeface="Times New Roman" panose="02020603050405020304" pitchFamily="18" charset="0"/>
                 <a:cs typeface="Times New Roman" panose="02020603050405020304" pitchFamily="18" charset="0"/>
               </a:rPr>
               <a:t>6. Programming &amp; Bring-up </a:t>
             </a:r>
             <a:r>
-              <a:rPr lang="en-US" sz="3300" spc="-1" dirty="0">
+              <a:rPr lang="en-US" sz="3400" spc="-1" dirty="0">
                 <a:latin typeface="Times New Roman" panose="02020603050405020304" pitchFamily="18" charset="0"/>
                 <a:cs typeface="Times New Roman" panose="02020603050405020304" pitchFamily="18" charset="0"/>
               </a:rPr>
-              <a:t>(5/5) Booting from the SD card</a:t>
+              <a:t>(2/5) Load firmware over JTAG</a:t>
             </a:r>
           </a:p>
         </p:txBody>
@@ -37693,6 +37522,1813 @@
                 <a:ea typeface="DejaVu Sans"/>
               </a:rPr>
               <a:t>47</a:t>
+            </a:fld>
+            <a:endParaRPr lang="en-US" sz="1600" b="0" strike="noStrike" spc="-1">
+              <a:latin typeface="Arial"/>
+            </a:endParaRPr>
+          </a:p>
+        </p:txBody>
+      </p:sp>
+      <p:sp>
+        <p:nvSpPr>
+          <p:cNvPr id="63" name="Rectangle 62"/>
+          <p:cNvSpPr/>
+          <p:nvPr/>
+        </p:nvSpPr>
+        <p:spPr>
+          <a:xfrm>
+            <a:off x="365760" y="868680"/>
+            <a:ext cx="7315200" cy="1139631"/>
+          </a:xfrm>
+          <a:prstGeom prst="rect">
+            <a:avLst/>
+          </a:prstGeom>
+          <a:solidFill>
+            <a:srgbClr val="F4F4F4"/>
+          </a:solidFill>
+          <a:ln>
+            <a:solidFill>
+              <a:srgbClr val="C8C8C8"/>
+            </a:solidFill>
+          </a:ln>
+          <a:effectLst/>
+        </p:spPr>
+        <p:style>
+          <a:lnRef idx="1">
+            <a:schemeClr val="accent1"/>
+          </a:lnRef>
+          <a:fillRef idx="3">
+            <a:schemeClr val="accent1"/>
+          </a:fillRef>
+          <a:effectRef idx="2">
+            <a:schemeClr val="accent1"/>
+          </a:effectRef>
+          <a:fontRef idx="minor">
+            <a:schemeClr val="lt1"/>
+          </a:fontRef>
+        </p:style>
+        <p:txBody>
+          <a:bodyPr rtlCol="0" anchor="t" wrap="none" lIns="73152" rIns="73152" tIns="73152" bIns="73152"/>
+          <a:lstStyle/>
+          <a:p>
+            <a:pPr algn="l"/>
+            <a:r>
+              <a:rPr sz="1211" b="1">
+                <a:solidFill>
+                  <a:srgbClr val="808080"/>
+                </a:solidFill>
+                <a:latin typeface="Consolas"/>
+              </a:rPr>
+              <a:t>Run this — from the repository root</a:t>
+            </a:r>
+          </a:p>
+          <a:p>
+            <a:pPr algn="l">
+              <a:lnSpc>
+                <a:spcPct val="100000"/>
+              </a:lnSpc>
+            </a:pPr>
+            <a:r>
+              <a:rPr sz="1211">
+                <a:solidFill>
+                  <a:srgbClr val="1F1F1F"/>
+                </a:solidFill>
+                <a:latin typeface="Consolas"/>
+              </a:rPr>
+              <a:t>cd fpga/sw/export/tests</a:t>
+            </a:r>
+          </a:p>
+          <a:p>
+            <a:pPr algn="l">
+              <a:lnSpc>
+                <a:spcPct val="100000"/>
+              </a:lnSpc>
+            </a:pPr>
+            <a:r>
+              <a:rPr sz="1211">
+                <a:solidFill>
+                  <a:srgbClr val="1F1F1F"/>
+                </a:solidFill>
+                <a:latin typeface="Consolas"/>
+              </a:rPr>
+              <a:t>make gpio_test                          # build a test program</a:t>
+            </a:r>
+          </a:p>
+          <a:p>
+            <a:pPr algn="l">
+              <a:lnSpc>
+                <a:spcPct val="100000"/>
+              </a:lnSpc>
+            </a:pPr>
+            <a:r>
+              <a:rPr sz="1211">
+                <a:solidFill>
+                  <a:srgbClr val="1F1F1F"/>
+                </a:solidFill>
+                <a:latin typeface="Consolas"/>
+              </a:rPr>
+              <a:t>BOARD=initiator ../common/board/run_one.sh build/gpio_test.elf 5   # board A</a:t>
+            </a:r>
+          </a:p>
+          <a:p>
+            <a:pPr algn="l">
+              <a:lnSpc>
+                <a:spcPct val="100000"/>
+              </a:lnSpc>
+            </a:pPr>
+            <a:r>
+              <a:rPr sz="1211">
+                <a:solidFill>
+                  <a:srgbClr val="1F1F1F"/>
+                </a:solidFill>
+                <a:latin typeface="Consolas"/>
+              </a:rPr>
+              <a:t>BOARD=responder ../common/board/run_one.sh build/gpio_test.elf 5   # board B</a:t>
+            </a:r>
+          </a:p>
+        </p:txBody>
+      </p:sp>
+      <p:sp>
+        <p:nvSpPr>
+          <p:cNvPr id="64" name="Rectangle 63"/>
+          <p:cNvSpPr/>
+          <p:nvPr/>
+        </p:nvSpPr>
+        <p:spPr>
+          <a:xfrm>
+            <a:off x="365760" y="2191191"/>
+            <a:ext cx="7315200" cy="1004809"/>
+          </a:xfrm>
+          <a:prstGeom prst="rect">
+            <a:avLst/>
+          </a:prstGeom>
+          <a:solidFill>
+            <a:srgbClr val="F4F4F4"/>
+          </a:solidFill>
+          <a:ln>
+            <a:solidFill>
+              <a:srgbClr val="C8C8C8"/>
+            </a:solidFill>
+          </a:ln>
+          <a:effectLst/>
+        </p:spPr>
+        <p:style>
+          <a:lnRef idx="1">
+            <a:schemeClr val="accent1"/>
+          </a:lnRef>
+          <a:fillRef idx="3">
+            <a:schemeClr val="accent1"/>
+          </a:fillRef>
+          <a:effectRef idx="2">
+            <a:schemeClr val="accent1"/>
+          </a:effectRef>
+          <a:fontRef idx="minor">
+            <a:schemeClr val="lt1"/>
+          </a:fontRef>
+        </p:style>
+        <p:txBody>
+          <a:bodyPr rtlCol="0" anchor="t" wrap="none" lIns="73152" rIns="73152" tIns="73152" bIns="73152"/>
+          <a:lstStyle/>
+          <a:p>
+            <a:pPr algn="l"/>
+            <a:r>
+              <a:rPr sz="1296" b="1">
+                <a:solidFill>
+                  <a:srgbClr val="808080"/>
+                </a:solidFill>
+                <a:latin typeface="Consolas"/>
+              </a:rPr>
+              <a:t>Simplified — what run_one.sh does ($SERIAL, $ELF are set by the script)</a:t>
+            </a:r>
+          </a:p>
+          <a:p>
+            <a:pPr algn="l">
+              <a:lnSpc>
+                <a:spcPct val="100000"/>
+              </a:lnSpc>
+            </a:pPr>
+            <a:r>
+              <a:rPr sz="1296">
+                <a:solidFill>
+                  <a:srgbClr val="1F1F1F"/>
+                </a:solidFill>
+                <a:latin typeface="Consolas"/>
+              </a:rPr>
+              <a:t>openocd -c "adapter serial $SERIAL" -f c232hm.cfg \</a:t>
+            </a:r>
+          </a:p>
+          <a:p>
+            <a:pPr algn="l">
+              <a:lnSpc>
+                <a:spcPct val="100000"/>
+              </a:lnSpc>
+            </a:pPr>
+            <a:r>
+              <a:rPr sz="1296">
+                <a:solidFill>
+                  <a:srgbClr val="1F1F1F"/>
+                </a:solidFill>
+                <a:latin typeface="Consolas"/>
+              </a:rPr>
+              <a:t>  -c "halt" -c "load_image $ELF" \</a:t>
+            </a:r>
+          </a:p>
+          <a:p>
+            <a:pPr algn="l">
+              <a:lnSpc>
+                <a:spcPct val="100000"/>
+              </a:lnSpc>
+            </a:pPr>
+            <a:r>
+              <a:rPr sz="1296">
+                <a:solidFill>
+                  <a:srgbClr val="1F1F1F"/>
+                </a:solidFill>
+                <a:latin typeface="Consolas"/>
+              </a:rPr>
+              <a:t>  -c "resume 0x80000000" -c "shutdown"</a:t>
+            </a:r>
+          </a:p>
+        </p:txBody>
+      </p:sp>
+      <p:sp>
+        <p:nvSpPr>
+          <p:cNvPr id="65" name="TextBox 64"/>
+          <p:cNvSpPr txBox="1"/>
+          <p:nvPr/>
+        </p:nvSpPr>
+        <p:spPr>
+          <a:xfrm>
+            <a:off x="7863840" y="914400"/>
+            <a:ext cx="4114800" cy="5394960"/>
+          </a:xfrm>
+          <a:prstGeom prst="rect">
+            <a:avLst/>
+          </a:prstGeom>
+          <a:noFill/>
+        </p:spPr>
+        <p:txBody>
+          <a:bodyPr wrap="square" anchor="t">
+            <a:spAutoFit/>
+          </a:bodyPr>
+          <a:lstStyle/>
+          <a:p>
+            <a:pPr marL="256032" indent="-219456">
+              <a:spcAft>
+                <a:spcPts val="400"/>
+              </a:spcAft>
+              <a:buChar char="•"/>
+            </a:pPr>
+            <a:r>
+              <a:rPr sz="1400" b="0">
+                <a:solidFill>
+                  <a:srgbClr val="8B1A1A"/>
+                </a:solidFill>
+                <a:latin typeface="Consolas"/>
+              </a:rPr>
+              <a:t>run_one.sh</a:t>
+            </a:r>
+            <a:r>
+              <a:rPr sz="1600" b="0">
+                <a:solidFill>
+                  <a:srgbClr val="000000"/>
+                </a:solidFill>
+                <a:latin typeface="Times New Roman"/>
+              </a:rPr>
+              <a:t>: halt the core, write the ELF into the scratchpad, start at 0x8000_0000, show the console.</a:t>
+            </a:r>
+          </a:p>
+          <a:p>
+            <a:pPr marL="256032" indent="-219456">
+              <a:spcAft>
+                <a:spcPts val="400"/>
+              </a:spcAft>
+              <a:buChar char="•"/>
+            </a:pPr>
+            <a:r>
+              <a:rPr sz="1600" b="0">
+                <a:solidFill>
+                  <a:srgbClr val="000000"/>
+                </a:solidFill>
+                <a:latin typeface="Times New Roman"/>
+              </a:rPr>
+              <a:t>Both boards at once (responder first): </a:t>
+            </a:r>
+            <a:r>
+              <a:rPr sz="1400" b="0">
+                <a:solidFill>
+                  <a:srgbClr val="8B1A1A"/>
+                </a:solidFill>
+                <a:latin typeface="Consolas"/>
+              </a:rPr>
+              <a:t>load_both.sh &lt;initiator.elf&gt; &lt;responder.elf&gt;</a:t>
+            </a:r>
+            <a:r>
+              <a:rPr sz="1600" b="0">
+                <a:solidFill>
+                  <a:srgbClr val="000000"/>
+                </a:solidFill>
+                <a:latin typeface="Times New Roman"/>
+              </a:rPr>
+              <a:t>, used from Lesson 3 on.</a:t>
+            </a:r>
+          </a:p>
+          <a:p>
+            <a:pPr marL="256032" indent="-219456">
+              <a:spcAft>
+                <a:spcPts val="400"/>
+              </a:spcAft>
+              <a:buChar char="•"/>
+            </a:pPr>
+            <a:r>
+              <a:rPr sz="1600" b="0">
+                <a:solidFill>
+                  <a:srgbClr val="000000"/>
+                </a:solidFill>
+                <a:latin typeface="Times New Roman"/>
+              </a:rPr>
+              <a:t>Cable and console of each board come from </a:t>
+            </a:r>
+            <a:r>
+              <a:rPr sz="1600" b="0" i="1">
+                <a:solidFill>
+                  <a:srgbClr val="000000"/>
+                </a:solidFill>
+                <a:latin typeface="Times New Roman"/>
+              </a:rPr>
+              <a:t>boards.env</a:t>
+            </a:r>
+            <a:r>
+              <a:rPr sz="1600" b="0">
+                <a:solidFill>
+                  <a:srgbClr val="000000"/>
+                </a:solidFill>
+                <a:latin typeface="Times New Roman"/>
+              </a:rPr>
+              <a:t>. It ships with our serials: put yours in first (Lesson 2, section 2, (1/3)–(2/3)).</a:t>
+            </a:r>
+          </a:p>
+          <a:p>
+            <a:pPr marL="256032" indent="-219456">
+              <a:spcAft>
+                <a:spcPts val="400"/>
+              </a:spcAft>
+              <a:buChar char="•"/>
+            </a:pPr>
+            <a:r>
+              <a:rPr sz="1600" b="0">
+                <a:solidFill>
+                  <a:srgbClr val="000000"/>
+                </a:solidFill>
+                <a:latin typeface="Times New Roman"/>
+              </a:rPr>
+              <a:t>The console tty is found by the board's serial, so moving ttyUSB numbers do not matter (57600 baud).</a:t>
+            </a:r>
+          </a:p>
+        </p:txBody>
+      </p:sp>
+      <p:sp>
+        <p:nvSpPr>
+          <p:cNvPr id="66" name="Rectangle 65"/>
+          <p:cNvSpPr/>
+          <p:nvPr/>
+        </p:nvSpPr>
+        <p:spPr>
+          <a:xfrm>
+            <a:off x="365760" y="3378880"/>
+            <a:ext cx="7315200" cy="576553"/>
+          </a:xfrm>
+          <a:prstGeom prst="rect">
+            <a:avLst/>
+          </a:prstGeom>
+          <a:solidFill>
+            <a:srgbClr val="F4F4F4"/>
+          </a:solidFill>
+          <a:ln>
+            <a:solidFill>
+              <a:srgbClr val="C8C8C8"/>
+            </a:solidFill>
+          </a:ln>
+          <a:effectLst/>
+        </p:spPr>
+        <p:style>
+          <a:lnRef idx="1">
+            <a:schemeClr val="accent1"/>
+          </a:lnRef>
+          <a:fillRef idx="3">
+            <a:schemeClr val="accent1"/>
+          </a:fillRef>
+          <a:effectRef idx="2">
+            <a:schemeClr val="accent1"/>
+          </a:effectRef>
+          <a:fontRef idx="minor">
+            <a:schemeClr val="lt1"/>
+          </a:fontRef>
+        </p:style>
+        <p:txBody>
+          <a:bodyPr rtlCol="0" anchor="t" wrap="none" lIns="73152" rIns="73152" tIns="73152" bIns="73152"/>
+          <a:lstStyle/>
+          <a:p>
+            <a:pPr algn="l"/>
+            <a:r>
+              <a:rPr sz="1211" b="1">
+                <a:solidFill>
+                  <a:srgbClr val="808080"/>
+                </a:solidFill>
+                <a:latin typeface="Consolas"/>
+              </a:rPr>
+              <a:t>Run this — which tty is which board?</a:t>
+            </a:r>
+          </a:p>
+          <a:p>
+            <a:pPr algn="l">
+              <a:lnSpc>
+                <a:spcPct val="100000"/>
+              </a:lnSpc>
+            </a:pPr>
+            <a:r>
+              <a:rPr sz="1211">
+                <a:solidFill>
+                  <a:srgbClr val="1F1F1F"/>
+                </a:solidFill>
+                <a:latin typeface="Consolas"/>
+              </a:rPr>
+              <a:t>../common/board/list_boards.sh     # serial and tty of every board and cable</a:t>
+            </a:r>
+          </a:p>
+        </p:txBody>
+      </p:sp>
+    </p:spTree>
+  </p:cSld>
+  <p:clrMapOvr>
+    <a:masterClrMapping/>
+  </p:clrMapOvr>
+</p:sld>
+</file>
+
+<file path=ppt/slides/slide54.xml><?xml version="1.0" encoding="utf-8"?>
+<p:sld xmlns:a="http://schemas.openxmlformats.org/drawingml/2006/main" xmlns:p="http://schemas.openxmlformats.org/presentationml/2006/main" xmlns:r="http://schemas.openxmlformats.org/officeDocument/2006/relationships">
+  <p:cSld>
+    <p:spTree>
+      <p:nvGrpSpPr>
+        <p:cNvPr id="1" name=""/>
+        <p:cNvGrpSpPr/>
+        <p:nvPr/>
+      </p:nvGrpSpPr>
+      <p:grpSpPr/>
+      <p:sp>
+        <p:nvSpPr>
+          <p:cNvPr id="10" name="CustomShape 6">
+            <a:extLst>
+              <a:ext uri="{FF2B5EF4-FFF2-40B4-BE49-F238E27FC236}">
+                <a16:creationId xmlns:a16="http://schemas.microsoft.com/office/drawing/2014/main" id="{CB76DC60-C0C9-436D-8956-EE4CA394869E}"/>
+              </a:ext>
+            </a:extLst>
+          </p:cNvPr>
+          <p:cNvSpPr/>
+          <p:nvPr/>
+        </p:nvSpPr>
+        <p:spPr>
+          <a:xfrm>
+            <a:off x="-6000" y="0"/>
+            <a:ext cx="12198000" cy="644877"/>
+          </a:xfrm>
+          <a:prstGeom prst="rect">
+            <a:avLst/>
+          </a:prstGeom>
+          <a:solidFill>
+            <a:schemeClr val="accent6">
+              <a:lumMod val="40000"/>
+              <a:lumOff val="60000"/>
+            </a:schemeClr>
+          </a:solidFill>
+          <a:ln>
+            <a:noFill/>
+          </a:ln>
+        </p:spPr>
+        <p:style>
+          <a:lnRef idx="0">
+            <a:scrgbClr r="0" g="0" b="0"/>
+          </a:lnRef>
+          <a:fillRef idx="0">
+            <a:scrgbClr r="0" g="0" b="0"/>
+          </a:fillRef>
+          <a:effectRef idx="0">
+            <a:scrgbClr r="0" g="0" b="0"/>
+          </a:effectRef>
+          <a:fontRef idx="minor"/>
+        </p:style>
+        <p:txBody>
+          <a:bodyPr wrap="square" lIns="90000" tIns="45000" rIns="90000" bIns="45000">
+            <a:spAutoFit/>
+          </a:bodyPr>
+          <a:lstStyle/>
+          <a:p>
+            <a:pPr marL="360" algn="ctr">
+              <a:lnSpc>
+                <a:spcPct val="100000"/>
+              </a:lnSpc>
+              <a:buClr>
+                <a:srgbClr val="000000"/>
+              </a:buClr>
+            </a:pPr>
+            <a:r>
+              <a:rPr lang="en-US" sz="3400" b="1" spc="-1" dirty="0">
+                <a:latin typeface="Times New Roman" panose="02020603050405020304" pitchFamily="18" charset="0"/>
+                <a:cs typeface="Times New Roman" panose="02020603050405020304" pitchFamily="18" charset="0"/>
+              </a:rPr>
+              <a:t>6. Programming &amp; Bring-up </a:t>
+            </a:r>
+            <a:r>
+              <a:rPr lang="en-US" sz="3400" spc="-1" dirty="0">
+                <a:latin typeface="Times New Roman" panose="02020603050405020304" pitchFamily="18" charset="0"/>
+                <a:cs typeface="Times New Roman" panose="02020603050405020304" pitchFamily="18" charset="0"/>
+              </a:rPr>
+              <a:t>(3/5) Bring-up: GPIO and JTAG</a:t>
+            </a:r>
+          </a:p>
+        </p:txBody>
+      </p:sp>
+      <p:sp>
+        <p:nvSpPr>
+          <p:cNvPr id="62" name="CustomShape 2"/>
+          <p:cNvSpPr/>
+          <p:nvPr/>
+        </p:nvSpPr>
+        <p:spPr>
+          <a:xfrm>
+            <a:off x="11291400" y="6492960"/>
+            <a:ext cx="894600" cy="358920"/>
+          </a:xfrm>
+          <a:prstGeom prst="rect">
+            <a:avLst/>
+          </a:prstGeom>
+          <a:noFill/>
+          <a:ln>
+            <a:noFill/>
+          </a:ln>
+        </p:spPr>
+        <p:style>
+          <a:lnRef idx="0">
+            <a:scrgbClr r="0" g="0" b="0"/>
+          </a:lnRef>
+          <a:fillRef idx="0">
+            <a:scrgbClr r="0" g="0" b="0"/>
+          </a:fillRef>
+          <a:effectRef idx="0">
+            <a:scrgbClr r="0" g="0" b="0"/>
+          </a:effectRef>
+          <a:fontRef idx="minor"/>
+        </p:style>
+        <p:txBody>
+          <a:bodyPr lIns="90000" tIns="45000" rIns="90000" bIns="45000" anchor="ctr">
+            <a:noAutofit/>
+          </a:bodyPr>
+          <a:lstStyle/>
+          <a:p>
+            <a:pPr algn="ctr">
+              <a:lnSpc>
+                <a:spcPct val="100000"/>
+              </a:lnSpc>
+            </a:pPr>
+            <a:fld id="{32452110-F6D1-439F-92C4-7A3912DA20B0}" type="slidenum">
+              <a:rPr lang="en-US" sz="1600" b="1" strike="noStrike" spc="-1">
+                <a:solidFill>
+                  <a:srgbClr val="000000"/>
+                </a:solidFill>
+                <a:latin typeface="Times New Roman"/>
+                <a:ea typeface="DejaVu Sans"/>
+              </a:rPr>
+              <a:t>48</a:t>
+            </a:fld>
+            <a:endParaRPr lang="en-US" sz="1600" b="0" strike="noStrike" spc="-1">
+              <a:latin typeface="Arial"/>
+            </a:endParaRPr>
+          </a:p>
+        </p:txBody>
+      </p:sp>
+      <p:sp>
+        <p:nvSpPr>
+          <p:cNvPr id="63" name="Rectangle 62"/>
+          <p:cNvSpPr/>
+          <p:nvPr/>
+        </p:nvSpPr>
+        <p:spPr>
+          <a:xfrm>
+            <a:off x="365760" y="914400"/>
+            <a:ext cx="5669280" cy="2416810"/>
+          </a:xfrm>
+          <a:prstGeom prst="rect">
+            <a:avLst/>
+          </a:prstGeom>
+          <a:solidFill>
+            <a:srgbClr val="1E1E1E"/>
+          </a:solidFill>
+          <a:ln>
+            <a:solidFill>
+              <a:srgbClr val="C8C8C8"/>
+            </a:solidFill>
+          </a:ln>
+          <a:effectLst/>
+        </p:spPr>
+        <p:style>
+          <a:lnRef idx="1">
+            <a:schemeClr val="accent1"/>
+          </a:lnRef>
+          <a:fillRef idx="3">
+            <a:schemeClr val="accent1"/>
+          </a:fillRef>
+          <a:effectRef idx="2">
+            <a:schemeClr val="accent1"/>
+          </a:effectRef>
+          <a:fontRef idx="minor">
+            <a:schemeClr val="lt1"/>
+          </a:fontRef>
+        </p:style>
+        <p:txBody>
+          <a:bodyPr rtlCol="0" anchor="t" wrap="none" lIns="73152" rIns="73152" tIns="73152" bIns="73152"/>
+          <a:lstStyle/>
+          <a:p>
+            <a:pPr algn="l"/>
+            <a:r>
+              <a:rPr sz="1300" b="1">
+                <a:solidFill>
+                  <a:srgbClr val="AAAAAA"/>
+                </a:solidFill>
+                <a:latin typeface="Consolas"/>
+              </a:rPr>
+              <a:t>tests/build/gpio_test.elf</a:t>
+            </a:r>
+          </a:p>
+          <a:p>
+            <a:pPr algn="l">
+              <a:lnSpc>
+                <a:spcPct val="100000"/>
+              </a:lnSpc>
+            </a:pPr>
+            <a:r>
+              <a:rPr sz="1300">
+                <a:solidFill>
+                  <a:srgbClr val="E6E6E6"/>
+                </a:solidFill>
+                <a:latin typeface="Consolas"/>
+              </a:rPr>
+              <a:t>=== GPIO test (0x64002000, 8 pins) ===</a:t>
+            </a:r>
+          </a:p>
+          <a:p>
+            <a:pPr algn="l">
+              <a:lnSpc>
+                <a:spcPct val="100000"/>
+              </a:lnSpc>
+            </a:pPr>
+            <a:r>
+              <a:rPr sz="1300">
+                <a:solidFill>
+                  <a:srgbClr val="8BE98B"/>
+                </a:solidFill>
+                <a:latin typeface="Consolas"/>
+              </a:rPr>
+              <a:t>  output_en   : got=ff want=ff PASS</a:t>
+            </a:r>
+          </a:p>
+          <a:p>
+            <a:pPr algn="l">
+              <a:lnSpc>
+                <a:spcPct val="100000"/>
+              </a:lnSpc>
+            </a:pPr>
+            <a:r>
+              <a:rPr sz="1300">
+                <a:solidFill>
+                  <a:srgbClr val="8BE98B"/>
+                </a:solidFill>
+                <a:latin typeface="Consolas"/>
+              </a:rPr>
+              <a:t>  all low     : got=0 want=0 PASS</a:t>
+            </a:r>
+          </a:p>
+          <a:p>
+            <a:pPr algn="l">
+              <a:lnSpc>
+                <a:spcPct val="100000"/>
+              </a:lnSpc>
+            </a:pPr>
+            <a:r>
+              <a:rPr sz="1300">
+                <a:solidFill>
+                  <a:srgbClr val="8BE98B"/>
+                </a:solidFill>
+                <a:latin typeface="Consolas"/>
+              </a:rPr>
+              <a:t>  all high    : got=ff want=ff PASS</a:t>
+            </a:r>
+          </a:p>
+          <a:p>
+            <a:pPr algn="l">
+              <a:lnSpc>
+                <a:spcPct val="100000"/>
+              </a:lnSpc>
+            </a:pPr>
+            <a:r>
+              <a:rPr sz="1300">
+                <a:solidFill>
+                  <a:srgbClr val="E6E6E6"/>
+                </a:solidFill>
+                <a:latin typeface="Consolas"/>
+              </a:rPr>
+              <a:t>  walking ones (watch the LEDs):</a:t>
+            </a:r>
+          </a:p>
+          <a:p>
+            <a:pPr algn="l">
+              <a:lnSpc>
+                <a:spcPct val="100000"/>
+              </a:lnSpc>
+            </a:pPr>
+            <a:r>
+              <a:rPr sz="1300">
+                <a:solidFill>
+                  <a:srgbClr val="8BE98B"/>
+                </a:solidFill>
+                <a:latin typeface="Consolas"/>
+              </a:rPr>
+              <a:t>    walk: PASS</a:t>
+            </a:r>
+          </a:p>
+          <a:p>
+            <a:pPr algn="l">
+              <a:lnSpc>
+                <a:spcPct val="100000"/>
+              </a:lnSpc>
+            </a:pPr>
+            <a:r>
+              <a:rPr sz="1300">
+                <a:solidFill>
+                  <a:srgbClr val="8BE98B"/>
+                </a:solidFill>
+                <a:latin typeface="Consolas"/>
+              </a:rPr>
+              <a:t>  xor set     : got=ff want=ff PASS</a:t>
+            </a:r>
+          </a:p>
+          <a:p>
+            <a:pPr algn="l">
+              <a:lnSpc>
+                <a:spcPct val="100000"/>
+              </a:lnSpc>
+            </a:pPr>
+            <a:r>
+              <a:rPr sz="1300">
+                <a:solidFill>
+                  <a:srgbClr val="8BE98B"/>
+                </a:solidFill>
+                <a:latin typeface="Consolas"/>
+              </a:rPr>
+              <a:t>  pattern AA  : got=aa want=aa PASS</a:t>
+            </a:r>
+          </a:p>
+          <a:p>
+            <a:pPr algn="l">
+              <a:lnSpc>
+                <a:spcPct val="100000"/>
+              </a:lnSpc>
+            </a:pPr>
+            <a:r>
+              <a:rPr sz="1300">
+                <a:solidFill>
+                  <a:srgbClr val="8BE98B"/>
+                </a:solidFill>
+                <a:latin typeface="Consolas"/>
+              </a:rPr>
+              <a:t>  pattern 55  : got=55 want=55 PASS</a:t>
+            </a:r>
+          </a:p>
+          <a:p>
+            <a:pPr algn="l">
+              <a:lnSpc>
+                <a:spcPct val="100000"/>
+              </a:lnSpc>
+            </a:pPr>
+            <a:r>
+              <a:rPr sz="1300">
+                <a:solidFill>
+                  <a:srgbClr val="8BE98B"/>
+                </a:solidFill>
+                <a:latin typeface="Consolas"/>
+              </a:rPr>
+              <a:t>GPIO TEST: PASS (0 failures)</a:t>
+            </a:r>
+          </a:p>
+        </p:txBody>
+      </p:sp>
+      <p:sp>
+        <p:nvSpPr>
+          <p:cNvPr id="64" name="Rectangle 63"/>
+          <p:cNvSpPr/>
+          <p:nvPr/>
+        </p:nvSpPr>
+        <p:spPr>
+          <a:xfrm>
+            <a:off x="6217920" y="914400"/>
+            <a:ext cx="5760720" cy="1971910"/>
+          </a:xfrm>
+          <a:prstGeom prst="rect">
+            <a:avLst/>
+          </a:prstGeom>
+          <a:solidFill>
+            <a:srgbClr val="1E1E1E"/>
+          </a:solidFill>
+          <a:ln>
+            <a:solidFill>
+              <a:srgbClr val="C8C8C8"/>
+            </a:solidFill>
+          </a:ln>
+          <a:effectLst/>
+        </p:spPr>
+        <p:style>
+          <a:lnRef idx="1">
+            <a:schemeClr val="accent1"/>
+          </a:lnRef>
+          <a:fillRef idx="3">
+            <a:schemeClr val="accent1"/>
+          </a:fillRef>
+          <a:effectRef idx="2">
+            <a:schemeClr val="accent1"/>
+          </a:effectRef>
+          <a:fontRef idx="minor">
+            <a:schemeClr val="lt1"/>
+          </a:fontRef>
+        </p:style>
+        <p:txBody>
+          <a:bodyPr rtlCol="0" anchor="t" wrap="none" lIns="73152" rIns="73152" tIns="73152" bIns="73152"/>
+          <a:lstStyle/>
+          <a:p>
+            <a:pPr algn="l"/>
+            <a:r>
+              <a:rPr sz="1142" b="1">
+                <a:solidFill>
+                  <a:srgbClr val="AAAAAA"/>
+                </a:solidFill>
+                <a:latin typeface="Consolas"/>
+              </a:rPr>
+              <a:t>tests/build/jtag_test.elf</a:t>
+            </a:r>
+          </a:p>
+          <a:p>
+            <a:pPr algn="l">
+              <a:lnSpc>
+                <a:spcPct val="100000"/>
+              </a:lnSpc>
+            </a:pPr>
+            <a:r>
+              <a:rPr sz="1142">
+                <a:solidFill>
+                  <a:srgbClr val="E6E6E6"/>
+                </a:solidFill>
+                <a:latin typeface="Consolas"/>
+              </a:rPr>
+              <a:t>=== JTAG / debug module test ===</a:t>
+            </a:r>
+          </a:p>
+          <a:p>
+            <a:pPr algn="l">
+              <a:lnSpc>
+                <a:spcPct val="100000"/>
+              </a:lnSpc>
+            </a:pPr>
+            <a:r>
+              <a:rPr sz="1142">
+                <a:solidFill>
+                  <a:srgbClr val="8BE98B"/>
+                </a:solidFill>
+                <a:latin typeface="Consolas"/>
+              </a:rPr>
+              <a:t>  Loaded and resumed over JTAG: PASS (this output is the proof)</a:t>
+            </a:r>
+          </a:p>
+          <a:p>
+            <a:pPr algn="l">
+              <a:lnSpc>
+                <a:spcPct val="100000"/>
+              </a:lnSpc>
+            </a:pPr>
+            <a:r>
+              <a:rPr sz="1142">
+                <a:solidFill>
+                  <a:srgbClr val="E6E6E6"/>
+                </a:solidFill>
+                <a:latin typeface="Consolas"/>
+              </a:rPr>
+              <a:t>  mhartid     : 0</a:t>
+            </a:r>
+          </a:p>
+          <a:p>
+            <a:pPr algn="l">
+              <a:lnSpc>
+                <a:spcPct val="100000"/>
+              </a:lnSpc>
+            </a:pPr>
+            <a:r>
+              <a:rPr sz="1142">
+                <a:solidFill>
+                  <a:srgbClr val="E6E6E6"/>
+                </a:solidFill>
+                <a:latin typeface="Consolas"/>
+              </a:rPr>
+              <a:t>  mvendorid   : 0</a:t>
+            </a:r>
+          </a:p>
+          <a:p>
+            <a:pPr algn="l">
+              <a:lnSpc>
+                <a:spcPct val="100000"/>
+              </a:lnSpc>
+            </a:pPr>
+            <a:r>
+              <a:rPr sz="1142">
+                <a:solidFill>
+                  <a:srgbClr val="E6E6E6"/>
+                </a:solidFill>
+                <a:latin typeface="Consolas"/>
+              </a:rPr>
+              <a:t>  marchid     : 1</a:t>
+            </a:r>
+          </a:p>
+          <a:p>
+            <a:pPr algn="l">
+              <a:lnSpc>
+                <a:spcPct val="100000"/>
+              </a:lnSpc>
+            </a:pPr>
+            <a:r>
+              <a:rPr sz="1142">
+                <a:solidFill>
+                  <a:srgbClr val="E6E6E6"/>
+                </a:solidFill>
+                <a:latin typeface="Consolas"/>
+              </a:rPr>
+              <a:t>  mimpid      : 20181004</a:t>
+            </a:r>
+          </a:p>
+          <a:p>
+            <a:pPr algn="l">
+              <a:lnSpc>
+                <a:spcPct val="100000"/>
+              </a:lnSpc>
+            </a:pPr>
+            <a:r>
+              <a:rPr sz="1142">
+                <a:solidFill>
+                  <a:srgbClr val="E6E6E6"/>
+                </a:solidFill>
+                <a:latin typeface="Consolas"/>
+              </a:rPr>
+              <a:t>  misa low32  : 801105  (MXL=2 -&gt; RV64)</a:t>
+            </a:r>
+          </a:p>
+          <a:p>
+            <a:pPr algn="l">
+              <a:lnSpc>
+                <a:spcPct val="100000"/>
+              </a:lnSpc>
+            </a:pPr>
+            <a:r>
+              <a:rPr sz="1142">
+                <a:solidFill>
+                  <a:srgbClr val="E6E6E6"/>
+                </a:solidFill>
+                <a:latin typeface="Consolas"/>
+              </a:rPr>
+              <a:t>  extensions  : ACIMX</a:t>
+            </a:r>
+          </a:p>
+          <a:p>
+            <a:pPr algn="l">
+              <a:lnSpc>
+                <a:spcPct val="100000"/>
+              </a:lnSpc>
+            </a:pPr>
+            <a:r>
+              <a:rPr sz="1142">
+                <a:solidFill>
+                  <a:srgbClr val="8BE98B"/>
+                </a:solidFill>
+                <a:latin typeface="Consolas"/>
+              </a:rPr>
+              <a:t>JTAG TEST: PASS (0 failures)</a:t>
+            </a:r>
+          </a:p>
+        </p:txBody>
+      </p:sp>
+      <p:sp>
+        <p:nvSpPr>
+          <p:cNvPr id="65" name="TextBox 64"/>
+          <p:cNvSpPr txBox="1"/>
+          <p:nvPr/>
+        </p:nvSpPr>
+        <p:spPr>
+          <a:xfrm>
+            <a:off x="365760" y="3605530"/>
+            <a:ext cx="11612880" cy="1645920"/>
+          </a:xfrm>
+          <a:prstGeom prst="rect">
+            <a:avLst/>
+          </a:prstGeom>
+          <a:noFill/>
+        </p:spPr>
+        <p:txBody>
+          <a:bodyPr wrap="square" anchor="t">
+            <a:spAutoFit/>
+          </a:bodyPr>
+          <a:lstStyle/>
+          <a:p>
+            <a:pPr marL="256032" indent="-219456">
+              <a:spcAft>
+                <a:spcPts val="400"/>
+              </a:spcAft>
+              <a:buChar char="•"/>
+            </a:pPr>
+            <a:r>
+              <a:rPr sz="1800" b="0">
+                <a:solidFill>
+                  <a:srgbClr val="000000"/>
+                </a:solidFill>
+                <a:latin typeface="Times New Roman"/>
+              </a:rPr>
+              <a:t>Real output from board A. The GPIO walk lights the four LEDs one after another.</a:t>
+            </a:r>
+          </a:p>
+          <a:p>
+            <a:pPr marL="256032" indent="-219456">
+              <a:spcAft>
+                <a:spcPts val="400"/>
+              </a:spcAft>
+              <a:buChar char="•"/>
+            </a:pPr>
+            <a:r>
+              <a:rPr sz="1800" b="0" i="1">
+                <a:solidFill>
+                  <a:srgbClr val="000000"/>
+                </a:solidFill>
+                <a:latin typeface="Times New Roman"/>
+              </a:rPr>
+              <a:t>misa</a:t>
+            </a:r>
+            <a:r>
+              <a:rPr sz="1800" b="0">
+                <a:solidFill>
+                  <a:srgbClr val="000000"/>
+                </a:solidFill>
+                <a:latin typeface="Times New Roman"/>
+              </a:rPr>
+              <a:t> confirms the hardware: MXL = 2 → 64-bit; extensions A, C, I, M (X = non-standard extensions present); </a:t>
+            </a:r>
+            <a:r>
+              <a:rPr sz="1800" b="0" i="1">
+                <a:solidFill>
+                  <a:srgbClr val="000000"/>
+                </a:solidFill>
+                <a:latin typeface="Times New Roman"/>
+              </a:rPr>
+              <a:t>marchid</a:t>
+            </a:r>
+            <a:r>
+              <a:rPr sz="1800" b="0">
+                <a:solidFill>
+                  <a:srgbClr val="000000"/>
+                </a:solidFill>
+                <a:latin typeface="Times New Roman"/>
+              </a:rPr>
+              <a:t> 1 = Rocket.</a:t>
+            </a:r>
+          </a:p>
+        </p:txBody>
+      </p:sp>
+    </p:spTree>
+  </p:cSld>
+  <p:clrMapOvr>
+    <a:masterClrMapping/>
+  </p:clrMapOvr>
+</p:sld>
+</file>
+
+<file path=ppt/slides/slide55.xml><?xml version="1.0" encoding="utf-8"?>
+<p:sld xmlns:a="http://schemas.openxmlformats.org/drawingml/2006/main" xmlns:p="http://schemas.openxmlformats.org/presentationml/2006/main" xmlns:r="http://schemas.openxmlformats.org/officeDocument/2006/relationships">
+  <p:cSld>
+    <p:spTree>
+      <p:nvGrpSpPr>
+        <p:cNvPr id="1" name=""/>
+        <p:cNvGrpSpPr/>
+        <p:nvPr/>
+      </p:nvGrpSpPr>
+      <p:grpSpPr/>
+      <p:sp>
+        <p:nvSpPr>
+          <p:cNvPr id="10" name="CustomShape 6">
+            <a:extLst>
+              <a:ext uri="{FF2B5EF4-FFF2-40B4-BE49-F238E27FC236}">
+                <a16:creationId xmlns:a16="http://schemas.microsoft.com/office/drawing/2014/main" id="{CB76DC60-C0C9-436D-8956-EE4CA394869E}"/>
+              </a:ext>
+            </a:extLst>
+          </p:cNvPr>
+          <p:cNvSpPr/>
+          <p:nvPr/>
+        </p:nvSpPr>
+        <p:spPr>
+          <a:xfrm>
+            <a:off x="-6000" y="0"/>
+            <a:ext cx="12198000" cy="644877"/>
+          </a:xfrm>
+          <a:prstGeom prst="rect">
+            <a:avLst/>
+          </a:prstGeom>
+          <a:solidFill>
+            <a:schemeClr val="accent6">
+              <a:lumMod val="40000"/>
+              <a:lumOff val="60000"/>
+            </a:schemeClr>
+          </a:solidFill>
+          <a:ln>
+            <a:noFill/>
+          </a:ln>
+        </p:spPr>
+        <p:style>
+          <a:lnRef idx="0">
+            <a:scrgbClr r="0" g="0" b="0"/>
+          </a:lnRef>
+          <a:fillRef idx="0">
+            <a:scrgbClr r="0" g="0" b="0"/>
+          </a:fillRef>
+          <a:effectRef idx="0">
+            <a:scrgbClr r="0" g="0" b="0"/>
+          </a:effectRef>
+          <a:fontRef idx="minor"/>
+        </p:style>
+        <p:txBody>
+          <a:bodyPr wrap="square" lIns="90000" tIns="45000" rIns="90000" bIns="45000">
+            <a:spAutoFit/>
+          </a:bodyPr>
+          <a:lstStyle/>
+          <a:p>
+            <a:pPr marL="360" algn="ctr">
+              <a:lnSpc>
+                <a:spcPct val="100000"/>
+              </a:lnSpc>
+              <a:buClr>
+                <a:srgbClr val="000000"/>
+              </a:buClr>
+            </a:pPr>
+            <a:r>
+              <a:rPr lang="en-US" sz="2900" b="1" spc="-1" dirty="0">
+                <a:latin typeface="Times New Roman" panose="02020603050405020304" pitchFamily="18" charset="0"/>
+                <a:cs typeface="Times New Roman" panose="02020603050405020304" pitchFamily="18" charset="0"/>
+              </a:rPr>
+              <a:t>6. Programming &amp; Bring-up </a:t>
+            </a:r>
+            <a:r>
+              <a:rPr lang="en-US" sz="2900" spc="-1" dirty="0">
+                <a:latin typeface="Times New Roman" panose="02020603050405020304" pitchFamily="18" charset="0"/>
+                <a:cs typeface="Times New Roman" panose="02020603050405020304" pitchFamily="18" charset="0"/>
+              </a:rPr>
+              <a:t>(4/5) Bring-up: SPI (SD card) and UART</a:t>
+            </a:r>
+          </a:p>
+        </p:txBody>
+      </p:sp>
+      <p:sp>
+        <p:nvSpPr>
+          <p:cNvPr id="62" name="CustomShape 2"/>
+          <p:cNvSpPr/>
+          <p:nvPr/>
+        </p:nvSpPr>
+        <p:spPr>
+          <a:xfrm>
+            <a:off x="11291400" y="6492960"/>
+            <a:ext cx="894600" cy="358920"/>
+          </a:xfrm>
+          <a:prstGeom prst="rect">
+            <a:avLst/>
+          </a:prstGeom>
+          <a:noFill/>
+          <a:ln>
+            <a:noFill/>
+          </a:ln>
+        </p:spPr>
+        <p:style>
+          <a:lnRef idx="0">
+            <a:scrgbClr r="0" g="0" b="0"/>
+          </a:lnRef>
+          <a:fillRef idx="0">
+            <a:scrgbClr r="0" g="0" b="0"/>
+          </a:fillRef>
+          <a:effectRef idx="0">
+            <a:scrgbClr r="0" g="0" b="0"/>
+          </a:effectRef>
+          <a:fontRef idx="minor"/>
+        </p:style>
+        <p:txBody>
+          <a:bodyPr lIns="90000" tIns="45000" rIns="90000" bIns="45000" anchor="ctr">
+            <a:noAutofit/>
+          </a:bodyPr>
+          <a:lstStyle/>
+          <a:p>
+            <a:pPr algn="ctr">
+              <a:lnSpc>
+                <a:spcPct val="100000"/>
+              </a:lnSpc>
+            </a:pPr>
+            <a:fld id="{32452110-F6D1-439F-92C4-7A3912DA20B0}" type="slidenum">
+              <a:rPr lang="en-US" sz="1600" b="1" strike="noStrike" spc="-1">
+                <a:solidFill>
+                  <a:srgbClr val="000000"/>
+                </a:solidFill>
+                <a:latin typeface="Times New Roman"/>
+                <a:ea typeface="DejaVu Sans"/>
+              </a:rPr>
+              <a:t>49</a:t>
+            </a:fld>
+            <a:endParaRPr lang="en-US" sz="1600" b="0" strike="noStrike" spc="-1">
+              <a:latin typeface="Arial"/>
+            </a:endParaRPr>
+          </a:p>
+        </p:txBody>
+      </p:sp>
+      <p:sp>
+        <p:nvSpPr>
+          <p:cNvPr id="63" name="Rectangle 62"/>
+          <p:cNvSpPr/>
+          <p:nvPr/>
+        </p:nvSpPr>
+        <p:spPr>
+          <a:xfrm>
+            <a:off x="365760" y="914400"/>
+            <a:ext cx="5669280" cy="1611121"/>
+          </a:xfrm>
+          <a:prstGeom prst="rect">
+            <a:avLst/>
+          </a:prstGeom>
+          <a:solidFill>
+            <a:srgbClr val="1E1E1E"/>
+          </a:solidFill>
+          <a:ln>
+            <a:solidFill>
+              <a:srgbClr val="C8C8C8"/>
+            </a:solidFill>
+          </a:ln>
+          <a:effectLst/>
+        </p:spPr>
+        <p:style>
+          <a:lnRef idx="1">
+            <a:schemeClr val="accent1"/>
+          </a:lnRef>
+          <a:fillRef idx="3">
+            <a:schemeClr val="accent1"/>
+          </a:fillRef>
+          <a:effectRef idx="2">
+            <a:schemeClr val="accent1"/>
+          </a:effectRef>
+          <a:fontRef idx="minor">
+            <a:schemeClr val="lt1"/>
+          </a:fontRef>
+        </p:style>
+        <p:txBody>
+          <a:bodyPr rtlCol="0" anchor="t" wrap="none" lIns="73152" rIns="73152" tIns="73152" bIns="73152"/>
+          <a:lstStyle/>
+          <a:p>
+            <a:pPr algn="l"/>
+            <a:r>
+              <a:rPr sz="1300" b="1">
+                <a:solidFill>
+                  <a:srgbClr val="AAAAAA"/>
+                </a:solidFill>
+                <a:latin typeface="Consolas"/>
+              </a:rPr>
+              <a:t>tests/build/spi_test.elf</a:t>
+            </a:r>
+          </a:p>
+          <a:p>
+            <a:pPr algn="l">
+              <a:lnSpc>
+                <a:spcPct val="100000"/>
+              </a:lnSpc>
+            </a:pPr>
+            <a:r>
+              <a:rPr sz="1300">
+                <a:solidFill>
+                  <a:srgbClr val="E6E6E6"/>
+                </a:solidFill>
+                <a:latin typeface="Consolas"/>
+              </a:rPr>
+              <a:t>=== SPI test (SPI0 @ 0x64001000, SD slot) ===</a:t>
+            </a:r>
+          </a:p>
+          <a:p>
+            <a:pPr algn="l">
+              <a:lnSpc>
+                <a:spcPct val="100000"/>
+              </a:lnSpc>
+            </a:pPr>
+            <a:r>
+              <a:rPr sz="1300">
+                <a:solidFill>
+                  <a:srgbClr val="8BE98B"/>
+                </a:solidFill>
+                <a:latin typeface="Consolas"/>
+              </a:rPr>
+              <a:t>  sckdiv      : got=c want=c PASS</a:t>
+            </a:r>
+          </a:p>
+          <a:p>
+            <a:pPr algn="l">
+              <a:lnSpc>
+                <a:spcPct val="100000"/>
+              </a:lnSpc>
+            </a:pPr>
+            <a:r>
+              <a:rPr sz="1300">
+                <a:solidFill>
+                  <a:srgbClr val="8BE98B"/>
+                </a:solidFill>
+                <a:latin typeface="Consolas"/>
+              </a:rPr>
+              <a:t>  sckmode     : got=0 want=0 PASS</a:t>
+            </a:r>
+          </a:p>
+          <a:p>
+            <a:pPr algn="l">
+              <a:lnSpc>
+                <a:spcPct val="100000"/>
+              </a:lnSpc>
+            </a:pPr>
+            <a:r>
+              <a:rPr sz="1300">
+                <a:solidFill>
+                  <a:srgbClr val="8BE98B"/>
+                </a:solidFill>
+                <a:latin typeface="Consolas"/>
+              </a:rPr>
+              <a:t>  csdef       : got=1 want=1 PASS</a:t>
+            </a:r>
+          </a:p>
+          <a:p>
+            <a:pPr algn="l">
+              <a:lnSpc>
+                <a:spcPct val="100000"/>
+              </a:lnSpc>
+            </a:pPr>
+            <a:r>
+              <a:rPr sz="1300">
+                <a:solidFill>
+                  <a:srgbClr val="8BE98B"/>
+                </a:solidFill>
+                <a:latin typeface="Consolas"/>
+              </a:rPr>
+              <a:t>  SD CMD0     : R1=1 PASS (card in idle state)</a:t>
+            </a:r>
+          </a:p>
+          <a:p>
+            <a:pPr algn="l">
+              <a:lnSpc>
+                <a:spcPct val="100000"/>
+              </a:lnSpc>
+            </a:pPr>
+            <a:r>
+              <a:rPr sz="1300">
+                <a:solidFill>
+                  <a:srgbClr val="8BE98B"/>
+                </a:solidFill>
+                <a:latin typeface="Consolas"/>
+              </a:rPr>
+              <a:t>SPI TEST: PASS (0 failures)</a:t>
+            </a:r>
+          </a:p>
+        </p:txBody>
+      </p:sp>
+      <p:sp>
+        <p:nvSpPr>
+          <p:cNvPr id="64" name="Rectangle 63"/>
+          <p:cNvSpPr/>
+          <p:nvPr/>
+        </p:nvSpPr>
+        <p:spPr>
+          <a:xfrm>
+            <a:off x="6217920" y="914400"/>
+            <a:ext cx="5760720" cy="2060448"/>
+          </a:xfrm>
+          <a:prstGeom prst="rect">
+            <a:avLst/>
+          </a:prstGeom>
+          <a:solidFill>
+            <a:srgbClr val="1E1E1E"/>
+          </a:solidFill>
+          <a:ln>
+            <a:solidFill>
+              <a:srgbClr val="C8C8C8"/>
+            </a:solidFill>
+          </a:ln>
+          <a:effectLst/>
+        </p:spPr>
+        <p:style>
+          <a:lnRef idx="1">
+            <a:schemeClr val="accent1"/>
+          </a:lnRef>
+          <a:fillRef idx="3">
+            <a:schemeClr val="accent1"/>
+          </a:fillRef>
+          <a:effectRef idx="2">
+            <a:schemeClr val="accent1"/>
+          </a:effectRef>
+          <a:fontRef idx="minor">
+            <a:schemeClr val="lt1"/>
+          </a:fontRef>
+        </p:style>
+        <p:txBody>
+          <a:bodyPr rtlCol="0" anchor="t" wrap="none" lIns="73152" rIns="73152" tIns="73152" bIns="73152"/>
+          <a:lstStyle/>
+          <a:p>
+            <a:pPr algn="l"/>
+            <a:r>
+              <a:rPr sz="1200" b="1">
+                <a:solidFill>
+                  <a:srgbClr val="AAAAAA"/>
+                </a:solidFill>
+                <a:latin typeface="Consolas"/>
+              </a:rPr>
+              <a:t>tests/build/uart_test.elf</a:t>
+            </a:r>
+          </a:p>
+          <a:p>
+            <a:pPr algn="l">
+              <a:lnSpc>
+                <a:spcPct val="100000"/>
+              </a:lnSpc>
+            </a:pPr>
+            <a:r>
+              <a:rPr sz="1200">
+                <a:solidFill>
+                  <a:srgbClr val="E6E6E6"/>
+                </a:solidFill>
+                <a:latin typeface="Consolas"/>
+              </a:rPr>
+              <a:t>=== UART test ===</a:t>
+            </a:r>
+          </a:p>
+          <a:p>
+            <a:pPr algn="l">
+              <a:lnSpc>
+                <a:spcPct val="100000"/>
+              </a:lnSpc>
+            </a:pPr>
+            <a:r>
+              <a:rPr sz="1200">
+                <a:solidFill>
+                  <a:srgbClr val="E6E6E6"/>
+                </a:solidFill>
+                <a:latin typeface="Consolas"/>
+              </a:rPr>
+              <a:t>  UART0 @ 0x64000000 (console), UART1 @ 0x64003000 (PMOD JB)</a:t>
+            </a:r>
+          </a:p>
+          <a:p>
+            <a:pPr algn="l">
+              <a:lnSpc>
+                <a:spcPct val="100000"/>
+              </a:lnSpc>
+            </a:pPr>
+            <a:r>
+              <a:rPr sz="1200">
+                <a:solidFill>
+                  <a:srgbClr val="8BE98B"/>
+                </a:solidFill>
+                <a:latin typeface="Consolas"/>
+              </a:rPr>
+              <a:t>  UART0 console TX: PASS (you are reading it)</a:t>
+            </a:r>
+          </a:p>
+          <a:p>
+            <a:pPr algn="l">
+              <a:lnSpc>
+                <a:spcPct val="100000"/>
+              </a:lnSpc>
+            </a:pPr>
+            <a:r>
+              <a:rPr sz="1200">
+                <a:solidFill>
+                  <a:srgbClr val="8BE98B"/>
+                </a:solidFill>
+                <a:latin typeface="Consolas"/>
+              </a:rPr>
+              <a:t>  UART0 div   : got=2a want=2a PASS</a:t>
+            </a:r>
+          </a:p>
+          <a:p>
+            <a:pPr algn="l">
+              <a:lnSpc>
+                <a:spcPct val="100000"/>
+              </a:lnSpc>
+            </a:pPr>
+            <a:r>
+              <a:rPr sz="1200">
+                <a:solidFill>
+                  <a:srgbClr val="8BE98B"/>
+                </a:solidFill>
+                <a:latin typeface="Consolas"/>
+              </a:rPr>
+              <a:t>  UART1 div   : got=2a want=2a PASS</a:t>
+            </a:r>
+          </a:p>
+          <a:p>
+            <a:pPr algn="l">
+              <a:lnSpc>
+                <a:spcPct val="100000"/>
+              </a:lnSpc>
+            </a:pPr>
+            <a:r>
+              <a:rPr sz="1200">
+                <a:solidFill>
+                  <a:srgbClr val="8BE98B"/>
+                </a:solidFill>
+                <a:latin typeface="Consolas"/>
+              </a:rPr>
+              <a:t>  UART1 txen  : got=1 want=1 PASS</a:t>
+            </a:r>
+          </a:p>
+          <a:p>
+            <a:pPr algn="l">
+              <a:lnSpc>
+                <a:spcPct val="100000"/>
+              </a:lnSpc>
+            </a:pPr>
+            <a:r>
+              <a:rPr sz="1200">
+                <a:solidFill>
+                  <a:srgbClr val="8BE98B"/>
+                </a:solidFill>
+                <a:latin typeface="Consolas"/>
+              </a:rPr>
+              <a:t>  UART1 rxen  : got=1 want=1 PASS</a:t>
+            </a:r>
+          </a:p>
+          <a:p>
+            <a:pPr algn="l">
+              <a:lnSpc>
+                <a:spcPct val="100000"/>
+              </a:lnSpc>
+            </a:pPr>
+            <a:r>
+              <a:rPr sz="1200">
+                <a:solidFill>
+                  <a:srgbClr val="E6E6E6"/>
+                </a:solidFill>
+                <a:latin typeface="Consolas"/>
+              </a:rPr>
+              <a:t>  UART1 loop  : SKIP (no echo; jumper JB1-JB2 to test)</a:t>
+            </a:r>
+          </a:p>
+          <a:p>
+            <a:pPr algn="l">
+              <a:lnSpc>
+                <a:spcPct val="100000"/>
+              </a:lnSpc>
+            </a:pPr>
+            <a:r>
+              <a:rPr sz="1200">
+                <a:solidFill>
+                  <a:srgbClr val="8BE98B"/>
+                </a:solidFill>
+                <a:latin typeface="Consolas"/>
+              </a:rPr>
+              <a:t>UART TEST: PASS (0 failures)</a:t>
+            </a:r>
+          </a:p>
+        </p:txBody>
+      </p:sp>
+      <p:sp>
+        <p:nvSpPr>
+          <p:cNvPr id="65" name="TextBox 64"/>
+          <p:cNvSpPr txBox="1"/>
+          <p:nvPr/>
+        </p:nvSpPr>
+        <p:spPr>
+          <a:xfrm>
+            <a:off x="365760" y="3249168"/>
+            <a:ext cx="11612880" cy="2011680"/>
+          </a:xfrm>
+          <a:prstGeom prst="rect">
+            <a:avLst/>
+          </a:prstGeom>
+          <a:noFill/>
+        </p:spPr>
+        <p:txBody>
+          <a:bodyPr wrap="square" anchor="t">
+            <a:spAutoFit/>
+          </a:bodyPr>
+          <a:lstStyle/>
+          <a:p>
+            <a:pPr marL="256032" indent="-219456">
+              <a:spcAft>
+                <a:spcPts val="400"/>
+              </a:spcAft>
+              <a:buChar char="•"/>
+            </a:pPr>
+            <a:r>
+              <a:rPr sz="1700" b="1">
+                <a:solidFill>
+                  <a:srgbClr val="000000"/>
+                </a:solidFill>
+                <a:latin typeface="Times New Roman"/>
+              </a:rPr>
+              <a:t>SD CMD0 → R1 = 0x01</a:t>
+            </a:r>
+            <a:r>
+              <a:rPr sz="1700" b="0">
+                <a:solidFill>
+                  <a:srgbClr val="000000"/>
+                </a:solidFill>
+                <a:latin typeface="Times New Roman"/>
+              </a:rPr>
+              <a:t> proves clock, chip select and both data lines work against a real card.</a:t>
+            </a:r>
+          </a:p>
+          <a:p>
+            <a:pPr marL="256032" indent="-219456">
+              <a:spcAft>
+                <a:spcPts val="400"/>
+              </a:spcAft>
+              <a:buChar char="•"/>
+            </a:pPr>
+            <a:r>
+              <a:rPr sz="1700" b="0">
+                <a:solidFill>
+                  <a:srgbClr val="000000"/>
+                </a:solidFill>
+                <a:latin typeface="Times New Roman"/>
+              </a:rPr>
+              <a:t>Right after power-up the card can answer the first CMD0 with one junk byte (e.g. 0x3f). The boot ROM, this test and the firmware send CMD0 again; the second answer is clean.</a:t>
+            </a:r>
+          </a:p>
+          <a:p>
+            <a:pPr marL="256032" indent="-219456">
+              <a:spcAft>
+                <a:spcPts val="400"/>
+              </a:spcAft>
+              <a:buChar char="•"/>
+            </a:pPr>
+            <a:r>
+              <a:rPr sz="1700" b="0">
+                <a:solidFill>
+                  <a:srgbClr val="000000"/>
+                </a:solidFill>
+                <a:latin typeface="Times New Roman"/>
+              </a:rPr>
+              <a:t>UART1 loopback needs a jumper JB1–JB2; without it the step is skipped, not failed.</a:t>
+            </a:r>
+          </a:p>
+        </p:txBody>
+      </p:sp>
+    </p:spTree>
+  </p:cSld>
+  <p:clrMapOvr>
+    <a:masterClrMapping/>
+  </p:clrMapOvr>
+</p:sld>
+</file>
+
+<file path=ppt/slides/slide56.xml><?xml version="1.0" encoding="utf-8"?>
+<p:sld xmlns:a="http://schemas.openxmlformats.org/drawingml/2006/main" xmlns:p="http://schemas.openxmlformats.org/presentationml/2006/main" xmlns:r="http://schemas.openxmlformats.org/officeDocument/2006/relationships">
+  <p:cSld>
+    <p:spTree>
+      <p:nvGrpSpPr>
+        <p:cNvPr id="1" name=""/>
+        <p:cNvGrpSpPr/>
+        <p:nvPr/>
+      </p:nvGrpSpPr>
+      <p:grpSpPr/>
+      <p:sp>
+        <p:nvSpPr>
+          <p:cNvPr id="10" name="CustomShape 6">
+            <a:extLst>
+              <a:ext uri="{FF2B5EF4-FFF2-40B4-BE49-F238E27FC236}">
+                <a16:creationId xmlns:a16="http://schemas.microsoft.com/office/drawing/2014/main" id="{CB76DC60-C0C9-436D-8956-EE4CA394869E}"/>
+              </a:ext>
+            </a:extLst>
+          </p:cNvPr>
+          <p:cNvSpPr/>
+          <p:nvPr/>
+        </p:nvSpPr>
+        <p:spPr>
+          <a:xfrm>
+            <a:off x="-6000" y="0"/>
+            <a:ext cx="12198000" cy="644877"/>
+          </a:xfrm>
+          <a:prstGeom prst="rect">
+            <a:avLst/>
+          </a:prstGeom>
+          <a:solidFill>
+            <a:schemeClr val="accent6">
+              <a:lumMod val="40000"/>
+              <a:lumOff val="60000"/>
+            </a:schemeClr>
+          </a:solidFill>
+          <a:ln>
+            <a:noFill/>
+          </a:ln>
+        </p:spPr>
+        <p:style>
+          <a:lnRef idx="0">
+            <a:scrgbClr r="0" g="0" b="0"/>
+          </a:lnRef>
+          <a:fillRef idx="0">
+            <a:scrgbClr r="0" g="0" b="0"/>
+          </a:fillRef>
+          <a:effectRef idx="0">
+            <a:scrgbClr r="0" g="0" b="0"/>
+          </a:effectRef>
+          <a:fontRef idx="minor"/>
+        </p:style>
+        <p:txBody>
+          <a:bodyPr wrap="square" lIns="90000" tIns="45000" rIns="90000" bIns="45000">
+            <a:spAutoFit/>
+          </a:bodyPr>
+          <a:lstStyle/>
+          <a:p>
+            <a:pPr marL="360" algn="ctr">
+              <a:lnSpc>
+                <a:spcPct val="100000"/>
+              </a:lnSpc>
+              <a:buClr>
+                <a:srgbClr val="000000"/>
+              </a:buClr>
+            </a:pPr>
+            <a:r>
+              <a:rPr lang="en-US" sz="3300" b="1" spc="-1" dirty="0">
+                <a:latin typeface="Times New Roman" panose="02020603050405020304" pitchFamily="18" charset="0"/>
+                <a:cs typeface="Times New Roman" panose="02020603050405020304" pitchFamily="18" charset="0"/>
+              </a:rPr>
+              <a:t>6. Programming &amp; Bring-up </a:t>
+            </a:r>
+            <a:r>
+              <a:rPr lang="en-US" sz="3300" spc="-1" dirty="0">
+                <a:latin typeface="Times New Roman" panose="02020603050405020304" pitchFamily="18" charset="0"/>
+                <a:cs typeface="Times New Roman" panose="02020603050405020304" pitchFamily="18" charset="0"/>
+              </a:rPr>
+              <a:t>(5/5) Booting from the SD card</a:t>
+            </a:r>
+          </a:p>
+        </p:txBody>
+      </p:sp>
+      <p:sp>
+        <p:nvSpPr>
+          <p:cNvPr id="62" name="CustomShape 2"/>
+          <p:cNvSpPr/>
+          <p:nvPr/>
+        </p:nvSpPr>
+        <p:spPr>
+          <a:xfrm>
+            <a:off x="11291400" y="6492960"/>
+            <a:ext cx="894600" cy="358920"/>
+          </a:xfrm>
+          <a:prstGeom prst="rect">
+            <a:avLst/>
+          </a:prstGeom>
+          <a:noFill/>
+          <a:ln>
+            <a:noFill/>
+          </a:ln>
+        </p:spPr>
+        <p:style>
+          <a:lnRef idx="0">
+            <a:scrgbClr r="0" g="0" b="0"/>
+          </a:lnRef>
+          <a:fillRef idx="0">
+            <a:scrgbClr r="0" g="0" b="0"/>
+          </a:fillRef>
+          <a:effectRef idx="0">
+            <a:scrgbClr r="0" g="0" b="0"/>
+          </a:effectRef>
+          <a:fontRef idx="minor"/>
+        </p:style>
+        <p:txBody>
+          <a:bodyPr lIns="90000" tIns="45000" rIns="90000" bIns="45000" anchor="ctr">
+            <a:noAutofit/>
+          </a:bodyPr>
+          <a:lstStyle/>
+          <a:p>
+            <a:pPr algn="ctr">
+              <a:lnSpc>
+                <a:spcPct val="100000"/>
+              </a:lnSpc>
+            </a:pPr>
+            <a:fld id="{32452110-F6D1-439F-92C4-7A3912DA20B0}" type="slidenum">
+              <a:rPr lang="en-US" sz="1600" b="1" strike="noStrike" spc="-1">
+                <a:solidFill>
+                  <a:srgbClr val="000000"/>
+                </a:solidFill>
+                <a:latin typeface="Times New Roman"/>
+                <a:ea typeface="DejaVu Sans"/>
+              </a:rPr>
+              <a:t>50</a:t>
             </a:fld>
             <a:endParaRPr lang="en-US" sz="1600" b="0" strike="noStrike" spc="-1">
               <a:latin typeface="Arial"/>
@@ -38244,7 +39880,7 @@
 </p:sld>
 </file>
 
-<file path=ppt/slides/slide54.xml><?xml version="1.0" encoding="utf-8"?>
+<file path=ppt/slides/slide57.xml><?xml version="1.0" encoding="utf-8"?>
 <p:sld xmlns:a="http://schemas.openxmlformats.org/drawingml/2006/main" xmlns:p="http://schemas.openxmlformats.org/presentationml/2006/main" xmlns:r="http://schemas.openxmlformats.org/officeDocument/2006/relationships">
   <p:cSld>
     <p:spTree>
@@ -38430,7 +40066,7 @@
                 <a:latin typeface="Times New Roman"/>
                 <a:ea typeface="DejaVu Sans"/>
               </a:rPr>
-              <a:t>48</a:t>
+              <a:t>51</a:t>
             </a:fld>
             <a:endParaRPr lang="en-US" sz="1600" b="0" strike="noStrike" spc="-1">
               <a:latin typeface="Arial"/>
@@ -38722,7 +40358,7 @@
 </p:sld>
 </file>
 
-<file path=ppt/slides/slide55.xml><?xml version="1.0" encoding="utf-8"?>
+<file path=ppt/slides/slide58.xml><?xml version="1.0" encoding="utf-8"?>
 <p:sld xmlns:a="http://schemas.openxmlformats.org/drawingml/2006/main" xmlns:p="http://schemas.openxmlformats.org/presentationml/2006/main" xmlns:r="http://schemas.openxmlformats.org/officeDocument/2006/relationships">
   <p:cSld>
     <p:spTree>
@@ -38855,7 +40491,7 @@
                 <a:latin typeface="Times New Roman"/>
                 <a:ea typeface="DejaVu Sans"/>
               </a:rPr>
-              <a:t>49</a:t>
+              <a:t>52</a:t>
             </a:fld>
             <a:endParaRPr lang="en-US" sz="1600" b="0" strike="noStrike" spc="-1">
               <a:latin typeface="Arial"/>
@@ -39298,7 +40934,7 @@
 </p:sld>
 </file>
 
-<file path=ppt/slides/slide56.xml><?xml version="1.0" encoding="utf-8"?>
+<file path=ppt/slides/slide59.xml><?xml version="1.0" encoding="utf-8"?>
 <p:sld xmlns:a="http://schemas.openxmlformats.org/drawingml/2006/main" xmlns:p="http://schemas.openxmlformats.org/presentationml/2006/main" xmlns:r="http://schemas.openxmlformats.org/officeDocument/2006/relationships">
   <p:cSld>
     <p:spTree>
@@ -39431,7 +41067,7 @@
                 <a:latin typeface="Times New Roman"/>
                 <a:ea typeface="DejaVu Sans"/>
               </a:rPr>
-              <a:t>50</a:t>
+              <a:t>53</a:t>
             </a:fld>
             <a:endParaRPr lang="en-US" sz="1600" b="0" strike="noStrike" spc="-1">
               <a:latin typeface="Arial"/>
@@ -39538,7 +41174,7 @@
 </p:sld>
 </file>
 
-<file path=ppt/slides/slide57.xml><?xml version="1.0" encoding="utf-8"?>
+<file path=ppt/slides/slide60.xml><?xml version="1.0" encoding="utf-8"?>
 <p:sld xmlns:a="http://schemas.openxmlformats.org/drawingml/2006/main" xmlns:p="http://schemas.openxmlformats.org/presentationml/2006/main" xmlns:r="http://schemas.openxmlformats.org/officeDocument/2006/relationships">
   <p:cSld>
     <p:spTree>
@@ -39671,7 +41307,7 @@
                 <a:latin typeface="Times New Roman"/>
                 <a:ea typeface="DejaVu Sans"/>
               </a:rPr>
-              <a:t>51</a:t>
+              <a:t>54</a:t>
             </a:fld>
             <a:endParaRPr lang="en-US" sz="1600" b="0" strike="noStrike" spc="-1">
               <a:latin typeface="Arial"/>
@@ -40115,7 +41751,7 @@
 </p:sld>
 </file>
 
-<file path=ppt/slides/slide58.xml><?xml version="1.0" encoding="utf-8"?>
+<file path=ppt/slides/slide61.xml><?xml version="1.0" encoding="utf-8"?>
 <p:sld xmlns:a="http://schemas.openxmlformats.org/drawingml/2006/main" xmlns:p="http://schemas.openxmlformats.org/presentationml/2006/main" xmlns:r="http://schemas.openxmlformats.org/officeDocument/2006/relationships">
   <p:cSld>
     <p:spTree>
@@ -40243,7 +41879,7 @@
                 <a:latin typeface="Times New Roman"/>
                 <a:ea typeface="DejaVu Sans"/>
               </a:rPr>
-              <a:t>52</a:t>
+              <a:t>55</a:t>
             </a:fld>
             <a:endParaRPr lang="en-US" sz="1600" b="0" strike="noStrike" spc="-1">
               <a:latin typeface="Arial"/>
@@ -40461,7 +42097,7 @@
 </p:sld>
 </file>
 
-<file path=ppt/slides/slide59.xml><?xml version="1.0" encoding="utf-8"?>
+<file path=ppt/slides/slide62.xml><?xml version="1.0" encoding="utf-8"?>
 <p:sld xmlns:a="http://schemas.openxmlformats.org/drawingml/2006/main" xmlns:p="http://schemas.openxmlformats.org/presentationml/2006/main" xmlns:r="http://schemas.openxmlformats.org/officeDocument/2006/relationships">
   <p:cSld>
     <p:spTree>
@@ -40625,7 +42261,7 @@
                 <a:latin typeface="Times New Roman"/>
                 <a:ea typeface="DejaVu Sans"/>
               </a:rPr>
-              <a:t>53</a:t>
+              <a:t>56</a:t>
             </a:fld>
             <a:endParaRPr lang="en-US" sz="1600" b="0" strike="noStrike" spc="-1">
               <a:latin typeface="Arial"/>

--- a/fpga/sw/export/docs/slides/01_EDHOC_SoC_on_Arty_A7-100T.pptx
+++ b/fpga/sw/export/docs/slides/01_EDHOC_SoC_on_Arty_A7-100T.pptx
@@ -10594,7 +10594,7 @@
                           </a:solidFill>
                           <a:latin typeface="Times New Roman"/>
                         </a:rPr>
-                        <a:t>Python 3 (in a venv, command below)</a:t>
+                        <a:t>Python 3</a:t>
                       </a:r>
                     </a:p>
                   </a:txBody>
@@ -10824,7 +10824,7 @@
                 </a:solidFill>
                 <a:latin typeface="Times New Roman"/>
               </a:rPr>
-              <a:t>USB access without sudo: install Vivado's cable drivers (Digilent) and OpenOCD's </a:t>
+              <a:t>USB access without sudo: Vivado's cable drivers (6/12), OpenOCD's udev rules (the apt package) and the </a:t>
             </a:r>
             <a:r>
               <a:rPr sz="1500" b="0" i="1">
@@ -10833,7 +10833,7 @@
                 </a:solidFill>
                 <a:latin typeface="Times New Roman"/>
               </a:rPr>
-              <a:t>60-openocd.rules</a:t>
+              <a:t>dialout</a:t>
             </a:r>
             <a:r>
               <a:rPr sz="1500" b="0">
@@ -10842,7 +10842,7 @@
                 </a:solidFill>
                 <a:latin typeface="Times New Roman"/>
               </a:rPr>
-              <a:t> (C232HM), and be in the </a:t>
+              <a:t> / </a:t>
             </a:r>
             <a:r>
               <a:rPr sz="1500" b="0" i="1">
@@ -10851,7 +10851,7 @@
                 </a:solidFill>
                 <a:latin typeface="Times New Roman"/>
               </a:rPr>
-              <a:t>dialout</a:t>
+              <a:t>plugdev</a:t>
             </a:r>
             <a:r>
               <a:rPr sz="1500" b="0">
@@ -10860,25 +10860,7 @@
                 </a:solidFill>
                 <a:latin typeface="Times New Roman"/>
               </a:rPr>
-              <a:t> / </a:t>
-            </a:r>
-            <a:r>
-              <a:rPr sz="1500" b="0" i="1">
-                <a:solidFill>
-                  <a:srgbClr val="000000"/>
-                </a:solidFill>
-                <a:latin typeface="Times New Roman"/>
-              </a:rPr>
-              <a:t>plugdev</a:t>
-            </a:r>
-            <a:r>
-              <a:rPr sz="1500" b="0">
-                <a:solidFill>
-                  <a:srgbClr val="000000"/>
-                </a:solidFill>
-                <a:latin typeface="Times New Roman"/>
-              </a:rPr>
-              <a:t> groups for the consoles.</a:t>
+              <a:t> groups (7/12).</a:t>
             </a:r>
           </a:p>
           <a:p>
@@ -12159,7 +12141,7 @@
         <p:spPr>
           <a:xfrm>
             <a:off x="365760" y="868680"/>
-            <a:ext cx="11430000" cy="3176016"/>
+            <a:ext cx="11430000" cy="3361944"/>
           </a:xfrm>
           <a:prstGeom prst="rect">
             <a:avLst/>
@@ -12280,6 +12262,22 @@
                 </a:solidFill>
                 <a:latin typeface="Consolas"/>
               </a:rPr>
+              <a:t>sudo usermod -aG dialout,plugdev $USER     # board consoles; takes effect after logging in again</a:t>
+            </a:r>
+          </a:p>
+          <a:p>
+            <a:pPr algn="l">
+              <a:lnSpc>
+                <a:spcPct val="100000"/>
+              </a:lnSpc>
+            </a:pPr>
+            <a:r>
+              <a:rPr sz="1200">
+                <a:solidFill>
+                  <a:srgbClr val="1F1F1F"/>
+                </a:solidFill>
+                <a:latin typeface="Consolas"/>
+              </a:rPr>
               <a:t>python3 -m venv ~/edhoc-venv</a:t>
             </a:r>
           </a:p>
@@ -12453,7 +12451,7 @@
         </p:nvSpPr>
         <p:spPr>
           <a:xfrm>
-            <a:off x="365760" y="4227576"/>
+            <a:off x="365760" y="4413504"/>
             <a:ext cx="11430000" cy="1920240"/>
           </a:xfrm>
           <a:prstGeom prst="rect">
@@ -13987,7 +13985,7 @@
                 <a:gridCol w="3017520"/>
                 <a:gridCol w="8412480"/>
               </a:tblGrid>
-              <a:tr h="388620">
+              <a:tr h="310896">
                 <a:tc>
                   <a:txBody>
                     <a:bodyPr wrap="square"/>
@@ -14033,7 +14031,7 @@
                   </a:tcPr>
                 </a:tc>
               </a:tr>
-              <a:tr h="388620">
+              <a:tr h="310896">
                 <a:tc>
                   <a:txBody>
                     <a:bodyPr wrap="square"/>
@@ -14046,7 +14044,7 @@
                           </a:solidFill>
                           <a:latin typeface="Times New Roman"/>
                         </a:rPr>
-                        <a:t>an Arty is missing</a:t>
+                        <a:t>MISSING: &lt;tool&gt;</a:t>
                       </a:r>
                     </a:p>
                   </a:txBody>
@@ -14068,7 +14066,7 @@
                           </a:solidFill>
                           <a:latin typeface="Times New Roman"/>
                         </a:rPr>
-                        <a:t>USB cable, board power switch, Vivado cable drivers</a:t>
+                        <a:t>redo that tool's slide ((6/12), (7/12) or (9/12)), then open a new terminal</a:t>
                       </a:r>
                     </a:p>
                   </a:txBody>
@@ -14079,7 +14077,7 @@
                   </a:tcPr>
                 </a:tc>
               </a:tr>
-              <a:tr h="388620">
+              <a:tr h="310896">
                 <a:tc>
                   <a:txBody>
                     <a:bodyPr wrap="square"/>
@@ -14092,7 +14090,7 @@
                           </a:solidFill>
                           <a:latin typeface="Times New Roman"/>
                         </a:rPr>
-                        <a:t>an Arty has no tty</a:t>
+                        <a:t>an Arty is missing</a:t>
                       </a:r>
                     </a:p>
                   </a:txBody>
@@ -14114,7 +14112,7 @@
                           </a:solidFill>
                           <a:latin typeface="Times New Roman"/>
                         </a:rPr>
-                        <a:t>dialout / plugdev group (log out and in), Vivado holding the port</a:t>
+                        <a:t>USB cable, board power switch, Vivado cable drivers</a:t>
                       </a:r>
                     </a:p>
                   </a:txBody>
@@ -14125,7 +14123,7 @@
                   </a:tcPr>
                 </a:tc>
               </a:tr>
-              <a:tr h="388620">
+              <a:tr h="310896">
                 <a:tc>
                   <a:txBody>
                     <a:bodyPr wrap="square"/>
@@ -14138,7 +14136,7 @@
                           </a:solidFill>
                           <a:latin typeface="Times New Roman"/>
                         </a:rPr>
-                        <a:t>a C232HM is missing</a:t>
+                        <a:t>an Arty has no tty</a:t>
                       </a:r>
                     </a:p>
                   </a:txBody>
@@ -14160,13 +14158,59 @@
                           </a:solidFill>
                           <a:latin typeface="Times New Roman"/>
                         </a:rPr>
+                        <a:t>dialout / plugdev group (log out and in), Vivado holding the port</a:t>
+                      </a:r>
+                    </a:p>
+                  </a:txBody>
+                  <a:tcPr marL="54864" marR="54864" marT="27432" marB="27432">
+                    <a:solidFill>
+                      <a:srgbClr val="FFFFFF"/>
+                    </a:solidFill>
+                  </a:tcPr>
+                </a:tc>
+              </a:tr>
+              <a:tr h="310896">
+                <a:tc>
+                  <a:txBody>
+                    <a:bodyPr wrap="square"/>
+                    <a:lstStyle/>
+                    <a:p>
+                      <a:r>
+                        <a:rPr sz="1500" b="0">
+                          <a:solidFill>
+                            <a:srgbClr val="000000"/>
+                          </a:solidFill>
+                          <a:latin typeface="Times New Roman"/>
+                        </a:rPr>
+                        <a:t>a C232HM is missing</a:t>
+                      </a:r>
+                    </a:p>
+                  </a:txBody>
+                  <a:tcPr marL="54864" marR="54864" marT="27432" marB="27432">
+                    <a:solidFill>
+                      <a:srgbClr val="F2F8EE"/>
+                    </a:solidFill>
+                  </a:tcPr>
+                </a:tc>
+                <a:tc>
+                  <a:txBody>
+                    <a:bodyPr wrap="square"/>
+                    <a:lstStyle/>
+                    <a:p>
+                      <a:r>
+                        <a:rPr sz="1500" b="0">
+                          <a:solidFill>
+                            <a:srgbClr val="000000"/>
+                          </a:solidFill>
+                          <a:latin typeface="Times New Roman"/>
+                        </a:rPr>
                         <a:t>USB plug, OpenOCD udev rules (0403:6014)</a:t>
                       </a:r>
                     </a:p>
                   </a:txBody>
                   <a:tcPr marL="54864" marR="54864" marT="27432" marB="27432">
                     <a:solidFill>
-                      <a:srgbClr val="FFFFFF"/>
+                      <a:srgbClr val="F2F8EE"/>
                     </a:solidFill>
                   </a:tcPr>
                 </a:tc>
@@ -35356,18 +35400,18 @@
               </a:buClr>
             </a:pPr>
             <a:r>
-              <a:rPr lang="en-US" sz="2400" b="1" spc="-1" dirty="0">
+              <a:rPr lang="en-US" sz="3200" b="1" spc="-1" dirty="0">
                 <a:latin typeface="Times New Roman" panose="02020603050405020304" pitchFamily="18" charset="0"/>
                 <a:cs typeface="Times New Roman" panose="02020603050405020304" pitchFamily="18" charset="0"/>
               </a:rPr>
               <a:t>5. Build &amp; Timing Closure </a:t>
             </a:r>
             <a:r>
-              <a:rPr lang="en-US" sz="2400" spc="-1" dirty="0">
+              <a:rPr lang="en-US" sz="3200" spc="-1" dirty="0">
                 <a:latin typeface="Times New Roman" panose="02020603050405020304" pitchFamily="18" charset="0"/>
                 <a:cs typeface="Times New Roman" panose="02020603050405020304" pitchFamily="18" charset="0"/>
               </a:rPr>
-              <a:t>(4/5) If WNS is negative or Vivado crashes: the closure recipe</a:t>
+              <a:t>(4/5) The timing closure recipe</a:t>
             </a:r>
           </a:p>
         </p:txBody>
